--- a/Tercer Trimestre/Presentacion ArteNauta.pptx
+++ b/Tercer Trimestre/Presentacion ArteNauta.pptx
@@ -1,39 +1,39 @@
 
 <file path=ppt/presentation.xml><?xml version="1.0" encoding="utf-8"?>
-<p:presentation xmlns:a="http://schemas.openxmlformats.org/drawingml/2006/main" xmlns:r="http://schemas.openxmlformats.org/officeDocument/2006/relationships" xmlns:mc="http://schemas.openxmlformats.org/markup-compatibility/2006" xmlns:mv="urn:schemas-microsoft-com:mac:vml" xmlns:p="http://schemas.openxmlformats.org/presentationml/2006/main" xmlns:c="http://schemas.openxmlformats.org/drawingml/2006/chart" xmlns:dgm="http://schemas.openxmlformats.org/drawingml/2006/diagram" xmlns:o="urn:schemas-microsoft-com:office:office" xmlns:v="urn:schemas-microsoft-com:vml" xmlns:pvml="urn:schemas-microsoft-com:office:powerpoint" xmlns:com="http://schemas.openxmlformats.org/drawingml/2006/compatibility" xmlns:p14="http://schemas.microsoft.com/office/powerpoint/2010/main" xmlns:p15="http://schemas.microsoft.com/office/powerpoint/2012/main" xmlns:ahyp="http://schemas.microsoft.com/office/drawing/2018/hyperlinkcolor" autoCompressPictures="0" embedTrueTypeFonts="1" strictFirstAndLastChars="0" saveSubsetFonts="1">
+<p:presentation xmlns:a="http://schemas.openxmlformats.org/drawingml/2006/main" xmlns:r="http://schemas.openxmlformats.org/officeDocument/2006/relationships" xmlns:p="http://schemas.openxmlformats.org/presentationml/2006/main" strictFirstAndLastChars="0" embedTrueTypeFonts="1" saveSubsetFonts="1" autoCompressPictures="0">
   <p:sldMasterIdLst>
-    <p:sldMasterId id="2147483653" r:id="rId4"/>
+    <p:sldMasterId id="2147483653" r:id="rId1"/>
   </p:sldMasterIdLst>
   <p:notesMasterIdLst>
-    <p:notesMasterId r:id="rId5"/>
+    <p:notesMasterId r:id="rId14"/>
   </p:notesMasterIdLst>
   <p:sldIdLst>
-    <p:sldId id="256" r:id="rId6"/>
-    <p:sldId id="257" r:id="rId7"/>
-    <p:sldId id="258" r:id="rId8"/>
-    <p:sldId id="259" r:id="rId9"/>
-    <p:sldId id="260" r:id="rId10"/>
-    <p:sldId id="261" r:id="rId11"/>
-    <p:sldId id="262" r:id="rId12"/>
-    <p:sldId id="263" r:id="rId13"/>
-    <p:sldId id="264" r:id="rId14"/>
-    <p:sldId id="265" r:id="rId15"/>
-    <p:sldId id="266" r:id="rId16"/>
-    <p:sldId id="267" r:id="rId17"/>
+    <p:sldId id="256" r:id="rId2"/>
+    <p:sldId id="257" r:id="rId3"/>
+    <p:sldId id="258" r:id="rId4"/>
+    <p:sldId id="260" r:id="rId5"/>
+    <p:sldId id="259" r:id="rId6"/>
+    <p:sldId id="261" r:id="rId7"/>
+    <p:sldId id="262" r:id="rId8"/>
+    <p:sldId id="263" r:id="rId9"/>
+    <p:sldId id="264" r:id="rId10"/>
+    <p:sldId id="265" r:id="rId11"/>
+    <p:sldId id="266" r:id="rId12"/>
+    <p:sldId id="267" r:id="rId13"/>
   </p:sldIdLst>
-  <p:sldSz cy="6858000" cx="12192000"/>
+  <p:sldSz cx="12192000" cy="6858000"/>
   <p:notesSz cx="12192000" cy="6858000"/>
   <p:embeddedFontLst>
     <p:embeddedFont>
-      <p:font typeface="Roboto"/>
-      <p:regular r:id="rId18"/>
-      <p:bold r:id="rId19"/>
-      <p:italic r:id="rId20"/>
-      <p:boldItalic r:id="rId21"/>
+      <p:font typeface="Roboto" panose="02000000000000000000" pitchFamily="2" charset="0"/>
+      <p:regular r:id="rId15"/>
+      <p:bold r:id="rId16"/>
+      <p:italic r:id="rId17"/>
+      <p:boldItalic r:id="rId18"/>
     </p:embeddedFont>
   </p:embeddedFontLst>
   <p:defaultTextStyle>
-    <a:defPPr lvl="0" marR="0" rtl="0" algn="l">
+    <a:defPPr marR="0" lvl="0" algn="l" rtl="0">
       <a:lnSpc>
         <a:spcPct val="100000"/>
       </a:lnSpc>
@@ -44,7 +44,7 @@
         <a:spcPts val="0"/>
       </a:spcAft>
     </a:defPPr>
-    <a:lvl1pPr lvl="0" marR="0" rtl="0" algn="l">
+    <a:lvl1pPr marR="0" lvl="0" algn="l" rtl="0">
       <a:lnSpc>
         <a:spcPct val="100000"/>
       </a:lnSpc>
@@ -58,7 +58,7 @@
         <a:srgbClr val="000000"/>
       </a:buClr>
       <a:buFont typeface="Arial"/>
-      <a:defRPr b="0" i="0" sz="1400" u="none" cap="none" strike="noStrike">
+      <a:defRPr sz="1400" b="0" i="0" u="none" strike="noStrike" cap="none">
         <a:solidFill>
           <a:srgbClr val="000000"/>
         </a:solidFill>
@@ -68,7 +68,7 @@
         <a:sym typeface="Arial"/>
       </a:defRPr>
     </a:lvl1pPr>
-    <a:lvl2pPr lvl="1" marR="0" rtl="0" algn="l">
+    <a:lvl2pPr marR="0" lvl="1" algn="l" rtl="0">
       <a:lnSpc>
         <a:spcPct val="100000"/>
       </a:lnSpc>
@@ -82,7 +82,7 @@
         <a:srgbClr val="000000"/>
       </a:buClr>
       <a:buFont typeface="Arial"/>
-      <a:defRPr b="0" i="0" sz="1400" u="none" cap="none" strike="noStrike">
+      <a:defRPr sz="1400" b="0" i="0" u="none" strike="noStrike" cap="none">
         <a:solidFill>
           <a:srgbClr val="000000"/>
         </a:solidFill>
@@ -92,7 +92,7 @@
         <a:sym typeface="Arial"/>
       </a:defRPr>
     </a:lvl2pPr>
-    <a:lvl3pPr lvl="2" marR="0" rtl="0" algn="l">
+    <a:lvl3pPr marR="0" lvl="2" algn="l" rtl="0">
       <a:lnSpc>
         <a:spcPct val="100000"/>
       </a:lnSpc>
@@ -106,7 +106,7 @@
         <a:srgbClr val="000000"/>
       </a:buClr>
       <a:buFont typeface="Arial"/>
-      <a:defRPr b="0" i="0" sz="1400" u="none" cap="none" strike="noStrike">
+      <a:defRPr sz="1400" b="0" i="0" u="none" strike="noStrike" cap="none">
         <a:solidFill>
           <a:srgbClr val="000000"/>
         </a:solidFill>
@@ -116,7 +116,7 @@
         <a:sym typeface="Arial"/>
       </a:defRPr>
     </a:lvl3pPr>
-    <a:lvl4pPr lvl="3" marR="0" rtl="0" algn="l">
+    <a:lvl4pPr marR="0" lvl="3" algn="l" rtl="0">
       <a:lnSpc>
         <a:spcPct val="100000"/>
       </a:lnSpc>
@@ -130,7 +130,7 @@
         <a:srgbClr val="000000"/>
       </a:buClr>
       <a:buFont typeface="Arial"/>
-      <a:defRPr b="0" i="0" sz="1400" u="none" cap="none" strike="noStrike">
+      <a:defRPr sz="1400" b="0" i="0" u="none" strike="noStrike" cap="none">
         <a:solidFill>
           <a:srgbClr val="000000"/>
         </a:solidFill>
@@ -140,7 +140,7 @@
         <a:sym typeface="Arial"/>
       </a:defRPr>
     </a:lvl4pPr>
-    <a:lvl5pPr lvl="4" marR="0" rtl="0" algn="l">
+    <a:lvl5pPr marR="0" lvl="4" algn="l" rtl="0">
       <a:lnSpc>
         <a:spcPct val="100000"/>
       </a:lnSpc>
@@ -154,7 +154,7 @@
         <a:srgbClr val="000000"/>
       </a:buClr>
       <a:buFont typeface="Arial"/>
-      <a:defRPr b="0" i="0" sz="1400" u="none" cap="none" strike="noStrike">
+      <a:defRPr sz="1400" b="0" i="0" u="none" strike="noStrike" cap="none">
         <a:solidFill>
           <a:srgbClr val="000000"/>
         </a:solidFill>
@@ -164,7 +164,7 @@
         <a:sym typeface="Arial"/>
       </a:defRPr>
     </a:lvl5pPr>
-    <a:lvl6pPr lvl="5" marR="0" rtl="0" algn="l">
+    <a:lvl6pPr marR="0" lvl="5" algn="l" rtl="0">
       <a:lnSpc>
         <a:spcPct val="100000"/>
       </a:lnSpc>
@@ -178,7 +178,7 @@
         <a:srgbClr val="000000"/>
       </a:buClr>
       <a:buFont typeface="Arial"/>
-      <a:defRPr b="0" i="0" sz="1400" u="none" cap="none" strike="noStrike">
+      <a:defRPr sz="1400" b="0" i="0" u="none" strike="noStrike" cap="none">
         <a:solidFill>
           <a:srgbClr val="000000"/>
         </a:solidFill>
@@ -188,7 +188,7 @@
         <a:sym typeface="Arial"/>
       </a:defRPr>
     </a:lvl6pPr>
-    <a:lvl7pPr lvl="6" marR="0" rtl="0" algn="l">
+    <a:lvl7pPr marR="0" lvl="6" algn="l" rtl="0">
       <a:lnSpc>
         <a:spcPct val="100000"/>
       </a:lnSpc>
@@ -202,7 +202,7 @@
         <a:srgbClr val="000000"/>
       </a:buClr>
       <a:buFont typeface="Arial"/>
-      <a:defRPr b="0" i="0" sz="1400" u="none" cap="none" strike="noStrike">
+      <a:defRPr sz="1400" b="0" i="0" u="none" strike="noStrike" cap="none">
         <a:solidFill>
           <a:srgbClr val="000000"/>
         </a:solidFill>
@@ -212,7 +212,7 @@
         <a:sym typeface="Arial"/>
       </a:defRPr>
     </a:lvl7pPr>
-    <a:lvl8pPr lvl="7" marR="0" rtl="0" algn="l">
+    <a:lvl8pPr marR="0" lvl="7" algn="l" rtl="0">
       <a:lnSpc>
         <a:spcPct val="100000"/>
       </a:lnSpc>
@@ -226,7 +226,7 @@
         <a:srgbClr val="000000"/>
       </a:buClr>
       <a:buFont typeface="Arial"/>
-      <a:defRPr b="0" i="0" sz="1400" u="none" cap="none" strike="noStrike">
+      <a:defRPr sz="1400" b="0" i="0" u="none" strike="noStrike" cap="none">
         <a:solidFill>
           <a:srgbClr val="000000"/>
         </a:solidFill>
@@ -236,7 +236,7 @@
         <a:sym typeface="Arial"/>
       </a:defRPr>
     </a:lvl8pPr>
-    <a:lvl9pPr lvl="8" marR="0" rtl="0" algn="l">
+    <a:lvl9pPr marR="0" lvl="8" algn="l" rtl="0">
       <a:lnSpc>
         <a:spcPct val="100000"/>
       </a:lnSpc>
@@ -250,7 +250,7 @@
         <a:srgbClr val="000000"/>
       </a:buClr>
       <a:buFont typeface="Arial"/>
-      <a:defRPr b="0" i="0" sz="1400" u="none" cap="none" strike="noStrike">
+      <a:defRPr sz="1400" b="0" i="0" u="none" strike="noStrike" cap="none">
         <a:solidFill>
           <a:srgbClr val="000000"/>
         </a:solidFill>
@@ -263,7 +263,7 @@
   </p:defaultTextStyle>
   <p:extLst>
     <p:ext uri="{EFAFB233-063F-42B5-8137-9DF3F51BA10A}">
-      <p15:sldGuideLst>
+      <p15:sldGuideLst xmlns:p15="http://schemas.microsoft.com/office/powerpoint/2012/main">
         <p15:guide id="1" orient="horz" pos="2880">
           <p15:clr>
             <a:srgbClr val="A4A3A4"/>
@@ -281,18 +281,19 @@
 </file>
 
 <file path=ppt/notesMasters/notesMaster1.xml><?xml version="1.0" encoding="utf-8"?>
-<p:notesMaster xmlns:a="http://schemas.openxmlformats.org/drawingml/2006/main" xmlns:r="http://schemas.openxmlformats.org/officeDocument/2006/relationships" xmlns:mc="http://schemas.openxmlformats.org/markup-compatibility/2006" xmlns:mv="urn:schemas-microsoft-com:mac:vml" xmlns:p="http://schemas.openxmlformats.org/presentationml/2006/main" xmlns:c="http://schemas.openxmlformats.org/drawingml/2006/chart" xmlns:dgm="http://schemas.openxmlformats.org/drawingml/2006/diagram" xmlns:o="urn:schemas-microsoft-com:office:office" xmlns:v="urn:schemas-microsoft-com:vml" xmlns:pvml="urn:schemas-microsoft-com:office:powerpoint" xmlns:com="http://schemas.openxmlformats.org/drawingml/2006/compatibility" xmlns:p14="http://schemas.microsoft.com/office/powerpoint/2010/main" xmlns:p15="http://schemas.microsoft.com/office/powerpoint/2012/main" xmlns:ahyp="http://schemas.microsoft.com/office/drawing/2018/hyperlinkcolor">
+<p:notesMaster xmlns:a="http://schemas.openxmlformats.org/drawingml/2006/main" xmlns:r="http://schemas.openxmlformats.org/officeDocument/2006/relationships" xmlns:p="http://schemas.openxmlformats.org/presentationml/2006/main">
   <p:cSld>
     <p:bg>
       <p:bgPr>
         <a:solidFill>
           <a:schemeClr val="lt1"/>
         </a:solidFill>
+        <a:effectLst/>
       </p:bgPr>
     </p:bg>
     <p:spTree>
       <p:nvGrpSpPr>
-        <p:cNvPr id="2" name="Shape 2"/>
+        <p:cNvPr id="1" name="Shape 2"/>
         <p:cNvGrpSpPr/>
         <p:nvPr/>
       </p:nvGrpSpPr>
@@ -307,9 +308,11 @@
       <p:sp>
         <p:nvSpPr>
           <p:cNvPr id="3" name="Google Shape;3;n"/>
-          <p:cNvSpPr/>
+          <p:cNvSpPr>
+            <a:spLocks noGrp="1" noRot="1" noChangeAspect="1"/>
+          </p:cNvSpPr>
           <p:nvPr>
-            <p:ph idx="2" type="sldImg"/>
+            <p:ph type="sldImg" idx="2"/>
           </p:nvPr>
         </p:nvSpPr>
         <p:spPr>
@@ -318,9 +321,13 @@
             <a:ext cx="8128400" cy="2571750"/>
           </a:xfrm>
           <a:custGeom>
-            <a:rect b="b" l="l" r="r" t="t"/>
+            <a:avLst/>
+            <a:gdLst/>
+            <a:ahLst/>
+            <a:cxnLst/>
+            <a:rect l="l" t="t" r="r" b="b"/>
             <a:pathLst>
-              <a:path extrusionOk="0" h="120000" w="120000">
+              <a:path w="120000" h="120000" extrusionOk="0">
                 <a:moveTo>
                   <a:pt x="0" y="0"/>
                 </a:moveTo>
@@ -338,23 +345,25 @@
             </a:pathLst>
           </a:custGeom>
           <a:noFill/>
-          <a:ln cap="flat" cmpd="sng" w="9525">
+          <a:ln w="9525" cap="flat" cmpd="sng">
             <a:solidFill>
               <a:srgbClr val="000000"/>
             </a:solidFill>
             <a:prstDash val="solid"/>
             <a:round/>
-            <a:headEnd len="sm" w="sm" type="none"/>
-            <a:tailEnd len="sm" w="sm" type="none"/>
+            <a:headEnd type="none" w="sm" len="sm"/>
+            <a:tailEnd type="none" w="sm" len="sm"/>
           </a:ln>
         </p:spPr>
       </p:sp>
       <p:sp>
         <p:nvSpPr>
           <p:cNvPr id="4" name="Google Shape;4;n"/>
-          <p:cNvSpPr txBox="1"/>
+          <p:cNvSpPr txBox="1">
+            <a:spLocks noGrp="1"/>
+          </p:cNvSpPr>
           <p:nvPr>
-            <p:ph idx="1" type="body"/>
+            <p:ph type="body" idx="1"/>
           </p:nvPr>
         </p:nvSpPr>
         <p:spPr>
@@ -371,11 +380,11 @@
           </a:ln>
         </p:spPr>
         <p:txBody>
-          <a:bodyPr anchorCtr="0" anchor="t" bIns="91425" lIns="91425" spcFirstLastPara="1" rIns="91425" wrap="square" tIns="91425">
+          <a:bodyPr spcFirstLastPara="1" wrap="square" lIns="91425" tIns="91425" rIns="91425" bIns="91425" anchor="t" anchorCtr="0">
             <a:noAutofit/>
           </a:bodyPr>
           <a:lstStyle>
-            <a:lvl1pPr indent="-298450" lvl="0" marL="457200" marR="0" rtl="0" algn="l">
+            <a:lvl1pPr marL="457200" marR="0" lvl="0" indent="-298450" algn="l" rtl="0">
               <a:lnSpc>
                 <a:spcPct val="100000"/>
               </a:lnSpc>
@@ -391,7 +400,7 @@
               <a:buSzPts val="1100"/>
               <a:buFont typeface="Arial"/>
               <a:buChar char="●"/>
-              <a:defRPr b="0" i="0" sz="1100" u="none" cap="none" strike="noStrike">
+              <a:defRPr sz="1100" b="0" i="0" u="none" strike="noStrike" cap="none">
                 <a:solidFill>
                   <a:srgbClr val="000000"/>
                 </a:solidFill>
@@ -401,7 +410,7 @@
                 <a:sym typeface="Arial"/>
               </a:defRPr>
             </a:lvl1pPr>
-            <a:lvl2pPr indent="-298450" lvl="1" marL="914400" marR="0" rtl="0" algn="l">
+            <a:lvl2pPr marL="914400" marR="0" lvl="1" indent="-298450" algn="l" rtl="0">
               <a:lnSpc>
                 <a:spcPct val="100000"/>
               </a:lnSpc>
@@ -417,7 +426,7 @@
               <a:buSzPts val="1100"/>
               <a:buFont typeface="Arial"/>
               <a:buChar char="○"/>
-              <a:defRPr b="0" i="0" sz="1100" u="none" cap="none" strike="noStrike">
+              <a:defRPr sz="1100" b="0" i="0" u="none" strike="noStrike" cap="none">
                 <a:solidFill>
                   <a:srgbClr val="000000"/>
                 </a:solidFill>
@@ -427,7 +436,7 @@
                 <a:sym typeface="Arial"/>
               </a:defRPr>
             </a:lvl2pPr>
-            <a:lvl3pPr indent="-298450" lvl="2" marL="1371600" marR="0" rtl="0" algn="l">
+            <a:lvl3pPr marL="1371600" marR="0" lvl="2" indent="-298450" algn="l" rtl="0">
               <a:lnSpc>
                 <a:spcPct val="100000"/>
               </a:lnSpc>
@@ -443,7 +452,7 @@
               <a:buSzPts val="1100"/>
               <a:buFont typeface="Arial"/>
               <a:buChar char="■"/>
-              <a:defRPr b="0" i="0" sz="1100" u="none" cap="none" strike="noStrike">
+              <a:defRPr sz="1100" b="0" i="0" u="none" strike="noStrike" cap="none">
                 <a:solidFill>
                   <a:srgbClr val="000000"/>
                 </a:solidFill>
@@ -453,7 +462,7 @@
                 <a:sym typeface="Arial"/>
               </a:defRPr>
             </a:lvl3pPr>
-            <a:lvl4pPr indent="-298450" lvl="3" marL="1828800" marR="0" rtl="0" algn="l">
+            <a:lvl4pPr marL="1828800" marR="0" lvl="3" indent="-298450" algn="l" rtl="0">
               <a:lnSpc>
                 <a:spcPct val="100000"/>
               </a:lnSpc>
@@ -469,7 +478,7 @@
               <a:buSzPts val="1100"/>
               <a:buFont typeface="Arial"/>
               <a:buChar char="●"/>
-              <a:defRPr b="0" i="0" sz="1100" u="none" cap="none" strike="noStrike">
+              <a:defRPr sz="1100" b="0" i="0" u="none" strike="noStrike" cap="none">
                 <a:solidFill>
                   <a:srgbClr val="000000"/>
                 </a:solidFill>
@@ -479,7 +488,7 @@
                 <a:sym typeface="Arial"/>
               </a:defRPr>
             </a:lvl4pPr>
-            <a:lvl5pPr indent="-298450" lvl="4" marL="2286000" marR="0" rtl="0" algn="l">
+            <a:lvl5pPr marL="2286000" marR="0" lvl="4" indent="-298450" algn="l" rtl="0">
               <a:lnSpc>
                 <a:spcPct val="100000"/>
               </a:lnSpc>
@@ -495,7 +504,7 @@
               <a:buSzPts val="1100"/>
               <a:buFont typeface="Arial"/>
               <a:buChar char="○"/>
-              <a:defRPr b="0" i="0" sz="1100" u="none" cap="none" strike="noStrike">
+              <a:defRPr sz="1100" b="0" i="0" u="none" strike="noStrike" cap="none">
                 <a:solidFill>
                   <a:srgbClr val="000000"/>
                 </a:solidFill>
@@ -505,7 +514,7 @@
                 <a:sym typeface="Arial"/>
               </a:defRPr>
             </a:lvl5pPr>
-            <a:lvl6pPr indent="-298450" lvl="5" marL="2743200" marR="0" rtl="0" algn="l">
+            <a:lvl6pPr marL="2743200" marR="0" lvl="5" indent="-298450" algn="l" rtl="0">
               <a:lnSpc>
                 <a:spcPct val="100000"/>
               </a:lnSpc>
@@ -521,7 +530,7 @@
               <a:buSzPts val="1100"/>
               <a:buFont typeface="Arial"/>
               <a:buChar char="■"/>
-              <a:defRPr b="0" i="0" sz="1100" u="none" cap="none" strike="noStrike">
+              <a:defRPr sz="1100" b="0" i="0" u="none" strike="noStrike" cap="none">
                 <a:solidFill>
                   <a:srgbClr val="000000"/>
                 </a:solidFill>
@@ -531,7 +540,7 @@
                 <a:sym typeface="Arial"/>
               </a:defRPr>
             </a:lvl6pPr>
-            <a:lvl7pPr indent="-298450" lvl="6" marL="3200400" marR="0" rtl="0" algn="l">
+            <a:lvl7pPr marL="3200400" marR="0" lvl="6" indent="-298450" algn="l" rtl="0">
               <a:lnSpc>
                 <a:spcPct val="100000"/>
               </a:lnSpc>
@@ -547,7 +556,7 @@
               <a:buSzPts val="1100"/>
               <a:buFont typeface="Arial"/>
               <a:buChar char="●"/>
-              <a:defRPr b="0" i="0" sz="1100" u="none" cap="none" strike="noStrike">
+              <a:defRPr sz="1100" b="0" i="0" u="none" strike="noStrike" cap="none">
                 <a:solidFill>
                   <a:srgbClr val="000000"/>
                 </a:solidFill>
@@ -557,7 +566,7 @@
                 <a:sym typeface="Arial"/>
               </a:defRPr>
             </a:lvl7pPr>
-            <a:lvl8pPr indent="-298450" lvl="7" marL="3657600" marR="0" rtl="0" algn="l">
+            <a:lvl8pPr marL="3657600" marR="0" lvl="7" indent="-298450" algn="l" rtl="0">
               <a:lnSpc>
                 <a:spcPct val="100000"/>
               </a:lnSpc>
@@ -573,7 +582,7 @@
               <a:buSzPts val="1100"/>
               <a:buFont typeface="Arial"/>
               <a:buChar char="○"/>
-              <a:defRPr b="0" i="0" sz="1100" u="none" cap="none" strike="noStrike">
+              <a:defRPr sz="1100" b="0" i="0" u="none" strike="noStrike" cap="none">
                 <a:solidFill>
                   <a:srgbClr val="000000"/>
                 </a:solidFill>
@@ -583,7 +592,7 @@
                 <a:sym typeface="Arial"/>
               </a:defRPr>
             </a:lvl8pPr>
-            <a:lvl9pPr indent="-298450" lvl="8" marL="4114800" marR="0" rtl="0" algn="l">
+            <a:lvl9pPr marL="4114800" marR="0" lvl="8" indent="-298450" algn="l" rtl="0">
               <a:lnSpc>
                 <a:spcPct val="100000"/>
               </a:lnSpc>
@@ -599,7 +608,7 @@
               <a:buSzPts val="1100"/>
               <a:buFont typeface="Arial"/>
               <a:buChar char="■"/>
-              <a:defRPr b="0" i="0" sz="1100" u="none" cap="none" strike="noStrike">
+              <a:defRPr sz="1100" b="0" i="0" u="none" strike="noStrike" cap="none">
                 <a:solidFill>
                   <a:srgbClr val="000000"/>
                 </a:solidFill>
@@ -610,14 +619,16 @@
               </a:defRPr>
             </a:lvl9pPr>
           </a:lstStyle>
-          <a:p/>
+          <a:p>
+            <a:endParaRPr/>
+          </a:p>
         </p:txBody>
       </p:sp>
     </p:spTree>
   </p:cSld>
-  <p:clrMap accent1="accent1" accent2="accent2" accent3="accent3" accent4="accent4" accent5="accent5" accent6="accent6" bg1="lt1" bg2="dk2" tx1="dk1" tx2="lt2" folHlink="folHlink" hlink="hlink"/>
+  <p:clrMap bg1="lt1" tx1="dk1" bg2="dk2" tx2="lt2" accent1="accent1" accent2="accent2" accent3="accent3" accent4="accent4" accent5="accent5" accent6="accent6" hlink="hlink" folHlink="folHlink"/>
   <p:notesStyle>
-    <a:defPPr lvl="0" marR="0" rtl="0" algn="l">
+    <a:defPPr marR="0" lvl="0" algn="l" rtl="0">
       <a:lnSpc>
         <a:spcPct val="100000"/>
       </a:lnSpc>
@@ -628,7 +639,7 @@
         <a:spcPts val="0"/>
       </a:spcAft>
     </a:defPPr>
-    <a:lvl1pPr lvl="0" marR="0" rtl="0" algn="l">
+    <a:lvl1pPr marR="0" lvl="0" algn="l" rtl="0">
       <a:lnSpc>
         <a:spcPct val="100000"/>
       </a:lnSpc>
@@ -642,7 +653,7 @@
         <a:srgbClr val="000000"/>
       </a:buClr>
       <a:buFont typeface="Arial"/>
-      <a:defRPr b="0" i="0" sz="1400" u="none" cap="none" strike="noStrike">
+      <a:defRPr sz="1400" b="0" i="0" u="none" strike="noStrike" cap="none">
         <a:solidFill>
           <a:srgbClr val="000000"/>
         </a:solidFill>
@@ -652,7 +663,7 @@
         <a:sym typeface="Arial"/>
       </a:defRPr>
     </a:lvl1pPr>
-    <a:lvl2pPr lvl="1" marR="0" rtl="0" algn="l">
+    <a:lvl2pPr marR="0" lvl="1" algn="l" rtl="0">
       <a:lnSpc>
         <a:spcPct val="100000"/>
       </a:lnSpc>
@@ -666,7 +677,7 @@
         <a:srgbClr val="000000"/>
       </a:buClr>
       <a:buFont typeface="Arial"/>
-      <a:defRPr b="0" i="0" sz="1400" u="none" cap="none" strike="noStrike">
+      <a:defRPr sz="1400" b="0" i="0" u="none" strike="noStrike" cap="none">
         <a:solidFill>
           <a:srgbClr val="000000"/>
         </a:solidFill>
@@ -676,7 +687,7 @@
         <a:sym typeface="Arial"/>
       </a:defRPr>
     </a:lvl2pPr>
-    <a:lvl3pPr lvl="2" marR="0" rtl="0" algn="l">
+    <a:lvl3pPr marR="0" lvl="2" algn="l" rtl="0">
       <a:lnSpc>
         <a:spcPct val="100000"/>
       </a:lnSpc>
@@ -690,7 +701,7 @@
         <a:srgbClr val="000000"/>
       </a:buClr>
       <a:buFont typeface="Arial"/>
-      <a:defRPr b="0" i="0" sz="1400" u="none" cap="none" strike="noStrike">
+      <a:defRPr sz="1400" b="0" i="0" u="none" strike="noStrike" cap="none">
         <a:solidFill>
           <a:srgbClr val="000000"/>
         </a:solidFill>
@@ -700,7 +711,7 @@
         <a:sym typeface="Arial"/>
       </a:defRPr>
     </a:lvl3pPr>
-    <a:lvl4pPr lvl="3" marR="0" rtl="0" algn="l">
+    <a:lvl4pPr marR="0" lvl="3" algn="l" rtl="0">
       <a:lnSpc>
         <a:spcPct val="100000"/>
       </a:lnSpc>
@@ -714,7 +725,7 @@
         <a:srgbClr val="000000"/>
       </a:buClr>
       <a:buFont typeface="Arial"/>
-      <a:defRPr b="0" i="0" sz="1400" u="none" cap="none" strike="noStrike">
+      <a:defRPr sz="1400" b="0" i="0" u="none" strike="noStrike" cap="none">
         <a:solidFill>
           <a:srgbClr val="000000"/>
         </a:solidFill>
@@ -724,7 +735,7 @@
         <a:sym typeface="Arial"/>
       </a:defRPr>
     </a:lvl4pPr>
-    <a:lvl5pPr lvl="4" marR="0" rtl="0" algn="l">
+    <a:lvl5pPr marR="0" lvl="4" algn="l" rtl="0">
       <a:lnSpc>
         <a:spcPct val="100000"/>
       </a:lnSpc>
@@ -738,7 +749,7 @@
         <a:srgbClr val="000000"/>
       </a:buClr>
       <a:buFont typeface="Arial"/>
-      <a:defRPr b="0" i="0" sz="1400" u="none" cap="none" strike="noStrike">
+      <a:defRPr sz="1400" b="0" i="0" u="none" strike="noStrike" cap="none">
         <a:solidFill>
           <a:srgbClr val="000000"/>
         </a:solidFill>
@@ -748,7 +759,7 @@
         <a:sym typeface="Arial"/>
       </a:defRPr>
     </a:lvl5pPr>
-    <a:lvl6pPr lvl="5" marR="0" rtl="0" algn="l">
+    <a:lvl6pPr marR="0" lvl="5" algn="l" rtl="0">
       <a:lnSpc>
         <a:spcPct val="100000"/>
       </a:lnSpc>
@@ -762,7 +773,7 @@
         <a:srgbClr val="000000"/>
       </a:buClr>
       <a:buFont typeface="Arial"/>
-      <a:defRPr b="0" i="0" sz="1400" u="none" cap="none" strike="noStrike">
+      <a:defRPr sz="1400" b="0" i="0" u="none" strike="noStrike" cap="none">
         <a:solidFill>
           <a:srgbClr val="000000"/>
         </a:solidFill>
@@ -772,7 +783,7 @@
         <a:sym typeface="Arial"/>
       </a:defRPr>
     </a:lvl6pPr>
-    <a:lvl7pPr lvl="6" marR="0" rtl="0" algn="l">
+    <a:lvl7pPr marR="0" lvl="6" algn="l" rtl="0">
       <a:lnSpc>
         <a:spcPct val="100000"/>
       </a:lnSpc>
@@ -786,7 +797,7 @@
         <a:srgbClr val="000000"/>
       </a:buClr>
       <a:buFont typeface="Arial"/>
-      <a:defRPr b="0" i="0" sz="1400" u="none" cap="none" strike="noStrike">
+      <a:defRPr sz="1400" b="0" i="0" u="none" strike="noStrike" cap="none">
         <a:solidFill>
           <a:srgbClr val="000000"/>
         </a:solidFill>
@@ -796,7 +807,7 @@
         <a:sym typeface="Arial"/>
       </a:defRPr>
     </a:lvl7pPr>
-    <a:lvl8pPr lvl="7" marR="0" rtl="0" algn="l">
+    <a:lvl8pPr marR="0" lvl="7" algn="l" rtl="0">
       <a:lnSpc>
         <a:spcPct val="100000"/>
       </a:lnSpc>
@@ -810,7 +821,7 @@
         <a:srgbClr val="000000"/>
       </a:buClr>
       <a:buFont typeface="Arial"/>
-      <a:defRPr b="0" i="0" sz="1400" u="none" cap="none" strike="noStrike">
+      <a:defRPr sz="1400" b="0" i="0" u="none" strike="noStrike" cap="none">
         <a:solidFill>
           <a:srgbClr val="000000"/>
         </a:solidFill>
@@ -820,7 +831,7 @@
         <a:sym typeface="Arial"/>
       </a:defRPr>
     </a:lvl8pPr>
-    <a:lvl9pPr lvl="8" marR="0" rtl="0" algn="l">
+    <a:lvl9pPr marR="0" lvl="8" algn="l" rtl="0">
       <a:lnSpc>
         <a:spcPct val="100000"/>
       </a:lnSpc>
@@ -834,7 +845,7 @@
         <a:srgbClr val="000000"/>
       </a:buClr>
       <a:buFont typeface="Arial"/>
-      <a:defRPr b="0" i="0" sz="1400" u="none" cap="none" strike="noStrike">
+      <a:defRPr sz="1400" b="0" i="0" u="none" strike="noStrike" cap="none">
         <a:solidFill>
           <a:srgbClr val="000000"/>
         </a:solidFill>
@@ -849,11 +860,11 @@
 </file>
 
 <file path=ppt/notesSlides/notesSlide1.xml><?xml version="1.0" encoding="utf-8"?>
-<p:notes xmlns:a="http://schemas.openxmlformats.org/drawingml/2006/main" xmlns:r="http://schemas.openxmlformats.org/officeDocument/2006/relationships" xmlns:mc="http://schemas.openxmlformats.org/markup-compatibility/2006" xmlns:mv="urn:schemas-microsoft-com:mac:vml" xmlns:p="http://schemas.openxmlformats.org/presentationml/2006/main" xmlns:c="http://schemas.openxmlformats.org/drawingml/2006/chart" xmlns:dgm="http://schemas.openxmlformats.org/drawingml/2006/diagram" xmlns:o="urn:schemas-microsoft-com:office:office" xmlns:v="urn:schemas-microsoft-com:vml" xmlns:pvml="urn:schemas-microsoft-com:office:powerpoint" xmlns:com="http://schemas.openxmlformats.org/drawingml/2006/compatibility" xmlns:p14="http://schemas.microsoft.com/office/powerpoint/2010/main" xmlns:p15="http://schemas.microsoft.com/office/powerpoint/2012/main" xmlns:ahyp="http://schemas.microsoft.com/office/drawing/2018/hyperlinkcolor" showMasterPhAnim="0" showMasterSp="0">
+<p:notes xmlns:a="http://schemas.openxmlformats.org/drawingml/2006/main" xmlns:r="http://schemas.openxmlformats.org/officeDocument/2006/relationships" xmlns:p="http://schemas.openxmlformats.org/presentationml/2006/main" showMasterSp="0" showMasterPhAnim="0">
   <p:cSld>
     <p:spTree>
       <p:nvGrpSpPr>
-        <p:cNvPr id="41" name="Shape 41"/>
+        <p:cNvPr id="1" name="Shape 41"/>
         <p:cNvGrpSpPr/>
         <p:nvPr/>
       </p:nvGrpSpPr>
@@ -868,9 +879,11 @@
       <p:sp>
         <p:nvSpPr>
           <p:cNvPr id="42" name="Google Shape;42;p1:notes"/>
-          <p:cNvSpPr txBox="1"/>
+          <p:cNvSpPr txBox="1">
+            <a:spLocks noGrp="1"/>
+          </p:cNvSpPr>
           <p:nvPr>
-            <p:ph idx="1" type="body"/>
+            <p:ph type="body" idx="1"/>
           </p:nvPr>
         </p:nvSpPr>
         <p:spPr>
@@ -887,12 +900,12 @@
           </a:ln>
         </p:spPr>
         <p:txBody>
-          <a:bodyPr anchorCtr="0" anchor="t" bIns="91425" lIns="91425" spcFirstLastPara="1" rIns="91425" wrap="square" tIns="91425">
+          <a:bodyPr spcFirstLastPara="1" wrap="square" lIns="91425" tIns="91425" rIns="91425" bIns="91425" anchor="t" anchorCtr="0">
             <a:noAutofit/>
           </a:bodyPr>
           <a:lstStyle/>
           <a:p>
-            <a:pPr indent="0" lvl="0" marL="0" rtl="0" algn="l">
+            <a:pPr marL="0" lvl="0" indent="0" algn="l" rtl="0">
               <a:lnSpc>
                 <a:spcPct val="100000"/>
               </a:lnSpc>
@@ -905,9 +918,6 @@
               <a:buSzPts val="1100"/>
               <a:buNone/>
             </a:pPr>
-            <a:r>
-              <a:t/>
-            </a:r>
             <a:endParaRPr/>
           </a:p>
         </p:txBody>
@@ -915,9 +925,11 @@
       <p:sp>
         <p:nvSpPr>
           <p:cNvPr id="43" name="Google Shape;43;p1:notes"/>
-          <p:cNvSpPr/>
+          <p:cNvSpPr>
+            <a:spLocks noGrp="1" noRot="1" noChangeAspect="1"/>
+          </p:cNvSpPr>
           <p:nvPr>
-            <p:ph idx="2" type="sldImg"/>
+            <p:ph type="sldImg" idx="2"/>
           </p:nvPr>
         </p:nvSpPr>
         <p:spPr>
@@ -926,9 +938,13 @@
             <a:ext cx="8128400" cy="2571750"/>
           </a:xfrm>
           <a:custGeom>
-            <a:rect b="b" l="l" r="r" t="t"/>
+            <a:avLst/>
+            <a:gdLst/>
+            <a:ahLst/>
+            <a:cxnLst/>
+            <a:rect l="l" t="t" r="r" b="b"/>
             <a:pathLst>
-              <a:path extrusionOk="0" h="120000" w="120000">
+              <a:path w="120000" h="120000" extrusionOk="0">
                 <a:moveTo>
                   <a:pt x="0" y="0"/>
                 </a:moveTo>
@@ -946,14 +962,14 @@
             </a:pathLst>
           </a:custGeom>
           <a:noFill/>
-          <a:ln cap="flat" cmpd="sng" w="9525">
+          <a:ln w="9525" cap="flat" cmpd="sng">
             <a:solidFill>
               <a:srgbClr val="000000"/>
             </a:solidFill>
             <a:prstDash val="solid"/>
             <a:round/>
-            <a:headEnd len="sm" w="sm" type="none"/>
-            <a:tailEnd len="sm" w="sm" type="none"/>
+            <a:headEnd type="none" w="sm" len="sm"/>
+            <a:tailEnd type="none" w="sm" len="sm"/>
           </a:ln>
         </p:spPr>
       </p:sp>
@@ -966,11 +982,11 @@
 </file>
 
 <file path=ppt/notesSlides/notesSlide10.xml><?xml version="1.0" encoding="utf-8"?>
-<p:notes xmlns:a="http://schemas.openxmlformats.org/drawingml/2006/main" xmlns:r="http://schemas.openxmlformats.org/officeDocument/2006/relationships" xmlns:mc="http://schemas.openxmlformats.org/markup-compatibility/2006" xmlns:mv="urn:schemas-microsoft-com:mac:vml" xmlns:p="http://schemas.openxmlformats.org/presentationml/2006/main" xmlns:c="http://schemas.openxmlformats.org/drawingml/2006/chart" xmlns:dgm="http://schemas.openxmlformats.org/drawingml/2006/diagram" xmlns:o="urn:schemas-microsoft-com:office:office" xmlns:v="urn:schemas-microsoft-com:vml" xmlns:pvml="urn:schemas-microsoft-com:office:powerpoint" xmlns:com="http://schemas.openxmlformats.org/drawingml/2006/compatibility" xmlns:p14="http://schemas.microsoft.com/office/powerpoint/2010/main" xmlns:p15="http://schemas.microsoft.com/office/powerpoint/2012/main" xmlns:ahyp="http://schemas.microsoft.com/office/drawing/2018/hyperlinkcolor" showMasterPhAnim="0" showMasterSp="0">
+<p:notes xmlns:a="http://schemas.openxmlformats.org/drawingml/2006/main" xmlns:r="http://schemas.openxmlformats.org/officeDocument/2006/relationships" xmlns:p="http://schemas.openxmlformats.org/presentationml/2006/main" showMasterSp="0" showMasterPhAnim="0">
   <p:cSld>
     <p:spTree>
       <p:nvGrpSpPr>
-        <p:cNvPr id="106" name="Shape 106"/>
+        <p:cNvPr id="1" name="Shape 106"/>
         <p:cNvGrpSpPr/>
         <p:nvPr/>
       </p:nvGrpSpPr>
@@ -985,9 +1001,11 @@
       <p:sp>
         <p:nvSpPr>
           <p:cNvPr id="107" name="Google Shape;107;p14:notes"/>
-          <p:cNvSpPr txBox="1"/>
+          <p:cNvSpPr txBox="1">
+            <a:spLocks noGrp="1"/>
+          </p:cNvSpPr>
           <p:nvPr>
-            <p:ph idx="1" type="body"/>
+            <p:ph type="body" idx="1"/>
           </p:nvPr>
         </p:nvSpPr>
         <p:spPr>
@@ -1004,12 +1022,12 @@
           </a:ln>
         </p:spPr>
         <p:txBody>
-          <a:bodyPr anchorCtr="0" anchor="t" bIns="91425" lIns="91425" spcFirstLastPara="1" rIns="91425" wrap="square" tIns="91425">
+          <a:bodyPr spcFirstLastPara="1" wrap="square" lIns="91425" tIns="91425" rIns="91425" bIns="91425" anchor="t" anchorCtr="0">
             <a:noAutofit/>
           </a:bodyPr>
           <a:lstStyle/>
           <a:p>
-            <a:pPr indent="0" lvl="0" marL="0" rtl="0" algn="l">
+            <a:pPr marL="0" lvl="0" indent="0" algn="l" rtl="0">
               <a:lnSpc>
                 <a:spcPct val="100000"/>
               </a:lnSpc>
@@ -1022,9 +1040,6 @@
               <a:buSzPts val="1100"/>
               <a:buNone/>
             </a:pPr>
-            <a:r>
-              <a:t/>
-            </a:r>
             <a:endParaRPr/>
           </a:p>
         </p:txBody>
@@ -1032,9 +1047,11 @@
       <p:sp>
         <p:nvSpPr>
           <p:cNvPr id="108" name="Google Shape;108;p14:notes"/>
-          <p:cNvSpPr/>
+          <p:cNvSpPr>
+            <a:spLocks noGrp="1" noRot="1" noChangeAspect="1"/>
+          </p:cNvSpPr>
           <p:nvPr>
-            <p:ph idx="2" type="sldImg"/>
+            <p:ph type="sldImg" idx="2"/>
           </p:nvPr>
         </p:nvSpPr>
         <p:spPr>
@@ -1043,9 +1060,13 @@
             <a:ext cx="4573588" cy="2571750"/>
           </a:xfrm>
           <a:custGeom>
-            <a:rect b="b" l="l" r="r" t="t"/>
+            <a:avLst/>
+            <a:gdLst/>
+            <a:ahLst/>
+            <a:cxnLst/>
+            <a:rect l="l" t="t" r="r" b="b"/>
             <a:pathLst>
-              <a:path extrusionOk="0" h="120000" w="120000">
+              <a:path w="120000" h="120000" extrusionOk="0">
                 <a:moveTo>
                   <a:pt x="0" y="0"/>
                 </a:moveTo>
@@ -1063,14 +1084,14 @@
             </a:pathLst>
           </a:custGeom>
           <a:noFill/>
-          <a:ln cap="flat" cmpd="sng" w="9525">
+          <a:ln w="9525" cap="flat" cmpd="sng">
             <a:solidFill>
               <a:srgbClr val="000000"/>
             </a:solidFill>
             <a:prstDash val="solid"/>
             <a:round/>
-            <a:headEnd len="sm" w="sm" type="none"/>
-            <a:tailEnd len="sm" w="sm" type="none"/>
+            <a:headEnd type="none" w="sm" len="sm"/>
+            <a:tailEnd type="none" w="sm" len="sm"/>
           </a:ln>
         </p:spPr>
       </p:sp>
@@ -1083,11 +1104,11 @@
 </file>
 
 <file path=ppt/notesSlides/notesSlide11.xml><?xml version="1.0" encoding="utf-8"?>
-<p:notes xmlns:a="http://schemas.openxmlformats.org/drawingml/2006/main" xmlns:r="http://schemas.openxmlformats.org/officeDocument/2006/relationships" xmlns:mc="http://schemas.openxmlformats.org/markup-compatibility/2006" xmlns:mv="urn:schemas-microsoft-com:mac:vml" xmlns:p="http://schemas.openxmlformats.org/presentationml/2006/main" xmlns:c="http://schemas.openxmlformats.org/drawingml/2006/chart" xmlns:dgm="http://schemas.openxmlformats.org/drawingml/2006/diagram" xmlns:o="urn:schemas-microsoft-com:office:office" xmlns:v="urn:schemas-microsoft-com:vml" xmlns:pvml="urn:schemas-microsoft-com:office:powerpoint" xmlns:com="http://schemas.openxmlformats.org/drawingml/2006/compatibility" xmlns:p14="http://schemas.microsoft.com/office/powerpoint/2010/main" xmlns:p15="http://schemas.microsoft.com/office/powerpoint/2012/main" xmlns:ahyp="http://schemas.microsoft.com/office/drawing/2018/hyperlinkcolor" showMasterPhAnim="0" showMasterSp="0">
+<p:notes xmlns:a="http://schemas.openxmlformats.org/drawingml/2006/main" xmlns:r="http://schemas.openxmlformats.org/officeDocument/2006/relationships" xmlns:p="http://schemas.openxmlformats.org/presentationml/2006/main" showMasterSp="0" showMasterPhAnim="0">
   <p:cSld>
     <p:spTree>
       <p:nvGrpSpPr>
-        <p:cNvPr id="113" name="Shape 113"/>
+        <p:cNvPr id="1" name="Shape 113"/>
         <p:cNvGrpSpPr/>
         <p:nvPr/>
       </p:nvGrpSpPr>
@@ -1102,9 +1123,11 @@
       <p:sp>
         <p:nvSpPr>
           <p:cNvPr id="114" name="Google Shape;114;p15:notes"/>
-          <p:cNvSpPr txBox="1"/>
+          <p:cNvSpPr txBox="1">
+            <a:spLocks noGrp="1"/>
+          </p:cNvSpPr>
           <p:nvPr>
-            <p:ph idx="1" type="body"/>
+            <p:ph type="body" idx="1"/>
           </p:nvPr>
         </p:nvSpPr>
         <p:spPr>
@@ -1121,12 +1144,12 @@
           </a:ln>
         </p:spPr>
         <p:txBody>
-          <a:bodyPr anchorCtr="0" anchor="t" bIns="91425" lIns="91425" spcFirstLastPara="1" rIns="91425" wrap="square" tIns="91425">
+          <a:bodyPr spcFirstLastPara="1" wrap="square" lIns="91425" tIns="91425" rIns="91425" bIns="91425" anchor="t" anchorCtr="0">
             <a:noAutofit/>
           </a:bodyPr>
           <a:lstStyle/>
           <a:p>
-            <a:pPr indent="0" lvl="0" marL="0" rtl="0" algn="l">
+            <a:pPr marL="0" lvl="0" indent="0" algn="l" rtl="0">
               <a:lnSpc>
                 <a:spcPct val="100000"/>
               </a:lnSpc>
@@ -1139,9 +1162,6 @@
               <a:buSzPts val="1100"/>
               <a:buNone/>
             </a:pPr>
-            <a:r>
-              <a:t/>
-            </a:r>
             <a:endParaRPr/>
           </a:p>
         </p:txBody>
@@ -1149,9 +1169,11 @@
       <p:sp>
         <p:nvSpPr>
           <p:cNvPr id="115" name="Google Shape;115;p15:notes"/>
-          <p:cNvSpPr/>
+          <p:cNvSpPr>
+            <a:spLocks noGrp="1" noRot="1" noChangeAspect="1"/>
+          </p:cNvSpPr>
           <p:nvPr>
-            <p:ph idx="2" type="sldImg"/>
+            <p:ph type="sldImg" idx="2"/>
           </p:nvPr>
         </p:nvSpPr>
         <p:spPr>
@@ -1160,9 +1182,13 @@
             <a:ext cx="4573588" cy="2571750"/>
           </a:xfrm>
           <a:custGeom>
-            <a:rect b="b" l="l" r="r" t="t"/>
+            <a:avLst/>
+            <a:gdLst/>
+            <a:ahLst/>
+            <a:cxnLst/>
+            <a:rect l="l" t="t" r="r" b="b"/>
             <a:pathLst>
-              <a:path extrusionOk="0" h="120000" w="120000">
+              <a:path w="120000" h="120000" extrusionOk="0">
                 <a:moveTo>
                   <a:pt x="0" y="0"/>
                 </a:moveTo>
@@ -1180,14 +1206,14 @@
             </a:pathLst>
           </a:custGeom>
           <a:noFill/>
-          <a:ln cap="flat" cmpd="sng" w="9525">
+          <a:ln w="9525" cap="flat" cmpd="sng">
             <a:solidFill>
               <a:srgbClr val="000000"/>
             </a:solidFill>
             <a:prstDash val="solid"/>
             <a:round/>
-            <a:headEnd len="sm" w="sm" type="none"/>
-            <a:tailEnd len="sm" w="sm" type="none"/>
+            <a:headEnd type="none" w="sm" len="sm"/>
+            <a:tailEnd type="none" w="sm" len="sm"/>
           </a:ln>
         </p:spPr>
       </p:sp>
@@ -1200,11 +1226,11 @@
 </file>
 
 <file path=ppt/notesSlides/notesSlide12.xml><?xml version="1.0" encoding="utf-8"?>
-<p:notes xmlns:a="http://schemas.openxmlformats.org/drawingml/2006/main" xmlns:r="http://schemas.openxmlformats.org/officeDocument/2006/relationships" xmlns:mc="http://schemas.openxmlformats.org/markup-compatibility/2006" xmlns:mv="urn:schemas-microsoft-com:mac:vml" xmlns:p="http://schemas.openxmlformats.org/presentationml/2006/main" xmlns:c="http://schemas.openxmlformats.org/drawingml/2006/chart" xmlns:dgm="http://schemas.openxmlformats.org/drawingml/2006/diagram" xmlns:o="urn:schemas-microsoft-com:office:office" xmlns:v="urn:schemas-microsoft-com:vml" xmlns:pvml="urn:schemas-microsoft-com:office:powerpoint" xmlns:com="http://schemas.openxmlformats.org/drawingml/2006/compatibility" xmlns:p14="http://schemas.microsoft.com/office/powerpoint/2010/main" xmlns:p15="http://schemas.microsoft.com/office/powerpoint/2012/main" xmlns:ahyp="http://schemas.microsoft.com/office/drawing/2018/hyperlinkcolor" showMasterPhAnim="0" showMasterSp="0">
+<p:notes xmlns:a="http://schemas.openxmlformats.org/drawingml/2006/main" xmlns:r="http://schemas.openxmlformats.org/officeDocument/2006/relationships" xmlns:p="http://schemas.openxmlformats.org/presentationml/2006/main" showMasterSp="0" showMasterPhAnim="0">
   <p:cSld>
     <p:spTree>
       <p:nvGrpSpPr>
-        <p:cNvPr id="120" name="Shape 120"/>
+        <p:cNvPr id="1" name="Shape 120"/>
         <p:cNvGrpSpPr/>
         <p:nvPr/>
       </p:nvGrpSpPr>
@@ -1219,9 +1245,11 @@
       <p:sp>
         <p:nvSpPr>
           <p:cNvPr id="121" name="Google Shape;121;p50:notes"/>
-          <p:cNvSpPr txBox="1"/>
+          <p:cNvSpPr txBox="1">
+            <a:spLocks noGrp="1"/>
+          </p:cNvSpPr>
           <p:nvPr>
-            <p:ph idx="1" type="body"/>
+            <p:ph type="body" idx="1"/>
           </p:nvPr>
         </p:nvSpPr>
         <p:spPr>
@@ -1238,12 +1266,12 @@
           </a:ln>
         </p:spPr>
         <p:txBody>
-          <a:bodyPr anchorCtr="0" anchor="t" bIns="91425" lIns="91425" spcFirstLastPara="1" rIns="91425" wrap="square" tIns="91425">
+          <a:bodyPr spcFirstLastPara="1" wrap="square" lIns="91425" tIns="91425" rIns="91425" bIns="91425" anchor="t" anchorCtr="0">
             <a:noAutofit/>
           </a:bodyPr>
           <a:lstStyle/>
           <a:p>
-            <a:pPr indent="0" lvl="0" marL="0" rtl="0" algn="l">
+            <a:pPr marL="0" lvl="0" indent="0" algn="l" rtl="0">
               <a:lnSpc>
                 <a:spcPct val="100000"/>
               </a:lnSpc>
@@ -1256,9 +1284,6 @@
               <a:buSzPts val="1100"/>
               <a:buNone/>
             </a:pPr>
-            <a:r>
-              <a:t/>
-            </a:r>
             <a:endParaRPr/>
           </a:p>
         </p:txBody>
@@ -1266,9 +1291,11 @@
       <p:sp>
         <p:nvSpPr>
           <p:cNvPr id="122" name="Google Shape;122;p50:notes"/>
-          <p:cNvSpPr/>
+          <p:cNvSpPr>
+            <a:spLocks noGrp="1" noRot="1" noChangeAspect="1"/>
+          </p:cNvSpPr>
           <p:nvPr>
-            <p:ph idx="2" type="sldImg"/>
+            <p:ph type="sldImg" idx="2"/>
           </p:nvPr>
         </p:nvSpPr>
         <p:spPr>
@@ -1277,9 +1304,13 @@
             <a:ext cx="8128400" cy="2571750"/>
           </a:xfrm>
           <a:custGeom>
-            <a:rect b="b" l="l" r="r" t="t"/>
+            <a:avLst/>
+            <a:gdLst/>
+            <a:ahLst/>
+            <a:cxnLst/>
+            <a:rect l="l" t="t" r="r" b="b"/>
             <a:pathLst>
-              <a:path extrusionOk="0" h="120000" w="120000">
+              <a:path w="120000" h="120000" extrusionOk="0">
                 <a:moveTo>
                   <a:pt x="0" y="0"/>
                 </a:moveTo>
@@ -1297,14 +1328,14 @@
             </a:pathLst>
           </a:custGeom>
           <a:noFill/>
-          <a:ln cap="flat" cmpd="sng" w="9525">
+          <a:ln w="9525" cap="flat" cmpd="sng">
             <a:solidFill>
               <a:srgbClr val="000000"/>
             </a:solidFill>
             <a:prstDash val="solid"/>
             <a:round/>
-            <a:headEnd len="sm" w="sm" type="none"/>
-            <a:tailEnd len="sm" w="sm" type="none"/>
+            <a:headEnd type="none" w="sm" len="sm"/>
+            <a:tailEnd type="none" w="sm" len="sm"/>
           </a:ln>
         </p:spPr>
       </p:sp>
@@ -1317,11 +1348,11 @@
 </file>
 
 <file path=ppt/notesSlides/notesSlide2.xml><?xml version="1.0" encoding="utf-8"?>
-<p:notes xmlns:a="http://schemas.openxmlformats.org/drawingml/2006/main" xmlns:r="http://schemas.openxmlformats.org/officeDocument/2006/relationships" xmlns:mc="http://schemas.openxmlformats.org/markup-compatibility/2006" xmlns:mv="urn:schemas-microsoft-com:mac:vml" xmlns:p="http://schemas.openxmlformats.org/presentationml/2006/main" xmlns:c="http://schemas.openxmlformats.org/drawingml/2006/chart" xmlns:dgm="http://schemas.openxmlformats.org/drawingml/2006/diagram" xmlns:o="urn:schemas-microsoft-com:office:office" xmlns:v="urn:schemas-microsoft-com:vml" xmlns:pvml="urn:schemas-microsoft-com:office:powerpoint" xmlns:com="http://schemas.openxmlformats.org/drawingml/2006/compatibility" xmlns:p14="http://schemas.microsoft.com/office/powerpoint/2010/main" xmlns:p15="http://schemas.microsoft.com/office/powerpoint/2012/main" xmlns:ahyp="http://schemas.microsoft.com/office/drawing/2018/hyperlinkcolor" showMasterPhAnim="0" showMasterSp="0">
+<p:notes xmlns:a="http://schemas.openxmlformats.org/drawingml/2006/main" xmlns:r="http://schemas.openxmlformats.org/officeDocument/2006/relationships" xmlns:p="http://schemas.openxmlformats.org/presentationml/2006/main" showMasterSp="0" showMasterPhAnim="0">
   <p:cSld>
     <p:spTree>
       <p:nvGrpSpPr>
-        <p:cNvPr id="49" name="Shape 49"/>
+        <p:cNvPr id="1" name="Shape 49"/>
         <p:cNvGrpSpPr/>
         <p:nvPr/>
       </p:nvGrpSpPr>
@@ -1336,9 +1367,11 @@
       <p:sp>
         <p:nvSpPr>
           <p:cNvPr id="50" name="Google Shape;50;p2:notes"/>
-          <p:cNvSpPr txBox="1"/>
+          <p:cNvSpPr txBox="1">
+            <a:spLocks noGrp="1"/>
+          </p:cNvSpPr>
           <p:nvPr>
-            <p:ph idx="1" type="body"/>
+            <p:ph type="body" idx="1"/>
           </p:nvPr>
         </p:nvSpPr>
         <p:spPr>
@@ -1355,12 +1388,12 @@
           </a:ln>
         </p:spPr>
         <p:txBody>
-          <a:bodyPr anchorCtr="0" anchor="t" bIns="91425" lIns="91425" spcFirstLastPara="1" rIns="91425" wrap="square" tIns="91425">
+          <a:bodyPr spcFirstLastPara="1" wrap="square" lIns="91425" tIns="91425" rIns="91425" bIns="91425" anchor="t" anchorCtr="0">
             <a:noAutofit/>
           </a:bodyPr>
           <a:lstStyle/>
           <a:p>
-            <a:pPr indent="0" lvl="0" marL="0" rtl="0" algn="l">
+            <a:pPr marL="0" lvl="0" indent="0" algn="l" rtl="0">
               <a:lnSpc>
                 <a:spcPct val="100000"/>
               </a:lnSpc>
@@ -1373,9 +1406,6 @@
               <a:buSzPts val="1100"/>
               <a:buNone/>
             </a:pPr>
-            <a:r>
-              <a:t/>
-            </a:r>
             <a:endParaRPr/>
           </a:p>
         </p:txBody>
@@ -1383,9 +1413,11 @@
       <p:sp>
         <p:nvSpPr>
           <p:cNvPr id="51" name="Google Shape;51;p2:notes"/>
-          <p:cNvSpPr/>
+          <p:cNvSpPr>
+            <a:spLocks noGrp="1" noRot="1" noChangeAspect="1"/>
+          </p:cNvSpPr>
           <p:nvPr>
-            <p:ph idx="2" type="sldImg"/>
+            <p:ph type="sldImg" idx="2"/>
           </p:nvPr>
         </p:nvSpPr>
         <p:spPr>
@@ -1394,9 +1426,13 @@
             <a:ext cx="4573588" cy="2571750"/>
           </a:xfrm>
           <a:custGeom>
-            <a:rect b="b" l="l" r="r" t="t"/>
+            <a:avLst/>
+            <a:gdLst/>
+            <a:ahLst/>
+            <a:cxnLst/>
+            <a:rect l="l" t="t" r="r" b="b"/>
             <a:pathLst>
-              <a:path extrusionOk="0" h="120000" w="120000">
+              <a:path w="120000" h="120000" extrusionOk="0">
                 <a:moveTo>
                   <a:pt x="0" y="0"/>
                 </a:moveTo>
@@ -1414,14 +1450,14 @@
             </a:pathLst>
           </a:custGeom>
           <a:noFill/>
-          <a:ln cap="flat" cmpd="sng" w="9525">
+          <a:ln w="9525" cap="flat" cmpd="sng">
             <a:solidFill>
               <a:srgbClr val="000000"/>
             </a:solidFill>
             <a:prstDash val="solid"/>
             <a:round/>
-            <a:headEnd len="sm" w="sm" type="none"/>
-            <a:tailEnd len="sm" w="sm" type="none"/>
+            <a:headEnd type="none" w="sm" len="sm"/>
+            <a:tailEnd type="none" w="sm" len="sm"/>
           </a:ln>
         </p:spPr>
       </p:sp>
@@ -1434,11 +1470,11 @@
 </file>
 
 <file path=ppt/notesSlides/notesSlide3.xml><?xml version="1.0" encoding="utf-8"?>
-<p:notes xmlns:a="http://schemas.openxmlformats.org/drawingml/2006/main" xmlns:r="http://schemas.openxmlformats.org/officeDocument/2006/relationships" xmlns:mc="http://schemas.openxmlformats.org/markup-compatibility/2006" xmlns:mv="urn:schemas-microsoft-com:mac:vml" xmlns:p="http://schemas.openxmlformats.org/presentationml/2006/main" xmlns:c="http://schemas.openxmlformats.org/drawingml/2006/chart" xmlns:dgm="http://schemas.openxmlformats.org/drawingml/2006/diagram" xmlns:o="urn:schemas-microsoft-com:office:office" xmlns:v="urn:schemas-microsoft-com:vml" xmlns:pvml="urn:schemas-microsoft-com:office:powerpoint" xmlns:com="http://schemas.openxmlformats.org/drawingml/2006/compatibility" xmlns:p14="http://schemas.microsoft.com/office/powerpoint/2010/main" xmlns:p15="http://schemas.microsoft.com/office/powerpoint/2012/main" xmlns:ahyp="http://schemas.microsoft.com/office/drawing/2018/hyperlinkcolor" showMasterPhAnim="0" showMasterSp="0">
+<p:notes xmlns:a="http://schemas.openxmlformats.org/drawingml/2006/main" xmlns:r="http://schemas.openxmlformats.org/officeDocument/2006/relationships" xmlns:p="http://schemas.openxmlformats.org/presentationml/2006/main" showMasterSp="0" showMasterPhAnim="0">
   <p:cSld>
     <p:spTree>
       <p:nvGrpSpPr>
-        <p:cNvPr id="57" name="Shape 57"/>
+        <p:cNvPr id="1" name="Shape 57"/>
         <p:cNvGrpSpPr/>
         <p:nvPr/>
       </p:nvGrpSpPr>
@@ -1453,9 +1489,11 @@
       <p:sp>
         <p:nvSpPr>
           <p:cNvPr id="58" name="Google Shape;58;p4:notes"/>
-          <p:cNvSpPr txBox="1"/>
+          <p:cNvSpPr txBox="1">
+            <a:spLocks noGrp="1"/>
+          </p:cNvSpPr>
           <p:nvPr>
-            <p:ph idx="1" type="body"/>
+            <p:ph type="body" idx="1"/>
           </p:nvPr>
         </p:nvSpPr>
         <p:spPr>
@@ -1472,12 +1510,12 @@
           </a:ln>
         </p:spPr>
         <p:txBody>
-          <a:bodyPr anchorCtr="0" anchor="t" bIns="91425" lIns="91425" spcFirstLastPara="1" rIns="91425" wrap="square" tIns="91425">
+          <a:bodyPr spcFirstLastPara="1" wrap="square" lIns="91425" tIns="91425" rIns="91425" bIns="91425" anchor="t" anchorCtr="0">
             <a:noAutofit/>
           </a:bodyPr>
           <a:lstStyle/>
           <a:p>
-            <a:pPr indent="0" lvl="0" marL="0" rtl="0" algn="l">
+            <a:pPr marL="0" lvl="0" indent="0" algn="l" rtl="0">
               <a:lnSpc>
                 <a:spcPct val="100000"/>
               </a:lnSpc>
@@ -1490,9 +1528,6 @@
               <a:buSzPts val="1100"/>
               <a:buNone/>
             </a:pPr>
-            <a:r>
-              <a:t/>
-            </a:r>
             <a:endParaRPr/>
           </a:p>
         </p:txBody>
@@ -1500,9 +1535,11 @@
       <p:sp>
         <p:nvSpPr>
           <p:cNvPr id="59" name="Google Shape;59;p4:notes"/>
-          <p:cNvSpPr/>
+          <p:cNvSpPr>
+            <a:spLocks noGrp="1" noRot="1" noChangeAspect="1"/>
+          </p:cNvSpPr>
           <p:nvPr>
-            <p:ph idx="2" type="sldImg"/>
+            <p:ph type="sldImg" idx="2"/>
           </p:nvPr>
         </p:nvSpPr>
         <p:spPr>
@@ -1511,9 +1548,13 @@
             <a:ext cx="8128400" cy="2571750"/>
           </a:xfrm>
           <a:custGeom>
-            <a:rect b="b" l="l" r="r" t="t"/>
+            <a:avLst/>
+            <a:gdLst/>
+            <a:ahLst/>
+            <a:cxnLst/>
+            <a:rect l="l" t="t" r="r" b="b"/>
             <a:pathLst>
-              <a:path extrusionOk="0" h="120000" w="120000">
+              <a:path w="120000" h="120000" extrusionOk="0">
                 <a:moveTo>
                   <a:pt x="0" y="0"/>
                 </a:moveTo>
@@ -1531,14 +1572,14 @@
             </a:pathLst>
           </a:custGeom>
           <a:noFill/>
-          <a:ln cap="flat" cmpd="sng" w="9525">
+          <a:ln w="9525" cap="flat" cmpd="sng">
             <a:solidFill>
               <a:srgbClr val="000000"/>
             </a:solidFill>
             <a:prstDash val="solid"/>
             <a:round/>
-            <a:headEnd len="sm" w="sm" type="none"/>
-            <a:tailEnd len="sm" w="sm" type="none"/>
+            <a:headEnd type="none" w="sm" len="sm"/>
+            <a:tailEnd type="none" w="sm" len="sm"/>
           </a:ln>
         </p:spPr>
       </p:sp>
@@ -1551,11 +1592,11 @@
 </file>
 
 <file path=ppt/notesSlides/notesSlide4.xml><?xml version="1.0" encoding="utf-8"?>
-<p:notes xmlns:a="http://schemas.openxmlformats.org/drawingml/2006/main" xmlns:r="http://schemas.openxmlformats.org/officeDocument/2006/relationships" xmlns:mc="http://schemas.openxmlformats.org/markup-compatibility/2006" xmlns:mv="urn:schemas-microsoft-com:mac:vml" xmlns:p="http://schemas.openxmlformats.org/presentationml/2006/main" xmlns:c="http://schemas.openxmlformats.org/drawingml/2006/chart" xmlns:dgm="http://schemas.openxmlformats.org/drawingml/2006/diagram" xmlns:o="urn:schemas-microsoft-com:office:office" xmlns:v="urn:schemas-microsoft-com:vml" xmlns:pvml="urn:schemas-microsoft-com:office:powerpoint" xmlns:com="http://schemas.openxmlformats.org/drawingml/2006/compatibility" xmlns:p14="http://schemas.microsoft.com/office/powerpoint/2010/main" xmlns:p15="http://schemas.microsoft.com/office/powerpoint/2012/main" xmlns:ahyp="http://schemas.microsoft.com/office/drawing/2018/hyperlinkcolor" showMasterPhAnim="0" showMasterSp="0">
+<p:notes xmlns:a="http://schemas.openxmlformats.org/drawingml/2006/main" xmlns:r="http://schemas.openxmlformats.org/officeDocument/2006/relationships" xmlns:p="http://schemas.openxmlformats.org/presentationml/2006/main" showMasterSp="0" showMasterPhAnim="0">
   <p:cSld>
     <p:spTree>
       <p:nvGrpSpPr>
-        <p:cNvPr id="66" name="Shape 66"/>
+        <p:cNvPr id="1" name="Shape 72"/>
         <p:cNvGrpSpPr/>
         <p:nvPr/>
       </p:nvGrpSpPr>
@@ -1569,10 +1610,12 @@
       </p:grpSpPr>
       <p:sp>
         <p:nvSpPr>
-          <p:cNvPr id="67" name="Google Shape;67;p5:notes"/>
-          <p:cNvSpPr txBox="1"/>
+          <p:cNvPr id="73" name="Google Shape;73;p6:notes"/>
+          <p:cNvSpPr txBox="1">
+            <a:spLocks noGrp="1"/>
+          </p:cNvSpPr>
           <p:nvPr>
-            <p:ph idx="1" type="body"/>
+            <p:ph type="body" idx="1"/>
           </p:nvPr>
         </p:nvSpPr>
         <p:spPr>
@@ -1589,12 +1632,12 @@
           </a:ln>
         </p:spPr>
         <p:txBody>
-          <a:bodyPr anchorCtr="0" anchor="t" bIns="91425" lIns="91425" spcFirstLastPara="1" rIns="91425" wrap="square" tIns="91425">
+          <a:bodyPr spcFirstLastPara="1" wrap="square" lIns="91425" tIns="91425" rIns="91425" bIns="91425" anchor="t" anchorCtr="0">
             <a:noAutofit/>
           </a:bodyPr>
           <a:lstStyle/>
           <a:p>
-            <a:pPr indent="0" lvl="0" marL="0" rtl="0" algn="l">
+            <a:pPr marL="0" lvl="0" indent="0" algn="l" rtl="0">
               <a:lnSpc>
                 <a:spcPct val="100000"/>
               </a:lnSpc>
@@ -1607,30 +1650,33 @@
               <a:buSzPts val="1100"/>
               <a:buNone/>
             </a:pPr>
-            <a:r>
-              <a:t/>
-            </a:r>
             <a:endParaRPr/>
           </a:p>
         </p:txBody>
       </p:sp>
       <p:sp>
         <p:nvSpPr>
-          <p:cNvPr id="68" name="Google Shape;68;p5:notes"/>
-          <p:cNvSpPr/>
+          <p:cNvPr id="74" name="Google Shape;74;p6:notes"/>
+          <p:cNvSpPr>
+            <a:spLocks noGrp="1" noRot="1" noChangeAspect="1"/>
+          </p:cNvSpPr>
           <p:nvPr>
-            <p:ph idx="2" type="sldImg"/>
+            <p:ph type="sldImg" idx="2"/>
           </p:nvPr>
         </p:nvSpPr>
         <p:spPr>
           <a:xfrm>
-            <a:off x="2032400" y="514350"/>
-            <a:ext cx="8128400" cy="2571750"/>
+            <a:off x="3810000" y="514350"/>
+            <a:ext cx="4573588" cy="2571750"/>
           </a:xfrm>
           <a:custGeom>
-            <a:rect b="b" l="l" r="r" t="t"/>
+            <a:avLst/>
+            <a:gdLst/>
+            <a:ahLst/>
+            <a:cxnLst/>
+            <a:rect l="l" t="t" r="r" b="b"/>
             <a:pathLst>
-              <a:path extrusionOk="0" h="120000" w="120000">
+              <a:path w="120000" h="120000" extrusionOk="0">
                 <a:moveTo>
                   <a:pt x="0" y="0"/>
                 </a:moveTo>
@@ -1648,14 +1694,14 @@
             </a:pathLst>
           </a:custGeom>
           <a:noFill/>
-          <a:ln cap="flat" cmpd="sng" w="9525">
+          <a:ln w="9525" cap="flat" cmpd="sng">
             <a:solidFill>
               <a:srgbClr val="000000"/>
             </a:solidFill>
             <a:prstDash val="solid"/>
             <a:round/>
-            <a:headEnd len="sm" w="sm" type="none"/>
-            <a:tailEnd len="sm" w="sm" type="none"/>
+            <a:headEnd type="none" w="sm" len="sm"/>
+            <a:tailEnd type="none" w="sm" len="sm"/>
           </a:ln>
         </p:spPr>
       </p:sp>
@@ -1668,11 +1714,11 @@
 </file>
 
 <file path=ppt/notesSlides/notesSlide5.xml><?xml version="1.0" encoding="utf-8"?>
-<p:notes xmlns:a="http://schemas.openxmlformats.org/drawingml/2006/main" xmlns:r="http://schemas.openxmlformats.org/officeDocument/2006/relationships" xmlns:mc="http://schemas.openxmlformats.org/markup-compatibility/2006" xmlns:mv="urn:schemas-microsoft-com:mac:vml" xmlns:p="http://schemas.openxmlformats.org/presentationml/2006/main" xmlns:c="http://schemas.openxmlformats.org/drawingml/2006/chart" xmlns:dgm="http://schemas.openxmlformats.org/drawingml/2006/diagram" xmlns:o="urn:schemas-microsoft-com:office:office" xmlns:v="urn:schemas-microsoft-com:vml" xmlns:pvml="urn:schemas-microsoft-com:office:powerpoint" xmlns:com="http://schemas.openxmlformats.org/drawingml/2006/compatibility" xmlns:p14="http://schemas.microsoft.com/office/powerpoint/2010/main" xmlns:p15="http://schemas.microsoft.com/office/powerpoint/2012/main" xmlns:ahyp="http://schemas.microsoft.com/office/drawing/2018/hyperlinkcolor" showMasterPhAnim="0" showMasterSp="0">
+<p:notes xmlns:a="http://schemas.openxmlformats.org/drawingml/2006/main" xmlns:r="http://schemas.openxmlformats.org/officeDocument/2006/relationships" xmlns:p="http://schemas.openxmlformats.org/presentationml/2006/main" showMasterSp="0" showMasterPhAnim="0">
   <p:cSld>
     <p:spTree>
       <p:nvGrpSpPr>
-        <p:cNvPr id="72" name="Shape 72"/>
+        <p:cNvPr id="1" name="Shape 66"/>
         <p:cNvGrpSpPr/>
         <p:nvPr/>
       </p:nvGrpSpPr>
@@ -1686,10 +1732,12 @@
       </p:grpSpPr>
       <p:sp>
         <p:nvSpPr>
-          <p:cNvPr id="73" name="Google Shape;73;p6:notes"/>
-          <p:cNvSpPr txBox="1"/>
+          <p:cNvPr id="67" name="Google Shape;67;p5:notes"/>
+          <p:cNvSpPr txBox="1">
+            <a:spLocks noGrp="1"/>
+          </p:cNvSpPr>
           <p:nvPr>
-            <p:ph idx="1" type="body"/>
+            <p:ph type="body" idx="1"/>
           </p:nvPr>
         </p:nvSpPr>
         <p:spPr>
@@ -1706,12 +1754,12 @@
           </a:ln>
         </p:spPr>
         <p:txBody>
-          <a:bodyPr anchorCtr="0" anchor="t" bIns="91425" lIns="91425" spcFirstLastPara="1" rIns="91425" wrap="square" tIns="91425">
+          <a:bodyPr spcFirstLastPara="1" wrap="square" lIns="91425" tIns="91425" rIns="91425" bIns="91425" anchor="t" anchorCtr="0">
             <a:noAutofit/>
           </a:bodyPr>
           <a:lstStyle/>
           <a:p>
-            <a:pPr indent="0" lvl="0" marL="0" rtl="0" algn="l">
+            <a:pPr marL="0" lvl="0" indent="0" algn="l" rtl="0">
               <a:lnSpc>
                 <a:spcPct val="100000"/>
               </a:lnSpc>
@@ -1724,30 +1772,33 @@
               <a:buSzPts val="1100"/>
               <a:buNone/>
             </a:pPr>
-            <a:r>
-              <a:t/>
-            </a:r>
             <a:endParaRPr/>
           </a:p>
         </p:txBody>
       </p:sp>
       <p:sp>
         <p:nvSpPr>
-          <p:cNvPr id="74" name="Google Shape;74;p6:notes"/>
-          <p:cNvSpPr/>
+          <p:cNvPr id="68" name="Google Shape;68;p5:notes"/>
+          <p:cNvSpPr>
+            <a:spLocks noGrp="1" noRot="1" noChangeAspect="1"/>
+          </p:cNvSpPr>
           <p:nvPr>
-            <p:ph idx="2" type="sldImg"/>
+            <p:ph type="sldImg" idx="2"/>
           </p:nvPr>
         </p:nvSpPr>
         <p:spPr>
           <a:xfrm>
-            <a:off x="2032400" y="514350"/>
-            <a:ext cx="8128400" cy="2571750"/>
+            <a:off x="3810000" y="514350"/>
+            <a:ext cx="4573588" cy="2571750"/>
           </a:xfrm>
           <a:custGeom>
-            <a:rect b="b" l="l" r="r" t="t"/>
+            <a:avLst/>
+            <a:gdLst/>
+            <a:ahLst/>
+            <a:cxnLst/>
+            <a:rect l="l" t="t" r="r" b="b"/>
             <a:pathLst>
-              <a:path extrusionOk="0" h="120000" w="120000">
+              <a:path w="120000" h="120000" extrusionOk="0">
                 <a:moveTo>
                   <a:pt x="0" y="0"/>
                 </a:moveTo>
@@ -1765,14 +1816,14 @@
             </a:pathLst>
           </a:custGeom>
           <a:noFill/>
-          <a:ln cap="flat" cmpd="sng" w="9525">
+          <a:ln w="9525" cap="flat" cmpd="sng">
             <a:solidFill>
               <a:srgbClr val="000000"/>
             </a:solidFill>
             <a:prstDash val="solid"/>
             <a:round/>
-            <a:headEnd len="sm" w="sm" type="none"/>
-            <a:tailEnd len="sm" w="sm" type="none"/>
+            <a:headEnd type="none" w="sm" len="sm"/>
+            <a:tailEnd type="none" w="sm" len="sm"/>
           </a:ln>
         </p:spPr>
       </p:sp>
@@ -1785,11 +1836,11 @@
 </file>
 
 <file path=ppt/notesSlides/notesSlide6.xml><?xml version="1.0" encoding="utf-8"?>
-<p:notes xmlns:a="http://schemas.openxmlformats.org/drawingml/2006/main" xmlns:r="http://schemas.openxmlformats.org/officeDocument/2006/relationships" xmlns:mc="http://schemas.openxmlformats.org/markup-compatibility/2006" xmlns:mv="urn:schemas-microsoft-com:mac:vml" xmlns:p="http://schemas.openxmlformats.org/presentationml/2006/main" xmlns:c="http://schemas.openxmlformats.org/drawingml/2006/chart" xmlns:dgm="http://schemas.openxmlformats.org/drawingml/2006/diagram" xmlns:o="urn:schemas-microsoft-com:office:office" xmlns:v="urn:schemas-microsoft-com:vml" xmlns:pvml="urn:schemas-microsoft-com:office:powerpoint" xmlns:com="http://schemas.openxmlformats.org/drawingml/2006/compatibility" xmlns:p14="http://schemas.microsoft.com/office/powerpoint/2010/main" xmlns:p15="http://schemas.microsoft.com/office/powerpoint/2012/main" xmlns:ahyp="http://schemas.microsoft.com/office/drawing/2018/hyperlinkcolor" showMasterPhAnim="0" showMasterSp="0">
+<p:notes xmlns:a="http://schemas.openxmlformats.org/drawingml/2006/main" xmlns:r="http://schemas.openxmlformats.org/officeDocument/2006/relationships" xmlns:p="http://schemas.openxmlformats.org/presentationml/2006/main" showMasterSp="0" showMasterPhAnim="0">
   <p:cSld>
     <p:spTree>
       <p:nvGrpSpPr>
-        <p:cNvPr id="78" name="Shape 78"/>
+        <p:cNvPr id="1" name="Shape 78"/>
         <p:cNvGrpSpPr/>
         <p:nvPr/>
       </p:nvGrpSpPr>
@@ -1804,9 +1855,11 @@
       <p:sp>
         <p:nvSpPr>
           <p:cNvPr id="79" name="Google Shape;79;p7:notes"/>
-          <p:cNvSpPr txBox="1"/>
+          <p:cNvSpPr txBox="1">
+            <a:spLocks noGrp="1"/>
+          </p:cNvSpPr>
           <p:nvPr>
-            <p:ph idx="1" type="body"/>
+            <p:ph type="body" idx="1"/>
           </p:nvPr>
         </p:nvSpPr>
         <p:spPr>
@@ -1823,12 +1876,12 @@
           </a:ln>
         </p:spPr>
         <p:txBody>
-          <a:bodyPr anchorCtr="0" anchor="t" bIns="91425" lIns="91425" spcFirstLastPara="1" rIns="91425" wrap="square" tIns="91425">
+          <a:bodyPr spcFirstLastPara="1" wrap="square" lIns="91425" tIns="91425" rIns="91425" bIns="91425" anchor="t" anchorCtr="0">
             <a:noAutofit/>
           </a:bodyPr>
           <a:lstStyle/>
           <a:p>
-            <a:pPr indent="0" lvl="0" marL="0" rtl="0" algn="l">
+            <a:pPr marL="0" lvl="0" indent="0" algn="l" rtl="0">
               <a:lnSpc>
                 <a:spcPct val="100000"/>
               </a:lnSpc>
@@ -1841,9 +1894,6 @@
               <a:buSzPts val="1100"/>
               <a:buNone/>
             </a:pPr>
-            <a:r>
-              <a:t/>
-            </a:r>
             <a:endParaRPr/>
           </a:p>
         </p:txBody>
@@ -1851,9 +1901,11 @@
       <p:sp>
         <p:nvSpPr>
           <p:cNvPr id="80" name="Google Shape;80;p7:notes"/>
-          <p:cNvSpPr/>
+          <p:cNvSpPr>
+            <a:spLocks noGrp="1" noRot="1" noChangeAspect="1"/>
+          </p:cNvSpPr>
           <p:nvPr>
-            <p:ph idx="2" type="sldImg"/>
+            <p:ph type="sldImg" idx="2"/>
           </p:nvPr>
         </p:nvSpPr>
         <p:spPr>
@@ -1862,9 +1914,13 @@
             <a:ext cx="8128400" cy="2571750"/>
           </a:xfrm>
           <a:custGeom>
-            <a:rect b="b" l="l" r="r" t="t"/>
+            <a:avLst/>
+            <a:gdLst/>
+            <a:ahLst/>
+            <a:cxnLst/>
+            <a:rect l="l" t="t" r="r" b="b"/>
             <a:pathLst>
-              <a:path extrusionOk="0" h="120000" w="120000">
+              <a:path w="120000" h="120000" extrusionOk="0">
                 <a:moveTo>
                   <a:pt x="0" y="0"/>
                 </a:moveTo>
@@ -1882,14 +1938,14 @@
             </a:pathLst>
           </a:custGeom>
           <a:noFill/>
-          <a:ln cap="flat" cmpd="sng" w="9525">
+          <a:ln w="9525" cap="flat" cmpd="sng">
             <a:solidFill>
               <a:srgbClr val="000000"/>
             </a:solidFill>
             <a:prstDash val="solid"/>
             <a:round/>
-            <a:headEnd len="sm" w="sm" type="none"/>
-            <a:tailEnd len="sm" w="sm" type="none"/>
+            <a:headEnd type="none" w="sm" len="sm"/>
+            <a:tailEnd type="none" w="sm" len="sm"/>
           </a:ln>
         </p:spPr>
       </p:sp>
@@ -1902,11 +1958,11 @@
 </file>
 
 <file path=ppt/notesSlides/notesSlide7.xml><?xml version="1.0" encoding="utf-8"?>
-<p:notes xmlns:a="http://schemas.openxmlformats.org/drawingml/2006/main" xmlns:r="http://schemas.openxmlformats.org/officeDocument/2006/relationships" xmlns:mc="http://schemas.openxmlformats.org/markup-compatibility/2006" xmlns:mv="urn:schemas-microsoft-com:mac:vml" xmlns:p="http://schemas.openxmlformats.org/presentationml/2006/main" xmlns:c="http://schemas.openxmlformats.org/drawingml/2006/chart" xmlns:dgm="http://schemas.openxmlformats.org/drawingml/2006/diagram" xmlns:o="urn:schemas-microsoft-com:office:office" xmlns:v="urn:schemas-microsoft-com:vml" xmlns:pvml="urn:schemas-microsoft-com:office:powerpoint" xmlns:com="http://schemas.openxmlformats.org/drawingml/2006/compatibility" xmlns:p14="http://schemas.microsoft.com/office/powerpoint/2010/main" xmlns:p15="http://schemas.microsoft.com/office/powerpoint/2012/main" xmlns:ahyp="http://schemas.microsoft.com/office/drawing/2018/hyperlinkcolor" showMasterPhAnim="0" showMasterSp="0">
+<p:notes xmlns:a="http://schemas.openxmlformats.org/drawingml/2006/main" xmlns:r="http://schemas.openxmlformats.org/officeDocument/2006/relationships" xmlns:p="http://schemas.openxmlformats.org/presentationml/2006/main" showMasterSp="0" showMasterPhAnim="0">
   <p:cSld>
     <p:spTree>
       <p:nvGrpSpPr>
-        <p:cNvPr id="85" name="Shape 85"/>
+        <p:cNvPr id="1" name="Shape 85"/>
         <p:cNvGrpSpPr/>
         <p:nvPr/>
       </p:nvGrpSpPr>
@@ -1921,9 +1977,11 @@
       <p:sp>
         <p:nvSpPr>
           <p:cNvPr id="86" name="Google Shape;86;p9:notes"/>
-          <p:cNvSpPr txBox="1"/>
+          <p:cNvSpPr txBox="1">
+            <a:spLocks noGrp="1"/>
+          </p:cNvSpPr>
           <p:nvPr>
-            <p:ph idx="1" type="body"/>
+            <p:ph type="body" idx="1"/>
           </p:nvPr>
         </p:nvSpPr>
         <p:spPr>
@@ -1940,12 +1998,12 @@
           </a:ln>
         </p:spPr>
         <p:txBody>
-          <a:bodyPr anchorCtr="0" anchor="t" bIns="91425" lIns="91425" spcFirstLastPara="1" rIns="91425" wrap="square" tIns="91425">
+          <a:bodyPr spcFirstLastPara="1" wrap="square" lIns="91425" tIns="91425" rIns="91425" bIns="91425" anchor="t" anchorCtr="0">
             <a:noAutofit/>
           </a:bodyPr>
           <a:lstStyle/>
           <a:p>
-            <a:pPr indent="0" lvl="0" marL="0" rtl="0" algn="l">
+            <a:pPr marL="0" lvl="0" indent="0" algn="l" rtl="0">
               <a:lnSpc>
                 <a:spcPct val="100000"/>
               </a:lnSpc>
@@ -1958,9 +2016,6 @@
               <a:buSzPts val="1100"/>
               <a:buNone/>
             </a:pPr>
-            <a:r>
-              <a:t/>
-            </a:r>
             <a:endParaRPr/>
           </a:p>
         </p:txBody>
@@ -1968,9 +2023,11 @@
       <p:sp>
         <p:nvSpPr>
           <p:cNvPr id="87" name="Google Shape;87;p9:notes"/>
-          <p:cNvSpPr/>
+          <p:cNvSpPr>
+            <a:spLocks noGrp="1" noRot="1" noChangeAspect="1"/>
+          </p:cNvSpPr>
           <p:nvPr>
-            <p:ph idx="2" type="sldImg"/>
+            <p:ph type="sldImg" idx="2"/>
           </p:nvPr>
         </p:nvSpPr>
         <p:spPr>
@@ -1979,9 +2036,13 @@
             <a:ext cx="4573500" cy="2571900"/>
           </a:xfrm>
           <a:custGeom>
-            <a:rect b="b" l="l" r="r" t="t"/>
+            <a:avLst/>
+            <a:gdLst/>
+            <a:ahLst/>
+            <a:cxnLst/>
+            <a:rect l="l" t="t" r="r" b="b"/>
             <a:pathLst>
-              <a:path extrusionOk="0" h="120000" w="120000">
+              <a:path w="120000" h="120000" extrusionOk="0">
                 <a:moveTo>
                   <a:pt x="0" y="0"/>
                 </a:moveTo>
@@ -1999,14 +2060,14 @@
             </a:pathLst>
           </a:custGeom>
           <a:noFill/>
-          <a:ln cap="flat" cmpd="sng" w="9525">
+          <a:ln w="9525" cap="flat" cmpd="sng">
             <a:solidFill>
               <a:srgbClr val="000000"/>
             </a:solidFill>
             <a:prstDash val="solid"/>
             <a:round/>
-            <a:headEnd len="sm" w="sm" type="none"/>
-            <a:tailEnd len="sm" w="sm" type="none"/>
+            <a:headEnd type="none" w="sm" len="sm"/>
+            <a:tailEnd type="none" w="sm" len="sm"/>
           </a:ln>
         </p:spPr>
       </p:sp>
@@ -2019,11 +2080,11 @@
 </file>
 
 <file path=ppt/notesSlides/notesSlide8.xml><?xml version="1.0" encoding="utf-8"?>
-<p:notes xmlns:a="http://schemas.openxmlformats.org/drawingml/2006/main" xmlns:r="http://schemas.openxmlformats.org/officeDocument/2006/relationships" xmlns:mc="http://schemas.openxmlformats.org/markup-compatibility/2006" xmlns:mv="urn:schemas-microsoft-com:mac:vml" xmlns:p="http://schemas.openxmlformats.org/presentationml/2006/main" xmlns:c="http://schemas.openxmlformats.org/drawingml/2006/chart" xmlns:dgm="http://schemas.openxmlformats.org/drawingml/2006/diagram" xmlns:o="urn:schemas-microsoft-com:office:office" xmlns:v="urn:schemas-microsoft-com:vml" xmlns:pvml="urn:schemas-microsoft-com:office:powerpoint" xmlns:com="http://schemas.openxmlformats.org/drawingml/2006/compatibility" xmlns:p14="http://schemas.microsoft.com/office/powerpoint/2010/main" xmlns:p15="http://schemas.microsoft.com/office/powerpoint/2012/main" xmlns:ahyp="http://schemas.microsoft.com/office/drawing/2018/hyperlinkcolor" showMasterPhAnim="0" showMasterSp="0">
+<p:notes xmlns:a="http://schemas.openxmlformats.org/drawingml/2006/main" xmlns:r="http://schemas.openxmlformats.org/officeDocument/2006/relationships" xmlns:p="http://schemas.openxmlformats.org/presentationml/2006/main" showMasterSp="0" showMasterPhAnim="0">
   <p:cSld>
     <p:spTree>
       <p:nvGrpSpPr>
-        <p:cNvPr id="92" name="Shape 92"/>
+        <p:cNvPr id="1" name="Shape 92"/>
         <p:cNvGrpSpPr/>
         <p:nvPr/>
       </p:nvGrpSpPr>
@@ -2038,9 +2099,11 @@
       <p:sp>
         <p:nvSpPr>
           <p:cNvPr id="93" name="Google Shape;93;p11:notes"/>
-          <p:cNvSpPr txBox="1"/>
+          <p:cNvSpPr txBox="1">
+            <a:spLocks noGrp="1"/>
+          </p:cNvSpPr>
           <p:nvPr>
-            <p:ph idx="1" type="body"/>
+            <p:ph type="body" idx="1"/>
           </p:nvPr>
         </p:nvSpPr>
         <p:spPr>
@@ -2057,12 +2120,12 @@
           </a:ln>
         </p:spPr>
         <p:txBody>
-          <a:bodyPr anchorCtr="0" anchor="t" bIns="91425" lIns="91425" spcFirstLastPara="1" rIns="91425" wrap="square" tIns="91425">
+          <a:bodyPr spcFirstLastPara="1" wrap="square" lIns="91425" tIns="91425" rIns="91425" bIns="91425" anchor="t" anchorCtr="0">
             <a:noAutofit/>
           </a:bodyPr>
           <a:lstStyle/>
           <a:p>
-            <a:pPr indent="0" lvl="0" marL="0" rtl="0" algn="l">
+            <a:pPr marL="0" lvl="0" indent="0" algn="l" rtl="0">
               <a:lnSpc>
                 <a:spcPct val="100000"/>
               </a:lnSpc>
@@ -2075,9 +2138,6 @@
               <a:buSzPts val="1100"/>
               <a:buNone/>
             </a:pPr>
-            <a:r>
-              <a:t/>
-            </a:r>
             <a:endParaRPr/>
           </a:p>
         </p:txBody>
@@ -2085,9 +2145,11 @@
       <p:sp>
         <p:nvSpPr>
           <p:cNvPr id="94" name="Google Shape;94;p11:notes"/>
-          <p:cNvSpPr/>
+          <p:cNvSpPr>
+            <a:spLocks noGrp="1" noRot="1" noChangeAspect="1"/>
+          </p:cNvSpPr>
           <p:nvPr>
-            <p:ph idx="2" type="sldImg"/>
+            <p:ph type="sldImg" idx="2"/>
           </p:nvPr>
         </p:nvSpPr>
         <p:spPr>
@@ -2096,9 +2158,13 @@
             <a:ext cx="8128400" cy="2571750"/>
           </a:xfrm>
           <a:custGeom>
-            <a:rect b="b" l="l" r="r" t="t"/>
+            <a:avLst/>
+            <a:gdLst/>
+            <a:ahLst/>
+            <a:cxnLst/>
+            <a:rect l="l" t="t" r="r" b="b"/>
             <a:pathLst>
-              <a:path extrusionOk="0" h="120000" w="120000">
+              <a:path w="120000" h="120000" extrusionOk="0">
                 <a:moveTo>
                   <a:pt x="0" y="0"/>
                 </a:moveTo>
@@ -2116,14 +2182,14 @@
             </a:pathLst>
           </a:custGeom>
           <a:noFill/>
-          <a:ln cap="flat" cmpd="sng" w="9525">
+          <a:ln w="9525" cap="flat" cmpd="sng">
             <a:solidFill>
               <a:srgbClr val="000000"/>
             </a:solidFill>
             <a:prstDash val="solid"/>
             <a:round/>
-            <a:headEnd len="sm" w="sm" type="none"/>
-            <a:tailEnd len="sm" w="sm" type="none"/>
+            <a:headEnd type="none" w="sm" len="sm"/>
+            <a:tailEnd type="none" w="sm" len="sm"/>
           </a:ln>
         </p:spPr>
       </p:sp>
@@ -2136,11 +2202,11 @@
 </file>
 
 <file path=ppt/notesSlides/notesSlide9.xml><?xml version="1.0" encoding="utf-8"?>
-<p:notes xmlns:a="http://schemas.openxmlformats.org/drawingml/2006/main" xmlns:r="http://schemas.openxmlformats.org/officeDocument/2006/relationships" xmlns:mc="http://schemas.openxmlformats.org/markup-compatibility/2006" xmlns:mv="urn:schemas-microsoft-com:mac:vml" xmlns:p="http://schemas.openxmlformats.org/presentationml/2006/main" xmlns:c="http://schemas.openxmlformats.org/drawingml/2006/chart" xmlns:dgm="http://schemas.openxmlformats.org/drawingml/2006/diagram" xmlns:o="urn:schemas-microsoft-com:office:office" xmlns:v="urn:schemas-microsoft-com:vml" xmlns:pvml="urn:schemas-microsoft-com:office:powerpoint" xmlns:com="http://schemas.openxmlformats.org/drawingml/2006/compatibility" xmlns:p14="http://schemas.microsoft.com/office/powerpoint/2010/main" xmlns:p15="http://schemas.microsoft.com/office/powerpoint/2012/main" xmlns:ahyp="http://schemas.microsoft.com/office/drawing/2018/hyperlinkcolor" showMasterPhAnim="0" showMasterSp="0">
+<p:notes xmlns:a="http://schemas.openxmlformats.org/drawingml/2006/main" xmlns:r="http://schemas.openxmlformats.org/officeDocument/2006/relationships" xmlns:p="http://schemas.openxmlformats.org/presentationml/2006/main" showMasterSp="0" showMasterPhAnim="0">
   <p:cSld>
     <p:spTree>
       <p:nvGrpSpPr>
-        <p:cNvPr id="99" name="Shape 99"/>
+        <p:cNvPr id="1" name="Shape 99"/>
         <p:cNvGrpSpPr/>
         <p:nvPr/>
       </p:nvGrpSpPr>
@@ -2155,9 +2221,11 @@
       <p:sp>
         <p:nvSpPr>
           <p:cNvPr id="100" name="Google Shape;100;p12:notes"/>
-          <p:cNvSpPr txBox="1"/>
+          <p:cNvSpPr txBox="1">
+            <a:spLocks noGrp="1"/>
+          </p:cNvSpPr>
           <p:nvPr>
-            <p:ph idx="1" type="body"/>
+            <p:ph type="body" idx="1"/>
           </p:nvPr>
         </p:nvSpPr>
         <p:spPr>
@@ -2174,12 +2242,12 @@
           </a:ln>
         </p:spPr>
         <p:txBody>
-          <a:bodyPr anchorCtr="0" anchor="t" bIns="91425" lIns="91425" spcFirstLastPara="1" rIns="91425" wrap="square" tIns="91425">
+          <a:bodyPr spcFirstLastPara="1" wrap="square" lIns="91425" tIns="91425" rIns="91425" bIns="91425" anchor="t" anchorCtr="0">
             <a:noAutofit/>
           </a:bodyPr>
           <a:lstStyle/>
           <a:p>
-            <a:pPr indent="0" lvl="0" marL="0" rtl="0" algn="l">
+            <a:pPr marL="0" lvl="0" indent="0" algn="l" rtl="0">
               <a:lnSpc>
                 <a:spcPct val="100000"/>
               </a:lnSpc>
@@ -2192,9 +2260,6 @@
               <a:buSzPts val="1100"/>
               <a:buNone/>
             </a:pPr>
-            <a:r>
-              <a:t/>
-            </a:r>
             <a:endParaRPr/>
           </a:p>
         </p:txBody>
@@ -2202,9 +2267,11 @@
       <p:sp>
         <p:nvSpPr>
           <p:cNvPr id="101" name="Google Shape;101;p12:notes"/>
-          <p:cNvSpPr/>
+          <p:cNvSpPr>
+            <a:spLocks noGrp="1" noRot="1" noChangeAspect="1"/>
+          </p:cNvSpPr>
           <p:nvPr>
-            <p:ph idx="2" type="sldImg"/>
+            <p:ph type="sldImg" idx="2"/>
           </p:nvPr>
         </p:nvSpPr>
         <p:spPr>
@@ -2213,9 +2280,13 @@
             <a:ext cx="8128400" cy="2571750"/>
           </a:xfrm>
           <a:custGeom>
-            <a:rect b="b" l="l" r="r" t="t"/>
+            <a:avLst/>
+            <a:gdLst/>
+            <a:ahLst/>
+            <a:cxnLst/>
+            <a:rect l="l" t="t" r="r" b="b"/>
             <a:pathLst>
-              <a:path extrusionOk="0" h="120000" w="120000">
+              <a:path w="120000" h="120000" extrusionOk="0">
                 <a:moveTo>
                   <a:pt x="0" y="0"/>
                 </a:moveTo>
@@ -2233,14 +2304,14 @@
             </a:pathLst>
           </a:custGeom>
           <a:noFill/>
-          <a:ln cap="flat" cmpd="sng" w="9525">
+          <a:ln w="9525" cap="flat" cmpd="sng">
             <a:solidFill>
               <a:srgbClr val="000000"/>
             </a:solidFill>
             <a:prstDash val="solid"/>
             <a:round/>
-            <a:headEnd len="sm" w="sm" type="none"/>
-            <a:tailEnd len="sm" w="sm" type="none"/>
+            <a:headEnd type="none" w="sm" len="sm"/>
+            <a:tailEnd type="none" w="sm" len="sm"/>
           </a:ln>
         </p:spPr>
       </p:sp>
@@ -2253,11 +2324,11 @@
 </file>
 
 <file path=ppt/slideLayouts/slideLayout1.xml><?xml version="1.0" encoding="utf-8"?>
-<p:sldLayout xmlns:a="http://schemas.openxmlformats.org/drawingml/2006/main" xmlns:r="http://schemas.openxmlformats.org/officeDocument/2006/relationships" xmlns:mc="http://schemas.openxmlformats.org/markup-compatibility/2006" xmlns:mv="urn:schemas-microsoft-com:mac:vml" xmlns:p="http://schemas.openxmlformats.org/presentationml/2006/main" xmlns:c="http://schemas.openxmlformats.org/drawingml/2006/chart" xmlns:dgm="http://schemas.openxmlformats.org/drawingml/2006/diagram" xmlns:o="urn:schemas-microsoft-com:office:office" xmlns:v="urn:schemas-microsoft-com:vml" xmlns:pvml="urn:schemas-microsoft-com:office:powerpoint" xmlns:com="http://schemas.openxmlformats.org/drawingml/2006/compatibility" xmlns:p14="http://schemas.microsoft.com/office/powerpoint/2010/main" xmlns:p15="http://schemas.microsoft.com/office/powerpoint/2012/main" xmlns:ahyp="http://schemas.microsoft.com/office/drawing/2018/hyperlinkcolor" matchingName="Title and Content" type="obj">
+<p:sldLayout xmlns:a="http://schemas.openxmlformats.org/drawingml/2006/main" xmlns:r="http://schemas.openxmlformats.org/officeDocument/2006/relationships" xmlns:p="http://schemas.openxmlformats.org/presentationml/2006/main" matchingName="Title and Content" type="obj">
   <p:cSld name="OBJECT">
     <p:spTree>
       <p:nvGrpSpPr>
-        <p:cNvPr id="12" name="Shape 12"/>
+        <p:cNvPr id="1" name="Shape 12"/>
         <p:cNvGrpSpPr/>
         <p:nvPr/>
       </p:nvGrpSpPr>
@@ -2272,7 +2343,9 @@
       <p:sp>
         <p:nvSpPr>
           <p:cNvPr id="13" name="Google Shape;13;p2"/>
-          <p:cNvSpPr txBox="1"/>
+          <p:cNvSpPr txBox="1">
+            <a:spLocks noGrp="1"/>
+          </p:cNvSpPr>
           <p:nvPr>
             <p:ph type="title"/>
           </p:nvPr>
@@ -2291,7 +2364,7 @@
           </a:ln>
         </p:spPr>
         <p:txBody>
-          <a:bodyPr anchorCtr="0" anchor="t" bIns="0" lIns="0" spcFirstLastPara="1" rIns="0" wrap="square" tIns="0">
+          <a:bodyPr spcFirstLastPara="1" wrap="square" lIns="0" tIns="0" rIns="0" bIns="0" anchor="t" anchorCtr="0">
             <a:spAutoFit/>
           </a:bodyPr>
           <a:lstStyle>
@@ -2307,7 +2380,7 @@
               </a:spcAft>
               <a:buSzPts val="1400"/>
               <a:buNone/>
-              <a:defRPr b="1" i="0" sz="3600">
+              <a:defRPr sz="3600" b="1" i="0">
                 <a:solidFill>
                   <a:schemeClr val="lt1"/>
                 </a:solidFill>
@@ -2430,15 +2503,19 @@
               <a:defRPr/>
             </a:lvl9pPr>
           </a:lstStyle>
-          <a:p/>
+          <a:p>
+            <a:endParaRPr/>
+          </a:p>
         </p:txBody>
       </p:sp>
       <p:sp>
         <p:nvSpPr>
           <p:cNvPr id="14" name="Google Shape;14;p2"/>
-          <p:cNvSpPr txBox="1"/>
+          <p:cNvSpPr txBox="1">
+            <a:spLocks noGrp="1"/>
+          </p:cNvSpPr>
           <p:nvPr>
-            <p:ph idx="1" type="body"/>
+            <p:ph type="body" idx="1"/>
           </p:nvPr>
         </p:nvSpPr>
         <p:spPr>
@@ -2455,23 +2532,23 @@
           </a:ln>
         </p:spPr>
         <p:txBody>
-          <a:bodyPr anchorCtr="0" anchor="t" bIns="0" lIns="0" spcFirstLastPara="1" rIns="0" wrap="square" tIns="0">
+          <a:bodyPr spcFirstLastPara="1" wrap="square" lIns="0" tIns="0" rIns="0" bIns="0" anchor="t" anchorCtr="0">
             <a:spAutoFit/>
           </a:bodyPr>
           <a:lstStyle>
-            <a:lvl1pPr indent="-228600" lvl="0" marL="457200" algn="l">
-              <a:lnSpc>
-                <a:spcPct val="100000"/>
-              </a:lnSpc>
-              <a:spcBef>
-                <a:spcPts val="0"/>
-              </a:spcBef>
-              <a:spcAft>
-                <a:spcPts val="0"/>
-              </a:spcAft>
-              <a:buSzPts val="1400"/>
-              <a:buNone/>
-              <a:defRPr b="0" i="0" sz="1800">
+            <a:lvl1pPr marL="457200" lvl="0" indent="-228600" algn="l">
+              <a:lnSpc>
+                <a:spcPct val="100000"/>
+              </a:lnSpc>
+              <a:spcBef>
+                <a:spcPts val="0"/>
+              </a:spcBef>
+              <a:spcAft>
+                <a:spcPts val="0"/>
+              </a:spcAft>
+              <a:buSzPts val="1400"/>
+              <a:buNone/>
+              <a:defRPr sz="1800" b="0" i="0">
                 <a:solidFill>
                   <a:schemeClr val="dk1"/>
                 </a:solidFill>
@@ -2481,7 +2558,7 @@
                 <a:sym typeface="Arial"/>
               </a:defRPr>
             </a:lvl1pPr>
-            <a:lvl2pPr indent="-228600" lvl="1" marL="914400" algn="l">
+            <a:lvl2pPr marL="914400" lvl="1" indent="-228600" algn="l">
               <a:lnSpc>
                 <a:spcPct val="100000"/>
               </a:lnSpc>
@@ -2495,7 +2572,7 @@
               <a:buNone/>
               <a:defRPr/>
             </a:lvl2pPr>
-            <a:lvl3pPr indent="-228600" lvl="2" marL="1371600" algn="l">
+            <a:lvl3pPr marL="1371600" lvl="2" indent="-228600" algn="l">
               <a:lnSpc>
                 <a:spcPct val="100000"/>
               </a:lnSpc>
@@ -2509,7 +2586,7 @@
               <a:buNone/>
               <a:defRPr/>
             </a:lvl3pPr>
-            <a:lvl4pPr indent="-228600" lvl="3" marL="1828800" algn="l">
+            <a:lvl4pPr marL="1828800" lvl="3" indent="-228600" algn="l">
               <a:lnSpc>
                 <a:spcPct val="100000"/>
               </a:lnSpc>
@@ -2523,7 +2600,7 @@
               <a:buNone/>
               <a:defRPr/>
             </a:lvl4pPr>
-            <a:lvl5pPr indent="-228600" lvl="4" marL="2286000" algn="l">
+            <a:lvl5pPr marL="2286000" lvl="4" indent="-228600" algn="l">
               <a:lnSpc>
                 <a:spcPct val="100000"/>
               </a:lnSpc>
@@ -2537,7 +2614,7 @@
               <a:buNone/>
               <a:defRPr/>
             </a:lvl5pPr>
-            <a:lvl6pPr indent="-228600" lvl="5" marL="2743200" algn="l">
+            <a:lvl6pPr marL="2743200" lvl="5" indent="-228600" algn="l">
               <a:lnSpc>
                 <a:spcPct val="100000"/>
               </a:lnSpc>
@@ -2551,7 +2628,7 @@
               <a:buNone/>
               <a:defRPr/>
             </a:lvl6pPr>
-            <a:lvl7pPr indent="-228600" lvl="6" marL="3200400" algn="l">
+            <a:lvl7pPr marL="3200400" lvl="6" indent="-228600" algn="l">
               <a:lnSpc>
                 <a:spcPct val="100000"/>
               </a:lnSpc>
@@ -2565,7 +2642,7 @@
               <a:buNone/>
               <a:defRPr/>
             </a:lvl7pPr>
-            <a:lvl8pPr indent="-228600" lvl="7" marL="3657600" algn="l">
+            <a:lvl8pPr marL="3657600" lvl="7" indent="-228600" algn="l">
               <a:lnSpc>
                 <a:spcPct val="100000"/>
               </a:lnSpc>
@@ -2579,7 +2656,7 @@
               <a:buNone/>
               <a:defRPr/>
             </a:lvl8pPr>
-            <a:lvl9pPr indent="-228600" lvl="8" marL="4114800" algn="l">
+            <a:lvl9pPr marL="4114800" lvl="8" indent="-228600" algn="l">
               <a:lnSpc>
                 <a:spcPct val="100000"/>
               </a:lnSpc>
@@ -2594,15 +2671,19 @@
               <a:defRPr/>
             </a:lvl9pPr>
           </a:lstStyle>
-          <a:p/>
+          <a:p>
+            <a:endParaRPr/>
+          </a:p>
         </p:txBody>
       </p:sp>
       <p:sp>
         <p:nvSpPr>
           <p:cNvPr id="15" name="Google Shape;15;p2"/>
-          <p:cNvSpPr txBox="1"/>
+          <p:cNvSpPr txBox="1">
+            <a:spLocks noGrp="1"/>
+          </p:cNvSpPr>
           <p:nvPr>
-            <p:ph idx="11" type="ftr"/>
+            <p:ph type="ftr" idx="11"/>
           </p:nvPr>
         </p:nvSpPr>
         <p:spPr>
@@ -2619,7 +2700,7 @@
           </a:ln>
         </p:spPr>
         <p:txBody>
-          <a:bodyPr anchorCtr="0" anchor="t" bIns="0" lIns="0" spcFirstLastPara="1" rIns="0" wrap="square" tIns="0">
+          <a:bodyPr spcFirstLastPara="1" wrap="square" lIns="0" tIns="0" rIns="0" bIns="0" anchor="t" anchorCtr="0">
             <a:spAutoFit/>
           </a:bodyPr>
           <a:lstStyle>
@@ -2754,15 +2835,19 @@
               <a:defRPr/>
             </a:lvl9pPr>
           </a:lstStyle>
-          <a:p/>
+          <a:p>
+            <a:endParaRPr/>
+          </a:p>
         </p:txBody>
       </p:sp>
       <p:sp>
         <p:nvSpPr>
           <p:cNvPr id="16" name="Google Shape;16;p2"/>
-          <p:cNvSpPr txBox="1"/>
+          <p:cNvSpPr txBox="1">
+            <a:spLocks noGrp="1"/>
+          </p:cNvSpPr>
           <p:nvPr>
-            <p:ph idx="10" type="dt"/>
+            <p:ph type="dt" idx="10"/>
           </p:nvPr>
         </p:nvSpPr>
         <p:spPr>
@@ -2779,7 +2864,7 @@
           </a:ln>
         </p:spPr>
         <p:txBody>
-          <a:bodyPr anchorCtr="0" anchor="t" bIns="0" lIns="0" spcFirstLastPara="1" rIns="0" wrap="square" tIns="0">
+          <a:bodyPr spcFirstLastPara="1" wrap="square" lIns="0" tIns="0" rIns="0" bIns="0" anchor="t" anchorCtr="0">
             <a:spAutoFit/>
           </a:bodyPr>
           <a:lstStyle>
@@ -2914,15 +2999,19 @@
               <a:defRPr/>
             </a:lvl9pPr>
           </a:lstStyle>
-          <a:p/>
+          <a:p>
+            <a:endParaRPr/>
+          </a:p>
         </p:txBody>
       </p:sp>
       <p:sp>
         <p:nvSpPr>
           <p:cNvPr id="17" name="Google Shape;17;p2"/>
-          <p:cNvSpPr txBox="1"/>
+          <p:cNvSpPr txBox="1">
+            <a:spLocks noGrp="1"/>
+          </p:cNvSpPr>
           <p:nvPr>
-            <p:ph idx="12" type="sldNum"/>
+            <p:ph type="sldNum" idx="12"/>
           </p:nvPr>
         </p:nvSpPr>
         <p:spPr>
@@ -2939,11 +3028,11 @@
           </a:ln>
         </p:spPr>
         <p:txBody>
-          <a:bodyPr anchorCtr="0" anchor="t" bIns="0" lIns="0" spcFirstLastPara="1" rIns="0" wrap="square" tIns="0">
+          <a:bodyPr spcFirstLastPara="1" wrap="square" lIns="0" tIns="0" rIns="0" bIns="0" anchor="t" anchorCtr="0">
             <a:spAutoFit/>
           </a:bodyPr>
           <a:lstStyle>
-            <a:lvl1pPr indent="0" lvl="0" marL="0" marR="0" algn="r">
+            <a:lvl1pPr marL="0" marR="0" lvl="0" indent="0" algn="r">
               <a:lnSpc>
                 <a:spcPct val="100000"/>
               </a:lnSpc>
@@ -2959,7 +3048,7 @@
               <a:buSzPts val="1800"/>
               <a:buFont typeface="Arial"/>
               <a:buNone/>
-              <a:defRPr b="0" i="0" sz="1800" u="none" cap="none" strike="noStrike">
+              <a:defRPr sz="1800" b="0" i="0" u="none" strike="noStrike" cap="none">
                 <a:solidFill>
                   <a:srgbClr val="888888"/>
                 </a:solidFill>
@@ -2969,7 +3058,7 @@
                 <a:sym typeface="Arial"/>
               </a:defRPr>
             </a:lvl1pPr>
-            <a:lvl2pPr indent="0" lvl="1" marL="0" marR="0" algn="r">
+            <a:lvl2pPr marL="0" marR="0" lvl="1" indent="0" algn="r">
               <a:lnSpc>
                 <a:spcPct val="100000"/>
               </a:lnSpc>
@@ -2985,7 +3074,7 @@
               <a:buSzPts val="1800"/>
               <a:buFont typeface="Arial"/>
               <a:buNone/>
-              <a:defRPr b="0" i="0" sz="1800" u="none" cap="none" strike="noStrike">
+              <a:defRPr sz="1800" b="0" i="0" u="none" strike="noStrike" cap="none">
                 <a:solidFill>
                   <a:srgbClr val="888888"/>
                 </a:solidFill>
@@ -2995,7 +3084,7 @@
                 <a:sym typeface="Arial"/>
               </a:defRPr>
             </a:lvl2pPr>
-            <a:lvl3pPr indent="0" lvl="2" marL="0" marR="0" algn="r">
+            <a:lvl3pPr marL="0" marR="0" lvl="2" indent="0" algn="r">
               <a:lnSpc>
                 <a:spcPct val="100000"/>
               </a:lnSpc>
@@ -3011,7 +3100,7 @@
               <a:buSzPts val="1800"/>
               <a:buFont typeface="Arial"/>
               <a:buNone/>
-              <a:defRPr b="0" i="0" sz="1800" u="none" cap="none" strike="noStrike">
+              <a:defRPr sz="1800" b="0" i="0" u="none" strike="noStrike" cap="none">
                 <a:solidFill>
                   <a:srgbClr val="888888"/>
                 </a:solidFill>
@@ -3021,7 +3110,7 @@
                 <a:sym typeface="Arial"/>
               </a:defRPr>
             </a:lvl3pPr>
-            <a:lvl4pPr indent="0" lvl="3" marL="0" marR="0" algn="r">
+            <a:lvl4pPr marL="0" marR="0" lvl="3" indent="0" algn="r">
               <a:lnSpc>
                 <a:spcPct val="100000"/>
               </a:lnSpc>
@@ -3037,7 +3126,7 @@
               <a:buSzPts val="1800"/>
               <a:buFont typeface="Arial"/>
               <a:buNone/>
-              <a:defRPr b="0" i="0" sz="1800" u="none" cap="none" strike="noStrike">
+              <a:defRPr sz="1800" b="0" i="0" u="none" strike="noStrike" cap="none">
                 <a:solidFill>
                   <a:srgbClr val="888888"/>
                 </a:solidFill>
@@ -3047,7 +3136,7 @@
                 <a:sym typeface="Arial"/>
               </a:defRPr>
             </a:lvl4pPr>
-            <a:lvl5pPr indent="0" lvl="4" marL="0" marR="0" algn="r">
+            <a:lvl5pPr marL="0" marR="0" lvl="4" indent="0" algn="r">
               <a:lnSpc>
                 <a:spcPct val="100000"/>
               </a:lnSpc>
@@ -3063,7 +3152,7 @@
               <a:buSzPts val="1800"/>
               <a:buFont typeface="Arial"/>
               <a:buNone/>
-              <a:defRPr b="0" i="0" sz="1800" u="none" cap="none" strike="noStrike">
+              <a:defRPr sz="1800" b="0" i="0" u="none" strike="noStrike" cap="none">
                 <a:solidFill>
                   <a:srgbClr val="888888"/>
                 </a:solidFill>
@@ -3073,7 +3162,7 @@
                 <a:sym typeface="Arial"/>
               </a:defRPr>
             </a:lvl5pPr>
-            <a:lvl6pPr indent="0" lvl="5" marL="0" marR="0" algn="r">
+            <a:lvl6pPr marL="0" marR="0" lvl="5" indent="0" algn="r">
               <a:lnSpc>
                 <a:spcPct val="100000"/>
               </a:lnSpc>
@@ -3089,7 +3178,7 @@
               <a:buSzPts val="1800"/>
               <a:buFont typeface="Arial"/>
               <a:buNone/>
-              <a:defRPr b="0" i="0" sz="1800" u="none" cap="none" strike="noStrike">
+              <a:defRPr sz="1800" b="0" i="0" u="none" strike="noStrike" cap="none">
                 <a:solidFill>
                   <a:srgbClr val="888888"/>
                 </a:solidFill>
@@ -3099,7 +3188,7 @@
                 <a:sym typeface="Arial"/>
               </a:defRPr>
             </a:lvl6pPr>
-            <a:lvl7pPr indent="0" lvl="6" marL="0" marR="0" algn="r">
+            <a:lvl7pPr marL="0" marR="0" lvl="6" indent="0" algn="r">
               <a:lnSpc>
                 <a:spcPct val="100000"/>
               </a:lnSpc>
@@ -3115,7 +3204,7 @@
               <a:buSzPts val="1800"/>
               <a:buFont typeface="Arial"/>
               <a:buNone/>
-              <a:defRPr b="0" i="0" sz="1800" u="none" cap="none" strike="noStrike">
+              <a:defRPr sz="1800" b="0" i="0" u="none" strike="noStrike" cap="none">
                 <a:solidFill>
                   <a:srgbClr val="888888"/>
                 </a:solidFill>
@@ -3125,7 +3214,7 @@
                 <a:sym typeface="Arial"/>
               </a:defRPr>
             </a:lvl7pPr>
-            <a:lvl8pPr indent="0" lvl="7" marL="0" marR="0" algn="r">
+            <a:lvl8pPr marL="0" marR="0" lvl="7" indent="0" algn="r">
               <a:lnSpc>
                 <a:spcPct val="100000"/>
               </a:lnSpc>
@@ -3141,7 +3230,7 @@
               <a:buSzPts val="1800"/>
               <a:buFont typeface="Arial"/>
               <a:buNone/>
-              <a:defRPr b="0" i="0" sz="1800" u="none" cap="none" strike="noStrike">
+              <a:defRPr sz="1800" b="0" i="0" u="none" strike="noStrike" cap="none">
                 <a:solidFill>
                   <a:srgbClr val="888888"/>
                 </a:solidFill>
@@ -3151,7 +3240,7 @@
                 <a:sym typeface="Arial"/>
               </a:defRPr>
             </a:lvl8pPr>
-            <a:lvl9pPr indent="0" lvl="8" marL="0" marR="0" algn="r">
+            <a:lvl9pPr marL="0" marR="0" lvl="8" indent="0" algn="r">
               <a:lnSpc>
                 <a:spcPct val="100000"/>
               </a:lnSpc>
@@ -3167,7 +3256,7 @@
               <a:buSzPts val="1800"/>
               <a:buFont typeface="Arial"/>
               <a:buNone/>
-              <a:defRPr b="0" i="0" sz="1800" u="none" cap="none" strike="noStrike">
+              <a:defRPr sz="1800" b="0" i="0" u="none" strike="noStrike" cap="none">
                 <a:solidFill>
                   <a:srgbClr val="888888"/>
                 </a:solidFill>
@@ -3179,7 +3268,7 @@
             </a:lvl9pPr>
           </a:lstStyle>
           <a:p>
-            <a:pPr indent="0" lvl="0" marL="0" rtl="0" algn="r">
+            <a:pPr marL="0" lvl="0" indent="0" algn="r" rtl="0">
               <a:spcBef>
                 <a:spcPts val="0"/>
               </a:spcBef>
@@ -3190,7 +3279,7 @@
             </a:pPr>
             <a:fld id="{00000000-1234-1234-1234-123412341234}" type="slidenum">
               <a:rPr lang="es-CO"/>
-              <a:t>‹#›</a:t>
+              <a:t>‹Nº›</a:t>
             </a:fld>
             <a:endParaRPr/>
           </a:p>
@@ -3205,18 +3294,19 @@
 </file>
 
 <file path=ppt/slideLayouts/slideLayout2.xml><?xml version="1.0" encoding="utf-8"?>
-<p:sldLayout xmlns:a="http://schemas.openxmlformats.org/drawingml/2006/main" xmlns:r="http://schemas.openxmlformats.org/officeDocument/2006/relationships" xmlns:mc="http://schemas.openxmlformats.org/markup-compatibility/2006" xmlns:mv="urn:schemas-microsoft-com:mac:vml" xmlns:p="http://schemas.openxmlformats.org/presentationml/2006/main" xmlns:c="http://schemas.openxmlformats.org/drawingml/2006/chart" xmlns:dgm="http://schemas.openxmlformats.org/drawingml/2006/diagram" xmlns:o="urn:schemas-microsoft-com:office:office" xmlns:v="urn:schemas-microsoft-com:vml" xmlns:pvml="urn:schemas-microsoft-com:office:powerpoint" xmlns:com="http://schemas.openxmlformats.org/drawingml/2006/compatibility" xmlns:p14="http://schemas.microsoft.com/office/powerpoint/2010/main" xmlns:p15="http://schemas.microsoft.com/office/powerpoint/2012/main" xmlns:ahyp="http://schemas.microsoft.com/office/drawing/2018/hyperlinkcolor" matchingName="Title Slide" showMasterSp="0">
+<p:sldLayout xmlns:a="http://schemas.openxmlformats.org/drawingml/2006/main" xmlns:r="http://schemas.openxmlformats.org/officeDocument/2006/relationships" xmlns:p="http://schemas.openxmlformats.org/presentationml/2006/main" showMasterSp="0" matchingName="Title Slide">
   <p:cSld name="Title Slide">
     <p:bg>
       <p:bgPr>
         <a:solidFill>
           <a:schemeClr val="lt1"/>
         </a:solidFill>
+        <a:effectLst/>
       </p:bgPr>
     </p:bg>
     <p:spTree>
       <p:nvGrpSpPr>
-        <p:cNvPr id="18" name="Shape 18"/>
+        <p:cNvPr id="1" name="Shape 18"/>
         <p:cNvGrpSpPr/>
         <p:nvPr/>
       </p:nvGrpSpPr>
@@ -3238,7 +3328,7 @@
           <a:blip r:embed="rId2">
             <a:alphaModFix/>
           </a:blip>
-          <a:srcRect b="0" l="0" r="0" t="0"/>
+          <a:srcRect/>
           <a:stretch/>
         </p:blipFill>
         <p:spPr>
@@ -3258,7 +3348,9 @@
       <p:sp>
         <p:nvSpPr>
           <p:cNvPr id="20" name="Google Shape;20;p3"/>
-          <p:cNvSpPr txBox="1"/>
+          <p:cNvSpPr txBox="1">
+            <a:spLocks noGrp="1"/>
+          </p:cNvSpPr>
           <p:nvPr>
             <p:ph type="ctrTitle"/>
           </p:nvPr>
@@ -3277,7 +3369,7 @@
           </a:ln>
         </p:spPr>
         <p:txBody>
-          <a:bodyPr anchorCtr="0" anchor="t" bIns="0" lIns="0" spcFirstLastPara="1" rIns="0" wrap="square" tIns="0">
+          <a:bodyPr spcFirstLastPara="1" wrap="square" lIns="0" tIns="0" rIns="0" bIns="0" anchor="t" anchorCtr="0">
             <a:spAutoFit/>
           </a:bodyPr>
           <a:lstStyle>
@@ -3293,7 +3385,7 @@
               </a:spcAft>
               <a:buSzPts val="1400"/>
               <a:buNone/>
-              <a:defRPr b="1" i="0" sz="3600">
+              <a:defRPr sz="3600" b="1" i="0">
                 <a:solidFill>
                   <a:schemeClr val="lt1"/>
                 </a:solidFill>
@@ -3416,15 +3508,19 @@
               <a:defRPr/>
             </a:lvl9pPr>
           </a:lstStyle>
-          <a:p/>
+          <a:p>
+            <a:endParaRPr/>
+          </a:p>
         </p:txBody>
       </p:sp>
       <p:sp>
         <p:nvSpPr>
           <p:cNvPr id="21" name="Google Shape;21;p3"/>
-          <p:cNvSpPr txBox="1"/>
+          <p:cNvSpPr txBox="1">
+            <a:spLocks noGrp="1"/>
+          </p:cNvSpPr>
           <p:nvPr>
-            <p:ph idx="1" type="subTitle"/>
+            <p:ph type="subTitle" idx="1"/>
           </p:nvPr>
         </p:nvSpPr>
         <p:spPr>
@@ -3441,7 +3537,7 @@
           </a:ln>
         </p:spPr>
         <p:txBody>
-          <a:bodyPr anchorCtr="0" anchor="t" bIns="0" lIns="0" spcFirstLastPara="1" rIns="0" wrap="square" tIns="0">
+          <a:bodyPr spcFirstLastPara="1" wrap="square" lIns="0" tIns="0" rIns="0" bIns="0" anchor="t" anchorCtr="0">
             <a:spAutoFit/>
           </a:bodyPr>
           <a:lstStyle>
@@ -3457,7 +3553,7 @@
               </a:spcAft>
               <a:buSzPts val="1400"/>
               <a:buNone/>
-              <a:defRPr b="0" i="0" sz="1800">
+              <a:defRPr sz="1800" b="0" i="0">
                 <a:solidFill>
                   <a:schemeClr val="dk1"/>
                 </a:solidFill>
@@ -3580,15 +3676,19 @@
               <a:defRPr/>
             </a:lvl9pPr>
           </a:lstStyle>
-          <a:p/>
+          <a:p>
+            <a:endParaRPr/>
+          </a:p>
         </p:txBody>
       </p:sp>
       <p:sp>
         <p:nvSpPr>
           <p:cNvPr id="22" name="Google Shape;22;p3"/>
-          <p:cNvSpPr txBox="1"/>
+          <p:cNvSpPr txBox="1">
+            <a:spLocks noGrp="1"/>
+          </p:cNvSpPr>
           <p:nvPr>
-            <p:ph idx="11" type="ftr"/>
+            <p:ph type="ftr" idx="11"/>
           </p:nvPr>
         </p:nvSpPr>
         <p:spPr>
@@ -3605,7 +3705,7 @@
           </a:ln>
         </p:spPr>
         <p:txBody>
-          <a:bodyPr anchorCtr="0" anchor="t" bIns="0" lIns="0" spcFirstLastPara="1" rIns="0" wrap="square" tIns="0">
+          <a:bodyPr spcFirstLastPara="1" wrap="square" lIns="0" tIns="0" rIns="0" bIns="0" anchor="t" anchorCtr="0">
             <a:spAutoFit/>
           </a:bodyPr>
           <a:lstStyle>
@@ -3740,15 +3840,19 @@
               <a:defRPr/>
             </a:lvl9pPr>
           </a:lstStyle>
-          <a:p/>
+          <a:p>
+            <a:endParaRPr/>
+          </a:p>
         </p:txBody>
       </p:sp>
       <p:sp>
         <p:nvSpPr>
           <p:cNvPr id="23" name="Google Shape;23;p3"/>
-          <p:cNvSpPr txBox="1"/>
+          <p:cNvSpPr txBox="1">
+            <a:spLocks noGrp="1"/>
+          </p:cNvSpPr>
           <p:nvPr>
-            <p:ph idx="10" type="dt"/>
+            <p:ph type="dt" idx="10"/>
           </p:nvPr>
         </p:nvSpPr>
         <p:spPr>
@@ -3765,7 +3869,7 @@
           </a:ln>
         </p:spPr>
         <p:txBody>
-          <a:bodyPr anchorCtr="0" anchor="t" bIns="0" lIns="0" spcFirstLastPara="1" rIns="0" wrap="square" tIns="0">
+          <a:bodyPr spcFirstLastPara="1" wrap="square" lIns="0" tIns="0" rIns="0" bIns="0" anchor="t" anchorCtr="0">
             <a:spAutoFit/>
           </a:bodyPr>
           <a:lstStyle>
@@ -3900,15 +4004,19 @@
               <a:defRPr/>
             </a:lvl9pPr>
           </a:lstStyle>
-          <a:p/>
+          <a:p>
+            <a:endParaRPr/>
+          </a:p>
         </p:txBody>
       </p:sp>
       <p:sp>
         <p:nvSpPr>
           <p:cNvPr id="24" name="Google Shape;24;p3"/>
-          <p:cNvSpPr txBox="1"/>
+          <p:cNvSpPr txBox="1">
+            <a:spLocks noGrp="1"/>
+          </p:cNvSpPr>
           <p:nvPr>
-            <p:ph idx="12" type="sldNum"/>
+            <p:ph type="sldNum" idx="12"/>
           </p:nvPr>
         </p:nvSpPr>
         <p:spPr>
@@ -3925,11 +4033,11 @@
           </a:ln>
         </p:spPr>
         <p:txBody>
-          <a:bodyPr anchorCtr="0" anchor="t" bIns="0" lIns="0" spcFirstLastPara="1" rIns="0" wrap="square" tIns="0">
+          <a:bodyPr spcFirstLastPara="1" wrap="square" lIns="0" tIns="0" rIns="0" bIns="0" anchor="t" anchorCtr="0">
             <a:spAutoFit/>
           </a:bodyPr>
           <a:lstStyle>
-            <a:lvl1pPr indent="0" lvl="0" marL="0" marR="0" algn="r">
+            <a:lvl1pPr marL="0" marR="0" lvl="0" indent="0" algn="r">
               <a:lnSpc>
                 <a:spcPct val="100000"/>
               </a:lnSpc>
@@ -3945,7 +4053,7 @@
               <a:buSzPts val="1800"/>
               <a:buFont typeface="Arial"/>
               <a:buNone/>
-              <a:defRPr b="0" i="0" sz="1800" u="none" cap="none" strike="noStrike">
+              <a:defRPr sz="1800" b="0" i="0" u="none" strike="noStrike" cap="none">
                 <a:solidFill>
                   <a:srgbClr val="888888"/>
                 </a:solidFill>
@@ -3955,7 +4063,7 @@
                 <a:sym typeface="Arial"/>
               </a:defRPr>
             </a:lvl1pPr>
-            <a:lvl2pPr indent="0" lvl="1" marL="0" marR="0" algn="r">
+            <a:lvl2pPr marL="0" marR="0" lvl="1" indent="0" algn="r">
               <a:lnSpc>
                 <a:spcPct val="100000"/>
               </a:lnSpc>
@@ -3971,7 +4079,7 @@
               <a:buSzPts val="1800"/>
               <a:buFont typeface="Arial"/>
               <a:buNone/>
-              <a:defRPr b="0" i="0" sz="1800" u="none" cap="none" strike="noStrike">
+              <a:defRPr sz="1800" b="0" i="0" u="none" strike="noStrike" cap="none">
                 <a:solidFill>
                   <a:srgbClr val="888888"/>
                 </a:solidFill>
@@ -3981,7 +4089,7 @@
                 <a:sym typeface="Arial"/>
               </a:defRPr>
             </a:lvl2pPr>
-            <a:lvl3pPr indent="0" lvl="2" marL="0" marR="0" algn="r">
+            <a:lvl3pPr marL="0" marR="0" lvl="2" indent="0" algn="r">
               <a:lnSpc>
                 <a:spcPct val="100000"/>
               </a:lnSpc>
@@ -3997,7 +4105,7 @@
               <a:buSzPts val="1800"/>
               <a:buFont typeface="Arial"/>
               <a:buNone/>
-              <a:defRPr b="0" i="0" sz="1800" u="none" cap="none" strike="noStrike">
+              <a:defRPr sz="1800" b="0" i="0" u="none" strike="noStrike" cap="none">
                 <a:solidFill>
                   <a:srgbClr val="888888"/>
                 </a:solidFill>
@@ -4007,7 +4115,7 @@
                 <a:sym typeface="Arial"/>
               </a:defRPr>
             </a:lvl3pPr>
-            <a:lvl4pPr indent="0" lvl="3" marL="0" marR="0" algn="r">
+            <a:lvl4pPr marL="0" marR="0" lvl="3" indent="0" algn="r">
               <a:lnSpc>
                 <a:spcPct val="100000"/>
               </a:lnSpc>
@@ -4023,7 +4131,7 @@
               <a:buSzPts val="1800"/>
               <a:buFont typeface="Arial"/>
               <a:buNone/>
-              <a:defRPr b="0" i="0" sz="1800" u="none" cap="none" strike="noStrike">
+              <a:defRPr sz="1800" b="0" i="0" u="none" strike="noStrike" cap="none">
                 <a:solidFill>
                   <a:srgbClr val="888888"/>
                 </a:solidFill>
@@ -4033,7 +4141,7 @@
                 <a:sym typeface="Arial"/>
               </a:defRPr>
             </a:lvl4pPr>
-            <a:lvl5pPr indent="0" lvl="4" marL="0" marR="0" algn="r">
+            <a:lvl5pPr marL="0" marR="0" lvl="4" indent="0" algn="r">
               <a:lnSpc>
                 <a:spcPct val="100000"/>
               </a:lnSpc>
@@ -4049,7 +4157,7 @@
               <a:buSzPts val="1800"/>
               <a:buFont typeface="Arial"/>
               <a:buNone/>
-              <a:defRPr b="0" i="0" sz="1800" u="none" cap="none" strike="noStrike">
+              <a:defRPr sz="1800" b="0" i="0" u="none" strike="noStrike" cap="none">
                 <a:solidFill>
                   <a:srgbClr val="888888"/>
                 </a:solidFill>
@@ -4059,7 +4167,7 @@
                 <a:sym typeface="Arial"/>
               </a:defRPr>
             </a:lvl5pPr>
-            <a:lvl6pPr indent="0" lvl="5" marL="0" marR="0" algn="r">
+            <a:lvl6pPr marL="0" marR="0" lvl="5" indent="0" algn="r">
               <a:lnSpc>
                 <a:spcPct val="100000"/>
               </a:lnSpc>
@@ -4075,7 +4183,7 @@
               <a:buSzPts val="1800"/>
               <a:buFont typeface="Arial"/>
               <a:buNone/>
-              <a:defRPr b="0" i="0" sz="1800" u="none" cap="none" strike="noStrike">
+              <a:defRPr sz="1800" b="0" i="0" u="none" strike="noStrike" cap="none">
                 <a:solidFill>
                   <a:srgbClr val="888888"/>
                 </a:solidFill>
@@ -4085,7 +4193,7 @@
                 <a:sym typeface="Arial"/>
               </a:defRPr>
             </a:lvl6pPr>
-            <a:lvl7pPr indent="0" lvl="6" marL="0" marR="0" algn="r">
+            <a:lvl7pPr marL="0" marR="0" lvl="6" indent="0" algn="r">
               <a:lnSpc>
                 <a:spcPct val="100000"/>
               </a:lnSpc>
@@ -4101,7 +4209,7 @@
               <a:buSzPts val="1800"/>
               <a:buFont typeface="Arial"/>
               <a:buNone/>
-              <a:defRPr b="0" i="0" sz="1800" u="none" cap="none" strike="noStrike">
+              <a:defRPr sz="1800" b="0" i="0" u="none" strike="noStrike" cap="none">
                 <a:solidFill>
                   <a:srgbClr val="888888"/>
                 </a:solidFill>
@@ -4111,7 +4219,7 @@
                 <a:sym typeface="Arial"/>
               </a:defRPr>
             </a:lvl7pPr>
-            <a:lvl8pPr indent="0" lvl="7" marL="0" marR="0" algn="r">
+            <a:lvl8pPr marL="0" marR="0" lvl="7" indent="0" algn="r">
               <a:lnSpc>
                 <a:spcPct val="100000"/>
               </a:lnSpc>
@@ -4127,7 +4235,7 @@
               <a:buSzPts val="1800"/>
               <a:buFont typeface="Arial"/>
               <a:buNone/>
-              <a:defRPr b="0" i="0" sz="1800" u="none" cap="none" strike="noStrike">
+              <a:defRPr sz="1800" b="0" i="0" u="none" strike="noStrike" cap="none">
                 <a:solidFill>
                   <a:srgbClr val="888888"/>
                 </a:solidFill>
@@ -4137,7 +4245,7 @@
                 <a:sym typeface="Arial"/>
               </a:defRPr>
             </a:lvl8pPr>
-            <a:lvl9pPr indent="0" lvl="8" marL="0" marR="0" algn="r">
+            <a:lvl9pPr marL="0" marR="0" lvl="8" indent="0" algn="r">
               <a:lnSpc>
                 <a:spcPct val="100000"/>
               </a:lnSpc>
@@ -4153,7 +4261,7 @@
               <a:buSzPts val="1800"/>
               <a:buFont typeface="Arial"/>
               <a:buNone/>
-              <a:defRPr b="0" i="0" sz="1800" u="none" cap="none" strike="noStrike">
+              <a:defRPr sz="1800" b="0" i="0" u="none" strike="noStrike" cap="none">
                 <a:solidFill>
                   <a:srgbClr val="888888"/>
                 </a:solidFill>
@@ -4165,7 +4273,7 @@
             </a:lvl9pPr>
           </a:lstStyle>
           <a:p>
-            <a:pPr indent="0" lvl="0" marL="0" rtl="0" algn="r">
+            <a:pPr marL="0" lvl="0" indent="0" algn="r" rtl="0">
               <a:spcBef>
                 <a:spcPts val="0"/>
               </a:spcBef>
@@ -4176,7 +4284,7 @@
             </a:pPr>
             <a:fld id="{00000000-1234-1234-1234-123412341234}" type="slidenum">
               <a:rPr lang="es-CO"/>
-              <a:t>‹#›</a:t>
+              <a:t>‹Nº›</a:t>
             </a:fld>
             <a:endParaRPr/>
           </a:p>
@@ -4191,18 +4299,19 @@
 </file>
 
 <file path=ppt/slideLayouts/slideLayout3.xml><?xml version="1.0" encoding="utf-8"?>
-<p:sldLayout xmlns:a="http://schemas.openxmlformats.org/drawingml/2006/main" xmlns:r="http://schemas.openxmlformats.org/officeDocument/2006/relationships" xmlns:mc="http://schemas.openxmlformats.org/markup-compatibility/2006" xmlns:mv="urn:schemas-microsoft-com:mac:vml" xmlns:p="http://schemas.openxmlformats.org/presentationml/2006/main" xmlns:c="http://schemas.openxmlformats.org/drawingml/2006/chart" xmlns:dgm="http://schemas.openxmlformats.org/drawingml/2006/diagram" xmlns:o="urn:schemas-microsoft-com:office:office" xmlns:v="urn:schemas-microsoft-com:vml" xmlns:pvml="urn:schemas-microsoft-com:office:powerpoint" xmlns:com="http://schemas.openxmlformats.org/drawingml/2006/compatibility" xmlns:p14="http://schemas.microsoft.com/office/powerpoint/2010/main" xmlns:p15="http://schemas.microsoft.com/office/powerpoint/2012/main" xmlns:ahyp="http://schemas.microsoft.com/office/drawing/2018/hyperlinkcolor" matchingName="Blank" showMasterSp="0">
+<p:sldLayout xmlns:a="http://schemas.openxmlformats.org/drawingml/2006/main" xmlns:r="http://schemas.openxmlformats.org/officeDocument/2006/relationships" xmlns:p="http://schemas.openxmlformats.org/presentationml/2006/main" showMasterSp="0" matchingName="Blank">
   <p:cSld name="Blank">
     <p:bg>
       <p:bgPr>
         <a:solidFill>
           <a:schemeClr val="lt1"/>
         </a:solidFill>
+        <a:effectLst/>
       </p:bgPr>
     </p:bg>
     <p:spTree>
       <p:nvGrpSpPr>
-        <p:cNvPr id="25" name="Shape 25"/>
+        <p:cNvPr id="1" name="Shape 25"/>
         <p:cNvGrpSpPr/>
         <p:nvPr/>
       </p:nvGrpSpPr>
@@ -4217,9 +4326,11 @@
       <p:sp>
         <p:nvSpPr>
           <p:cNvPr id="26" name="Google Shape;26;p4"/>
-          <p:cNvSpPr txBox="1"/>
+          <p:cNvSpPr txBox="1">
+            <a:spLocks noGrp="1"/>
+          </p:cNvSpPr>
           <p:nvPr>
-            <p:ph idx="11" type="ftr"/>
+            <p:ph type="ftr" idx="11"/>
           </p:nvPr>
         </p:nvSpPr>
         <p:spPr>
@@ -4236,7 +4347,7 @@
           </a:ln>
         </p:spPr>
         <p:txBody>
-          <a:bodyPr anchorCtr="0" anchor="t" bIns="0" lIns="0" spcFirstLastPara="1" rIns="0" wrap="square" tIns="0">
+          <a:bodyPr spcFirstLastPara="1" wrap="square" lIns="0" tIns="0" rIns="0" bIns="0" anchor="t" anchorCtr="0">
             <a:spAutoFit/>
           </a:bodyPr>
           <a:lstStyle>
@@ -4371,15 +4482,19 @@
               <a:defRPr/>
             </a:lvl9pPr>
           </a:lstStyle>
-          <a:p/>
+          <a:p>
+            <a:endParaRPr/>
+          </a:p>
         </p:txBody>
       </p:sp>
       <p:sp>
         <p:nvSpPr>
           <p:cNvPr id="27" name="Google Shape;27;p4"/>
-          <p:cNvSpPr txBox="1"/>
+          <p:cNvSpPr txBox="1">
+            <a:spLocks noGrp="1"/>
+          </p:cNvSpPr>
           <p:nvPr>
-            <p:ph idx="10" type="dt"/>
+            <p:ph type="dt" idx="10"/>
           </p:nvPr>
         </p:nvSpPr>
         <p:spPr>
@@ -4396,7 +4511,7 @@
           </a:ln>
         </p:spPr>
         <p:txBody>
-          <a:bodyPr anchorCtr="0" anchor="t" bIns="0" lIns="0" spcFirstLastPara="1" rIns="0" wrap="square" tIns="0">
+          <a:bodyPr spcFirstLastPara="1" wrap="square" lIns="0" tIns="0" rIns="0" bIns="0" anchor="t" anchorCtr="0">
             <a:spAutoFit/>
           </a:bodyPr>
           <a:lstStyle>
@@ -4531,15 +4646,19 @@
               <a:defRPr/>
             </a:lvl9pPr>
           </a:lstStyle>
-          <a:p/>
+          <a:p>
+            <a:endParaRPr/>
+          </a:p>
         </p:txBody>
       </p:sp>
       <p:sp>
         <p:nvSpPr>
           <p:cNvPr id="28" name="Google Shape;28;p4"/>
-          <p:cNvSpPr txBox="1"/>
+          <p:cNvSpPr txBox="1">
+            <a:spLocks noGrp="1"/>
+          </p:cNvSpPr>
           <p:nvPr>
-            <p:ph idx="12" type="sldNum"/>
+            <p:ph type="sldNum" idx="12"/>
           </p:nvPr>
         </p:nvSpPr>
         <p:spPr>
@@ -4556,11 +4675,11 @@
           </a:ln>
         </p:spPr>
         <p:txBody>
-          <a:bodyPr anchorCtr="0" anchor="t" bIns="0" lIns="0" spcFirstLastPara="1" rIns="0" wrap="square" tIns="0">
+          <a:bodyPr spcFirstLastPara="1" wrap="square" lIns="0" tIns="0" rIns="0" bIns="0" anchor="t" anchorCtr="0">
             <a:spAutoFit/>
           </a:bodyPr>
           <a:lstStyle>
-            <a:lvl1pPr indent="0" lvl="0" marL="0" marR="0" algn="r">
+            <a:lvl1pPr marL="0" marR="0" lvl="0" indent="0" algn="r">
               <a:lnSpc>
                 <a:spcPct val="100000"/>
               </a:lnSpc>
@@ -4576,7 +4695,7 @@
               <a:buSzPts val="1800"/>
               <a:buFont typeface="Arial"/>
               <a:buNone/>
-              <a:defRPr b="0" i="0" sz="1800" u="none" cap="none" strike="noStrike">
+              <a:defRPr sz="1800" b="0" i="0" u="none" strike="noStrike" cap="none">
                 <a:solidFill>
                   <a:srgbClr val="888888"/>
                 </a:solidFill>
@@ -4586,7 +4705,7 @@
                 <a:sym typeface="Arial"/>
               </a:defRPr>
             </a:lvl1pPr>
-            <a:lvl2pPr indent="0" lvl="1" marL="0" marR="0" algn="r">
+            <a:lvl2pPr marL="0" marR="0" lvl="1" indent="0" algn="r">
               <a:lnSpc>
                 <a:spcPct val="100000"/>
               </a:lnSpc>
@@ -4602,7 +4721,7 @@
               <a:buSzPts val="1800"/>
               <a:buFont typeface="Arial"/>
               <a:buNone/>
-              <a:defRPr b="0" i="0" sz="1800" u="none" cap="none" strike="noStrike">
+              <a:defRPr sz="1800" b="0" i="0" u="none" strike="noStrike" cap="none">
                 <a:solidFill>
                   <a:srgbClr val="888888"/>
                 </a:solidFill>
@@ -4612,7 +4731,7 @@
                 <a:sym typeface="Arial"/>
               </a:defRPr>
             </a:lvl2pPr>
-            <a:lvl3pPr indent="0" lvl="2" marL="0" marR="0" algn="r">
+            <a:lvl3pPr marL="0" marR="0" lvl="2" indent="0" algn="r">
               <a:lnSpc>
                 <a:spcPct val="100000"/>
               </a:lnSpc>
@@ -4628,7 +4747,7 @@
               <a:buSzPts val="1800"/>
               <a:buFont typeface="Arial"/>
               <a:buNone/>
-              <a:defRPr b="0" i="0" sz="1800" u="none" cap="none" strike="noStrike">
+              <a:defRPr sz="1800" b="0" i="0" u="none" strike="noStrike" cap="none">
                 <a:solidFill>
                   <a:srgbClr val="888888"/>
                 </a:solidFill>
@@ -4638,7 +4757,7 @@
                 <a:sym typeface="Arial"/>
               </a:defRPr>
             </a:lvl3pPr>
-            <a:lvl4pPr indent="0" lvl="3" marL="0" marR="0" algn="r">
+            <a:lvl4pPr marL="0" marR="0" lvl="3" indent="0" algn="r">
               <a:lnSpc>
                 <a:spcPct val="100000"/>
               </a:lnSpc>
@@ -4654,7 +4773,7 @@
               <a:buSzPts val="1800"/>
               <a:buFont typeface="Arial"/>
               <a:buNone/>
-              <a:defRPr b="0" i="0" sz="1800" u="none" cap="none" strike="noStrike">
+              <a:defRPr sz="1800" b="0" i="0" u="none" strike="noStrike" cap="none">
                 <a:solidFill>
                   <a:srgbClr val="888888"/>
                 </a:solidFill>
@@ -4664,7 +4783,7 @@
                 <a:sym typeface="Arial"/>
               </a:defRPr>
             </a:lvl4pPr>
-            <a:lvl5pPr indent="0" lvl="4" marL="0" marR="0" algn="r">
+            <a:lvl5pPr marL="0" marR="0" lvl="4" indent="0" algn="r">
               <a:lnSpc>
                 <a:spcPct val="100000"/>
               </a:lnSpc>
@@ -4680,7 +4799,7 @@
               <a:buSzPts val="1800"/>
               <a:buFont typeface="Arial"/>
               <a:buNone/>
-              <a:defRPr b="0" i="0" sz="1800" u="none" cap="none" strike="noStrike">
+              <a:defRPr sz="1800" b="0" i="0" u="none" strike="noStrike" cap="none">
                 <a:solidFill>
                   <a:srgbClr val="888888"/>
                 </a:solidFill>
@@ -4690,7 +4809,7 @@
                 <a:sym typeface="Arial"/>
               </a:defRPr>
             </a:lvl5pPr>
-            <a:lvl6pPr indent="0" lvl="5" marL="0" marR="0" algn="r">
+            <a:lvl6pPr marL="0" marR="0" lvl="5" indent="0" algn="r">
               <a:lnSpc>
                 <a:spcPct val="100000"/>
               </a:lnSpc>
@@ -4706,7 +4825,7 @@
               <a:buSzPts val="1800"/>
               <a:buFont typeface="Arial"/>
               <a:buNone/>
-              <a:defRPr b="0" i="0" sz="1800" u="none" cap="none" strike="noStrike">
+              <a:defRPr sz="1800" b="0" i="0" u="none" strike="noStrike" cap="none">
                 <a:solidFill>
                   <a:srgbClr val="888888"/>
                 </a:solidFill>
@@ -4716,7 +4835,7 @@
                 <a:sym typeface="Arial"/>
               </a:defRPr>
             </a:lvl6pPr>
-            <a:lvl7pPr indent="0" lvl="6" marL="0" marR="0" algn="r">
+            <a:lvl7pPr marL="0" marR="0" lvl="6" indent="0" algn="r">
               <a:lnSpc>
                 <a:spcPct val="100000"/>
               </a:lnSpc>
@@ -4732,7 +4851,7 @@
               <a:buSzPts val="1800"/>
               <a:buFont typeface="Arial"/>
               <a:buNone/>
-              <a:defRPr b="0" i="0" sz="1800" u="none" cap="none" strike="noStrike">
+              <a:defRPr sz="1800" b="0" i="0" u="none" strike="noStrike" cap="none">
                 <a:solidFill>
                   <a:srgbClr val="888888"/>
                 </a:solidFill>
@@ -4742,7 +4861,7 @@
                 <a:sym typeface="Arial"/>
               </a:defRPr>
             </a:lvl7pPr>
-            <a:lvl8pPr indent="0" lvl="7" marL="0" marR="0" algn="r">
+            <a:lvl8pPr marL="0" marR="0" lvl="7" indent="0" algn="r">
               <a:lnSpc>
                 <a:spcPct val="100000"/>
               </a:lnSpc>
@@ -4758,7 +4877,7 @@
               <a:buSzPts val="1800"/>
               <a:buFont typeface="Arial"/>
               <a:buNone/>
-              <a:defRPr b="0" i="0" sz="1800" u="none" cap="none" strike="noStrike">
+              <a:defRPr sz="1800" b="0" i="0" u="none" strike="noStrike" cap="none">
                 <a:solidFill>
                   <a:srgbClr val="888888"/>
                 </a:solidFill>
@@ -4768,7 +4887,7 @@
                 <a:sym typeface="Arial"/>
               </a:defRPr>
             </a:lvl8pPr>
-            <a:lvl9pPr indent="0" lvl="8" marL="0" marR="0" algn="r">
+            <a:lvl9pPr marL="0" marR="0" lvl="8" indent="0" algn="r">
               <a:lnSpc>
                 <a:spcPct val="100000"/>
               </a:lnSpc>
@@ -4784,7 +4903,7 @@
               <a:buSzPts val="1800"/>
               <a:buFont typeface="Arial"/>
               <a:buNone/>
-              <a:defRPr b="0" i="0" sz="1800" u="none" cap="none" strike="noStrike">
+              <a:defRPr sz="1800" b="0" i="0" u="none" strike="noStrike" cap="none">
                 <a:solidFill>
                   <a:srgbClr val="888888"/>
                 </a:solidFill>
@@ -4796,7 +4915,7 @@
             </a:lvl9pPr>
           </a:lstStyle>
           <a:p>
-            <a:pPr indent="0" lvl="0" marL="0" rtl="0" algn="r">
+            <a:pPr marL="0" lvl="0" indent="0" algn="r" rtl="0">
               <a:spcBef>
                 <a:spcPts val="0"/>
               </a:spcBef>
@@ -4807,7 +4926,7 @@
             </a:pPr>
             <a:fld id="{00000000-1234-1234-1234-123412341234}" type="slidenum">
               <a:rPr lang="es-CO"/>
-              <a:t>‹#›</a:t>
+              <a:t>‹Nº›</a:t>
             </a:fld>
             <a:endParaRPr/>
           </a:p>
@@ -4822,11 +4941,11 @@
 </file>
 
 <file path=ppt/slideLayouts/slideLayout4.xml><?xml version="1.0" encoding="utf-8"?>
-<p:sldLayout xmlns:a="http://schemas.openxmlformats.org/drawingml/2006/main" xmlns:r="http://schemas.openxmlformats.org/officeDocument/2006/relationships" xmlns:mc="http://schemas.openxmlformats.org/markup-compatibility/2006" xmlns:mv="urn:schemas-microsoft-com:mac:vml" xmlns:p="http://schemas.openxmlformats.org/presentationml/2006/main" xmlns:c="http://schemas.openxmlformats.org/drawingml/2006/chart" xmlns:dgm="http://schemas.openxmlformats.org/drawingml/2006/diagram" xmlns:o="urn:schemas-microsoft-com:office:office" xmlns:v="urn:schemas-microsoft-com:vml" xmlns:pvml="urn:schemas-microsoft-com:office:powerpoint" xmlns:com="http://schemas.openxmlformats.org/drawingml/2006/compatibility" xmlns:p14="http://schemas.microsoft.com/office/powerpoint/2010/main" xmlns:p15="http://schemas.microsoft.com/office/powerpoint/2012/main" xmlns:ahyp="http://schemas.microsoft.com/office/drawing/2018/hyperlinkcolor" matchingName="Two Content">
+<p:sldLayout xmlns:a="http://schemas.openxmlformats.org/drawingml/2006/main" xmlns:r="http://schemas.openxmlformats.org/officeDocument/2006/relationships" xmlns:p="http://schemas.openxmlformats.org/presentationml/2006/main" matchingName="Two Content">
   <p:cSld name="Two Content">
     <p:spTree>
       <p:nvGrpSpPr>
-        <p:cNvPr id="29" name="Shape 29"/>
+        <p:cNvPr id="1" name="Shape 29"/>
         <p:cNvGrpSpPr/>
         <p:nvPr/>
       </p:nvGrpSpPr>
@@ -4841,7 +4960,9 @@
       <p:sp>
         <p:nvSpPr>
           <p:cNvPr id="30" name="Google Shape;30;p5"/>
-          <p:cNvSpPr txBox="1"/>
+          <p:cNvSpPr txBox="1">
+            <a:spLocks noGrp="1"/>
+          </p:cNvSpPr>
           <p:nvPr>
             <p:ph type="title"/>
           </p:nvPr>
@@ -4860,7 +4981,7 @@
           </a:ln>
         </p:spPr>
         <p:txBody>
-          <a:bodyPr anchorCtr="0" anchor="t" bIns="0" lIns="0" spcFirstLastPara="1" rIns="0" wrap="square" tIns="0">
+          <a:bodyPr spcFirstLastPara="1" wrap="square" lIns="0" tIns="0" rIns="0" bIns="0" anchor="t" anchorCtr="0">
             <a:spAutoFit/>
           </a:bodyPr>
           <a:lstStyle>
@@ -4876,7 +4997,7 @@
               </a:spcAft>
               <a:buSzPts val="1400"/>
               <a:buNone/>
-              <a:defRPr b="1" i="0" sz="3600">
+              <a:defRPr sz="3600" b="1" i="0">
                 <a:solidFill>
                   <a:schemeClr val="lt1"/>
                 </a:solidFill>
@@ -4999,15 +5120,19 @@
               <a:defRPr/>
             </a:lvl9pPr>
           </a:lstStyle>
-          <a:p/>
+          <a:p>
+            <a:endParaRPr/>
+          </a:p>
         </p:txBody>
       </p:sp>
       <p:sp>
         <p:nvSpPr>
           <p:cNvPr id="31" name="Google Shape;31;p5"/>
-          <p:cNvSpPr txBox="1"/>
+          <p:cNvSpPr txBox="1">
+            <a:spLocks noGrp="1"/>
+          </p:cNvSpPr>
           <p:nvPr>
-            <p:ph idx="1" type="body"/>
+            <p:ph type="body" idx="1"/>
           </p:nvPr>
         </p:nvSpPr>
         <p:spPr>
@@ -5024,11 +5149,11 @@
           </a:ln>
         </p:spPr>
         <p:txBody>
-          <a:bodyPr anchorCtr="0" anchor="t" bIns="0" lIns="0" spcFirstLastPara="1" rIns="0" wrap="square" tIns="0">
+          <a:bodyPr spcFirstLastPara="1" wrap="square" lIns="0" tIns="0" rIns="0" bIns="0" anchor="t" anchorCtr="0">
             <a:spAutoFit/>
           </a:bodyPr>
           <a:lstStyle>
-            <a:lvl1pPr indent="-228600" lvl="0" marL="457200" algn="l">
+            <a:lvl1pPr marL="457200" lvl="0" indent="-228600" algn="l">
               <a:lnSpc>
                 <a:spcPct val="100000"/>
               </a:lnSpc>
@@ -5042,7 +5167,7 @@
               <a:buNone/>
               <a:defRPr/>
             </a:lvl1pPr>
-            <a:lvl2pPr indent="-228600" lvl="1" marL="914400" algn="l">
+            <a:lvl2pPr marL="914400" lvl="1" indent="-228600" algn="l">
               <a:lnSpc>
                 <a:spcPct val="100000"/>
               </a:lnSpc>
@@ -5056,7 +5181,7 @@
               <a:buNone/>
               <a:defRPr/>
             </a:lvl2pPr>
-            <a:lvl3pPr indent="-228600" lvl="2" marL="1371600" algn="l">
+            <a:lvl3pPr marL="1371600" lvl="2" indent="-228600" algn="l">
               <a:lnSpc>
                 <a:spcPct val="100000"/>
               </a:lnSpc>
@@ -5070,7 +5195,7 @@
               <a:buNone/>
               <a:defRPr/>
             </a:lvl3pPr>
-            <a:lvl4pPr indent="-228600" lvl="3" marL="1828800" algn="l">
+            <a:lvl4pPr marL="1828800" lvl="3" indent="-228600" algn="l">
               <a:lnSpc>
                 <a:spcPct val="100000"/>
               </a:lnSpc>
@@ -5084,7 +5209,7 @@
               <a:buNone/>
               <a:defRPr/>
             </a:lvl4pPr>
-            <a:lvl5pPr indent="-228600" lvl="4" marL="2286000" algn="l">
+            <a:lvl5pPr marL="2286000" lvl="4" indent="-228600" algn="l">
               <a:lnSpc>
                 <a:spcPct val="100000"/>
               </a:lnSpc>
@@ -5098,7 +5223,7 @@
               <a:buNone/>
               <a:defRPr/>
             </a:lvl5pPr>
-            <a:lvl6pPr indent="-228600" lvl="5" marL="2743200" algn="l">
+            <a:lvl6pPr marL="2743200" lvl="5" indent="-228600" algn="l">
               <a:lnSpc>
                 <a:spcPct val="100000"/>
               </a:lnSpc>
@@ -5112,7 +5237,7 @@
               <a:buNone/>
               <a:defRPr/>
             </a:lvl6pPr>
-            <a:lvl7pPr indent="-228600" lvl="6" marL="3200400" algn="l">
+            <a:lvl7pPr marL="3200400" lvl="6" indent="-228600" algn="l">
               <a:lnSpc>
                 <a:spcPct val="100000"/>
               </a:lnSpc>
@@ -5126,7 +5251,7 @@
               <a:buNone/>
               <a:defRPr/>
             </a:lvl7pPr>
-            <a:lvl8pPr indent="-228600" lvl="7" marL="3657600" algn="l">
+            <a:lvl8pPr marL="3657600" lvl="7" indent="-228600" algn="l">
               <a:lnSpc>
                 <a:spcPct val="100000"/>
               </a:lnSpc>
@@ -5140,7 +5265,7 @@
               <a:buNone/>
               <a:defRPr/>
             </a:lvl8pPr>
-            <a:lvl9pPr indent="-228600" lvl="8" marL="4114800" algn="l">
+            <a:lvl9pPr marL="4114800" lvl="8" indent="-228600" algn="l">
               <a:lnSpc>
                 <a:spcPct val="100000"/>
               </a:lnSpc>
@@ -5155,15 +5280,19 @@
               <a:defRPr/>
             </a:lvl9pPr>
           </a:lstStyle>
-          <a:p/>
+          <a:p>
+            <a:endParaRPr/>
+          </a:p>
         </p:txBody>
       </p:sp>
       <p:sp>
         <p:nvSpPr>
           <p:cNvPr id="32" name="Google Shape;32;p5"/>
-          <p:cNvSpPr txBox="1"/>
+          <p:cNvSpPr txBox="1">
+            <a:spLocks noGrp="1"/>
+          </p:cNvSpPr>
           <p:nvPr>
-            <p:ph idx="2" type="body"/>
+            <p:ph type="body" idx="2"/>
           </p:nvPr>
         </p:nvSpPr>
         <p:spPr>
@@ -5180,11 +5309,11 @@
           </a:ln>
         </p:spPr>
         <p:txBody>
-          <a:bodyPr anchorCtr="0" anchor="t" bIns="0" lIns="0" spcFirstLastPara="1" rIns="0" wrap="square" tIns="0">
+          <a:bodyPr spcFirstLastPara="1" wrap="square" lIns="0" tIns="0" rIns="0" bIns="0" anchor="t" anchorCtr="0">
             <a:spAutoFit/>
           </a:bodyPr>
           <a:lstStyle>
-            <a:lvl1pPr indent="-228600" lvl="0" marL="457200" algn="l">
+            <a:lvl1pPr marL="457200" lvl="0" indent="-228600" algn="l">
               <a:lnSpc>
                 <a:spcPct val="100000"/>
               </a:lnSpc>
@@ -5198,7 +5327,7 @@
               <a:buNone/>
               <a:defRPr/>
             </a:lvl1pPr>
-            <a:lvl2pPr indent="-228600" lvl="1" marL="914400" algn="l">
+            <a:lvl2pPr marL="914400" lvl="1" indent="-228600" algn="l">
               <a:lnSpc>
                 <a:spcPct val="100000"/>
               </a:lnSpc>
@@ -5212,7 +5341,7 @@
               <a:buNone/>
               <a:defRPr/>
             </a:lvl2pPr>
-            <a:lvl3pPr indent="-228600" lvl="2" marL="1371600" algn="l">
+            <a:lvl3pPr marL="1371600" lvl="2" indent="-228600" algn="l">
               <a:lnSpc>
                 <a:spcPct val="100000"/>
               </a:lnSpc>
@@ -5226,7 +5355,7 @@
               <a:buNone/>
               <a:defRPr/>
             </a:lvl3pPr>
-            <a:lvl4pPr indent="-228600" lvl="3" marL="1828800" algn="l">
+            <a:lvl4pPr marL="1828800" lvl="3" indent="-228600" algn="l">
               <a:lnSpc>
                 <a:spcPct val="100000"/>
               </a:lnSpc>
@@ -5240,7 +5369,7 @@
               <a:buNone/>
               <a:defRPr/>
             </a:lvl4pPr>
-            <a:lvl5pPr indent="-228600" lvl="4" marL="2286000" algn="l">
+            <a:lvl5pPr marL="2286000" lvl="4" indent="-228600" algn="l">
               <a:lnSpc>
                 <a:spcPct val="100000"/>
               </a:lnSpc>
@@ -5254,7 +5383,7 @@
               <a:buNone/>
               <a:defRPr/>
             </a:lvl5pPr>
-            <a:lvl6pPr indent="-228600" lvl="5" marL="2743200" algn="l">
+            <a:lvl6pPr marL="2743200" lvl="5" indent="-228600" algn="l">
               <a:lnSpc>
                 <a:spcPct val="100000"/>
               </a:lnSpc>
@@ -5268,7 +5397,7 @@
               <a:buNone/>
               <a:defRPr/>
             </a:lvl6pPr>
-            <a:lvl7pPr indent="-228600" lvl="6" marL="3200400" algn="l">
+            <a:lvl7pPr marL="3200400" lvl="6" indent="-228600" algn="l">
               <a:lnSpc>
                 <a:spcPct val="100000"/>
               </a:lnSpc>
@@ -5282,7 +5411,7 @@
               <a:buNone/>
               <a:defRPr/>
             </a:lvl7pPr>
-            <a:lvl8pPr indent="-228600" lvl="7" marL="3657600" algn="l">
+            <a:lvl8pPr marL="3657600" lvl="7" indent="-228600" algn="l">
               <a:lnSpc>
                 <a:spcPct val="100000"/>
               </a:lnSpc>
@@ -5296,7 +5425,7 @@
               <a:buNone/>
               <a:defRPr/>
             </a:lvl8pPr>
-            <a:lvl9pPr indent="-228600" lvl="8" marL="4114800" algn="l">
+            <a:lvl9pPr marL="4114800" lvl="8" indent="-228600" algn="l">
               <a:lnSpc>
                 <a:spcPct val="100000"/>
               </a:lnSpc>
@@ -5311,15 +5440,19 @@
               <a:defRPr/>
             </a:lvl9pPr>
           </a:lstStyle>
-          <a:p/>
+          <a:p>
+            <a:endParaRPr/>
+          </a:p>
         </p:txBody>
       </p:sp>
       <p:sp>
         <p:nvSpPr>
           <p:cNvPr id="33" name="Google Shape;33;p5"/>
-          <p:cNvSpPr txBox="1"/>
+          <p:cNvSpPr txBox="1">
+            <a:spLocks noGrp="1"/>
+          </p:cNvSpPr>
           <p:nvPr>
-            <p:ph idx="11" type="ftr"/>
+            <p:ph type="ftr" idx="11"/>
           </p:nvPr>
         </p:nvSpPr>
         <p:spPr>
@@ -5336,7 +5469,7 @@
           </a:ln>
         </p:spPr>
         <p:txBody>
-          <a:bodyPr anchorCtr="0" anchor="t" bIns="0" lIns="0" spcFirstLastPara="1" rIns="0" wrap="square" tIns="0">
+          <a:bodyPr spcFirstLastPara="1" wrap="square" lIns="0" tIns="0" rIns="0" bIns="0" anchor="t" anchorCtr="0">
             <a:spAutoFit/>
           </a:bodyPr>
           <a:lstStyle>
@@ -5471,15 +5604,19 @@
               <a:defRPr/>
             </a:lvl9pPr>
           </a:lstStyle>
-          <a:p/>
+          <a:p>
+            <a:endParaRPr/>
+          </a:p>
         </p:txBody>
       </p:sp>
       <p:sp>
         <p:nvSpPr>
           <p:cNvPr id="34" name="Google Shape;34;p5"/>
-          <p:cNvSpPr txBox="1"/>
+          <p:cNvSpPr txBox="1">
+            <a:spLocks noGrp="1"/>
+          </p:cNvSpPr>
           <p:nvPr>
-            <p:ph idx="10" type="dt"/>
+            <p:ph type="dt" idx="10"/>
           </p:nvPr>
         </p:nvSpPr>
         <p:spPr>
@@ -5496,7 +5633,7 @@
           </a:ln>
         </p:spPr>
         <p:txBody>
-          <a:bodyPr anchorCtr="0" anchor="t" bIns="0" lIns="0" spcFirstLastPara="1" rIns="0" wrap="square" tIns="0">
+          <a:bodyPr spcFirstLastPara="1" wrap="square" lIns="0" tIns="0" rIns="0" bIns="0" anchor="t" anchorCtr="0">
             <a:spAutoFit/>
           </a:bodyPr>
           <a:lstStyle>
@@ -5631,15 +5768,19 @@
               <a:defRPr/>
             </a:lvl9pPr>
           </a:lstStyle>
-          <a:p/>
+          <a:p>
+            <a:endParaRPr/>
+          </a:p>
         </p:txBody>
       </p:sp>
       <p:sp>
         <p:nvSpPr>
           <p:cNvPr id="35" name="Google Shape;35;p5"/>
-          <p:cNvSpPr txBox="1"/>
+          <p:cNvSpPr txBox="1">
+            <a:spLocks noGrp="1"/>
+          </p:cNvSpPr>
           <p:nvPr>
-            <p:ph idx="12" type="sldNum"/>
+            <p:ph type="sldNum" idx="12"/>
           </p:nvPr>
         </p:nvSpPr>
         <p:spPr>
@@ -5656,11 +5797,11 @@
           </a:ln>
         </p:spPr>
         <p:txBody>
-          <a:bodyPr anchorCtr="0" anchor="t" bIns="0" lIns="0" spcFirstLastPara="1" rIns="0" wrap="square" tIns="0">
+          <a:bodyPr spcFirstLastPara="1" wrap="square" lIns="0" tIns="0" rIns="0" bIns="0" anchor="t" anchorCtr="0">
             <a:spAutoFit/>
           </a:bodyPr>
           <a:lstStyle>
-            <a:lvl1pPr indent="0" lvl="0" marL="0" marR="0" algn="r">
+            <a:lvl1pPr marL="0" marR="0" lvl="0" indent="0" algn="r">
               <a:lnSpc>
                 <a:spcPct val="100000"/>
               </a:lnSpc>
@@ -5676,7 +5817,7 @@
               <a:buSzPts val="1800"/>
               <a:buFont typeface="Arial"/>
               <a:buNone/>
-              <a:defRPr b="0" i="0" sz="1800" u="none" cap="none" strike="noStrike">
+              <a:defRPr sz="1800" b="0" i="0" u="none" strike="noStrike" cap="none">
                 <a:solidFill>
                   <a:srgbClr val="888888"/>
                 </a:solidFill>
@@ -5686,7 +5827,7 @@
                 <a:sym typeface="Arial"/>
               </a:defRPr>
             </a:lvl1pPr>
-            <a:lvl2pPr indent="0" lvl="1" marL="0" marR="0" algn="r">
+            <a:lvl2pPr marL="0" marR="0" lvl="1" indent="0" algn="r">
               <a:lnSpc>
                 <a:spcPct val="100000"/>
               </a:lnSpc>
@@ -5702,7 +5843,7 @@
               <a:buSzPts val="1800"/>
               <a:buFont typeface="Arial"/>
               <a:buNone/>
-              <a:defRPr b="0" i="0" sz="1800" u="none" cap="none" strike="noStrike">
+              <a:defRPr sz="1800" b="0" i="0" u="none" strike="noStrike" cap="none">
                 <a:solidFill>
                   <a:srgbClr val="888888"/>
                 </a:solidFill>
@@ -5712,7 +5853,7 @@
                 <a:sym typeface="Arial"/>
               </a:defRPr>
             </a:lvl2pPr>
-            <a:lvl3pPr indent="0" lvl="2" marL="0" marR="0" algn="r">
+            <a:lvl3pPr marL="0" marR="0" lvl="2" indent="0" algn="r">
               <a:lnSpc>
                 <a:spcPct val="100000"/>
               </a:lnSpc>
@@ -5728,7 +5869,7 @@
               <a:buSzPts val="1800"/>
               <a:buFont typeface="Arial"/>
               <a:buNone/>
-              <a:defRPr b="0" i="0" sz="1800" u="none" cap="none" strike="noStrike">
+              <a:defRPr sz="1800" b="0" i="0" u="none" strike="noStrike" cap="none">
                 <a:solidFill>
                   <a:srgbClr val="888888"/>
                 </a:solidFill>
@@ -5738,7 +5879,7 @@
                 <a:sym typeface="Arial"/>
               </a:defRPr>
             </a:lvl3pPr>
-            <a:lvl4pPr indent="0" lvl="3" marL="0" marR="0" algn="r">
+            <a:lvl4pPr marL="0" marR="0" lvl="3" indent="0" algn="r">
               <a:lnSpc>
                 <a:spcPct val="100000"/>
               </a:lnSpc>
@@ -5754,7 +5895,7 @@
               <a:buSzPts val="1800"/>
               <a:buFont typeface="Arial"/>
               <a:buNone/>
-              <a:defRPr b="0" i="0" sz="1800" u="none" cap="none" strike="noStrike">
+              <a:defRPr sz="1800" b="0" i="0" u="none" strike="noStrike" cap="none">
                 <a:solidFill>
                   <a:srgbClr val="888888"/>
                 </a:solidFill>
@@ -5764,7 +5905,7 @@
                 <a:sym typeface="Arial"/>
               </a:defRPr>
             </a:lvl4pPr>
-            <a:lvl5pPr indent="0" lvl="4" marL="0" marR="0" algn="r">
+            <a:lvl5pPr marL="0" marR="0" lvl="4" indent="0" algn="r">
               <a:lnSpc>
                 <a:spcPct val="100000"/>
               </a:lnSpc>
@@ -5780,7 +5921,7 @@
               <a:buSzPts val="1800"/>
               <a:buFont typeface="Arial"/>
               <a:buNone/>
-              <a:defRPr b="0" i="0" sz="1800" u="none" cap="none" strike="noStrike">
+              <a:defRPr sz="1800" b="0" i="0" u="none" strike="noStrike" cap="none">
                 <a:solidFill>
                   <a:srgbClr val="888888"/>
                 </a:solidFill>
@@ -5790,7 +5931,7 @@
                 <a:sym typeface="Arial"/>
               </a:defRPr>
             </a:lvl5pPr>
-            <a:lvl6pPr indent="0" lvl="5" marL="0" marR="0" algn="r">
+            <a:lvl6pPr marL="0" marR="0" lvl="5" indent="0" algn="r">
               <a:lnSpc>
                 <a:spcPct val="100000"/>
               </a:lnSpc>
@@ -5806,7 +5947,7 @@
               <a:buSzPts val="1800"/>
               <a:buFont typeface="Arial"/>
               <a:buNone/>
-              <a:defRPr b="0" i="0" sz="1800" u="none" cap="none" strike="noStrike">
+              <a:defRPr sz="1800" b="0" i="0" u="none" strike="noStrike" cap="none">
                 <a:solidFill>
                   <a:srgbClr val="888888"/>
                 </a:solidFill>
@@ -5816,7 +5957,7 @@
                 <a:sym typeface="Arial"/>
               </a:defRPr>
             </a:lvl6pPr>
-            <a:lvl7pPr indent="0" lvl="6" marL="0" marR="0" algn="r">
+            <a:lvl7pPr marL="0" marR="0" lvl="6" indent="0" algn="r">
               <a:lnSpc>
                 <a:spcPct val="100000"/>
               </a:lnSpc>
@@ -5832,7 +5973,7 @@
               <a:buSzPts val="1800"/>
               <a:buFont typeface="Arial"/>
               <a:buNone/>
-              <a:defRPr b="0" i="0" sz="1800" u="none" cap="none" strike="noStrike">
+              <a:defRPr sz="1800" b="0" i="0" u="none" strike="noStrike" cap="none">
                 <a:solidFill>
                   <a:srgbClr val="888888"/>
                 </a:solidFill>
@@ -5842,7 +5983,7 @@
                 <a:sym typeface="Arial"/>
               </a:defRPr>
             </a:lvl7pPr>
-            <a:lvl8pPr indent="0" lvl="7" marL="0" marR="0" algn="r">
+            <a:lvl8pPr marL="0" marR="0" lvl="7" indent="0" algn="r">
               <a:lnSpc>
                 <a:spcPct val="100000"/>
               </a:lnSpc>
@@ -5858,7 +5999,7 @@
               <a:buSzPts val="1800"/>
               <a:buFont typeface="Arial"/>
               <a:buNone/>
-              <a:defRPr b="0" i="0" sz="1800" u="none" cap="none" strike="noStrike">
+              <a:defRPr sz="1800" b="0" i="0" u="none" strike="noStrike" cap="none">
                 <a:solidFill>
                   <a:srgbClr val="888888"/>
                 </a:solidFill>
@@ -5868,7 +6009,7 @@
                 <a:sym typeface="Arial"/>
               </a:defRPr>
             </a:lvl8pPr>
-            <a:lvl9pPr indent="0" lvl="8" marL="0" marR="0" algn="r">
+            <a:lvl9pPr marL="0" marR="0" lvl="8" indent="0" algn="r">
               <a:lnSpc>
                 <a:spcPct val="100000"/>
               </a:lnSpc>
@@ -5884,7 +6025,7 @@
               <a:buSzPts val="1800"/>
               <a:buFont typeface="Arial"/>
               <a:buNone/>
-              <a:defRPr b="0" i="0" sz="1800" u="none" cap="none" strike="noStrike">
+              <a:defRPr sz="1800" b="0" i="0" u="none" strike="noStrike" cap="none">
                 <a:solidFill>
                   <a:srgbClr val="888888"/>
                 </a:solidFill>
@@ -5896,7 +6037,7 @@
             </a:lvl9pPr>
           </a:lstStyle>
           <a:p>
-            <a:pPr indent="0" lvl="0" marL="0" rtl="0" algn="r">
+            <a:pPr marL="0" lvl="0" indent="0" algn="r" rtl="0">
               <a:spcBef>
                 <a:spcPts val="0"/>
               </a:spcBef>
@@ -5907,7 +6048,7 @@
             </a:pPr>
             <a:fld id="{00000000-1234-1234-1234-123412341234}" type="slidenum">
               <a:rPr lang="es-CO"/>
-              <a:t>‹#›</a:t>
+              <a:t>‹Nº›</a:t>
             </a:fld>
             <a:endParaRPr/>
           </a:p>
@@ -5922,11 +6063,11 @@
 </file>
 
 <file path=ppt/slideLayouts/slideLayout5.xml><?xml version="1.0" encoding="utf-8"?>
-<p:sldLayout xmlns:a="http://schemas.openxmlformats.org/drawingml/2006/main" xmlns:r="http://schemas.openxmlformats.org/officeDocument/2006/relationships" xmlns:mc="http://schemas.openxmlformats.org/markup-compatibility/2006" xmlns:mv="urn:schemas-microsoft-com:mac:vml" xmlns:p="http://schemas.openxmlformats.org/presentationml/2006/main" xmlns:c="http://schemas.openxmlformats.org/drawingml/2006/chart" xmlns:dgm="http://schemas.openxmlformats.org/drawingml/2006/diagram" xmlns:o="urn:schemas-microsoft-com:office:office" xmlns:v="urn:schemas-microsoft-com:vml" xmlns:pvml="urn:schemas-microsoft-com:office:powerpoint" xmlns:com="http://schemas.openxmlformats.org/drawingml/2006/compatibility" xmlns:p14="http://schemas.microsoft.com/office/powerpoint/2010/main" xmlns:p15="http://schemas.microsoft.com/office/powerpoint/2012/main" xmlns:ahyp="http://schemas.microsoft.com/office/drawing/2018/hyperlinkcolor" matchingName="Title Only">
+<p:sldLayout xmlns:a="http://schemas.openxmlformats.org/drawingml/2006/main" xmlns:r="http://schemas.openxmlformats.org/officeDocument/2006/relationships" xmlns:p="http://schemas.openxmlformats.org/presentationml/2006/main" matchingName="Title Only">
   <p:cSld name="Title Only">
     <p:spTree>
       <p:nvGrpSpPr>
-        <p:cNvPr id="36" name="Shape 36"/>
+        <p:cNvPr id="1" name="Shape 36"/>
         <p:cNvGrpSpPr/>
         <p:nvPr/>
       </p:nvGrpSpPr>
@@ -5941,7 +6082,9 @@
       <p:sp>
         <p:nvSpPr>
           <p:cNvPr id="37" name="Google Shape;37;p6"/>
-          <p:cNvSpPr txBox="1"/>
+          <p:cNvSpPr txBox="1">
+            <a:spLocks noGrp="1"/>
+          </p:cNvSpPr>
           <p:nvPr>
             <p:ph type="title"/>
           </p:nvPr>
@@ -5960,7 +6103,7 @@
           </a:ln>
         </p:spPr>
         <p:txBody>
-          <a:bodyPr anchorCtr="0" anchor="t" bIns="0" lIns="0" spcFirstLastPara="1" rIns="0" wrap="square" tIns="0">
+          <a:bodyPr spcFirstLastPara="1" wrap="square" lIns="0" tIns="0" rIns="0" bIns="0" anchor="t" anchorCtr="0">
             <a:spAutoFit/>
           </a:bodyPr>
           <a:lstStyle>
@@ -5976,7 +6119,7 @@
               </a:spcAft>
               <a:buSzPts val="1400"/>
               <a:buNone/>
-              <a:defRPr b="1" i="0" sz="3600">
+              <a:defRPr sz="3600" b="1" i="0">
                 <a:solidFill>
                   <a:schemeClr val="lt1"/>
                 </a:solidFill>
@@ -6099,15 +6242,19 @@
               <a:defRPr/>
             </a:lvl9pPr>
           </a:lstStyle>
-          <a:p/>
+          <a:p>
+            <a:endParaRPr/>
+          </a:p>
         </p:txBody>
       </p:sp>
       <p:sp>
         <p:nvSpPr>
           <p:cNvPr id="38" name="Google Shape;38;p6"/>
-          <p:cNvSpPr txBox="1"/>
+          <p:cNvSpPr txBox="1">
+            <a:spLocks noGrp="1"/>
+          </p:cNvSpPr>
           <p:nvPr>
-            <p:ph idx="11" type="ftr"/>
+            <p:ph type="ftr" idx="11"/>
           </p:nvPr>
         </p:nvSpPr>
         <p:spPr>
@@ -6124,7 +6271,7 @@
           </a:ln>
         </p:spPr>
         <p:txBody>
-          <a:bodyPr anchorCtr="0" anchor="t" bIns="0" lIns="0" spcFirstLastPara="1" rIns="0" wrap="square" tIns="0">
+          <a:bodyPr spcFirstLastPara="1" wrap="square" lIns="0" tIns="0" rIns="0" bIns="0" anchor="t" anchorCtr="0">
             <a:spAutoFit/>
           </a:bodyPr>
           <a:lstStyle>
@@ -6259,15 +6406,19 @@
               <a:defRPr/>
             </a:lvl9pPr>
           </a:lstStyle>
-          <a:p/>
+          <a:p>
+            <a:endParaRPr/>
+          </a:p>
         </p:txBody>
       </p:sp>
       <p:sp>
         <p:nvSpPr>
           <p:cNvPr id="39" name="Google Shape;39;p6"/>
-          <p:cNvSpPr txBox="1"/>
+          <p:cNvSpPr txBox="1">
+            <a:spLocks noGrp="1"/>
+          </p:cNvSpPr>
           <p:nvPr>
-            <p:ph idx="10" type="dt"/>
+            <p:ph type="dt" idx="10"/>
           </p:nvPr>
         </p:nvSpPr>
         <p:spPr>
@@ -6284,7 +6435,7 @@
           </a:ln>
         </p:spPr>
         <p:txBody>
-          <a:bodyPr anchorCtr="0" anchor="t" bIns="0" lIns="0" spcFirstLastPara="1" rIns="0" wrap="square" tIns="0">
+          <a:bodyPr spcFirstLastPara="1" wrap="square" lIns="0" tIns="0" rIns="0" bIns="0" anchor="t" anchorCtr="0">
             <a:spAutoFit/>
           </a:bodyPr>
           <a:lstStyle>
@@ -6419,15 +6570,19 @@
               <a:defRPr/>
             </a:lvl9pPr>
           </a:lstStyle>
-          <a:p/>
+          <a:p>
+            <a:endParaRPr/>
+          </a:p>
         </p:txBody>
       </p:sp>
       <p:sp>
         <p:nvSpPr>
           <p:cNvPr id="40" name="Google Shape;40;p6"/>
-          <p:cNvSpPr txBox="1"/>
+          <p:cNvSpPr txBox="1">
+            <a:spLocks noGrp="1"/>
+          </p:cNvSpPr>
           <p:nvPr>
-            <p:ph idx="12" type="sldNum"/>
+            <p:ph type="sldNum" idx="12"/>
           </p:nvPr>
         </p:nvSpPr>
         <p:spPr>
@@ -6444,11 +6599,11 @@
           </a:ln>
         </p:spPr>
         <p:txBody>
-          <a:bodyPr anchorCtr="0" anchor="t" bIns="0" lIns="0" spcFirstLastPara="1" rIns="0" wrap="square" tIns="0">
+          <a:bodyPr spcFirstLastPara="1" wrap="square" lIns="0" tIns="0" rIns="0" bIns="0" anchor="t" anchorCtr="0">
             <a:spAutoFit/>
           </a:bodyPr>
           <a:lstStyle>
-            <a:lvl1pPr indent="0" lvl="0" marL="0" marR="0" algn="r">
+            <a:lvl1pPr marL="0" marR="0" lvl="0" indent="0" algn="r">
               <a:lnSpc>
                 <a:spcPct val="100000"/>
               </a:lnSpc>
@@ -6464,7 +6619,7 @@
               <a:buSzPts val="1800"/>
               <a:buFont typeface="Arial"/>
               <a:buNone/>
-              <a:defRPr b="0" i="0" sz="1800" u="none" cap="none" strike="noStrike">
+              <a:defRPr sz="1800" b="0" i="0" u="none" strike="noStrike" cap="none">
                 <a:solidFill>
                   <a:srgbClr val="888888"/>
                 </a:solidFill>
@@ -6474,7 +6629,7 @@
                 <a:sym typeface="Arial"/>
               </a:defRPr>
             </a:lvl1pPr>
-            <a:lvl2pPr indent="0" lvl="1" marL="0" marR="0" algn="r">
+            <a:lvl2pPr marL="0" marR="0" lvl="1" indent="0" algn="r">
               <a:lnSpc>
                 <a:spcPct val="100000"/>
               </a:lnSpc>
@@ -6490,7 +6645,7 @@
               <a:buSzPts val="1800"/>
               <a:buFont typeface="Arial"/>
               <a:buNone/>
-              <a:defRPr b="0" i="0" sz="1800" u="none" cap="none" strike="noStrike">
+              <a:defRPr sz="1800" b="0" i="0" u="none" strike="noStrike" cap="none">
                 <a:solidFill>
                   <a:srgbClr val="888888"/>
                 </a:solidFill>
@@ -6500,7 +6655,7 @@
                 <a:sym typeface="Arial"/>
               </a:defRPr>
             </a:lvl2pPr>
-            <a:lvl3pPr indent="0" lvl="2" marL="0" marR="0" algn="r">
+            <a:lvl3pPr marL="0" marR="0" lvl="2" indent="0" algn="r">
               <a:lnSpc>
                 <a:spcPct val="100000"/>
               </a:lnSpc>
@@ -6516,7 +6671,7 @@
               <a:buSzPts val="1800"/>
               <a:buFont typeface="Arial"/>
               <a:buNone/>
-              <a:defRPr b="0" i="0" sz="1800" u="none" cap="none" strike="noStrike">
+              <a:defRPr sz="1800" b="0" i="0" u="none" strike="noStrike" cap="none">
                 <a:solidFill>
                   <a:srgbClr val="888888"/>
                 </a:solidFill>
@@ -6526,7 +6681,7 @@
                 <a:sym typeface="Arial"/>
               </a:defRPr>
             </a:lvl3pPr>
-            <a:lvl4pPr indent="0" lvl="3" marL="0" marR="0" algn="r">
+            <a:lvl4pPr marL="0" marR="0" lvl="3" indent="0" algn="r">
               <a:lnSpc>
                 <a:spcPct val="100000"/>
               </a:lnSpc>
@@ -6542,7 +6697,7 @@
               <a:buSzPts val="1800"/>
               <a:buFont typeface="Arial"/>
               <a:buNone/>
-              <a:defRPr b="0" i="0" sz="1800" u="none" cap="none" strike="noStrike">
+              <a:defRPr sz="1800" b="0" i="0" u="none" strike="noStrike" cap="none">
                 <a:solidFill>
                   <a:srgbClr val="888888"/>
                 </a:solidFill>
@@ -6552,7 +6707,7 @@
                 <a:sym typeface="Arial"/>
               </a:defRPr>
             </a:lvl4pPr>
-            <a:lvl5pPr indent="0" lvl="4" marL="0" marR="0" algn="r">
+            <a:lvl5pPr marL="0" marR="0" lvl="4" indent="0" algn="r">
               <a:lnSpc>
                 <a:spcPct val="100000"/>
               </a:lnSpc>
@@ -6568,7 +6723,7 @@
               <a:buSzPts val="1800"/>
               <a:buFont typeface="Arial"/>
               <a:buNone/>
-              <a:defRPr b="0" i="0" sz="1800" u="none" cap="none" strike="noStrike">
+              <a:defRPr sz="1800" b="0" i="0" u="none" strike="noStrike" cap="none">
                 <a:solidFill>
                   <a:srgbClr val="888888"/>
                 </a:solidFill>
@@ -6578,7 +6733,7 @@
                 <a:sym typeface="Arial"/>
               </a:defRPr>
             </a:lvl5pPr>
-            <a:lvl6pPr indent="0" lvl="5" marL="0" marR="0" algn="r">
+            <a:lvl6pPr marL="0" marR="0" lvl="5" indent="0" algn="r">
               <a:lnSpc>
                 <a:spcPct val="100000"/>
               </a:lnSpc>
@@ -6594,7 +6749,7 @@
               <a:buSzPts val="1800"/>
               <a:buFont typeface="Arial"/>
               <a:buNone/>
-              <a:defRPr b="0" i="0" sz="1800" u="none" cap="none" strike="noStrike">
+              <a:defRPr sz="1800" b="0" i="0" u="none" strike="noStrike" cap="none">
                 <a:solidFill>
                   <a:srgbClr val="888888"/>
                 </a:solidFill>
@@ -6604,7 +6759,7 @@
                 <a:sym typeface="Arial"/>
               </a:defRPr>
             </a:lvl6pPr>
-            <a:lvl7pPr indent="0" lvl="6" marL="0" marR="0" algn="r">
+            <a:lvl7pPr marL="0" marR="0" lvl="6" indent="0" algn="r">
               <a:lnSpc>
                 <a:spcPct val="100000"/>
               </a:lnSpc>
@@ -6620,7 +6775,7 @@
               <a:buSzPts val="1800"/>
               <a:buFont typeface="Arial"/>
               <a:buNone/>
-              <a:defRPr b="0" i="0" sz="1800" u="none" cap="none" strike="noStrike">
+              <a:defRPr sz="1800" b="0" i="0" u="none" strike="noStrike" cap="none">
                 <a:solidFill>
                   <a:srgbClr val="888888"/>
                 </a:solidFill>
@@ -6630,7 +6785,7 @@
                 <a:sym typeface="Arial"/>
               </a:defRPr>
             </a:lvl7pPr>
-            <a:lvl8pPr indent="0" lvl="7" marL="0" marR="0" algn="r">
+            <a:lvl8pPr marL="0" marR="0" lvl="7" indent="0" algn="r">
               <a:lnSpc>
                 <a:spcPct val="100000"/>
               </a:lnSpc>
@@ -6646,7 +6801,7 @@
               <a:buSzPts val="1800"/>
               <a:buFont typeface="Arial"/>
               <a:buNone/>
-              <a:defRPr b="0" i="0" sz="1800" u="none" cap="none" strike="noStrike">
+              <a:defRPr sz="1800" b="0" i="0" u="none" strike="noStrike" cap="none">
                 <a:solidFill>
                   <a:srgbClr val="888888"/>
                 </a:solidFill>
@@ -6656,7 +6811,7 @@
                 <a:sym typeface="Arial"/>
               </a:defRPr>
             </a:lvl8pPr>
-            <a:lvl9pPr indent="0" lvl="8" marL="0" marR="0" algn="r">
+            <a:lvl9pPr marL="0" marR="0" lvl="8" indent="0" algn="r">
               <a:lnSpc>
                 <a:spcPct val="100000"/>
               </a:lnSpc>
@@ -6672,7 +6827,7 @@
               <a:buSzPts val="1800"/>
               <a:buFont typeface="Arial"/>
               <a:buNone/>
-              <a:defRPr b="0" i="0" sz="1800" u="none" cap="none" strike="noStrike">
+              <a:defRPr sz="1800" b="0" i="0" u="none" strike="noStrike" cap="none">
                 <a:solidFill>
                   <a:srgbClr val="888888"/>
                 </a:solidFill>
@@ -6684,7 +6839,7 @@
             </a:lvl9pPr>
           </a:lstStyle>
           <a:p>
-            <a:pPr indent="0" lvl="0" marL="0" rtl="0" algn="r">
+            <a:pPr marL="0" lvl="0" indent="0" algn="r" rtl="0">
               <a:spcBef>
                 <a:spcPts val="0"/>
               </a:spcBef>
@@ -6695,7 +6850,7 @@
             </a:pPr>
             <a:fld id="{00000000-1234-1234-1234-123412341234}" type="slidenum">
               <a:rPr lang="es-CO"/>
-              <a:t>‹#›</a:t>
+              <a:t>‹Nº›</a:t>
             </a:fld>
             <a:endParaRPr/>
           </a:p>
@@ -6710,18 +6865,19 @@
 </file>
 
 <file path=ppt/slideMasters/slideMaster1.xml><?xml version="1.0" encoding="utf-8"?>
-<p:sldMaster xmlns:a="http://schemas.openxmlformats.org/drawingml/2006/main" xmlns:r="http://schemas.openxmlformats.org/officeDocument/2006/relationships" xmlns:mc="http://schemas.openxmlformats.org/markup-compatibility/2006" xmlns:mv="urn:schemas-microsoft-com:mac:vml" xmlns:p="http://schemas.openxmlformats.org/presentationml/2006/main" xmlns:c="http://schemas.openxmlformats.org/drawingml/2006/chart" xmlns:dgm="http://schemas.openxmlformats.org/drawingml/2006/diagram" xmlns:o="urn:schemas-microsoft-com:office:office" xmlns:v="urn:schemas-microsoft-com:vml" xmlns:pvml="urn:schemas-microsoft-com:office:powerpoint" xmlns:com="http://schemas.openxmlformats.org/drawingml/2006/compatibility" xmlns:p14="http://schemas.microsoft.com/office/powerpoint/2010/main" xmlns:p15="http://schemas.microsoft.com/office/powerpoint/2012/main" xmlns:ahyp="http://schemas.microsoft.com/office/drawing/2018/hyperlinkcolor">
+<p:sldMaster xmlns:a="http://schemas.openxmlformats.org/drawingml/2006/main" xmlns:r="http://schemas.openxmlformats.org/officeDocument/2006/relationships" xmlns:p="http://schemas.openxmlformats.org/presentationml/2006/main">
   <p:cSld>
     <p:bg>
       <p:bgPr>
         <a:solidFill>
           <a:schemeClr val="lt1"/>
         </a:solidFill>
+        <a:effectLst/>
       </p:bgPr>
     </p:bg>
     <p:spTree>
       <p:nvGrpSpPr>
-        <p:cNvPr id="5" name="Shape 5"/>
+        <p:cNvPr id="1" name="Shape 5"/>
         <p:cNvGrpSpPr/>
         <p:nvPr/>
       </p:nvGrpSpPr>
@@ -6740,10 +6896,10 @@
           <p:nvPr/>
         </p:nvPicPr>
         <p:blipFill rotWithShape="1">
-          <a:blip r:embed="rId1">
+          <a:blip r:embed="rId7">
             <a:alphaModFix/>
           </a:blip>
-          <a:srcRect b="0" l="0" r="0" t="0"/>
+          <a:srcRect/>
           <a:stretch/>
         </p:blipFill>
         <p:spPr>
@@ -6763,7 +6919,9 @@
       <p:sp>
         <p:nvSpPr>
           <p:cNvPr id="7" name="Google Shape;7;p1"/>
-          <p:cNvSpPr txBox="1"/>
+          <p:cNvSpPr txBox="1">
+            <a:spLocks noGrp="1"/>
+          </p:cNvSpPr>
           <p:nvPr>
             <p:ph type="title"/>
           </p:nvPr>
@@ -6782,11 +6940,11 @@
           </a:ln>
         </p:spPr>
         <p:txBody>
-          <a:bodyPr anchorCtr="0" anchor="t" bIns="0" lIns="0" spcFirstLastPara="1" rIns="0" wrap="square" tIns="0">
+          <a:bodyPr spcFirstLastPara="1" wrap="square" lIns="0" tIns="0" rIns="0" bIns="0" anchor="t" anchorCtr="0">
             <a:spAutoFit/>
           </a:bodyPr>
           <a:lstStyle>
-            <a:lvl1pPr lvl="0" marR="0" rtl="0" algn="l">
+            <a:lvl1pPr marR="0" lvl="0" algn="l" rtl="0">
               <a:lnSpc>
                 <a:spcPct val="100000"/>
               </a:lnSpc>
@@ -6802,7 +6960,7 @@
               <a:buSzPts val="1400"/>
               <a:buFont typeface="Arial"/>
               <a:buNone/>
-              <a:defRPr b="1" i="0" sz="3600" u="none" cap="none" strike="noStrike">
+              <a:defRPr sz="3600" b="1" i="0" u="none" strike="noStrike" cap="none">
                 <a:solidFill>
                   <a:schemeClr val="lt1"/>
                 </a:solidFill>
@@ -6812,7 +6970,7 @@
                 <a:sym typeface="Times New Roman"/>
               </a:defRPr>
             </a:lvl1pPr>
-            <a:lvl2pPr lvl="1" marR="0" rtl="0" algn="l">
+            <a:lvl2pPr marR="0" lvl="1" algn="l" rtl="0">
               <a:lnSpc>
                 <a:spcPct val="100000"/>
               </a:lnSpc>
@@ -6828,7 +6986,7 @@
               <a:buSzPts val="1400"/>
               <a:buFont typeface="Arial"/>
               <a:buNone/>
-              <a:defRPr b="0" i="0" sz="1800" u="none" cap="none" strike="noStrike">
+              <a:defRPr sz="1800" b="0" i="0" u="none" strike="noStrike" cap="none">
                 <a:solidFill>
                   <a:srgbClr val="000000"/>
                 </a:solidFill>
@@ -6838,7 +6996,7 @@
                 <a:sym typeface="Arial"/>
               </a:defRPr>
             </a:lvl2pPr>
-            <a:lvl3pPr lvl="2" marR="0" rtl="0" algn="l">
+            <a:lvl3pPr marR="0" lvl="2" algn="l" rtl="0">
               <a:lnSpc>
                 <a:spcPct val="100000"/>
               </a:lnSpc>
@@ -6854,7 +7012,7 @@
               <a:buSzPts val="1400"/>
               <a:buFont typeface="Arial"/>
               <a:buNone/>
-              <a:defRPr b="0" i="0" sz="1800" u="none" cap="none" strike="noStrike">
+              <a:defRPr sz="1800" b="0" i="0" u="none" strike="noStrike" cap="none">
                 <a:solidFill>
                   <a:srgbClr val="000000"/>
                 </a:solidFill>
@@ -6864,7 +7022,7 @@
                 <a:sym typeface="Arial"/>
               </a:defRPr>
             </a:lvl3pPr>
-            <a:lvl4pPr lvl="3" marR="0" rtl="0" algn="l">
+            <a:lvl4pPr marR="0" lvl="3" algn="l" rtl="0">
               <a:lnSpc>
                 <a:spcPct val="100000"/>
               </a:lnSpc>
@@ -6880,7 +7038,7 @@
               <a:buSzPts val="1400"/>
               <a:buFont typeface="Arial"/>
               <a:buNone/>
-              <a:defRPr b="0" i="0" sz="1800" u="none" cap="none" strike="noStrike">
+              <a:defRPr sz="1800" b="0" i="0" u="none" strike="noStrike" cap="none">
                 <a:solidFill>
                   <a:srgbClr val="000000"/>
                 </a:solidFill>
@@ -6890,7 +7048,7 @@
                 <a:sym typeface="Arial"/>
               </a:defRPr>
             </a:lvl4pPr>
-            <a:lvl5pPr lvl="4" marR="0" rtl="0" algn="l">
+            <a:lvl5pPr marR="0" lvl="4" algn="l" rtl="0">
               <a:lnSpc>
                 <a:spcPct val="100000"/>
               </a:lnSpc>
@@ -6906,7 +7064,7 @@
               <a:buSzPts val="1400"/>
               <a:buFont typeface="Arial"/>
               <a:buNone/>
-              <a:defRPr b="0" i="0" sz="1800" u="none" cap="none" strike="noStrike">
+              <a:defRPr sz="1800" b="0" i="0" u="none" strike="noStrike" cap="none">
                 <a:solidFill>
                   <a:srgbClr val="000000"/>
                 </a:solidFill>
@@ -6916,7 +7074,7 @@
                 <a:sym typeface="Arial"/>
               </a:defRPr>
             </a:lvl5pPr>
-            <a:lvl6pPr lvl="5" marR="0" rtl="0" algn="l">
+            <a:lvl6pPr marR="0" lvl="5" algn="l" rtl="0">
               <a:lnSpc>
                 <a:spcPct val="100000"/>
               </a:lnSpc>
@@ -6932,7 +7090,7 @@
               <a:buSzPts val="1400"/>
               <a:buFont typeface="Arial"/>
               <a:buNone/>
-              <a:defRPr b="0" i="0" sz="1800" u="none" cap="none" strike="noStrike">
+              <a:defRPr sz="1800" b="0" i="0" u="none" strike="noStrike" cap="none">
                 <a:solidFill>
                   <a:srgbClr val="000000"/>
                 </a:solidFill>
@@ -6942,7 +7100,7 @@
                 <a:sym typeface="Arial"/>
               </a:defRPr>
             </a:lvl6pPr>
-            <a:lvl7pPr lvl="6" marR="0" rtl="0" algn="l">
+            <a:lvl7pPr marR="0" lvl="6" algn="l" rtl="0">
               <a:lnSpc>
                 <a:spcPct val="100000"/>
               </a:lnSpc>
@@ -6958,7 +7116,7 @@
               <a:buSzPts val="1400"/>
               <a:buFont typeface="Arial"/>
               <a:buNone/>
-              <a:defRPr b="0" i="0" sz="1800" u="none" cap="none" strike="noStrike">
+              <a:defRPr sz="1800" b="0" i="0" u="none" strike="noStrike" cap="none">
                 <a:solidFill>
                   <a:srgbClr val="000000"/>
                 </a:solidFill>
@@ -6968,7 +7126,7 @@
                 <a:sym typeface="Arial"/>
               </a:defRPr>
             </a:lvl7pPr>
-            <a:lvl8pPr lvl="7" marR="0" rtl="0" algn="l">
+            <a:lvl8pPr marR="0" lvl="7" algn="l" rtl="0">
               <a:lnSpc>
                 <a:spcPct val="100000"/>
               </a:lnSpc>
@@ -6984,7 +7142,7 @@
               <a:buSzPts val="1400"/>
               <a:buFont typeface="Arial"/>
               <a:buNone/>
-              <a:defRPr b="0" i="0" sz="1800" u="none" cap="none" strike="noStrike">
+              <a:defRPr sz="1800" b="0" i="0" u="none" strike="noStrike" cap="none">
                 <a:solidFill>
                   <a:srgbClr val="000000"/>
                 </a:solidFill>
@@ -6994,7 +7152,7 @@
                 <a:sym typeface="Arial"/>
               </a:defRPr>
             </a:lvl8pPr>
-            <a:lvl9pPr lvl="8" marR="0" rtl="0" algn="l">
+            <a:lvl9pPr marR="0" lvl="8" algn="l" rtl="0">
               <a:lnSpc>
                 <a:spcPct val="100000"/>
               </a:lnSpc>
@@ -7010,7 +7168,7 @@
               <a:buSzPts val="1400"/>
               <a:buFont typeface="Arial"/>
               <a:buNone/>
-              <a:defRPr b="0" i="0" sz="1800" u="none" cap="none" strike="noStrike">
+              <a:defRPr sz="1800" b="0" i="0" u="none" strike="noStrike" cap="none">
                 <a:solidFill>
                   <a:srgbClr val="000000"/>
                 </a:solidFill>
@@ -7021,15 +7179,19 @@
               </a:defRPr>
             </a:lvl9pPr>
           </a:lstStyle>
-          <a:p/>
+          <a:p>
+            <a:endParaRPr/>
+          </a:p>
         </p:txBody>
       </p:sp>
       <p:sp>
         <p:nvSpPr>
           <p:cNvPr id="8" name="Google Shape;8;p1"/>
-          <p:cNvSpPr txBox="1"/>
+          <p:cNvSpPr txBox="1">
+            <a:spLocks noGrp="1"/>
+          </p:cNvSpPr>
           <p:nvPr>
-            <p:ph idx="1" type="body"/>
+            <p:ph type="body" idx="1"/>
           </p:nvPr>
         </p:nvSpPr>
         <p:spPr>
@@ -7046,11 +7208,11 @@
           </a:ln>
         </p:spPr>
         <p:txBody>
-          <a:bodyPr anchorCtr="0" anchor="t" bIns="0" lIns="0" spcFirstLastPara="1" rIns="0" wrap="square" tIns="0">
+          <a:bodyPr spcFirstLastPara="1" wrap="square" lIns="0" tIns="0" rIns="0" bIns="0" anchor="t" anchorCtr="0">
             <a:spAutoFit/>
           </a:bodyPr>
           <a:lstStyle>
-            <a:lvl1pPr indent="-228600" lvl="0" marL="457200" marR="0" rtl="0" algn="l">
+            <a:lvl1pPr marL="457200" marR="0" lvl="0" indent="-228600" algn="l" rtl="0">
               <a:lnSpc>
                 <a:spcPct val="100000"/>
               </a:lnSpc>
@@ -7066,7 +7228,7 @@
               <a:buSzPts val="1400"/>
               <a:buFont typeface="Arial"/>
               <a:buNone/>
-              <a:defRPr b="0" i="0" sz="1800" u="none" cap="none" strike="noStrike">
+              <a:defRPr sz="1800" b="0" i="0" u="none" strike="noStrike" cap="none">
                 <a:solidFill>
                   <a:schemeClr val="dk1"/>
                 </a:solidFill>
@@ -7076,7 +7238,7 @@
                 <a:sym typeface="Arial"/>
               </a:defRPr>
             </a:lvl1pPr>
-            <a:lvl2pPr indent="-228600" lvl="1" marL="914400" marR="0" rtl="0" algn="l">
+            <a:lvl2pPr marL="914400" marR="0" lvl="1" indent="-228600" algn="l" rtl="0">
               <a:lnSpc>
                 <a:spcPct val="100000"/>
               </a:lnSpc>
@@ -7092,7 +7254,7 @@
               <a:buSzPts val="1400"/>
               <a:buFont typeface="Arial"/>
               <a:buNone/>
-              <a:defRPr b="0" i="0" sz="1800" u="none" cap="none" strike="noStrike">
+              <a:defRPr sz="1800" b="0" i="0" u="none" strike="noStrike" cap="none">
                 <a:solidFill>
                   <a:srgbClr val="000000"/>
                 </a:solidFill>
@@ -7102,7 +7264,7 @@
                 <a:sym typeface="Calibri"/>
               </a:defRPr>
             </a:lvl2pPr>
-            <a:lvl3pPr indent="-228600" lvl="2" marL="1371600" marR="0" rtl="0" algn="l">
+            <a:lvl3pPr marL="1371600" marR="0" lvl="2" indent="-228600" algn="l" rtl="0">
               <a:lnSpc>
                 <a:spcPct val="100000"/>
               </a:lnSpc>
@@ -7118,7 +7280,7 @@
               <a:buSzPts val="1400"/>
               <a:buFont typeface="Arial"/>
               <a:buNone/>
-              <a:defRPr b="0" i="0" sz="1800" u="none" cap="none" strike="noStrike">
+              <a:defRPr sz="1800" b="0" i="0" u="none" strike="noStrike" cap="none">
                 <a:solidFill>
                   <a:srgbClr val="000000"/>
                 </a:solidFill>
@@ -7128,7 +7290,7 @@
                 <a:sym typeface="Calibri"/>
               </a:defRPr>
             </a:lvl3pPr>
-            <a:lvl4pPr indent="-228600" lvl="3" marL="1828800" marR="0" rtl="0" algn="l">
+            <a:lvl4pPr marL="1828800" marR="0" lvl="3" indent="-228600" algn="l" rtl="0">
               <a:lnSpc>
                 <a:spcPct val="100000"/>
               </a:lnSpc>
@@ -7144,7 +7306,7 @@
               <a:buSzPts val="1400"/>
               <a:buFont typeface="Arial"/>
               <a:buNone/>
-              <a:defRPr b="0" i="0" sz="1800" u="none" cap="none" strike="noStrike">
+              <a:defRPr sz="1800" b="0" i="0" u="none" strike="noStrike" cap="none">
                 <a:solidFill>
                   <a:srgbClr val="000000"/>
                 </a:solidFill>
@@ -7154,7 +7316,7 @@
                 <a:sym typeface="Calibri"/>
               </a:defRPr>
             </a:lvl4pPr>
-            <a:lvl5pPr indent="-228600" lvl="4" marL="2286000" marR="0" rtl="0" algn="l">
+            <a:lvl5pPr marL="2286000" marR="0" lvl="4" indent="-228600" algn="l" rtl="0">
               <a:lnSpc>
                 <a:spcPct val="100000"/>
               </a:lnSpc>
@@ -7170,7 +7332,7 @@
               <a:buSzPts val="1400"/>
               <a:buFont typeface="Arial"/>
               <a:buNone/>
-              <a:defRPr b="0" i="0" sz="1800" u="none" cap="none" strike="noStrike">
+              <a:defRPr sz="1800" b="0" i="0" u="none" strike="noStrike" cap="none">
                 <a:solidFill>
                   <a:srgbClr val="000000"/>
                 </a:solidFill>
@@ -7180,7 +7342,7 @@
                 <a:sym typeface="Calibri"/>
               </a:defRPr>
             </a:lvl5pPr>
-            <a:lvl6pPr indent="-228600" lvl="5" marL="2743200" marR="0" rtl="0" algn="l">
+            <a:lvl6pPr marL="2743200" marR="0" lvl="5" indent="-228600" algn="l" rtl="0">
               <a:lnSpc>
                 <a:spcPct val="100000"/>
               </a:lnSpc>
@@ -7196,7 +7358,7 @@
               <a:buSzPts val="1400"/>
               <a:buFont typeface="Arial"/>
               <a:buNone/>
-              <a:defRPr b="0" i="0" sz="1800" u="none" cap="none" strike="noStrike">
+              <a:defRPr sz="1800" b="0" i="0" u="none" strike="noStrike" cap="none">
                 <a:solidFill>
                   <a:srgbClr val="000000"/>
                 </a:solidFill>
@@ -7206,7 +7368,7 @@
                 <a:sym typeface="Calibri"/>
               </a:defRPr>
             </a:lvl6pPr>
-            <a:lvl7pPr indent="-228600" lvl="6" marL="3200400" marR="0" rtl="0" algn="l">
+            <a:lvl7pPr marL="3200400" marR="0" lvl="6" indent="-228600" algn="l" rtl="0">
               <a:lnSpc>
                 <a:spcPct val="100000"/>
               </a:lnSpc>
@@ -7222,7 +7384,7 @@
               <a:buSzPts val="1400"/>
               <a:buFont typeface="Arial"/>
               <a:buNone/>
-              <a:defRPr b="0" i="0" sz="1800" u="none" cap="none" strike="noStrike">
+              <a:defRPr sz="1800" b="0" i="0" u="none" strike="noStrike" cap="none">
                 <a:solidFill>
                   <a:srgbClr val="000000"/>
                 </a:solidFill>
@@ -7232,7 +7394,7 @@
                 <a:sym typeface="Calibri"/>
               </a:defRPr>
             </a:lvl7pPr>
-            <a:lvl8pPr indent="-228600" lvl="7" marL="3657600" marR="0" rtl="0" algn="l">
+            <a:lvl8pPr marL="3657600" marR="0" lvl="7" indent="-228600" algn="l" rtl="0">
               <a:lnSpc>
                 <a:spcPct val="100000"/>
               </a:lnSpc>
@@ -7248,7 +7410,7 @@
               <a:buSzPts val="1400"/>
               <a:buFont typeface="Arial"/>
               <a:buNone/>
-              <a:defRPr b="0" i="0" sz="1800" u="none" cap="none" strike="noStrike">
+              <a:defRPr sz="1800" b="0" i="0" u="none" strike="noStrike" cap="none">
                 <a:solidFill>
                   <a:srgbClr val="000000"/>
                 </a:solidFill>
@@ -7258,7 +7420,7 @@
                 <a:sym typeface="Calibri"/>
               </a:defRPr>
             </a:lvl8pPr>
-            <a:lvl9pPr indent="-228600" lvl="8" marL="4114800" marR="0" rtl="0" algn="l">
+            <a:lvl9pPr marL="4114800" marR="0" lvl="8" indent="-228600" algn="l" rtl="0">
               <a:lnSpc>
                 <a:spcPct val="100000"/>
               </a:lnSpc>
@@ -7274,7 +7436,7 @@
               <a:buSzPts val="1400"/>
               <a:buFont typeface="Arial"/>
               <a:buNone/>
-              <a:defRPr b="0" i="0" sz="1800" u="none" cap="none" strike="noStrike">
+              <a:defRPr sz="1800" b="0" i="0" u="none" strike="noStrike" cap="none">
                 <a:solidFill>
                   <a:srgbClr val="000000"/>
                 </a:solidFill>
@@ -7285,15 +7447,19 @@
               </a:defRPr>
             </a:lvl9pPr>
           </a:lstStyle>
-          <a:p/>
+          <a:p>
+            <a:endParaRPr/>
+          </a:p>
         </p:txBody>
       </p:sp>
       <p:sp>
         <p:nvSpPr>
           <p:cNvPr id="9" name="Google Shape;9;p1"/>
-          <p:cNvSpPr txBox="1"/>
+          <p:cNvSpPr txBox="1">
+            <a:spLocks noGrp="1"/>
+          </p:cNvSpPr>
           <p:nvPr>
-            <p:ph idx="11" type="ftr"/>
+            <p:ph type="ftr" idx="11"/>
           </p:nvPr>
         </p:nvSpPr>
         <p:spPr>
@@ -7310,11 +7476,11 @@
           </a:ln>
         </p:spPr>
         <p:txBody>
-          <a:bodyPr anchorCtr="0" anchor="t" bIns="0" lIns="0" spcFirstLastPara="1" rIns="0" wrap="square" tIns="0">
+          <a:bodyPr spcFirstLastPara="1" wrap="square" lIns="0" tIns="0" rIns="0" bIns="0" anchor="t" anchorCtr="0">
             <a:spAutoFit/>
           </a:bodyPr>
           <a:lstStyle>
-            <a:lvl1pPr lvl="0" marR="0" rtl="0" algn="ctr">
+            <a:lvl1pPr marR="0" lvl="0" algn="ctr" rtl="0">
               <a:lnSpc>
                 <a:spcPct val="100000"/>
               </a:lnSpc>
@@ -7330,7 +7496,7 @@
               <a:buSzPts val="1400"/>
               <a:buFont typeface="Arial"/>
               <a:buNone/>
-              <a:defRPr b="0" i="0" sz="1800" u="none" cap="none" strike="noStrike">
+              <a:defRPr sz="1800" b="0" i="0" u="none" strike="noStrike" cap="none">
                 <a:solidFill>
                   <a:srgbClr val="888888"/>
                 </a:solidFill>
@@ -7340,7 +7506,7 @@
                 <a:sym typeface="Arial"/>
               </a:defRPr>
             </a:lvl1pPr>
-            <a:lvl2pPr lvl="1" marR="0" rtl="0" algn="l">
+            <a:lvl2pPr marR="0" lvl="1" algn="l" rtl="0">
               <a:lnSpc>
                 <a:spcPct val="100000"/>
               </a:lnSpc>
@@ -7356,7 +7522,7 @@
               <a:buSzPts val="1400"/>
               <a:buFont typeface="Arial"/>
               <a:buNone/>
-              <a:defRPr b="0" i="0" sz="1800" u="none" cap="none" strike="noStrike">
+              <a:defRPr sz="1800" b="0" i="0" u="none" strike="noStrike" cap="none">
                 <a:solidFill>
                   <a:srgbClr val="000000"/>
                 </a:solidFill>
@@ -7366,7 +7532,7 @@
                 <a:sym typeface="Arial"/>
               </a:defRPr>
             </a:lvl2pPr>
-            <a:lvl3pPr lvl="2" marR="0" rtl="0" algn="l">
+            <a:lvl3pPr marR="0" lvl="2" algn="l" rtl="0">
               <a:lnSpc>
                 <a:spcPct val="100000"/>
               </a:lnSpc>
@@ -7382,7 +7548,7 @@
               <a:buSzPts val="1400"/>
               <a:buFont typeface="Arial"/>
               <a:buNone/>
-              <a:defRPr b="0" i="0" sz="1800" u="none" cap="none" strike="noStrike">
+              <a:defRPr sz="1800" b="0" i="0" u="none" strike="noStrike" cap="none">
                 <a:solidFill>
                   <a:srgbClr val="000000"/>
                 </a:solidFill>
@@ -7392,7 +7558,7 @@
                 <a:sym typeface="Arial"/>
               </a:defRPr>
             </a:lvl3pPr>
-            <a:lvl4pPr lvl="3" marR="0" rtl="0" algn="l">
+            <a:lvl4pPr marR="0" lvl="3" algn="l" rtl="0">
               <a:lnSpc>
                 <a:spcPct val="100000"/>
               </a:lnSpc>
@@ -7408,7 +7574,7 @@
               <a:buSzPts val="1400"/>
               <a:buFont typeface="Arial"/>
               <a:buNone/>
-              <a:defRPr b="0" i="0" sz="1800" u="none" cap="none" strike="noStrike">
+              <a:defRPr sz="1800" b="0" i="0" u="none" strike="noStrike" cap="none">
                 <a:solidFill>
                   <a:srgbClr val="000000"/>
                 </a:solidFill>
@@ -7418,7 +7584,7 @@
                 <a:sym typeface="Arial"/>
               </a:defRPr>
             </a:lvl4pPr>
-            <a:lvl5pPr lvl="4" marR="0" rtl="0" algn="l">
+            <a:lvl5pPr marR="0" lvl="4" algn="l" rtl="0">
               <a:lnSpc>
                 <a:spcPct val="100000"/>
               </a:lnSpc>
@@ -7434,7 +7600,7 @@
               <a:buSzPts val="1400"/>
               <a:buFont typeface="Arial"/>
               <a:buNone/>
-              <a:defRPr b="0" i="0" sz="1800" u="none" cap="none" strike="noStrike">
+              <a:defRPr sz="1800" b="0" i="0" u="none" strike="noStrike" cap="none">
                 <a:solidFill>
                   <a:srgbClr val="000000"/>
                 </a:solidFill>
@@ -7444,7 +7610,7 @@
                 <a:sym typeface="Arial"/>
               </a:defRPr>
             </a:lvl5pPr>
-            <a:lvl6pPr lvl="5" marR="0" rtl="0" algn="l">
+            <a:lvl6pPr marR="0" lvl="5" algn="l" rtl="0">
               <a:lnSpc>
                 <a:spcPct val="100000"/>
               </a:lnSpc>
@@ -7460,7 +7626,7 @@
               <a:buSzPts val="1400"/>
               <a:buFont typeface="Arial"/>
               <a:buNone/>
-              <a:defRPr b="0" i="0" sz="1800" u="none" cap="none" strike="noStrike">
+              <a:defRPr sz="1800" b="0" i="0" u="none" strike="noStrike" cap="none">
                 <a:solidFill>
                   <a:srgbClr val="000000"/>
                 </a:solidFill>
@@ -7470,7 +7636,7 @@
                 <a:sym typeface="Arial"/>
               </a:defRPr>
             </a:lvl6pPr>
-            <a:lvl7pPr lvl="6" marR="0" rtl="0" algn="l">
+            <a:lvl7pPr marR="0" lvl="6" algn="l" rtl="0">
               <a:lnSpc>
                 <a:spcPct val="100000"/>
               </a:lnSpc>
@@ -7486,7 +7652,7 @@
               <a:buSzPts val="1400"/>
               <a:buFont typeface="Arial"/>
               <a:buNone/>
-              <a:defRPr b="0" i="0" sz="1800" u="none" cap="none" strike="noStrike">
+              <a:defRPr sz="1800" b="0" i="0" u="none" strike="noStrike" cap="none">
                 <a:solidFill>
                   <a:srgbClr val="000000"/>
                 </a:solidFill>
@@ -7496,7 +7662,7 @@
                 <a:sym typeface="Arial"/>
               </a:defRPr>
             </a:lvl7pPr>
-            <a:lvl8pPr lvl="7" marR="0" rtl="0" algn="l">
+            <a:lvl8pPr marR="0" lvl="7" algn="l" rtl="0">
               <a:lnSpc>
                 <a:spcPct val="100000"/>
               </a:lnSpc>
@@ -7512,7 +7678,7 @@
               <a:buSzPts val="1400"/>
               <a:buFont typeface="Arial"/>
               <a:buNone/>
-              <a:defRPr b="0" i="0" sz="1800" u="none" cap="none" strike="noStrike">
+              <a:defRPr sz="1800" b="0" i="0" u="none" strike="noStrike" cap="none">
                 <a:solidFill>
                   <a:srgbClr val="000000"/>
                 </a:solidFill>
@@ -7522,7 +7688,7 @@
                 <a:sym typeface="Arial"/>
               </a:defRPr>
             </a:lvl8pPr>
-            <a:lvl9pPr lvl="8" marR="0" rtl="0" algn="l">
+            <a:lvl9pPr marR="0" lvl="8" algn="l" rtl="0">
               <a:lnSpc>
                 <a:spcPct val="100000"/>
               </a:lnSpc>
@@ -7538,7 +7704,7 @@
               <a:buSzPts val="1400"/>
               <a:buFont typeface="Arial"/>
               <a:buNone/>
-              <a:defRPr b="0" i="0" sz="1800" u="none" cap="none" strike="noStrike">
+              <a:defRPr sz="1800" b="0" i="0" u="none" strike="noStrike" cap="none">
                 <a:solidFill>
                   <a:srgbClr val="000000"/>
                 </a:solidFill>
@@ -7549,15 +7715,19 @@
               </a:defRPr>
             </a:lvl9pPr>
           </a:lstStyle>
-          <a:p/>
+          <a:p>
+            <a:endParaRPr/>
+          </a:p>
         </p:txBody>
       </p:sp>
       <p:sp>
         <p:nvSpPr>
           <p:cNvPr id="10" name="Google Shape;10;p1"/>
-          <p:cNvSpPr txBox="1"/>
+          <p:cNvSpPr txBox="1">
+            <a:spLocks noGrp="1"/>
+          </p:cNvSpPr>
           <p:nvPr>
-            <p:ph idx="10" type="dt"/>
+            <p:ph type="dt" idx="10"/>
           </p:nvPr>
         </p:nvSpPr>
         <p:spPr>
@@ -7574,11 +7744,11 @@
           </a:ln>
         </p:spPr>
         <p:txBody>
-          <a:bodyPr anchorCtr="0" anchor="t" bIns="0" lIns="0" spcFirstLastPara="1" rIns="0" wrap="square" tIns="0">
+          <a:bodyPr spcFirstLastPara="1" wrap="square" lIns="0" tIns="0" rIns="0" bIns="0" anchor="t" anchorCtr="0">
             <a:spAutoFit/>
           </a:bodyPr>
           <a:lstStyle>
-            <a:lvl1pPr lvl="0" marR="0" rtl="0" algn="l">
+            <a:lvl1pPr marR="0" lvl="0" algn="l" rtl="0">
               <a:lnSpc>
                 <a:spcPct val="100000"/>
               </a:lnSpc>
@@ -7594,7 +7764,7 @@
               <a:buSzPts val="1400"/>
               <a:buFont typeface="Arial"/>
               <a:buNone/>
-              <a:defRPr b="0" i="0" sz="1800" u="none" cap="none" strike="noStrike">
+              <a:defRPr sz="1800" b="0" i="0" u="none" strike="noStrike" cap="none">
                 <a:solidFill>
                   <a:srgbClr val="888888"/>
                 </a:solidFill>
@@ -7604,7 +7774,7 @@
                 <a:sym typeface="Arial"/>
               </a:defRPr>
             </a:lvl1pPr>
-            <a:lvl2pPr lvl="1" marR="0" rtl="0" algn="l">
+            <a:lvl2pPr marR="0" lvl="1" algn="l" rtl="0">
               <a:lnSpc>
                 <a:spcPct val="100000"/>
               </a:lnSpc>
@@ -7620,7 +7790,7 @@
               <a:buSzPts val="1400"/>
               <a:buFont typeface="Arial"/>
               <a:buNone/>
-              <a:defRPr b="0" i="0" sz="1800" u="none" cap="none" strike="noStrike">
+              <a:defRPr sz="1800" b="0" i="0" u="none" strike="noStrike" cap="none">
                 <a:solidFill>
                   <a:srgbClr val="000000"/>
                 </a:solidFill>
@@ -7630,7 +7800,7 @@
                 <a:sym typeface="Arial"/>
               </a:defRPr>
             </a:lvl2pPr>
-            <a:lvl3pPr lvl="2" marR="0" rtl="0" algn="l">
+            <a:lvl3pPr marR="0" lvl="2" algn="l" rtl="0">
               <a:lnSpc>
                 <a:spcPct val="100000"/>
               </a:lnSpc>
@@ -7646,7 +7816,7 @@
               <a:buSzPts val="1400"/>
               <a:buFont typeface="Arial"/>
               <a:buNone/>
-              <a:defRPr b="0" i="0" sz="1800" u="none" cap="none" strike="noStrike">
+              <a:defRPr sz="1800" b="0" i="0" u="none" strike="noStrike" cap="none">
                 <a:solidFill>
                   <a:srgbClr val="000000"/>
                 </a:solidFill>
@@ -7656,7 +7826,7 @@
                 <a:sym typeface="Arial"/>
               </a:defRPr>
             </a:lvl3pPr>
-            <a:lvl4pPr lvl="3" marR="0" rtl="0" algn="l">
+            <a:lvl4pPr marR="0" lvl="3" algn="l" rtl="0">
               <a:lnSpc>
                 <a:spcPct val="100000"/>
               </a:lnSpc>
@@ -7672,7 +7842,7 @@
               <a:buSzPts val="1400"/>
               <a:buFont typeface="Arial"/>
               <a:buNone/>
-              <a:defRPr b="0" i="0" sz="1800" u="none" cap="none" strike="noStrike">
+              <a:defRPr sz="1800" b="0" i="0" u="none" strike="noStrike" cap="none">
                 <a:solidFill>
                   <a:srgbClr val="000000"/>
                 </a:solidFill>
@@ -7682,7 +7852,7 @@
                 <a:sym typeface="Arial"/>
               </a:defRPr>
             </a:lvl4pPr>
-            <a:lvl5pPr lvl="4" marR="0" rtl="0" algn="l">
+            <a:lvl5pPr marR="0" lvl="4" algn="l" rtl="0">
               <a:lnSpc>
                 <a:spcPct val="100000"/>
               </a:lnSpc>
@@ -7698,7 +7868,7 @@
               <a:buSzPts val="1400"/>
               <a:buFont typeface="Arial"/>
               <a:buNone/>
-              <a:defRPr b="0" i="0" sz="1800" u="none" cap="none" strike="noStrike">
+              <a:defRPr sz="1800" b="0" i="0" u="none" strike="noStrike" cap="none">
                 <a:solidFill>
                   <a:srgbClr val="000000"/>
                 </a:solidFill>
@@ -7708,7 +7878,7 @@
                 <a:sym typeface="Arial"/>
               </a:defRPr>
             </a:lvl5pPr>
-            <a:lvl6pPr lvl="5" marR="0" rtl="0" algn="l">
+            <a:lvl6pPr marR="0" lvl="5" algn="l" rtl="0">
               <a:lnSpc>
                 <a:spcPct val="100000"/>
               </a:lnSpc>
@@ -7724,7 +7894,7 @@
               <a:buSzPts val="1400"/>
               <a:buFont typeface="Arial"/>
               <a:buNone/>
-              <a:defRPr b="0" i="0" sz="1800" u="none" cap="none" strike="noStrike">
+              <a:defRPr sz="1800" b="0" i="0" u="none" strike="noStrike" cap="none">
                 <a:solidFill>
                   <a:srgbClr val="000000"/>
                 </a:solidFill>
@@ -7734,7 +7904,7 @@
                 <a:sym typeface="Arial"/>
               </a:defRPr>
             </a:lvl6pPr>
-            <a:lvl7pPr lvl="6" marR="0" rtl="0" algn="l">
+            <a:lvl7pPr marR="0" lvl="6" algn="l" rtl="0">
               <a:lnSpc>
                 <a:spcPct val="100000"/>
               </a:lnSpc>
@@ -7750,7 +7920,7 @@
               <a:buSzPts val="1400"/>
               <a:buFont typeface="Arial"/>
               <a:buNone/>
-              <a:defRPr b="0" i="0" sz="1800" u="none" cap="none" strike="noStrike">
+              <a:defRPr sz="1800" b="0" i="0" u="none" strike="noStrike" cap="none">
                 <a:solidFill>
                   <a:srgbClr val="000000"/>
                 </a:solidFill>
@@ -7760,7 +7930,7 @@
                 <a:sym typeface="Arial"/>
               </a:defRPr>
             </a:lvl7pPr>
-            <a:lvl8pPr lvl="7" marR="0" rtl="0" algn="l">
+            <a:lvl8pPr marR="0" lvl="7" algn="l" rtl="0">
               <a:lnSpc>
                 <a:spcPct val="100000"/>
               </a:lnSpc>
@@ -7776,7 +7946,7 @@
               <a:buSzPts val="1400"/>
               <a:buFont typeface="Arial"/>
               <a:buNone/>
-              <a:defRPr b="0" i="0" sz="1800" u="none" cap="none" strike="noStrike">
+              <a:defRPr sz="1800" b="0" i="0" u="none" strike="noStrike" cap="none">
                 <a:solidFill>
                   <a:srgbClr val="000000"/>
                 </a:solidFill>
@@ -7786,7 +7956,7 @@
                 <a:sym typeface="Arial"/>
               </a:defRPr>
             </a:lvl8pPr>
-            <a:lvl9pPr lvl="8" marR="0" rtl="0" algn="l">
+            <a:lvl9pPr marR="0" lvl="8" algn="l" rtl="0">
               <a:lnSpc>
                 <a:spcPct val="100000"/>
               </a:lnSpc>
@@ -7802,7 +7972,7 @@
               <a:buSzPts val="1400"/>
               <a:buFont typeface="Arial"/>
               <a:buNone/>
-              <a:defRPr b="0" i="0" sz="1800" u="none" cap="none" strike="noStrike">
+              <a:defRPr sz="1800" b="0" i="0" u="none" strike="noStrike" cap="none">
                 <a:solidFill>
                   <a:srgbClr val="000000"/>
                 </a:solidFill>
@@ -7813,15 +7983,19 @@
               </a:defRPr>
             </a:lvl9pPr>
           </a:lstStyle>
-          <a:p/>
+          <a:p>
+            <a:endParaRPr/>
+          </a:p>
         </p:txBody>
       </p:sp>
       <p:sp>
         <p:nvSpPr>
           <p:cNvPr id="11" name="Google Shape;11;p1"/>
-          <p:cNvSpPr txBox="1"/>
+          <p:cNvSpPr txBox="1">
+            <a:spLocks noGrp="1"/>
+          </p:cNvSpPr>
           <p:nvPr>
-            <p:ph idx="12" type="sldNum"/>
+            <p:ph type="sldNum" idx="12"/>
           </p:nvPr>
         </p:nvSpPr>
         <p:spPr>
@@ -7838,11 +8012,11 @@
           </a:ln>
         </p:spPr>
         <p:txBody>
-          <a:bodyPr anchorCtr="0" anchor="t" bIns="0" lIns="0" spcFirstLastPara="1" rIns="0" wrap="square" tIns="0">
+          <a:bodyPr spcFirstLastPara="1" wrap="square" lIns="0" tIns="0" rIns="0" bIns="0" anchor="t" anchorCtr="0">
             <a:spAutoFit/>
           </a:bodyPr>
           <a:lstStyle>
-            <a:lvl1pPr indent="0" lvl="0" marL="0" marR="0" rtl="0" algn="r">
+            <a:lvl1pPr marL="0" marR="0" lvl="0" indent="0" algn="r" rtl="0">
               <a:lnSpc>
                 <a:spcPct val="100000"/>
               </a:lnSpc>
@@ -7858,7 +8032,7 @@
               <a:buSzPts val="1800"/>
               <a:buFont typeface="Arial"/>
               <a:buNone/>
-              <a:defRPr b="0" i="0" sz="1800" u="none" cap="none" strike="noStrike">
+              <a:defRPr sz="1800" b="0" i="0" u="none" strike="noStrike" cap="none">
                 <a:solidFill>
                   <a:srgbClr val="888888"/>
                 </a:solidFill>
@@ -7868,7 +8042,7 @@
                 <a:sym typeface="Arial"/>
               </a:defRPr>
             </a:lvl1pPr>
-            <a:lvl2pPr indent="0" lvl="1" marL="0" marR="0" rtl="0" algn="r">
+            <a:lvl2pPr marL="0" marR="0" lvl="1" indent="0" algn="r" rtl="0">
               <a:lnSpc>
                 <a:spcPct val="100000"/>
               </a:lnSpc>
@@ -7884,7 +8058,7 @@
               <a:buSzPts val="1800"/>
               <a:buFont typeface="Arial"/>
               <a:buNone/>
-              <a:defRPr b="0" i="0" sz="1800" u="none" cap="none" strike="noStrike">
+              <a:defRPr sz="1800" b="0" i="0" u="none" strike="noStrike" cap="none">
                 <a:solidFill>
                   <a:srgbClr val="888888"/>
                 </a:solidFill>
@@ -7894,7 +8068,7 @@
                 <a:sym typeface="Arial"/>
               </a:defRPr>
             </a:lvl2pPr>
-            <a:lvl3pPr indent="0" lvl="2" marL="0" marR="0" rtl="0" algn="r">
+            <a:lvl3pPr marL="0" marR="0" lvl="2" indent="0" algn="r" rtl="0">
               <a:lnSpc>
                 <a:spcPct val="100000"/>
               </a:lnSpc>
@@ -7910,7 +8084,7 @@
               <a:buSzPts val="1800"/>
               <a:buFont typeface="Arial"/>
               <a:buNone/>
-              <a:defRPr b="0" i="0" sz="1800" u="none" cap="none" strike="noStrike">
+              <a:defRPr sz="1800" b="0" i="0" u="none" strike="noStrike" cap="none">
                 <a:solidFill>
                   <a:srgbClr val="888888"/>
                 </a:solidFill>
@@ -7920,7 +8094,7 @@
                 <a:sym typeface="Arial"/>
               </a:defRPr>
             </a:lvl3pPr>
-            <a:lvl4pPr indent="0" lvl="3" marL="0" marR="0" rtl="0" algn="r">
+            <a:lvl4pPr marL="0" marR="0" lvl="3" indent="0" algn="r" rtl="0">
               <a:lnSpc>
                 <a:spcPct val="100000"/>
               </a:lnSpc>
@@ -7936,7 +8110,7 @@
               <a:buSzPts val="1800"/>
               <a:buFont typeface="Arial"/>
               <a:buNone/>
-              <a:defRPr b="0" i="0" sz="1800" u="none" cap="none" strike="noStrike">
+              <a:defRPr sz="1800" b="0" i="0" u="none" strike="noStrike" cap="none">
                 <a:solidFill>
                   <a:srgbClr val="888888"/>
                 </a:solidFill>
@@ -7946,7 +8120,7 @@
                 <a:sym typeface="Arial"/>
               </a:defRPr>
             </a:lvl4pPr>
-            <a:lvl5pPr indent="0" lvl="4" marL="0" marR="0" rtl="0" algn="r">
+            <a:lvl5pPr marL="0" marR="0" lvl="4" indent="0" algn="r" rtl="0">
               <a:lnSpc>
                 <a:spcPct val="100000"/>
               </a:lnSpc>
@@ -7962,7 +8136,7 @@
               <a:buSzPts val="1800"/>
               <a:buFont typeface="Arial"/>
               <a:buNone/>
-              <a:defRPr b="0" i="0" sz="1800" u="none" cap="none" strike="noStrike">
+              <a:defRPr sz="1800" b="0" i="0" u="none" strike="noStrike" cap="none">
                 <a:solidFill>
                   <a:srgbClr val="888888"/>
                 </a:solidFill>
@@ -7972,7 +8146,7 @@
                 <a:sym typeface="Arial"/>
               </a:defRPr>
             </a:lvl5pPr>
-            <a:lvl6pPr indent="0" lvl="5" marL="0" marR="0" rtl="0" algn="r">
+            <a:lvl6pPr marL="0" marR="0" lvl="5" indent="0" algn="r" rtl="0">
               <a:lnSpc>
                 <a:spcPct val="100000"/>
               </a:lnSpc>
@@ -7988,7 +8162,7 @@
               <a:buSzPts val="1800"/>
               <a:buFont typeface="Arial"/>
               <a:buNone/>
-              <a:defRPr b="0" i="0" sz="1800" u="none" cap="none" strike="noStrike">
+              <a:defRPr sz="1800" b="0" i="0" u="none" strike="noStrike" cap="none">
                 <a:solidFill>
                   <a:srgbClr val="888888"/>
                 </a:solidFill>
@@ -7998,7 +8172,7 @@
                 <a:sym typeface="Arial"/>
               </a:defRPr>
             </a:lvl6pPr>
-            <a:lvl7pPr indent="0" lvl="6" marL="0" marR="0" rtl="0" algn="r">
+            <a:lvl7pPr marL="0" marR="0" lvl="6" indent="0" algn="r" rtl="0">
               <a:lnSpc>
                 <a:spcPct val="100000"/>
               </a:lnSpc>
@@ -8014,7 +8188,7 @@
               <a:buSzPts val="1800"/>
               <a:buFont typeface="Arial"/>
               <a:buNone/>
-              <a:defRPr b="0" i="0" sz="1800" u="none" cap="none" strike="noStrike">
+              <a:defRPr sz="1800" b="0" i="0" u="none" strike="noStrike" cap="none">
                 <a:solidFill>
                   <a:srgbClr val="888888"/>
                 </a:solidFill>
@@ -8024,7 +8198,7 @@
                 <a:sym typeface="Arial"/>
               </a:defRPr>
             </a:lvl7pPr>
-            <a:lvl8pPr indent="0" lvl="7" marL="0" marR="0" rtl="0" algn="r">
+            <a:lvl8pPr marL="0" marR="0" lvl="7" indent="0" algn="r" rtl="0">
               <a:lnSpc>
                 <a:spcPct val="100000"/>
               </a:lnSpc>
@@ -8040,7 +8214,7 @@
               <a:buSzPts val="1800"/>
               <a:buFont typeface="Arial"/>
               <a:buNone/>
-              <a:defRPr b="0" i="0" sz="1800" u="none" cap="none" strike="noStrike">
+              <a:defRPr sz="1800" b="0" i="0" u="none" strike="noStrike" cap="none">
                 <a:solidFill>
                   <a:srgbClr val="888888"/>
                 </a:solidFill>
@@ -8050,7 +8224,7 @@
                 <a:sym typeface="Arial"/>
               </a:defRPr>
             </a:lvl8pPr>
-            <a:lvl9pPr indent="0" lvl="8" marL="0" marR="0" rtl="0" algn="r">
+            <a:lvl9pPr marL="0" marR="0" lvl="8" indent="0" algn="r" rtl="0">
               <a:lnSpc>
                 <a:spcPct val="100000"/>
               </a:lnSpc>
@@ -8066,7 +8240,7 @@
               <a:buSzPts val="1800"/>
               <a:buFont typeface="Arial"/>
               <a:buNone/>
-              <a:defRPr b="0" i="0" sz="1800" u="none" cap="none" strike="noStrike">
+              <a:defRPr sz="1800" b="0" i="0" u="none" strike="noStrike" cap="none">
                 <a:solidFill>
                   <a:srgbClr val="888888"/>
                 </a:solidFill>
@@ -8078,7 +8252,7 @@
             </a:lvl9pPr>
           </a:lstStyle>
           <a:p>
-            <a:pPr indent="0" lvl="0" marL="0" rtl="0" algn="r">
+            <a:pPr marL="0" lvl="0" indent="0" algn="r" rtl="0">
               <a:spcBef>
                 <a:spcPts val="0"/>
               </a:spcBef>
@@ -8089,7 +8263,7 @@
             </a:pPr>
             <a:fld id="{00000000-1234-1234-1234-123412341234}" type="slidenum">
               <a:rPr lang="es-CO"/>
-              <a:t>‹#›</a:t>
+              <a:t>‹Nº›</a:t>
             </a:fld>
             <a:endParaRPr/>
           </a:p>
@@ -8097,18 +8271,18 @@
       </p:sp>
     </p:spTree>
   </p:cSld>
-  <p:clrMap accent1="accent1" accent2="accent2" accent3="accent3" accent4="accent4" accent5="accent5" accent6="accent6" bg1="lt1" bg2="dk2" tx1="dk1" tx2="lt2" folHlink="folHlink" hlink="hlink"/>
+  <p:clrMap bg1="lt1" tx1="dk1" bg2="dk2" tx2="lt2" accent1="accent1" accent2="accent2" accent3="accent3" accent4="accent4" accent5="accent5" accent6="accent6" hlink="hlink" folHlink="folHlink"/>
   <p:sldLayoutIdLst>
-    <p:sldLayoutId id="2147483648" r:id="rId2"/>
-    <p:sldLayoutId id="2147483649" r:id="rId3"/>
-    <p:sldLayoutId id="2147483650" r:id="rId4"/>
-    <p:sldLayoutId id="2147483651" r:id="rId5"/>
-    <p:sldLayoutId id="2147483652" r:id="rId6"/>
+    <p:sldLayoutId id="2147483648" r:id="rId1"/>
+    <p:sldLayoutId id="2147483649" r:id="rId2"/>
+    <p:sldLayoutId id="2147483650" r:id="rId3"/>
+    <p:sldLayoutId id="2147483651" r:id="rId4"/>
+    <p:sldLayoutId id="2147483652" r:id="rId5"/>
   </p:sldLayoutIdLst>
-  <p:hf dt="0" ftr="0" hdr="0" sldNum="0"/>
+  <p:hf sldNum="0" hdr="0" ftr="0" dt="0"/>
   <p:txStyles>
     <p:titleStyle>
-      <a:defPPr lvl="0" marR="0" rtl="0" algn="l">
+      <a:defPPr marR="0" lvl="0" algn="l" rtl="0">
         <a:lnSpc>
           <a:spcPct val="100000"/>
         </a:lnSpc>
@@ -8119,7 +8293,7 @@
           <a:spcPts val="0"/>
         </a:spcAft>
       </a:defPPr>
-      <a:lvl1pPr lvl="0" marR="0" rtl="0" algn="l">
+      <a:lvl1pPr marR="0" lvl="0" algn="l" rtl="0">
         <a:lnSpc>
           <a:spcPct val="100000"/>
         </a:lnSpc>
@@ -8133,7 +8307,7 @@
           <a:srgbClr val="000000"/>
         </a:buClr>
         <a:buFont typeface="Arial"/>
-        <a:defRPr b="0" i="0" sz="1400" u="none" cap="none" strike="noStrike">
+        <a:defRPr sz="1400" b="0" i="0" u="none" strike="noStrike" cap="none">
           <a:solidFill>
             <a:srgbClr val="000000"/>
           </a:solidFill>
@@ -8143,7 +8317,7 @@
           <a:sym typeface="Arial"/>
         </a:defRPr>
       </a:lvl1pPr>
-      <a:lvl2pPr lvl="1" marR="0" rtl="0" algn="l">
+      <a:lvl2pPr marR="0" lvl="1" algn="l" rtl="0">
         <a:lnSpc>
           <a:spcPct val="100000"/>
         </a:lnSpc>
@@ -8157,7 +8331,7 @@
           <a:srgbClr val="000000"/>
         </a:buClr>
         <a:buFont typeface="Arial"/>
-        <a:defRPr b="0" i="0" sz="1400" u="none" cap="none" strike="noStrike">
+        <a:defRPr sz="1400" b="0" i="0" u="none" strike="noStrike" cap="none">
           <a:solidFill>
             <a:srgbClr val="000000"/>
           </a:solidFill>
@@ -8167,7 +8341,7 @@
           <a:sym typeface="Arial"/>
         </a:defRPr>
       </a:lvl2pPr>
-      <a:lvl3pPr lvl="2" marR="0" rtl="0" algn="l">
+      <a:lvl3pPr marR="0" lvl="2" algn="l" rtl="0">
         <a:lnSpc>
           <a:spcPct val="100000"/>
         </a:lnSpc>
@@ -8181,7 +8355,7 @@
           <a:srgbClr val="000000"/>
         </a:buClr>
         <a:buFont typeface="Arial"/>
-        <a:defRPr b="0" i="0" sz="1400" u="none" cap="none" strike="noStrike">
+        <a:defRPr sz="1400" b="0" i="0" u="none" strike="noStrike" cap="none">
           <a:solidFill>
             <a:srgbClr val="000000"/>
           </a:solidFill>
@@ -8191,7 +8365,7 @@
           <a:sym typeface="Arial"/>
         </a:defRPr>
       </a:lvl3pPr>
-      <a:lvl4pPr lvl="3" marR="0" rtl="0" algn="l">
+      <a:lvl4pPr marR="0" lvl="3" algn="l" rtl="0">
         <a:lnSpc>
           <a:spcPct val="100000"/>
         </a:lnSpc>
@@ -8205,7 +8379,7 @@
           <a:srgbClr val="000000"/>
         </a:buClr>
         <a:buFont typeface="Arial"/>
-        <a:defRPr b="0" i="0" sz="1400" u="none" cap="none" strike="noStrike">
+        <a:defRPr sz="1400" b="0" i="0" u="none" strike="noStrike" cap="none">
           <a:solidFill>
             <a:srgbClr val="000000"/>
           </a:solidFill>
@@ -8215,7 +8389,7 @@
           <a:sym typeface="Arial"/>
         </a:defRPr>
       </a:lvl4pPr>
-      <a:lvl5pPr lvl="4" marR="0" rtl="0" algn="l">
+      <a:lvl5pPr marR="0" lvl="4" algn="l" rtl="0">
         <a:lnSpc>
           <a:spcPct val="100000"/>
         </a:lnSpc>
@@ -8229,7 +8403,7 @@
           <a:srgbClr val="000000"/>
         </a:buClr>
         <a:buFont typeface="Arial"/>
-        <a:defRPr b="0" i="0" sz="1400" u="none" cap="none" strike="noStrike">
+        <a:defRPr sz="1400" b="0" i="0" u="none" strike="noStrike" cap="none">
           <a:solidFill>
             <a:srgbClr val="000000"/>
           </a:solidFill>
@@ -8239,7 +8413,7 @@
           <a:sym typeface="Arial"/>
         </a:defRPr>
       </a:lvl5pPr>
-      <a:lvl6pPr lvl="5" marR="0" rtl="0" algn="l">
+      <a:lvl6pPr marR="0" lvl="5" algn="l" rtl="0">
         <a:lnSpc>
           <a:spcPct val="100000"/>
         </a:lnSpc>
@@ -8253,7 +8427,7 @@
           <a:srgbClr val="000000"/>
         </a:buClr>
         <a:buFont typeface="Arial"/>
-        <a:defRPr b="0" i="0" sz="1400" u="none" cap="none" strike="noStrike">
+        <a:defRPr sz="1400" b="0" i="0" u="none" strike="noStrike" cap="none">
           <a:solidFill>
             <a:srgbClr val="000000"/>
           </a:solidFill>
@@ -8263,7 +8437,7 @@
           <a:sym typeface="Arial"/>
         </a:defRPr>
       </a:lvl6pPr>
-      <a:lvl7pPr lvl="6" marR="0" rtl="0" algn="l">
+      <a:lvl7pPr marR="0" lvl="6" algn="l" rtl="0">
         <a:lnSpc>
           <a:spcPct val="100000"/>
         </a:lnSpc>
@@ -8277,7 +8451,7 @@
           <a:srgbClr val="000000"/>
         </a:buClr>
         <a:buFont typeface="Arial"/>
-        <a:defRPr b="0" i="0" sz="1400" u="none" cap="none" strike="noStrike">
+        <a:defRPr sz="1400" b="0" i="0" u="none" strike="noStrike" cap="none">
           <a:solidFill>
             <a:srgbClr val="000000"/>
           </a:solidFill>
@@ -8287,7 +8461,7 @@
           <a:sym typeface="Arial"/>
         </a:defRPr>
       </a:lvl7pPr>
-      <a:lvl8pPr lvl="7" marR="0" rtl="0" algn="l">
+      <a:lvl8pPr marR="0" lvl="7" algn="l" rtl="0">
         <a:lnSpc>
           <a:spcPct val="100000"/>
         </a:lnSpc>
@@ -8301,7 +8475,7 @@
           <a:srgbClr val="000000"/>
         </a:buClr>
         <a:buFont typeface="Arial"/>
-        <a:defRPr b="0" i="0" sz="1400" u="none" cap="none" strike="noStrike">
+        <a:defRPr sz="1400" b="0" i="0" u="none" strike="noStrike" cap="none">
           <a:solidFill>
             <a:srgbClr val="000000"/>
           </a:solidFill>
@@ -8311,7 +8485,7 @@
           <a:sym typeface="Arial"/>
         </a:defRPr>
       </a:lvl8pPr>
-      <a:lvl9pPr lvl="8" marR="0" rtl="0" algn="l">
+      <a:lvl9pPr marR="0" lvl="8" algn="l" rtl="0">
         <a:lnSpc>
           <a:spcPct val="100000"/>
         </a:lnSpc>
@@ -8325,7 +8499,7 @@
           <a:srgbClr val="000000"/>
         </a:buClr>
         <a:buFont typeface="Arial"/>
-        <a:defRPr b="0" i="0" sz="1400" u="none" cap="none" strike="noStrike">
+        <a:defRPr sz="1400" b="0" i="0" u="none" strike="noStrike" cap="none">
           <a:solidFill>
             <a:srgbClr val="000000"/>
           </a:solidFill>
@@ -8337,7 +8511,7 @@
       </a:lvl9pPr>
     </p:titleStyle>
     <p:bodyStyle>
-      <a:defPPr lvl="0" marR="0" rtl="0" algn="l">
+      <a:defPPr marR="0" lvl="0" algn="l" rtl="0">
         <a:lnSpc>
           <a:spcPct val="100000"/>
         </a:lnSpc>
@@ -8348,7 +8522,7 @@
           <a:spcPts val="0"/>
         </a:spcAft>
       </a:defPPr>
-      <a:lvl1pPr lvl="0" marR="0" rtl="0" algn="l">
+      <a:lvl1pPr marR="0" lvl="0" algn="l" rtl="0">
         <a:lnSpc>
           <a:spcPct val="100000"/>
         </a:lnSpc>
@@ -8362,7 +8536,7 @@
           <a:srgbClr val="000000"/>
         </a:buClr>
         <a:buFont typeface="Arial"/>
-        <a:defRPr b="0" i="0" sz="1400" u="none" cap="none" strike="noStrike">
+        <a:defRPr sz="1400" b="0" i="0" u="none" strike="noStrike" cap="none">
           <a:solidFill>
             <a:srgbClr val="000000"/>
           </a:solidFill>
@@ -8372,7 +8546,7 @@
           <a:sym typeface="Arial"/>
         </a:defRPr>
       </a:lvl1pPr>
-      <a:lvl2pPr lvl="1" marR="0" rtl="0" algn="l">
+      <a:lvl2pPr marR="0" lvl="1" algn="l" rtl="0">
         <a:lnSpc>
           <a:spcPct val="100000"/>
         </a:lnSpc>
@@ -8386,7 +8560,7 @@
           <a:srgbClr val="000000"/>
         </a:buClr>
         <a:buFont typeface="Arial"/>
-        <a:defRPr b="0" i="0" sz="1400" u="none" cap="none" strike="noStrike">
+        <a:defRPr sz="1400" b="0" i="0" u="none" strike="noStrike" cap="none">
           <a:solidFill>
             <a:srgbClr val="000000"/>
           </a:solidFill>
@@ -8396,7 +8570,7 @@
           <a:sym typeface="Arial"/>
         </a:defRPr>
       </a:lvl2pPr>
-      <a:lvl3pPr lvl="2" marR="0" rtl="0" algn="l">
+      <a:lvl3pPr marR="0" lvl="2" algn="l" rtl="0">
         <a:lnSpc>
           <a:spcPct val="100000"/>
         </a:lnSpc>
@@ -8410,7 +8584,7 @@
           <a:srgbClr val="000000"/>
         </a:buClr>
         <a:buFont typeface="Arial"/>
-        <a:defRPr b="0" i="0" sz="1400" u="none" cap="none" strike="noStrike">
+        <a:defRPr sz="1400" b="0" i="0" u="none" strike="noStrike" cap="none">
           <a:solidFill>
             <a:srgbClr val="000000"/>
           </a:solidFill>
@@ -8420,7 +8594,7 @@
           <a:sym typeface="Arial"/>
         </a:defRPr>
       </a:lvl3pPr>
-      <a:lvl4pPr lvl="3" marR="0" rtl="0" algn="l">
+      <a:lvl4pPr marR="0" lvl="3" algn="l" rtl="0">
         <a:lnSpc>
           <a:spcPct val="100000"/>
         </a:lnSpc>
@@ -8434,7 +8608,7 @@
           <a:srgbClr val="000000"/>
         </a:buClr>
         <a:buFont typeface="Arial"/>
-        <a:defRPr b="0" i="0" sz="1400" u="none" cap="none" strike="noStrike">
+        <a:defRPr sz="1400" b="0" i="0" u="none" strike="noStrike" cap="none">
           <a:solidFill>
             <a:srgbClr val="000000"/>
           </a:solidFill>
@@ -8444,7 +8618,7 @@
           <a:sym typeface="Arial"/>
         </a:defRPr>
       </a:lvl4pPr>
-      <a:lvl5pPr lvl="4" marR="0" rtl="0" algn="l">
+      <a:lvl5pPr marR="0" lvl="4" algn="l" rtl="0">
         <a:lnSpc>
           <a:spcPct val="100000"/>
         </a:lnSpc>
@@ -8458,7 +8632,7 @@
           <a:srgbClr val="000000"/>
         </a:buClr>
         <a:buFont typeface="Arial"/>
-        <a:defRPr b="0" i="0" sz="1400" u="none" cap="none" strike="noStrike">
+        <a:defRPr sz="1400" b="0" i="0" u="none" strike="noStrike" cap="none">
           <a:solidFill>
             <a:srgbClr val="000000"/>
           </a:solidFill>
@@ -8468,7 +8642,7 @@
           <a:sym typeface="Arial"/>
         </a:defRPr>
       </a:lvl5pPr>
-      <a:lvl6pPr lvl="5" marR="0" rtl="0" algn="l">
+      <a:lvl6pPr marR="0" lvl="5" algn="l" rtl="0">
         <a:lnSpc>
           <a:spcPct val="100000"/>
         </a:lnSpc>
@@ -8482,7 +8656,7 @@
           <a:srgbClr val="000000"/>
         </a:buClr>
         <a:buFont typeface="Arial"/>
-        <a:defRPr b="0" i="0" sz="1400" u="none" cap="none" strike="noStrike">
+        <a:defRPr sz="1400" b="0" i="0" u="none" strike="noStrike" cap="none">
           <a:solidFill>
             <a:srgbClr val="000000"/>
           </a:solidFill>
@@ -8492,7 +8666,7 @@
           <a:sym typeface="Arial"/>
         </a:defRPr>
       </a:lvl6pPr>
-      <a:lvl7pPr lvl="6" marR="0" rtl="0" algn="l">
+      <a:lvl7pPr marR="0" lvl="6" algn="l" rtl="0">
         <a:lnSpc>
           <a:spcPct val="100000"/>
         </a:lnSpc>
@@ -8506,7 +8680,7 @@
           <a:srgbClr val="000000"/>
         </a:buClr>
         <a:buFont typeface="Arial"/>
-        <a:defRPr b="0" i="0" sz="1400" u="none" cap="none" strike="noStrike">
+        <a:defRPr sz="1400" b="0" i="0" u="none" strike="noStrike" cap="none">
           <a:solidFill>
             <a:srgbClr val="000000"/>
           </a:solidFill>
@@ -8516,7 +8690,7 @@
           <a:sym typeface="Arial"/>
         </a:defRPr>
       </a:lvl7pPr>
-      <a:lvl8pPr lvl="7" marR="0" rtl="0" algn="l">
+      <a:lvl8pPr marR="0" lvl="7" algn="l" rtl="0">
         <a:lnSpc>
           <a:spcPct val="100000"/>
         </a:lnSpc>
@@ -8530,7 +8704,7 @@
           <a:srgbClr val="000000"/>
         </a:buClr>
         <a:buFont typeface="Arial"/>
-        <a:defRPr b="0" i="0" sz="1400" u="none" cap="none" strike="noStrike">
+        <a:defRPr sz="1400" b="0" i="0" u="none" strike="noStrike" cap="none">
           <a:solidFill>
             <a:srgbClr val="000000"/>
           </a:solidFill>
@@ -8540,7 +8714,7 @@
           <a:sym typeface="Arial"/>
         </a:defRPr>
       </a:lvl8pPr>
-      <a:lvl9pPr lvl="8" marR="0" rtl="0" algn="l">
+      <a:lvl9pPr marR="0" lvl="8" algn="l" rtl="0">
         <a:lnSpc>
           <a:spcPct val="100000"/>
         </a:lnSpc>
@@ -8554,7 +8728,7 @@
           <a:srgbClr val="000000"/>
         </a:buClr>
         <a:buFont typeface="Arial"/>
-        <a:defRPr b="0" i="0" sz="1400" u="none" cap="none" strike="noStrike">
+        <a:defRPr sz="1400" b="0" i="0" u="none" strike="noStrike" cap="none">
           <a:solidFill>
             <a:srgbClr val="000000"/>
           </a:solidFill>
@@ -8566,7 +8740,7 @@
       </a:lvl9pPr>
     </p:bodyStyle>
     <p:otherStyle>
-      <a:defPPr lvl="0" marR="0" rtl="0" algn="l">
+      <a:defPPr marR="0" lvl="0" algn="l" rtl="0">
         <a:lnSpc>
           <a:spcPct val="100000"/>
         </a:lnSpc>
@@ -8577,7 +8751,7 @@
           <a:spcPts val="0"/>
         </a:spcAft>
       </a:defPPr>
-      <a:lvl1pPr lvl="0" marR="0" rtl="0" algn="l">
+      <a:lvl1pPr marR="0" lvl="0" algn="l" rtl="0">
         <a:lnSpc>
           <a:spcPct val="100000"/>
         </a:lnSpc>
@@ -8591,7 +8765,7 @@
           <a:srgbClr val="000000"/>
         </a:buClr>
         <a:buFont typeface="Arial"/>
-        <a:defRPr b="0" i="0" sz="1400" u="none" cap="none" strike="noStrike">
+        <a:defRPr sz="1400" b="0" i="0" u="none" strike="noStrike" cap="none">
           <a:solidFill>
             <a:srgbClr val="000000"/>
           </a:solidFill>
@@ -8601,7 +8775,7 @@
           <a:sym typeface="Arial"/>
         </a:defRPr>
       </a:lvl1pPr>
-      <a:lvl2pPr lvl="1" marR="0" rtl="0" algn="l">
+      <a:lvl2pPr marR="0" lvl="1" algn="l" rtl="0">
         <a:lnSpc>
           <a:spcPct val="100000"/>
         </a:lnSpc>
@@ -8615,7 +8789,7 @@
           <a:srgbClr val="000000"/>
         </a:buClr>
         <a:buFont typeface="Arial"/>
-        <a:defRPr b="0" i="0" sz="1400" u="none" cap="none" strike="noStrike">
+        <a:defRPr sz="1400" b="0" i="0" u="none" strike="noStrike" cap="none">
           <a:solidFill>
             <a:srgbClr val="000000"/>
           </a:solidFill>
@@ -8625,7 +8799,7 @@
           <a:sym typeface="Arial"/>
         </a:defRPr>
       </a:lvl2pPr>
-      <a:lvl3pPr lvl="2" marR="0" rtl="0" algn="l">
+      <a:lvl3pPr marR="0" lvl="2" algn="l" rtl="0">
         <a:lnSpc>
           <a:spcPct val="100000"/>
         </a:lnSpc>
@@ -8639,7 +8813,7 @@
           <a:srgbClr val="000000"/>
         </a:buClr>
         <a:buFont typeface="Arial"/>
-        <a:defRPr b="0" i="0" sz="1400" u="none" cap="none" strike="noStrike">
+        <a:defRPr sz="1400" b="0" i="0" u="none" strike="noStrike" cap="none">
           <a:solidFill>
             <a:srgbClr val="000000"/>
           </a:solidFill>
@@ -8649,7 +8823,7 @@
           <a:sym typeface="Arial"/>
         </a:defRPr>
       </a:lvl3pPr>
-      <a:lvl4pPr lvl="3" marR="0" rtl="0" algn="l">
+      <a:lvl4pPr marR="0" lvl="3" algn="l" rtl="0">
         <a:lnSpc>
           <a:spcPct val="100000"/>
         </a:lnSpc>
@@ -8663,7 +8837,7 @@
           <a:srgbClr val="000000"/>
         </a:buClr>
         <a:buFont typeface="Arial"/>
-        <a:defRPr b="0" i="0" sz="1400" u="none" cap="none" strike="noStrike">
+        <a:defRPr sz="1400" b="0" i="0" u="none" strike="noStrike" cap="none">
           <a:solidFill>
             <a:srgbClr val="000000"/>
           </a:solidFill>
@@ -8673,7 +8847,7 @@
           <a:sym typeface="Arial"/>
         </a:defRPr>
       </a:lvl4pPr>
-      <a:lvl5pPr lvl="4" marR="0" rtl="0" algn="l">
+      <a:lvl5pPr marR="0" lvl="4" algn="l" rtl="0">
         <a:lnSpc>
           <a:spcPct val="100000"/>
         </a:lnSpc>
@@ -8687,7 +8861,7 @@
           <a:srgbClr val="000000"/>
         </a:buClr>
         <a:buFont typeface="Arial"/>
-        <a:defRPr b="0" i="0" sz="1400" u="none" cap="none" strike="noStrike">
+        <a:defRPr sz="1400" b="0" i="0" u="none" strike="noStrike" cap="none">
           <a:solidFill>
             <a:srgbClr val="000000"/>
           </a:solidFill>
@@ -8697,7 +8871,7 @@
           <a:sym typeface="Arial"/>
         </a:defRPr>
       </a:lvl5pPr>
-      <a:lvl6pPr lvl="5" marR="0" rtl="0" algn="l">
+      <a:lvl6pPr marR="0" lvl="5" algn="l" rtl="0">
         <a:lnSpc>
           <a:spcPct val="100000"/>
         </a:lnSpc>
@@ -8711,7 +8885,7 @@
           <a:srgbClr val="000000"/>
         </a:buClr>
         <a:buFont typeface="Arial"/>
-        <a:defRPr b="0" i="0" sz="1400" u="none" cap="none" strike="noStrike">
+        <a:defRPr sz="1400" b="0" i="0" u="none" strike="noStrike" cap="none">
           <a:solidFill>
             <a:srgbClr val="000000"/>
           </a:solidFill>
@@ -8721,7 +8895,7 @@
           <a:sym typeface="Arial"/>
         </a:defRPr>
       </a:lvl6pPr>
-      <a:lvl7pPr lvl="6" marR="0" rtl="0" algn="l">
+      <a:lvl7pPr marR="0" lvl="6" algn="l" rtl="0">
         <a:lnSpc>
           <a:spcPct val="100000"/>
         </a:lnSpc>
@@ -8735,7 +8909,7 @@
           <a:srgbClr val="000000"/>
         </a:buClr>
         <a:buFont typeface="Arial"/>
-        <a:defRPr b="0" i="0" sz="1400" u="none" cap="none" strike="noStrike">
+        <a:defRPr sz="1400" b="0" i="0" u="none" strike="noStrike" cap="none">
           <a:solidFill>
             <a:srgbClr val="000000"/>
           </a:solidFill>
@@ -8745,7 +8919,7 @@
           <a:sym typeface="Arial"/>
         </a:defRPr>
       </a:lvl7pPr>
-      <a:lvl8pPr lvl="7" marR="0" rtl="0" algn="l">
+      <a:lvl8pPr marR="0" lvl="7" algn="l" rtl="0">
         <a:lnSpc>
           <a:spcPct val="100000"/>
         </a:lnSpc>
@@ -8759,7 +8933,7 @@
           <a:srgbClr val="000000"/>
         </a:buClr>
         <a:buFont typeface="Arial"/>
-        <a:defRPr b="0" i="0" sz="1400" u="none" cap="none" strike="noStrike">
+        <a:defRPr sz="1400" b="0" i="0" u="none" strike="noStrike" cap="none">
           <a:solidFill>
             <a:srgbClr val="000000"/>
           </a:solidFill>
@@ -8769,7 +8943,7 @@
           <a:sym typeface="Arial"/>
         </a:defRPr>
       </a:lvl8pPr>
-      <a:lvl9pPr lvl="8" marR="0" rtl="0" algn="l">
+      <a:lvl9pPr marR="0" lvl="8" algn="l" rtl="0">
         <a:lnSpc>
           <a:spcPct val="100000"/>
         </a:lnSpc>
@@ -8783,7 +8957,7 @@
           <a:srgbClr val="000000"/>
         </a:buClr>
         <a:buFont typeface="Arial"/>
-        <a:defRPr b="0" i="0" sz="1400" u="none" cap="none" strike="noStrike">
+        <a:defRPr sz="1400" b="0" i="0" u="none" strike="noStrike" cap="none">
           <a:solidFill>
             <a:srgbClr val="000000"/>
           </a:solidFill>
@@ -8799,11 +8973,11 @@
 </file>
 
 <file path=ppt/slides/slide1.xml><?xml version="1.0" encoding="utf-8"?>
-<p:sld xmlns:a="http://schemas.openxmlformats.org/drawingml/2006/main" xmlns:r="http://schemas.openxmlformats.org/officeDocument/2006/relationships" xmlns:mc="http://schemas.openxmlformats.org/markup-compatibility/2006" xmlns:mv="urn:schemas-microsoft-com:mac:vml" xmlns:p="http://schemas.openxmlformats.org/presentationml/2006/main" xmlns:c="http://schemas.openxmlformats.org/drawingml/2006/chart" xmlns:dgm="http://schemas.openxmlformats.org/drawingml/2006/diagram" xmlns:o="urn:schemas-microsoft-com:office:office" xmlns:v="urn:schemas-microsoft-com:vml" xmlns:pvml="urn:schemas-microsoft-com:office:powerpoint" xmlns:com="http://schemas.openxmlformats.org/drawingml/2006/compatibility" xmlns:p14="http://schemas.microsoft.com/office/powerpoint/2010/main" xmlns:p15="http://schemas.microsoft.com/office/powerpoint/2012/main" xmlns:ahyp="http://schemas.microsoft.com/office/drawing/2018/hyperlinkcolor" showMasterSp="0">
+<p:sld xmlns:a="http://schemas.openxmlformats.org/drawingml/2006/main" xmlns:r="http://schemas.openxmlformats.org/officeDocument/2006/relationships" xmlns:p="http://schemas.openxmlformats.org/presentationml/2006/main" showMasterSp="0">
   <p:cSld>
     <p:spTree>
       <p:nvGrpSpPr>
-        <p:cNvPr id="44" name="Shape 44"/>
+        <p:cNvPr id="1" name="Shape 44"/>
         <p:cNvGrpSpPr/>
         <p:nvPr/>
       </p:nvGrpSpPr>
@@ -8825,7 +8999,7 @@
           <a:blip r:embed="rId3">
             <a:alphaModFix/>
           </a:blip>
-          <a:srcRect b="0" l="0" r="0" t="0"/>
+          <a:srcRect/>
           <a:stretch/>
         </p:blipFill>
         <p:spPr>
@@ -8845,7 +9019,9 @@
       <p:sp>
         <p:nvSpPr>
           <p:cNvPr id="46" name="Google Shape;46;p7"/>
-          <p:cNvSpPr txBox="1"/>
+          <p:cNvSpPr txBox="1">
+            <a:spLocks noGrp="1"/>
+          </p:cNvSpPr>
           <p:nvPr>
             <p:ph type="title"/>
           </p:nvPr>
@@ -8864,12 +9040,12 @@
           </a:ln>
         </p:spPr>
         <p:txBody>
-          <a:bodyPr anchorCtr="0" anchor="t" bIns="0" lIns="0" spcFirstLastPara="1" rIns="0" wrap="square" tIns="12700">
+          <a:bodyPr spcFirstLastPara="1" wrap="square" lIns="0" tIns="12700" rIns="0" bIns="0" anchor="t" anchorCtr="0">
             <a:spAutoFit/>
           </a:bodyPr>
           <a:lstStyle/>
           <a:p>
-            <a:pPr indent="0" lvl="0" marL="12700" rtl="0" algn="l">
+            <a:pPr marL="12700" lvl="0" indent="0" algn="l" rtl="0">
               <a:lnSpc>
                 <a:spcPct val="100000"/>
               </a:lnSpc>
@@ -8904,7 +9080,7 @@
           <a:blip r:embed="rId4">
             <a:alphaModFix/>
           </a:blip>
-          <a:srcRect b="13722" l="0" r="0" t="13715"/>
+          <a:srcRect t="13715" b="13722"/>
           <a:stretch/>
         </p:blipFill>
         <p:spPr>
@@ -8941,12 +9117,12 @@
           </a:ln>
         </p:spPr>
         <p:txBody>
-          <a:bodyPr anchorCtr="0" anchor="t" bIns="91425" lIns="91425" spcFirstLastPara="1" rIns="91425" wrap="square" tIns="91425">
+          <a:bodyPr spcFirstLastPara="1" wrap="square" lIns="91425" tIns="91425" rIns="91425" bIns="91425" anchor="t" anchorCtr="0">
             <a:spAutoFit/>
           </a:bodyPr>
           <a:lstStyle/>
           <a:p>
-            <a:pPr indent="0" lvl="0" marL="0" marR="0" rtl="0" algn="l">
+            <a:pPr marL="0" marR="0" lvl="0" indent="0" algn="l" rtl="0">
               <a:lnSpc>
                 <a:spcPct val="100000"/>
               </a:lnSpc>
@@ -8971,7 +9147,7 @@
               </a:rPr>
               <a:t>Julian Esteban Nossa Poveda</a:t>
             </a:r>
-            <a:endParaRPr b="0" i="0" sz="1500" u="none" cap="none" strike="noStrike">
+            <a:endParaRPr sz="1500" b="0" i="0" u="none" strike="noStrike" cap="none">
               <a:solidFill>
                 <a:schemeClr val="dk1"/>
               </a:solidFill>
@@ -8982,7 +9158,7 @@
             </a:endParaRPr>
           </a:p>
           <a:p>
-            <a:pPr indent="0" lvl="0" marL="0" marR="0" rtl="0" algn="l">
+            <a:pPr marL="0" marR="0" lvl="0" indent="0" algn="l" rtl="0">
               <a:lnSpc>
                 <a:spcPct val="100000"/>
               </a:lnSpc>
@@ -9007,7 +9183,7 @@
               </a:rPr>
               <a:t>Johan Esteban Acosta Moncada</a:t>
             </a:r>
-            <a:endParaRPr b="0" i="0" sz="1500" u="none" cap="none" strike="noStrike">
+            <a:endParaRPr sz="1500" b="0" i="0" u="none" strike="noStrike" cap="none">
               <a:solidFill>
                 <a:schemeClr val="dk1"/>
               </a:solidFill>
@@ -9018,7 +9194,7 @@
             </a:endParaRPr>
           </a:p>
           <a:p>
-            <a:pPr indent="0" lvl="0" marL="0" marR="0" rtl="0" algn="l">
+            <a:pPr marL="0" marR="0" lvl="0" indent="0" algn="l" rtl="0">
               <a:lnSpc>
                 <a:spcPct val="100000"/>
               </a:lnSpc>
@@ -9043,7 +9219,7 @@
               </a:rPr>
               <a:t>Bryam Alejandro Mora Mendoza</a:t>
             </a:r>
-            <a:endParaRPr b="0" i="0" sz="1500" u="none" cap="none" strike="noStrike">
+            <a:endParaRPr sz="1500" b="0" i="0" u="none" strike="noStrike" cap="none">
               <a:solidFill>
                 <a:schemeClr val="dk1"/>
               </a:solidFill>
@@ -9054,7 +9230,7 @@
             </a:endParaRPr>
           </a:p>
           <a:p>
-            <a:pPr indent="0" lvl="0" marL="0" marR="0" rtl="0" algn="l">
+            <a:pPr marL="0" marR="0" lvl="0" indent="0" algn="l" rtl="0">
               <a:lnSpc>
                 <a:spcPct val="100000"/>
               </a:lnSpc>
@@ -9079,7 +9255,7 @@
               </a:rPr>
               <a:t>Jorge Alexander Herrera Camacho</a:t>
             </a:r>
-            <a:endParaRPr b="0" i="0" sz="1500" u="none" cap="none" strike="noStrike">
+            <a:endParaRPr sz="1500" b="0" i="0" u="none" strike="noStrike" cap="none">
               <a:solidFill>
                 <a:schemeClr val="dk1"/>
               </a:solidFill>
@@ -9100,11 +9276,11 @@
 </file>
 
 <file path=ppt/slides/slide10.xml><?xml version="1.0" encoding="utf-8"?>
-<p:sld xmlns:a="http://schemas.openxmlformats.org/drawingml/2006/main" xmlns:r="http://schemas.openxmlformats.org/officeDocument/2006/relationships" xmlns:mc="http://schemas.openxmlformats.org/markup-compatibility/2006" xmlns:mv="urn:schemas-microsoft-com:mac:vml" xmlns:p="http://schemas.openxmlformats.org/presentationml/2006/main" xmlns:c="http://schemas.openxmlformats.org/drawingml/2006/chart" xmlns:dgm="http://schemas.openxmlformats.org/drawingml/2006/diagram" xmlns:o="urn:schemas-microsoft-com:office:office" xmlns:v="urn:schemas-microsoft-com:vml" xmlns:pvml="urn:schemas-microsoft-com:office:powerpoint" xmlns:com="http://schemas.openxmlformats.org/drawingml/2006/compatibility" xmlns:p14="http://schemas.microsoft.com/office/powerpoint/2010/main" xmlns:p15="http://schemas.microsoft.com/office/powerpoint/2012/main" xmlns:ahyp="http://schemas.microsoft.com/office/drawing/2018/hyperlinkcolor">
+<p:sld xmlns:a="http://schemas.openxmlformats.org/drawingml/2006/main" xmlns:r="http://schemas.openxmlformats.org/officeDocument/2006/relationships" xmlns:p="http://schemas.openxmlformats.org/presentationml/2006/main">
   <p:cSld>
     <p:spTree>
       <p:nvGrpSpPr>
-        <p:cNvPr id="109" name="Shape 109"/>
+        <p:cNvPr id="1" name="Shape 109"/>
         <p:cNvGrpSpPr/>
         <p:nvPr/>
       </p:nvGrpSpPr>
@@ -9119,7 +9295,9 @@
       <p:sp>
         <p:nvSpPr>
           <p:cNvPr id="110" name="Google Shape;110;p16"/>
-          <p:cNvSpPr txBox="1"/>
+          <p:cNvSpPr txBox="1">
+            <a:spLocks noGrp="1"/>
+          </p:cNvSpPr>
           <p:nvPr>
             <p:ph type="title"/>
           </p:nvPr>
@@ -9138,12 +9316,12 @@
           </a:ln>
         </p:spPr>
         <p:txBody>
-          <a:bodyPr anchorCtr="0" anchor="t" bIns="0" lIns="0" spcFirstLastPara="1" rIns="0" wrap="square" tIns="12700">
+          <a:bodyPr spcFirstLastPara="1" wrap="square" lIns="0" tIns="12700" rIns="0" bIns="0" anchor="t" anchorCtr="0">
             <a:spAutoFit/>
           </a:bodyPr>
           <a:lstStyle/>
           <a:p>
-            <a:pPr indent="0" lvl="0" marL="0" rtl="0" algn="l">
+            <a:pPr marL="0" lvl="0" indent="0" algn="l" rtl="0">
               <a:lnSpc>
                 <a:spcPct val="100000"/>
               </a:lnSpc>
@@ -9184,12 +9362,12 @@
           </a:ln>
         </p:spPr>
         <p:txBody>
-          <a:bodyPr anchorCtr="0" anchor="t" bIns="0" lIns="0" spcFirstLastPara="1" rIns="0" wrap="square" tIns="12700">
+          <a:bodyPr spcFirstLastPara="1" wrap="square" lIns="0" tIns="12700" rIns="0" bIns="0" anchor="t" anchorCtr="0">
             <a:spAutoFit/>
           </a:bodyPr>
           <a:lstStyle/>
           <a:p>
-            <a:pPr indent="0" lvl="0" marL="12700" marR="5080" rtl="0" algn="l">
+            <a:pPr marL="12700" marR="5080" lvl="0" indent="0" algn="l" rtl="0">
               <a:lnSpc>
                 <a:spcPct val="100000"/>
               </a:lnSpc>
@@ -9210,7 +9388,7 @@
               <a:rPr lang="es-CO" sz="2200"/>
               <a:t>El Front-End funcional fue desarrollado en base a la combinacion de la biblioteca de JS React y TailwindCSS como estilos.</a:t>
             </a:r>
-            <a:endParaRPr b="0" i="0" sz="2200" u="none" cap="none" strike="noStrike">
+            <a:endParaRPr sz="2200" b="0" i="0" u="none" strike="noStrike" cap="none">
               <a:solidFill>
                 <a:srgbClr val="000000"/>
               </a:solidFill>
@@ -9259,11 +9437,11 @@
 </file>
 
 <file path=ppt/slides/slide11.xml><?xml version="1.0" encoding="utf-8"?>
-<p:sld xmlns:a="http://schemas.openxmlformats.org/drawingml/2006/main" xmlns:r="http://schemas.openxmlformats.org/officeDocument/2006/relationships" xmlns:mc="http://schemas.openxmlformats.org/markup-compatibility/2006" xmlns:mv="urn:schemas-microsoft-com:mac:vml" xmlns:p="http://schemas.openxmlformats.org/presentationml/2006/main" xmlns:c="http://schemas.openxmlformats.org/drawingml/2006/chart" xmlns:dgm="http://schemas.openxmlformats.org/drawingml/2006/diagram" xmlns:o="urn:schemas-microsoft-com:office:office" xmlns:v="urn:schemas-microsoft-com:vml" xmlns:pvml="urn:schemas-microsoft-com:office:powerpoint" xmlns:com="http://schemas.openxmlformats.org/drawingml/2006/compatibility" xmlns:p14="http://schemas.microsoft.com/office/powerpoint/2010/main" xmlns:p15="http://schemas.microsoft.com/office/powerpoint/2012/main" xmlns:ahyp="http://schemas.microsoft.com/office/drawing/2018/hyperlinkcolor">
+<p:sld xmlns:a="http://schemas.openxmlformats.org/drawingml/2006/main" xmlns:r="http://schemas.openxmlformats.org/officeDocument/2006/relationships" xmlns:p="http://schemas.openxmlformats.org/presentationml/2006/main">
   <p:cSld>
     <p:spTree>
       <p:nvGrpSpPr>
-        <p:cNvPr id="116" name="Shape 116"/>
+        <p:cNvPr id="1" name="Shape 116"/>
         <p:cNvGrpSpPr/>
         <p:nvPr/>
       </p:nvGrpSpPr>
@@ -9278,7 +9456,9 @@
       <p:sp>
         <p:nvSpPr>
           <p:cNvPr id="117" name="Google Shape;117;p17"/>
-          <p:cNvSpPr txBox="1"/>
+          <p:cNvSpPr txBox="1">
+            <a:spLocks noGrp="1"/>
+          </p:cNvSpPr>
           <p:nvPr>
             <p:ph type="title"/>
           </p:nvPr>
@@ -9297,12 +9477,12 @@
           </a:ln>
         </p:spPr>
         <p:txBody>
-          <a:bodyPr anchorCtr="0" anchor="t" bIns="0" lIns="0" spcFirstLastPara="1" rIns="0" wrap="square" tIns="12700">
+          <a:bodyPr spcFirstLastPara="1" wrap="square" lIns="0" tIns="12700" rIns="0" bIns="0" anchor="t" anchorCtr="0">
             <a:spAutoFit/>
           </a:bodyPr>
           <a:lstStyle/>
           <a:p>
-            <a:pPr indent="0" lvl="0" marL="12700" rtl="0" algn="l">
+            <a:pPr marL="12700" lvl="0" indent="0" algn="l" rtl="0">
               <a:lnSpc>
                 <a:spcPct val="100000"/>
               </a:lnSpc>
@@ -9343,12 +9523,12 @@
           </a:ln>
         </p:spPr>
         <p:txBody>
-          <a:bodyPr anchorCtr="0" anchor="t" bIns="0" lIns="0" spcFirstLastPara="1" rIns="0" wrap="square" tIns="12700">
+          <a:bodyPr spcFirstLastPara="1" wrap="square" lIns="0" tIns="12700" rIns="0" bIns="0" anchor="t" anchorCtr="0">
             <a:spAutoFit/>
           </a:bodyPr>
           <a:lstStyle/>
           <a:p>
-            <a:pPr indent="0" lvl="0" marL="12700" marR="5080" rtl="0" algn="l">
+            <a:pPr marL="12700" marR="5080" lvl="0" indent="0" algn="l" rtl="0">
               <a:lnSpc>
                 <a:spcPct val="100000"/>
               </a:lnSpc>
@@ -9369,7 +9549,7 @@
               <a:rPr lang="es-CO" sz="2200"/>
               <a:t>El equipo de trabajo cuenta con un GitHub en el cual se suben los trabajos y aportes de cada uno para el proyecto.</a:t>
             </a:r>
-            <a:endParaRPr b="0" i="0" sz="2200" u="none" cap="none" strike="noStrike">
+            <a:endParaRPr sz="2200" b="0" i="0" u="none" strike="noStrike" cap="none">
               <a:solidFill>
                 <a:srgbClr val="000000"/>
               </a:solidFill>
@@ -9418,11 +9598,11 @@
 </file>
 
 <file path=ppt/slides/slide12.xml><?xml version="1.0" encoding="utf-8"?>
-<p:sld xmlns:a="http://schemas.openxmlformats.org/drawingml/2006/main" xmlns:r="http://schemas.openxmlformats.org/officeDocument/2006/relationships" xmlns:mc="http://schemas.openxmlformats.org/markup-compatibility/2006" xmlns:mv="urn:schemas-microsoft-com:mac:vml" xmlns:p="http://schemas.openxmlformats.org/presentationml/2006/main" xmlns:c="http://schemas.openxmlformats.org/drawingml/2006/chart" xmlns:dgm="http://schemas.openxmlformats.org/drawingml/2006/diagram" xmlns:o="urn:schemas-microsoft-com:office:office" xmlns:v="urn:schemas-microsoft-com:vml" xmlns:pvml="urn:schemas-microsoft-com:office:powerpoint" xmlns:com="http://schemas.openxmlformats.org/drawingml/2006/compatibility" xmlns:p14="http://schemas.microsoft.com/office/powerpoint/2010/main" xmlns:p15="http://schemas.microsoft.com/office/powerpoint/2012/main" xmlns:ahyp="http://schemas.microsoft.com/office/drawing/2018/hyperlinkcolor">
+<p:sld xmlns:a="http://schemas.openxmlformats.org/drawingml/2006/main" xmlns:r="http://schemas.openxmlformats.org/officeDocument/2006/relationships" xmlns:p="http://schemas.openxmlformats.org/presentationml/2006/main">
   <p:cSld>
     <p:spTree>
       <p:nvGrpSpPr>
-        <p:cNvPr id="123" name="Shape 123"/>
+        <p:cNvPr id="1" name="Shape 123"/>
         <p:cNvGrpSpPr/>
         <p:nvPr/>
       </p:nvGrpSpPr>
@@ -9444,7 +9624,7 @@
           <a:blip r:embed="rId3">
             <a:alphaModFix/>
           </a:blip>
-          <a:srcRect b="0" l="0" r="0" t="0"/>
+          <a:srcRect/>
           <a:stretch/>
         </p:blipFill>
         <p:spPr>
@@ -9470,11 +9650,11 @@
 </file>
 
 <file path=ppt/slides/slide2.xml><?xml version="1.0" encoding="utf-8"?>
-<p:sld xmlns:a="http://schemas.openxmlformats.org/drawingml/2006/main" xmlns:r="http://schemas.openxmlformats.org/officeDocument/2006/relationships" xmlns:mc="http://schemas.openxmlformats.org/markup-compatibility/2006" xmlns:mv="urn:schemas-microsoft-com:mac:vml" xmlns:p="http://schemas.openxmlformats.org/presentationml/2006/main" xmlns:c="http://schemas.openxmlformats.org/drawingml/2006/chart" xmlns:dgm="http://schemas.openxmlformats.org/drawingml/2006/diagram" xmlns:o="urn:schemas-microsoft-com:office:office" xmlns:v="urn:schemas-microsoft-com:vml" xmlns:pvml="urn:schemas-microsoft-com:office:powerpoint" xmlns:com="http://schemas.openxmlformats.org/drawingml/2006/compatibility" xmlns:p14="http://schemas.microsoft.com/office/powerpoint/2010/main" xmlns:p15="http://schemas.microsoft.com/office/powerpoint/2012/main" xmlns:ahyp="http://schemas.microsoft.com/office/drawing/2018/hyperlinkcolor" showMasterSp="0">
+<p:sld xmlns:a="http://schemas.openxmlformats.org/drawingml/2006/main" xmlns:r="http://schemas.openxmlformats.org/officeDocument/2006/relationships" xmlns:p="http://schemas.openxmlformats.org/presentationml/2006/main" showMasterSp="0">
   <p:cSld>
     <p:spTree>
       <p:nvGrpSpPr>
-        <p:cNvPr id="52" name="Shape 52"/>
+        <p:cNvPr id="1" name="Shape 52"/>
         <p:cNvGrpSpPr/>
         <p:nvPr/>
       </p:nvGrpSpPr>
@@ -9496,12 +9676,12 @@
           <a:blip r:embed="rId3">
             <a:alphaModFix/>
           </a:blip>
-          <a:srcRect b="0" l="0" r="0" t="0"/>
+          <a:srcRect/>
           <a:stretch/>
         </p:blipFill>
         <p:spPr>
           <a:xfrm>
-            <a:off x="0" y="0"/>
+            <a:off x="0" y="9832"/>
             <a:ext cx="12192000" cy="6858000"/>
           </a:xfrm>
           <a:prstGeom prst="rect">
@@ -9533,12 +9713,12 @@
           </a:ln>
         </p:spPr>
         <p:txBody>
-          <a:bodyPr anchorCtr="0" anchor="t" bIns="0" lIns="0" spcFirstLastPara="1" rIns="0" wrap="square" tIns="12700">
+          <a:bodyPr spcFirstLastPara="1" wrap="square" lIns="0" tIns="12700" rIns="0" bIns="0" anchor="t" anchorCtr="0">
             <a:spAutoFit/>
           </a:bodyPr>
           <a:lstStyle/>
           <a:p>
-            <a:pPr indent="0" lvl="0" marL="12700" marR="0" rtl="0" algn="l">
+            <a:pPr marL="12700" marR="0" lvl="0" indent="0" algn="l" rtl="0">
               <a:lnSpc>
                 <a:spcPct val="100000"/>
               </a:lnSpc>
@@ -9556,7 +9736,7 @@
               <a:buNone/>
             </a:pPr>
             <a:r>
-              <a:rPr b="1" lang="es-CO" sz="6000">
+              <a:rPr lang="es-CO" sz="6000" b="1">
                 <a:solidFill>
                   <a:srgbClr val="4D4D4C"/>
                 </a:solidFill>
@@ -9567,7 +9747,7 @@
               </a:rPr>
               <a:t>ArteNauta</a:t>
             </a:r>
-            <a:endParaRPr b="0" i="0" sz="6000" u="none" cap="none" strike="noStrike">
+            <a:endParaRPr sz="6000" b="0" i="0" u="none" strike="noStrike" cap="none">
               <a:solidFill>
                 <a:srgbClr val="000000"/>
               </a:solidFill>
@@ -9591,9 +9771,13 @@
             <a:ext cx="2247900" cy="0"/>
           </a:xfrm>
           <a:custGeom>
-            <a:rect b="b" l="l" r="r" t="t"/>
+            <a:avLst/>
+            <a:gdLst/>
+            <a:ahLst/>
+            <a:cxnLst/>
+            <a:rect l="l" t="t" r="r" b="b"/>
             <a:pathLst>
-              <a:path extrusionOk="0" h="120000" w="2247900">
+              <a:path w="2247900" h="120000" extrusionOk="0">
                 <a:moveTo>
                   <a:pt x="0" y="0"/>
                 </a:moveTo>
@@ -9604,23 +9788,23 @@
             </a:pathLst>
           </a:custGeom>
           <a:noFill/>
-          <a:ln cap="flat" cmpd="sng" w="12650">
+          <a:ln w="12650" cap="flat" cmpd="sng">
             <a:solidFill>
               <a:srgbClr val="37AA00"/>
             </a:solidFill>
             <a:prstDash val="solid"/>
             <a:round/>
-            <a:headEnd len="sm" w="sm" type="none"/>
-            <a:tailEnd len="sm" w="sm" type="none"/>
+            <a:headEnd type="none" w="sm" len="sm"/>
+            <a:tailEnd type="none" w="sm" len="sm"/>
           </a:ln>
         </p:spPr>
         <p:txBody>
-          <a:bodyPr anchorCtr="0" anchor="t" bIns="0" lIns="0" spcFirstLastPara="1" rIns="0" wrap="square" tIns="0">
+          <a:bodyPr spcFirstLastPara="1" wrap="square" lIns="0" tIns="0" rIns="0" bIns="0" anchor="t" anchorCtr="0">
             <a:noAutofit/>
           </a:bodyPr>
           <a:lstStyle/>
           <a:p>
-            <a:pPr indent="0" lvl="0" marL="0" marR="0" rtl="0" algn="l">
+            <a:pPr marL="0" marR="0" lvl="0" indent="0" algn="l" rtl="0">
               <a:lnSpc>
                 <a:spcPct val="100000"/>
               </a:lnSpc>
@@ -9637,10 +9821,7 @@
               <a:buFont typeface="Arial"/>
               <a:buNone/>
             </a:pPr>
-            <a:r>
-              <a:t/>
-            </a:r>
-            <a:endParaRPr b="0" i="0" sz="1800" u="none" cap="none" strike="noStrike">
+            <a:endParaRPr sz="1800" b="0" i="0" u="none" strike="noStrike" cap="none">
               <a:solidFill>
                 <a:srgbClr val="000000"/>
               </a:solidFill>
@@ -9661,7 +9842,7 @@
         <p:spPr>
           <a:xfrm>
             <a:off x="3016350" y="3484450"/>
-            <a:ext cx="6159300" cy="289800"/>
+            <a:ext cx="6159300" cy="566822"/>
           </a:xfrm>
           <a:prstGeom prst="rect">
             <a:avLst/>
@@ -9672,12 +9853,12 @@
           </a:ln>
         </p:spPr>
         <p:txBody>
-          <a:bodyPr anchorCtr="0" anchor="t" bIns="0" lIns="0" spcFirstLastPara="1" rIns="0" wrap="square" tIns="12700">
+          <a:bodyPr spcFirstLastPara="1" wrap="square" lIns="0" tIns="12700" rIns="0" bIns="0" anchor="t" anchorCtr="0">
             <a:spAutoFit/>
           </a:bodyPr>
           <a:lstStyle/>
           <a:p>
-            <a:pPr indent="0" lvl="0" marL="12700" marR="0" rtl="0" algn="l">
+            <a:pPr marL="12700" marR="0" lvl="0" indent="0" algn="ctr" rtl="0">
               <a:lnSpc>
                 <a:spcPct val="100000"/>
               </a:lnSpc>
@@ -9695,7 +9876,7 @@
               <a:buNone/>
             </a:pPr>
             <a:r>
-              <a:rPr lang="es-CO" sz="1800">
+              <a:rPr lang="es-CO" sz="1800" dirty="0">
                 <a:solidFill>
                   <a:srgbClr val="212529"/>
                 </a:solidFill>
@@ -9709,7 +9890,7 @@
               </a:rPr>
               <a:t> PLATAFORMA DE HABILIDADES ARTISTICAS - ARTENAUTA</a:t>
             </a:r>
-            <a:endParaRPr b="0" i="0" sz="2400" u="none" cap="none" strike="noStrike">
+            <a:endParaRPr sz="2400" b="0" i="0" u="none" strike="noStrike" cap="none" dirty="0">
               <a:solidFill>
                 <a:srgbClr val="000000"/>
               </a:solidFill>
@@ -9730,11 +9911,11 @@
 </file>
 
 <file path=ppt/slides/slide3.xml><?xml version="1.0" encoding="utf-8"?>
-<p:sld xmlns:a="http://schemas.openxmlformats.org/drawingml/2006/main" xmlns:r="http://schemas.openxmlformats.org/officeDocument/2006/relationships" xmlns:mc="http://schemas.openxmlformats.org/markup-compatibility/2006" xmlns:mv="urn:schemas-microsoft-com:mac:vml" xmlns:p="http://schemas.openxmlformats.org/presentationml/2006/main" xmlns:c="http://schemas.openxmlformats.org/drawingml/2006/chart" xmlns:dgm="http://schemas.openxmlformats.org/drawingml/2006/diagram" xmlns:o="urn:schemas-microsoft-com:office:office" xmlns:v="urn:schemas-microsoft-com:vml" xmlns:pvml="urn:schemas-microsoft-com:office:powerpoint" xmlns:com="http://schemas.openxmlformats.org/drawingml/2006/compatibility" xmlns:p14="http://schemas.microsoft.com/office/powerpoint/2010/main" xmlns:p15="http://schemas.microsoft.com/office/powerpoint/2012/main" xmlns:ahyp="http://schemas.microsoft.com/office/drawing/2018/hyperlinkcolor" showMasterSp="0">
+<p:sld xmlns:a="http://schemas.openxmlformats.org/drawingml/2006/main" xmlns:r="http://schemas.openxmlformats.org/officeDocument/2006/relationships" xmlns:p="http://schemas.openxmlformats.org/presentationml/2006/main" showMasterSp="0">
   <p:cSld>
     <p:spTree>
       <p:nvGrpSpPr>
-        <p:cNvPr id="60" name="Shape 60"/>
+        <p:cNvPr id="1" name="Shape 60"/>
         <p:cNvGrpSpPr/>
         <p:nvPr/>
       </p:nvGrpSpPr>
@@ -9756,7 +9937,7 @@
           <a:blip r:embed="rId3">
             <a:alphaModFix/>
           </a:blip>
-          <a:srcRect b="0" l="0" r="0" t="0"/>
+          <a:srcRect/>
           <a:stretch/>
         </p:blipFill>
         <p:spPr>
@@ -9776,7 +9957,9 @@
       <p:sp>
         <p:nvSpPr>
           <p:cNvPr id="62" name="Google Shape;62;p9"/>
-          <p:cNvSpPr txBox="1"/>
+          <p:cNvSpPr txBox="1">
+            <a:spLocks noGrp="1"/>
+          </p:cNvSpPr>
           <p:nvPr>
             <p:ph type="title"/>
           </p:nvPr>
@@ -9795,12 +9978,12 @@
           </a:ln>
         </p:spPr>
         <p:txBody>
-          <a:bodyPr anchorCtr="0" anchor="t" bIns="0" lIns="0" spcFirstLastPara="1" rIns="0" wrap="square" tIns="12700">
+          <a:bodyPr spcFirstLastPara="1" wrap="square" lIns="0" tIns="12700" rIns="0" bIns="0" anchor="t" anchorCtr="0">
             <a:spAutoFit/>
           </a:bodyPr>
           <a:lstStyle/>
           <a:p>
-            <a:pPr indent="0" lvl="0" marL="12700" rtl="0" algn="l">
+            <a:pPr marL="12700" lvl="0" indent="0" algn="l" rtl="0">
               <a:lnSpc>
                 <a:spcPct val="100000"/>
               </a:lnSpc>
@@ -9837,9 +10020,13 @@
             <a:ext cx="3961765" cy="0"/>
           </a:xfrm>
           <a:custGeom>
-            <a:rect b="b" l="l" r="r" t="t"/>
+            <a:avLst/>
+            <a:gdLst/>
+            <a:ahLst/>
+            <a:cxnLst/>
+            <a:rect l="l" t="t" r="r" b="b"/>
             <a:pathLst>
-              <a:path extrusionOk="0" h="120000" w="3961765">
+              <a:path w="3961765" h="120000" extrusionOk="0">
                 <a:moveTo>
                   <a:pt x="0" y="0"/>
                 </a:moveTo>
@@ -9850,23 +10037,23 @@
             </a:pathLst>
           </a:custGeom>
           <a:noFill/>
-          <a:ln cap="flat" cmpd="sng" w="12650">
+          <a:ln w="12650" cap="flat" cmpd="sng">
             <a:solidFill>
               <a:srgbClr val="37AA00"/>
             </a:solidFill>
             <a:prstDash val="solid"/>
             <a:round/>
-            <a:headEnd len="sm" w="sm" type="none"/>
-            <a:tailEnd len="sm" w="sm" type="none"/>
+            <a:headEnd type="none" w="sm" len="sm"/>
+            <a:tailEnd type="none" w="sm" len="sm"/>
           </a:ln>
         </p:spPr>
         <p:txBody>
-          <a:bodyPr anchorCtr="0" anchor="t" bIns="0" lIns="0" spcFirstLastPara="1" rIns="0" wrap="square" tIns="0">
+          <a:bodyPr spcFirstLastPara="1" wrap="square" lIns="0" tIns="0" rIns="0" bIns="0" anchor="t" anchorCtr="0">
             <a:noAutofit/>
           </a:bodyPr>
           <a:lstStyle/>
           <a:p>
-            <a:pPr indent="0" lvl="0" marL="0" marR="0" rtl="0" algn="l">
+            <a:pPr marL="0" marR="0" lvl="0" indent="0" algn="l" rtl="0">
               <a:lnSpc>
                 <a:spcPct val="100000"/>
               </a:lnSpc>
@@ -9883,10 +10070,7 @@
               <a:buFont typeface="Arial"/>
               <a:buNone/>
             </a:pPr>
-            <a:r>
-              <a:t/>
-            </a:r>
-            <a:endParaRPr b="0" i="0" sz="1800" u="none" cap="none" strike="noStrike">
+            <a:endParaRPr sz="1800" b="0" i="0" u="none" strike="noStrike" cap="none">
               <a:solidFill>
                 <a:srgbClr val="000000"/>
               </a:solidFill>
@@ -9918,12 +10102,12 @@
           </a:ln>
         </p:spPr>
         <p:txBody>
-          <a:bodyPr anchorCtr="0" anchor="t" bIns="0" lIns="0" spcFirstLastPara="1" rIns="0" wrap="square" tIns="12700">
+          <a:bodyPr spcFirstLastPara="1" wrap="square" lIns="0" tIns="12700" rIns="0" bIns="0" anchor="t" anchorCtr="0">
             <a:spAutoFit/>
           </a:bodyPr>
           <a:lstStyle/>
           <a:p>
-            <a:pPr indent="0" lvl="0" marL="12700" marR="5080" rtl="0" algn="l">
+            <a:pPr marL="12700" marR="5080" lvl="0" indent="0" algn="l" rtl="0">
               <a:lnSpc>
                 <a:spcPct val="100000"/>
               </a:lnSpc>
@@ -9944,7 +10128,7 @@
               <a:rPr lang="es-CO" sz="2200"/>
               <a:t>ArteNauta es una plataforma diseñada para ofrecer un espacio confiable para generar visibilidad a las personas que cuentan con habilidades artisticas o personas interesadas en el arte y sus referentes.</a:t>
             </a:r>
-            <a:endParaRPr b="0" i="0" sz="2200" u="none" cap="none" strike="noStrike">
+            <a:endParaRPr sz="2200" b="0" i="0" u="none" strike="noStrike" cap="none">
               <a:solidFill>
                 <a:srgbClr val="000000"/>
               </a:solidFill>
@@ -9993,11 +10177,11 @@
 </file>
 
 <file path=ppt/slides/slide4.xml><?xml version="1.0" encoding="utf-8"?>
-<p:sld xmlns:a="http://schemas.openxmlformats.org/drawingml/2006/main" xmlns:r="http://schemas.openxmlformats.org/officeDocument/2006/relationships" xmlns:mc="http://schemas.openxmlformats.org/markup-compatibility/2006" xmlns:mv="urn:schemas-microsoft-com:mac:vml" xmlns:p="http://schemas.openxmlformats.org/presentationml/2006/main" xmlns:c="http://schemas.openxmlformats.org/drawingml/2006/chart" xmlns:dgm="http://schemas.openxmlformats.org/drawingml/2006/diagram" xmlns:o="urn:schemas-microsoft-com:office:office" xmlns:v="urn:schemas-microsoft-com:vml" xmlns:pvml="urn:schemas-microsoft-com:office:powerpoint" xmlns:com="http://schemas.openxmlformats.org/drawingml/2006/compatibility" xmlns:p14="http://schemas.microsoft.com/office/powerpoint/2010/main" xmlns:p15="http://schemas.microsoft.com/office/powerpoint/2012/main" xmlns:ahyp="http://schemas.microsoft.com/office/drawing/2018/hyperlinkcolor">
+<p:sld xmlns:a="http://schemas.openxmlformats.org/drawingml/2006/main" xmlns:r="http://schemas.openxmlformats.org/officeDocument/2006/relationships" xmlns:p="http://schemas.openxmlformats.org/presentationml/2006/main">
   <p:cSld>
     <p:spTree>
       <p:nvGrpSpPr>
-        <p:cNvPr id="69" name="Shape 69"/>
+        <p:cNvPr id="1" name="Shape 75"/>
         <p:cNvGrpSpPr/>
         <p:nvPr/>
       </p:nvGrpSpPr>
@@ -10011,8 +10195,10 @@
       </p:grpSpPr>
       <p:sp>
         <p:nvSpPr>
-          <p:cNvPr id="70" name="Google Shape;70;p10"/>
-          <p:cNvSpPr txBox="1"/>
+          <p:cNvPr id="76" name="Google Shape;76;p11"/>
+          <p:cNvSpPr txBox="1">
+            <a:spLocks noGrp="1"/>
+          </p:cNvSpPr>
           <p:nvPr>
             <p:ph type="title"/>
           </p:nvPr>
@@ -10031,12 +10217,137 @@
           </a:ln>
         </p:spPr>
         <p:txBody>
-          <a:bodyPr anchorCtr="0" anchor="t" bIns="0" lIns="0" spcFirstLastPara="1" rIns="0" wrap="square" tIns="12700">
+          <a:bodyPr spcFirstLastPara="1" wrap="square" lIns="0" tIns="12700" rIns="0" bIns="0" anchor="t" anchorCtr="0">
             <a:spAutoFit/>
           </a:bodyPr>
           <a:lstStyle/>
           <a:p>
-            <a:pPr indent="0" lvl="0" marL="12700" rtl="0" algn="l">
+            <a:pPr marL="12700" lvl="0" indent="0" algn="l" rtl="0">
+              <a:lnSpc>
+                <a:spcPct val="100000"/>
+              </a:lnSpc>
+              <a:spcBef>
+                <a:spcPts val="0"/>
+              </a:spcBef>
+              <a:spcAft>
+                <a:spcPts val="0"/>
+              </a:spcAft>
+              <a:buSzPts val="1400"/>
+              <a:buNone/>
+            </a:pPr>
+            <a:r>
+              <a:rPr lang="es-CO"/>
+              <a:t>Objetivo general</a:t>
+            </a:r>
+            <a:endParaRPr/>
+          </a:p>
+        </p:txBody>
+      </p:sp>
+      <p:sp>
+        <p:nvSpPr>
+          <p:cNvPr id="77" name="Google Shape;77;p11"/>
+          <p:cNvSpPr txBox="1">
+            <a:spLocks noGrp="1"/>
+          </p:cNvSpPr>
+          <p:nvPr>
+            <p:ph type="body" idx="1"/>
+          </p:nvPr>
+        </p:nvSpPr>
+        <p:spPr>
+          <a:xfrm>
+            <a:off x="2011575" y="2578600"/>
+            <a:ext cx="8459400" cy="2398500"/>
+          </a:xfrm>
+          <a:prstGeom prst="rect">
+            <a:avLst/>
+          </a:prstGeom>
+          <a:noFill/>
+          <a:ln>
+            <a:noFill/>
+          </a:ln>
+        </p:spPr>
+        <p:txBody>
+          <a:bodyPr spcFirstLastPara="1" wrap="square" lIns="0" tIns="12700" rIns="0" bIns="0" anchor="t" anchorCtr="0">
+            <a:spAutoFit/>
+          </a:bodyPr>
+          <a:lstStyle/>
+          <a:p>
+            <a:pPr marL="457200" marR="5080" lvl="0" indent="-425450" algn="l" rtl="0">
+              <a:lnSpc>
+                <a:spcPct val="100000"/>
+              </a:lnSpc>
+              <a:spcBef>
+                <a:spcPts val="0"/>
+              </a:spcBef>
+              <a:spcAft>
+                <a:spcPts val="0"/>
+              </a:spcAft>
+              <a:buSzPts val="3100"/>
+              <a:buChar char="●"/>
+            </a:pPr>
+            <a:r>
+              <a:rPr lang="es-CO" sz="3100"/>
+              <a:t>Desarrollar una plataforma tipo red social que incremente la visibilidad de los artistas, facilitando de forma segura y con garantías el contacto de los artistas y la búsqueda de información sobre servicios artísticos.</a:t>
+            </a:r>
+            <a:endParaRPr sz="3400"/>
+          </a:p>
+        </p:txBody>
+      </p:sp>
+    </p:spTree>
+  </p:cSld>
+  <p:clrMapOvr>
+    <a:masterClrMapping/>
+  </p:clrMapOvr>
+</p:sld>
+</file>
+
+<file path=ppt/slides/slide5.xml><?xml version="1.0" encoding="utf-8"?>
+<p:sld xmlns:a="http://schemas.openxmlformats.org/drawingml/2006/main" xmlns:r="http://schemas.openxmlformats.org/officeDocument/2006/relationships" xmlns:p="http://schemas.openxmlformats.org/presentationml/2006/main">
+  <p:cSld>
+    <p:spTree>
+      <p:nvGrpSpPr>
+        <p:cNvPr id="1" name="Shape 69"/>
+        <p:cNvGrpSpPr/>
+        <p:nvPr/>
+      </p:nvGrpSpPr>
+      <p:grpSpPr>
+        <a:xfrm>
+          <a:off x="0" y="0"/>
+          <a:ext cx="0" cy="0"/>
+          <a:chOff x="0" y="0"/>
+          <a:chExt cx="0" cy="0"/>
+        </a:xfrm>
+      </p:grpSpPr>
+      <p:sp>
+        <p:nvSpPr>
+          <p:cNvPr id="70" name="Google Shape;70;p10"/>
+          <p:cNvSpPr txBox="1">
+            <a:spLocks noGrp="1"/>
+          </p:cNvSpPr>
+          <p:nvPr>
+            <p:ph type="title"/>
+          </p:nvPr>
+        </p:nvSpPr>
+        <p:spPr>
+          <a:xfrm>
+            <a:off x="529261" y="358447"/>
+            <a:ext cx="7123500" cy="567000"/>
+          </a:xfrm>
+          <a:prstGeom prst="rect">
+            <a:avLst/>
+          </a:prstGeom>
+          <a:noFill/>
+          <a:ln>
+            <a:noFill/>
+          </a:ln>
+        </p:spPr>
+        <p:txBody>
+          <a:bodyPr spcFirstLastPara="1" wrap="square" lIns="0" tIns="12700" rIns="0" bIns="0" anchor="t" anchorCtr="0">
+            <a:spAutoFit/>
+          </a:bodyPr>
+          <a:lstStyle/>
+          <a:p>
+            <a:pPr marL="12700" lvl="0" indent="0" algn="l" rtl="0">
               <a:lnSpc>
                 <a:spcPct val="100000"/>
               </a:lnSpc>
@@ -10077,12 +10388,12 @@
           </a:ln>
         </p:spPr>
         <p:txBody>
-          <a:bodyPr anchorCtr="0" anchor="t" bIns="0" lIns="0" spcFirstLastPara="1" rIns="0" wrap="square" tIns="12700">
+          <a:bodyPr spcFirstLastPara="1" wrap="square" lIns="0" tIns="12700" rIns="0" bIns="0" anchor="t" anchorCtr="0">
             <a:spAutoFit/>
           </a:bodyPr>
           <a:lstStyle/>
           <a:p>
-            <a:pPr indent="-406400" lvl="0" marL="457200" marR="5080" rtl="0" algn="l">
+            <a:pPr marL="457200" marR="5080" lvl="0" indent="-406400" algn="l" rtl="0">
               <a:lnSpc>
                 <a:spcPct val="115000"/>
               </a:lnSpc>
@@ -10102,7 +10413,7 @@
             <a:endParaRPr sz="2800"/>
           </a:p>
           <a:p>
-            <a:pPr indent="-406400" lvl="0" marL="457200" marR="5080" rtl="0" algn="l">
+            <a:pPr marL="457200" marR="5080" lvl="0" indent="-406400" algn="l" rtl="0">
               <a:lnSpc>
                 <a:spcPct val="115000"/>
               </a:lnSpc>
@@ -10122,7 +10433,7 @@
             <a:endParaRPr sz="2800"/>
           </a:p>
           <a:p>
-            <a:pPr indent="-406400" lvl="0" marL="457200" marR="5080" rtl="0" algn="l">
+            <a:pPr marL="457200" marR="5080" lvl="0" indent="-406400" algn="l" rtl="0">
               <a:lnSpc>
                 <a:spcPct val="115000"/>
               </a:lnSpc>
@@ -10142,7 +10453,7 @@
             <a:endParaRPr sz="2800"/>
           </a:p>
           <a:p>
-            <a:pPr indent="-406400" lvl="0" marL="457200" marR="5080" rtl="0" algn="l">
+            <a:pPr marL="457200" marR="5080" lvl="0" indent="-406400" algn="l" rtl="0">
               <a:lnSpc>
                 <a:spcPct val="115000"/>
               </a:lnSpc>
@@ -10159,7 +10470,7 @@
               <a:rPr lang="es-CO" sz="2800"/>
               <a:t>Construir el modulo de notificaciones del sistema</a:t>
             </a:r>
-            <a:endParaRPr b="0" i="0" sz="2800" u="none" cap="none" strike="noStrike">
+            <a:endParaRPr sz="2800" b="0" i="0" u="none" strike="noStrike" cap="none">
               <a:solidFill>
                 <a:srgbClr val="000000"/>
               </a:solidFill>
@@ -10179,133 +10490,12 @@
 </p:sld>
 </file>
 
-<file path=ppt/slides/slide5.xml><?xml version="1.0" encoding="utf-8"?>
-<p:sld xmlns:a="http://schemas.openxmlformats.org/drawingml/2006/main" xmlns:r="http://schemas.openxmlformats.org/officeDocument/2006/relationships" xmlns:mc="http://schemas.openxmlformats.org/markup-compatibility/2006" xmlns:mv="urn:schemas-microsoft-com:mac:vml" xmlns:p="http://schemas.openxmlformats.org/presentationml/2006/main" xmlns:c="http://schemas.openxmlformats.org/drawingml/2006/chart" xmlns:dgm="http://schemas.openxmlformats.org/drawingml/2006/diagram" xmlns:o="urn:schemas-microsoft-com:office:office" xmlns:v="urn:schemas-microsoft-com:vml" xmlns:pvml="urn:schemas-microsoft-com:office:powerpoint" xmlns:com="http://schemas.openxmlformats.org/drawingml/2006/compatibility" xmlns:p14="http://schemas.microsoft.com/office/powerpoint/2010/main" xmlns:p15="http://schemas.microsoft.com/office/powerpoint/2012/main" xmlns:ahyp="http://schemas.microsoft.com/office/drawing/2018/hyperlinkcolor">
+<file path=ppt/slides/slide6.xml><?xml version="1.0" encoding="utf-8"?>
+<p:sld xmlns:a="http://schemas.openxmlformats.org/drawingml/2006/main" xmlns:r="http://schemas.openxmlformats.org/officeDocument/2006/relationships" xmlns:p="http://schemas.openxmlformats.org/presentationml/2006/main">
   <p:cSld>
     <p:spTree>
       <p:nvGrpSpPr>
-        <p:cNvPr id="75" name="Shape 75"/>
-        <p:cNvGrpSpPr/>
-        <p:nvPr/>
-      </p:nvGrpSpPr>
-      <p:grpSpPr>
-        <a:xfrm>
-          <a:off x="0" y="0"/>
-          <a:ext cx="0" cy="0"/>
-          <a:chOff x="0" y="0"/>
-          <a:chExt cx="0" cy="0"/>
-        </a:xfrm>
-      </p:grpSpPr>
-      <p:sp>
-        <p:nvSpPr>
-          <p:cNvPr id="76" name="Google Shape;76;p11"/>
-          <p:cNvSpPr txBox="1"/>
-          <p:nvPr>
-            <p:ph type="title"/>
-          </p:nvPr>
-        </p:nvSpPr>
-        <p:spPr>
-          <a:xfrm>
-            <a:off x="529261" y="358447"/>
-            <a:ext cx="7123500" cy="567000"/>
-          </a:xfrm>
-          <a:prstGeom prst="rect">
-            <a:avLst/>
-          </a:prstGeom>
-          <a:noFill/>
-          <a:ln>
-            <a:noFill/>
-          </a:ln>
-        </p:spPr>
-        <p:txBody>
-          <a:bodyPr anchorCtr="0" anchor="t" bIns="0" lIns="0" spcFirstLastPara="1" rIns="0" wrap="square" tIns="12700">
-            <a:spAutoFit/>
-          </a:bodyPr>
-          <a:lstStyle/>
-          <a:p>
-            <a:pPr indent="0" lvl="0" marL="12700" rtl="0" algn="l">
-              <a:lnSpc>
-                <a:spcPct val="100000"/>
-              </a:lnSpc>
-              <a:spcBef>
-                <a:spcPts val="0"/>
-              </a:spcBef>
-              <a:spcAft>
-                <a:spcPts val="0"/>
-              </a:spcAft>
-              <a:buSzPts val="1400"/>
-              <a:buNone/>
-            </a:pPr>
-            <a:r>
-              <a:rPr lang="es-CO"/>
-              <a:t>Objetivo general</a:t>
-            </a:r>
-            <a:endParaRPr/>
-          </a:p>
-        </p:txBody>
-      </p:sp>
-      <p:sp>
-        <p:nvSpPr>
-          <p:cNvPr id="77" name="Google Shape;77;p11"/>
-          <p:cNvSpPr txBox="1"/>
-          <p:nvPr>
-            <p:ph idx="1" type="body"/>
-          </p:nvPr>
-        </p:nvSpPr>
-        <p:spPr>
-          <a:xfrm>
-            <a:off x="2011575" y="2578600"/>
-            <a:ext cx="8459400" cy="2398500"/>
-          </a:xfrm>
-          <a:prstGeom prst="rect">
-            <a:avLst/>
-          </a:prstGeom>
-          <a:noFill/>
-          <a:ln>
-            <a:noFill/>
-          </a:ln>
-        </p:spPr>
-        <p:txBody>
-          <a:bodyPr anchorCtr="0" anchor="t" bIns="0" lIns="0" spcFirstLastPara="1" rIns="0" wrap="square" tIns="12700">
-            <a:spAutoFit/>
-          </a:bodyPr>
-          <a:lstStyle/>
-          <a:p>
-            <a:pPr indent="-425450" lvl="0" marL="457200" marR="5080" rtl="0" algn="l">
-              <a:lnSpc>
-                <a:spcPct val="100000"/>
-              </a:lnSpc>
-              <a:spcBef>
-                <a:spcPts val="0"/>
-              </a:spcBef>
-              <a:spcAft>
-                <a:spcPts val="0"/>
-              </a:spcAft>
-              <a:buSzPts val="3100"/>
-              <a:buChar char="●"/>
-            </a:pPr>
-            <a:r>
-              <a:rPr lang="es-CO" sz="3100"/>
-              <a:t>Desarrollar una plataforma tipo red social que incremente la visibilidad de los artistas, facilitando de forma segura y con garantías el contacto de los artistas y la búsqueda de información sobre servicios artísticos.</a:t>
-            </a:r>
-            <a:endParaRPr sz="3400"/>
-          </a:p>
-        </p:txBody>
-      </p:sp>
-    </p:spTree>
-  </p:cSld>
-  <p:clrMapOvr>
-    <a:masterClrMapping/>
-  </p:clrMapOvr>
-</p:sld>
-</file>
-
-<file path=ppt/slides/slide6.xml><?xml version="1.0" encoding="utf-8"?>
-<p:sld xmlns:a="http://schemas.openxmlformats.org/drawingml/2006/main" xmlns:r="http://schemas.openxmlformats.org/officeDocument/2006/relationships" xmlns:mc="http://schemas.openxmlformats.org/markup-compatibility/2006" xmlns:mv="urn:schemas-microsoft-com:mac:vml" xmlns:p="http://schemas.openxmlformats.org/presentationml/2006/main" xmlns:c="http://schemas.openxmlformats.org/drawingml/2006/chart" xmlns:dgm="http://schemas.openxmlformats.org/drawingml/2006/diagram" xmlns:o="urn:schemas-microsoft-com:office:office" xmlns:v="urn:schemas-microsoft-com:vml" xmlns:pvml="urn:schemas-microsoft-com:office:powerpoint" xmlns:com="http://schemas.openxmlformats.org/drawingml/2006/compatibility" xmlns:p14="http://schemas.microsoft.com/office/powerpoint/2010/main" xmlns:p15="http://schemas.microsoft.com/office/powerpoint/2012/main" xmlns:ahyp="http://schemas.microsoft.com/office/drawing/2018/hyperlinkcolor">
-  <p:cSld>
-    <p:spTree>
-      <p:nvGrpSpPr>
-        <p:cNvPr id="81" name="Shape 81"/>
+        <p:cNvPr id="1" name="Shape 81"/>
         <p:cNvGrpSpPr/>
         <p:nvPr/>
       </p:nvGrpSpPr>
@@ -10320,7 +10510,9 @@
       <p:sp>
         <p:nvSpPr>
           <p:cNvPr id="82" name="Google Shape;82;p12"/>
-          <p:cNvSpPr txBox="1"/>
+          <p:cNvSpPr txBox="1">
+            <a:spLocks noGrp="1"/>
+          </p:cNvSpPr>
           <p:nvPr>
             <p:ph type="title"/>
           </p:nvPr>
@@ -10339,12 +10531,12 @@
           </a:ln>
         </p:spPr>
         <p:txBody>
-          <a:bodyPr anchorCtr="0" anchor="t" bIns="0" lIns="0" spcFirstLastPara="1" rIns="0" wrap="square" tIns="12700">
+          <a:bodyPr spcFirstLastPara="1" wrap="square" lIns="0" tIns="12700" rIns="0" bIns="0" anchor="t" anchorCtr="0">
             <a:spAutoFit/>
           </a:bodyPr>
           <a:lstStyle/>
           <a:p>
-            <a:pPr indent="0" lvl="0" marL="12700" rtl="0" algn="l">
+            <a:pPr marL="12700" lvl="0" indent="0" algn="l" rtl="0">
               <a:lnSpc>
                 <a:spcPct val="100000"/>
               </a:lnSpc>
@@ -10385,12 +10577,12 @@
           </a:ln>
         </p:spPr>
         <p:txBody>
-          <a:bodyPr anchorCtr="0" anchor="t" bIns="0" lIns="0" spcFirstLastPara="1" rIns="0" wrap="square" tIns="12700">
+          <a:bodyPr spcFirstLastPara="1" wrap="square" lIns="0" tIns="12700" rIns="0" bIns="0" anchor="t" anchorCtr="0">
             <a:spAutoFit/>
           </a:bodyPr>
           <a:lstStyle/>
           <a:p>
-            <a:pPr indent="0" lvl="0" marL="12700" marR="5080" rtl="0" algn="l">
+            <a:pPr marL="12700" marR="5080" lvl="0" indent="0" algn="l" rtl="0">
               <a:lnSpc>
                 <a:spcPct val="100000"/>
               </a:lnSpc>
@@ -10409,13 +10601,9 @@
             </a:pPr>
             <a:r>
               <a:rPr lang="es-CO" sz="2200"/>
-              <a:t>La base de datos de ArteNauta se conforma de 12 tablas con 4 </a:t>
+              <a:t>La base de datos de ArteNauta se conforma de 12 tablas con 4 módulos (Validacion de usuarios, notificaciones, conversaciones, publicaciones), tambien cuenta con inserciones de 50 datos por tabla y 10 consultas sencillas, subconsultas y joins</a:t>
             </a:r>
-            <a:r>
-              <a:rPr lang="es-CO" sz="2200"/>
-              <a:t>módulos (Validacion de usuarios, notificaciones, conversaciones, publicaciones), tambien cuenta con inserciones de 50 datos por tabla y 10 consultas sencillas, subconsultas y joins</a:t>
-            </a:r>
-            <a:endParaRPr b="0" i="0" sz="2200" u="none" cap="none" strike="noStrike">
+            <a:endParaRPr sz="2200" b="0" i="0" u="none" strike="noStrike" cap="none">
               <a:solidFill>
                 <a:srgbClr val="000000"/>
               </a:solidFill>
@@ -10464,11 +10652,11 @@
 </file>
 
 <file path=ppt/slides/slide7.xml><?xml version="1.0" encoding="utf-8"?>
-<p:sld xmlns:a="http://schemas.openxmlformats.org/drawingml/2006/main" xmlns:r="http://schemas.openxmlformats.org/officeDocument/2006/relationships" xmlns:mc="http://schemas.openxmlformats.org/markup-compatibility/2006" xmlns:mv="urn:schemas-microsoft-com:mac:vml" xmlns:p="http://schemas.openxmlformats.org/presentationml/2006/main" xmlns:c="http://schemas.openxmlformats.org/drawingml/2006/chart" xmlns:dgm="http://schemas.openxmlformats.org/drawingml/2006/diagram" xmlns:o="urn:schemas-microsoft-com:office:office" xmlns:v="urn:schemas-microsoft-com:vml" xmlns:pvml="urn:schemas-microsoft-com:office:powerpoint" xmlns:com="http://schemas.openxmlformats.org/drawingml/2006/compatibility" xmlns:p14="http://schemas.microsoft.com/office/powerpoint/2010/main" xmlns:p15="http://schemas.microsoft.com/office/powerpoint/2012/main" xmlns:ahyp="http://schemas.microsoft.com/office/drawing/2018/hyperlinkcolor">
+<p:sld xmlns:a="http://schemas.openxmlformats.org/drawingml/2006/main" xmlns:r="http://schemas.openxmlformats.org/officeDocument/2006/relationships" xmlns:p="http://schemas.openxmlformats.org/presentationml/2006/main">
   <p:cSld>
     <p:spTree>
       <p:nvGrpSpPr>
-        <p:cNvPr id="88" name="Shape 88"/>
+        <p:cNvPr id="1" name="Shape 88"/>
         <p:cNvGrpSpPr/>
         <p:nvPr/>
       </p:nvGrpSpPr>
@@ -10483,7 +10671,9 @@
       <p:sp>
         <p:nvSpPr>
           <p:cNvPr id="89" name="Google Shape;89;p13"/>
-          <p:cNvSpPr txBox="1"/>
+          <p:cNvSpPr txBox="1">
+            <a:spLocks noGrp="1"/>
+          </p:cNvSpPr>
           <p:nvPr>
             <p:ph type="title"/>
           </p:nvPr>
@@ -10502,12 +10692,12 @@
           </a:ln>
         </p:spPr>
         <p:txBody>
-          <a:bodyPr anchorCtr="0" anchor="t" bIns="0" lIns="0" spcFirstLastPara="1" rIns="0" wrap="square" tIns="12700">
+          <a:bodyPr spcFirstLastPara="1" wrap="square" lIns="0" tIns="12700" rIns="0" bIns="0" anchor="t" anchorCtr="0">
             <a:spAutoFit/>
           </a:bodyPr>
           <a:lstStyle/>
           <a:p>
-            <a:pPr indent="0" lvl="0" marL="12700" rtl="0" algn="l">
+            <a:pPr marL="12700" lvl="0" indent="0" algn="l" rtl="0">
               <a:lnSpc>
                 <a:spcPct val="100000"/>
               </a:lnSpc>
@@ -10522,11 +10712,7 @@
             </a:pPr>
             <a:r>
               <a:rPr lang="es-CO"/>
-              <a:t>U</a:t>
-            </a:r>
-            <a:r>
-              <a:rPr lang="es-CO"/>
-              <a:t>so de la base de datos a través de sentencias DML</a:t>
+              <a:t>Uso de la base de datos a través de sentencias DML</a:t>
             </a:r>
             <a:endParaRPr/>
           </a:p>
@@ -10552,12 +10738,12 @@
           </a:ln>
         </p:spPr>
         <p:txBody>
-          <a:bodyPr anchorCtr="0" anchor="t" bIns="0" lIns="0" spcFirstLastPara="1" rIns="0" wrap="square" tIns="12700">
+          <a:bodyPr spcFirstLastPara="1" wrap="square" lIns="0" tIns="12700" rIns="0" bIns="0" anchor="t" anchorCtr="0">
             <a:spAutoFit/>
           </a:bodyPr>
           <a:lstStyle/>
           <a:p>
-            <a:pPr indent="0" lvl="0" marL="12700" marR="5080" rtl="0" algn="l">
+            <a:pPr marL="12700" marR="5080" lvl="0" indent="0" algn="l" rtl="0">
               <a:lnSpc>
                 <a:spcPct val="100000"/>
               </a:lnSpc>
@@ -10576,13 +10762,9 @@
             </a:pPr>
             <a:r>
               <a:rPr lang="es-CO" sz="2200"/>
-              <a:t>En las tablas de la base de datos se contaran con 50 inserciones de datos las cuales simulan la infromacion que se </a:t>
+              <a:t>En las tablas de la base de datos se contaran con 50 inserciones de datos las cuales simulan la infromacion que se guardará desde el sistema</a:t>
             </a:r>
-            <a:r>
-              <a:rPr lang="es-CO" sz="2200"/>
-              <a:t>guardará desde el sistema</a:t>
-            </a:r>
-            <a:endParaRPr b="0" i="0" sz="2200" u="none" cap="none" strike="noStrike">
+            <a:endParaRPr sz="2200" b="0" i="0" u="none" strike="noStrike" cap="none">
               <a:solidFill>
                 <a:srgbClr val="000000"/>
               </a:solidFill>
@@ -10631,11 +10813,11 @@
 </file>
 
 <file path=ppt/slides/slide8.xml><?xml version="1.0" encoding="utf-8"?>
-<p:sld xmlns:a="http://schemas.openxmlformats.org/drawingml/2006/main" xmlns:r="http://schemas.openxmlformats.org/officeDocument/2006/relationships" xmlns:mc="http://schemas.openxmlformats.org/markup-compatibility/2006" xmlns:mv="urn:schemas-microsoft-com:mac:vml" xmlns:p="http://schemas.openxmlformats.org/presentationml/2006/main" xmlns:c="http://schemas.openxmlformats.org/drawingml/2006/chart" xmlns:dgm="http://schemas.openxmlformats.org/drawingml/2006/diagram" xmlns:o="urn:schemas-microsoft-com:office:office" xmlns:v="urn:schemas-microsoft-com:vml" xmlns:pvml="urn:schemas-microsoft-com:office:powerpoint" xmlns:com="http://schemas.openxmlformats.org/drawingml/2006/compatibility" xmlns:p14="http://schemas.microsoft.com/office/powerpoint/2010/main" xmlns:p15="http://schemas.microsoft.com/office/powerpoint/2012/main" xmlns:ahyp="http://schemas.microsoft.com/office/drawing/2018/hyperlinkcolor">
+<p:sld xmlns:a="http://schemas.openxmlformats.org/drawingml/2006/main" xmlns:r="http://schemas.openxmlformats.org/officeDocument/2006/relationships" xmlns:p="http://schemas.openxmlformats.org/presentationml/2006/main">
   <p:cSld>
     <p:spTree>
       <p:nvGrpSpPr>
-        <p:cNvPr id="95" name="Shape 95"/>
+        <p:cNvPr id="1" name="Shape 95"/>
         <p:cNvGrpSpPr/>
         <p:nvPr/>
       </p:nvGrpSpPr>
@@ -10650,7 +10832,9 @@
       <p:sp>
         <p:nvSpPr>
           <p:cNvPr id="96" name="Google Shape;96;p14"/>
-          <p:cNvSpPr txBox="1"/>
+          <p:cNvSpPr txBox="1">
+            <a:spLocks noGrp="1"/>
+          </p:cNvSpPr>
           <p:nvPr>
             <p:ph type="title"/>
           </p:nvPr>
@@ -10669,12 +10853,12 @@
           </a:ln>
         </p:spPr>
         <p:txBody>
-          <a:bodyPr anchorCtr="0" anchor="t" bIns="0" lIns="0" spcFirstLastPara="1" rIns="0" wrap="square" tIns="12700">
+          <a:bodyPr spcFirstLastPara="1" wrap="square" lIns="0" tIns="12700" rIns="0" bIns="0" anchor="t" anchorCtr="0">
             <a:spAutoFit/>
           </a:bodyPr>
           <a:lstStyle/>
           <a:p>
-            <a:pPr indent="0" lvl="0" marL="12700" rtl="0" algn="l">
+            <a:pPr marL="12700" lvl="0" indent="0" algn="l" rtl="0">
               <a:lnSpc>
                 <a:spcPct val="100000"/>
               </a:lnSpc>
@@ -10689,15 +10873,7 @@
             </a:pPr>
             <a:r>
               <a:rPr lang="es-CO"/>
-              <a:t>Uso de la base de datos </a:t>
-            </a:r>
-            <a:r>
-              <a:rPr lang="es-CO"/>
-              <a:t>a través</a:t>
-            </a:r>
-            <a:r>
-              <a:rPr lang="es-CO"/>
-              <a:t> de sentencias DQL</a:t>
+              <a:t>Uso de la base de datos a través de sentencias DQL</a:t>
             </a:r>
             <a:endParaRPr/>
           </a:p>
@@ -10723,12 +10899,12 @@
           </a:ln>
         </p:spPr>
         <p:txBody>
-          <a:bodyPr anchorCtr="0" anchor="t" bIns="0" lIns="0" spcFirstLastPara="1" rIns="0" wrap="square" tIns="12700">
+          <a:bodyPr spcFirstLastPara="1" wrap="square" lIns="0" tIns="12700" rIns="0" bIns="0" anchor="t" anchorCtr="0">
             <a:spAutoFit/>
           </a:bodyPr>
           <a:lstStyle/>
           <a:p>
-            <a:pPr indent="0" lvl="0" marL="12700" marR="5080" rtl="0" algn="l">
+            <a:pPr marL="12700" marR="5080" lvl="0" indent="0" algn="l" rtl="0">
               <a:lnSpc>
                 <a:spcPct val="100000"/>
               </a:lnSpc>
@@ -10749,7 +10925,7 @@
               <a:rPr lang="es-CO" sz="2200"/>
               <a:t>Las consultas DQL se usaran para solicitar y analizar informacion de los datos que se encuentras dentro de las tablas</a:t>
             </a:r>
-            <a:endParaRPr b="0" i="0" sz="2200" u="none" cap="none" strike="noStrike">
+            <a:endParaRPr sz="2200" b="0" i="0" u="none" strike="noStrike" cap="none">
               <a:solidFill>
                 <a:srgbClr val="000000"/>
               </a:solidFill>
@@ -10798,11 +10974,11 @@
 </file>
 
 <file path=ppt/slides/slide9.xml><?xml version="1.0" encoding="utf-8"?>
-<p:sld xmlns:a="http://schemas.openxmlformats.org/drawingml/2006/main" xmlns:r="http://schemas.openxmlformats.org/officeDocument/2006/relationships" xmlns:mc="http://schemas.openxmlformats.org/markup-compatibility/2006" xmlns:mv="urn:schemas-microsoft-com:mac:vml" xmlns:p="http://schemas.openxmlformats.org/presentationml/2006/main" xmlns:c="http://schemas.openxmlformats.org/drawingml/2006/chart" xmlns:dgm="http://schemas.openxmlformats.org/drawingml/2006/diagram" xmlns:o="urn:schemas-microsoft-com:office:office" xmlns:v="urn:schemas-microsoft-com:vml" xmlns:pvml="urn:schemas-microsoft-com:office:powerpoint" xmlns:com="http://schemas.openxmlformats.org/drawingml/2006/compatibility" xmlns:p14="http://schemas.microsoft.com/office/powerpoint/2010/main" xmlns:p15="http://schemas.microsoft.com/office/powerpoint/2012/main" xmlns:ahyp="http://schemas.microsoft.com/office/drawing/2018/hyperlinkcolor">
+<p:sld xmlns:a="http://schemas.openxmlformats.org/drawingml/2006/main" xmlns:r="http://schemas.openxmlformats.org/officeDocument/2006/relationships" xmlns:p="http://schemas.openxmlformats.org/presentationml/2006/main">
   <p:cSld>
     <p:spTree>
       <p:nvGrpSpPr>
-        <p:cNvPr id="102" name="Shape 102"/>
+        <p:cNvPr id="1" name="Shape 102"/>
         <p:cNvGrpSpPr/>
         <p:nvPr/>
       </p:nvGrpSpPr>
@@ -10817,7 +10993,9 @@
       <p:sp>
         <p:nvSpPr>
           <p:cNvPr id="103" name="Google Shape;103;p15"/>
-          <p:cNvSpPr txBox="1"/>
+          <p:cNvSpPr txBox="1">
+            <a:spLocks noGrp="1"/>
+          </p:cNvSpPr>
           <p:nvPr>
             <p:ph type="title"/>
           </p:nvPr>
@@ -10836,12 +11014,12 @@
           </a:ln>
         </p:spPr>
         <p:txBody>
-          <a:bodyPr anchorCtr="0" anchor="t" bIns="0" lIns="0" spcFirstLastPara="1" rIns="0" wrap="square" tIns="12700">
+          <a:bodyPr spcFirstLastPara="1" wrap="square" lIns="0" tIns="12700" rIns="0" bIns="0" anchor="t" anchorCtr="0">
             <a:spAutoFit/>
           </a:bodyPr>
           <a:lstStyle/>
           <a:p>
-            <a:pPr indent="0" lvl="0" marL="12700" rtl="0" algn="l">
+            <a:pPr marL="12700" lvl="0" indent="0" algn="l" rtl="0">
               <a:lnSpc>
                 <a:spcPct val="100000"/>
               </a:lnSpc>
@@ -10882,12 +11060,12 @@
           </a:ln>
         </p:spPr>
         <p:txBody>
-          <a:bodyPr anchorCtr="0" anchor="t" bIns="0" lIns="0" spcFirstLastPara="1" rIns="0" wrap="square" tIns="12700">
+          <a:bodyPr spcFirstLastPara="1" wrap="square" lIns="0" tIns="12700" rIns="0" bIns="0" anchor="t" anchorCtr="0">
             <a:spAutoFit/>
           </a:bodyPr>
           <a:lstStyle/>
           <a:p>
-            <a:pPr indent="0" lvl="0" marL="12700" marR="5080" rtl="0" algn="l">
+            <a:pPr marL="12700" marR="5080" lvl="0" indent="0" algn="l" rtl="0">
               <a:lnSpc>
                 <a:spcPct val="100000"/>
               </a:lnSpc>
@@ -10908,7 +11086,7 @@
               <a:rPr lang="es-CO" sz="2200"/>
               <a:t>Los procedimientos almacenados de la base de datos ayudan a usar instrucciones SQL, ejecutarlas y reutilizarlas para un mayor rendimiento y seguridad</a:t>
             </a:r>
-            <a:endParaRPr b="0" i="0" sz="2200" u="none" cap="none" strike="noStrike">
+            <a:endParaRPr sz="2200" b="0" i="0" u="none" strike="noStrike" cap="none">
               <a:solidFill>
                 <a:srgbClr val="000000"/>
               </a:solidFill>
@@ -10957,7 +11135,7 @@
 </file>
 
 <file path=ppt/theme/theme1.xml><?xml version="1.0" encoding="utf-8"?>
-<a:theme xmlns:a="http://schemas.openxmlformats.org/drawingml/2006/main" xmlns:r="http://schemas.openxmlformats.org/officeDocument/2006/relationships" name="Office Theme">
+<a:theme xmlns:a="http://schemas.openxmlformats.org/drawingml/2006/main" name="Office Theme">
   <a:themeElements>
     <a:clrScheme name="Office">
       <a:dk1>
@@ -11232,11 +11410,13 @@
       </a:bgFillStyleLst>
     </a:fmtScheme>
   </a:themeElements>
+  <a:objectDefaults/>
+  <a:extraClrSchemeLst/>
 </a:theme>
 </file>
 
 <file path=ppt/theme/theme2.xml><?xml version="1.0" encoding="utf-8"?>
-<a:theme xmlns:a="http://schemas.openxmlformats.org/drawingml/2006/main" xmlns:r="http://schemas.openxmlformats.org/officeDocument/2006/relationships">
+<a:theme xmlns:a="http://schemas.openxmlformats.org/drawingml/2006/main">
   <a:themeElements>
     <a:clrScheme name="Default">
       <a:dk1>
@@ -11511,5 +11691,7 @@
       </a:bgFillStyleLst>
     </a:fmtScheme>
   </a:themeElements>
+  <a:objectDefaults/>
+  <a:extraClrSchemeLst/>
 </a:theme>
 </file>
--- a/Tercer Trimestre/Presentacion ArteNauta.pptx
+++ b/Tercer Trimestre/Presentacion ArteNauta.pptx
@@ -5,31 +5,30 @@
     <p:sldMasterId id="2147483653" r:id="rId1"/>
   </p:sldMasterIdLst>
   <p:notesMasterIdLst>
-    <p:notesMasterId r:id="rId14"/>
+    <p:notesMasterId r:id="rId13"/>
   </p:notesMasterIdLst>
   <p:sldIdLst>
     <p:sldId id="256" r:id="rId2"/>
     <p:sldId id="257" r:id="rId3"/>
     <p:sldId id="258" r:id="rId4"/>
     <p:sldId id="260" r:id="rId5"/>
-    <p:sldId id="259" r:id="rId6"/>
-    <p:sldId id="261" r:id="rId7"/>
-    <p:sldId id="262" r:id="rId8"/>
-    <p:sldId id="263" r:id="rId9"/>
-    <p:sldId id="264" r:id="rId10"/>
-    <p:sldId id="265" r:id="rId11"/>
-    <p:sldId id="266" r:id="rId12"/>
-    <p:sldId id="267" r:id="rId13"/>
+    <p:sldId id="270" r:id="rId6"/>
+    <p:sldId id="269" r:id="rId7"/>
+    <p:sldId id="268" r:id="rId8"/>
+    <p:sldId id="259" r:id="rId9"/>
+    <p:sldId id="265" r:id="rId10"/>
+    <p:sldId id="266" r:id="rId11"/>
+    <p:sldId id="267" r:id="rId12"/>
   </p:sldIdLst>
   <p:sldSz cx="12192000" cy="6858000"/>
   <p:notesSz cx="12192000" cy="6858000"/>
   <p:embeddedFontLst>
     <p:embeddedFont>
       <p:font typeface="Roboto" panose="02000000000000000000" pitchFamily="2" charset="0"/>
-      <p:regular r:id="rId15"/>
-      <p:bold r:id="rId16"/>
-      <p:italic r:id="rId17"/>
-      <p:boldItalic r:id="rId18"/>
+      <p:regular r:id="rId14"/>
+      <p:bold r:id="rId15"/>
+      <p:italic r:id="rId16"/>
+      <p:boldItalic r:id="rId17"/>
     </p:embeddedFont>
   </p:embeddedFontLst>
   <p:defaultTextStyle>
@@ -986,128 +985,6 @@
   <p:cSld>
     <p:spTree>
       <p:nvGrpSpPr>
-        <p:cNvPr id="1" name="Shape 106"/>
-        <p:cNvGrpSpPr/>
-        <p:nvPr/>
-      </p:nvGrpSpPr>
-      <p:grpSpPr>
-        <a:xfrm>
-          <a:off x="0" y="0"/>
-          <a:ext cx="0" cy="0"/>
-          <a:chOff x="0" y="0"/>
-          <a:chExt cx="0" cy="0"/>
-        </a:xfrm>
-      </p:grpSpPr>
-      <p:sp>
-        <p:nvSpPr>
-          <p:cNvPr id="107" name="Google Shape;107;p14:notes"/>
-          <p:cNvSpPr txBox="1">
-            <a:spLocks noGrp="1"/>
-          </p:cNvSpPr>
-          <p:nvPr>
-            <p:ph type="body" idx="1"/>
-          </p:nvPr>
-        </p:nvSpPr>
-        <p:spPr>
-          <a:xfrm>
-            <a:off x="1219200" y="3257550"/>
-            <a:ext cx="9753600" cy="3086100"/>
-          </a:xfrm>
-          <a:prstGeom prst="rect">
-            <a:avLst/>
-          </a:prstGeom>
-          <a:noFill/>
-          <a:ln>
-            <a:noFill/>
-          </a:ln>
-        </p:spPr>
-        <p:txBody>
-          <a:bodyPr spcFirstLastPara="1" wrap="square" lIns="91425" tIns="91425" rIns="91425" bIns="91425" anchor="t" anchorCtr="0">
-            <a:noAutofit/>
-          </a:bodyPr>
-          <a:lstStyle/>
-          <a:p>
-            <a:pPr marL="0" lvl="0" indent="0" algn="l" rtl="0">
-              <a:lnSpc>
-                <a:spcPct val="100000"/>
-              </a:lnSpc>
-              <a:spcBef>
-                <a:spcPts val="0"/>
-              </a:spcBef>
-              <a:spcAft>
-                <a:spcPts val="0"/>
-              </a:spcAft>
-              <a:buSzPts val="1100"/>
-              <a:buNone/>
-            </a:pPr>
-            <a:endParaRPr/>
-          </a:p>
-        </p:txBody>
-      </p:sp>
-      <p:sp>
-        <p:nvSpPr>
-          <p:cNvPr id="108" name="Google Shape;108;p14:notes"/>
-          <p:cNvSpPr>
-            <a:spLocks noGrp="1" noRot="1" noChangeAspect="1"/>
-          </p:cNvSpPr>
-          <p:nvPr>
-            <p:ph type="sldImg" idx="2"/>
-          </p:nvPr>
-        </p:nvSpPr>
-        <p:spPr>
-          <a:xfrm>
-            <a:off x="3810000" y="514350"/>
-            <a:ext cx="4573588" cy="2571750"/>
-          </a:xfrm>
-          <a:custGeom>
-            <a:avLst/>
-            <a:gdLst/>
-            <a:ahLst/>
-            <a:cxnLst/>
-            <a:rect l="l" t="t" r="r" b="b"/>
-            <a:pathLst>
-              <a:path w="120000" h="120000" extrusionOk="0">
-                <a:moveTo>
-                  <a:pt x="0" y="0"/>
-                </a:moveTo>
-                <a:lnTo>
-                  <a:pt x="120000" y="0"/>
-                </a:lnTo>
-                <a:lnTo>
-                  <a:pt x="120000" y="120000"/>
-                </a:lnTo>
-                <a:lnTo>
-                  <a:pt x="0" y="120000"/>
-                </a:lnTo>
-                <a:close/>
-              </a:path>
-            </a:pathLst>
-          </a:custGeom>
-          <a:noFill/>
-          <a:ln w="9525" cap="flat" cmpd="sng">
-            <a:solidFill>
-              <a:srgbClr val="000000"/>
-            </a:solidFill>
-            <a:prstDash val="solid"/>
-            <a:round/>
-            <a:headEnd type="none" w="sm" len="sm"/>
-            <a:tailEnd type="none" w="sm" len="sm"/>
-          </a:ln>
-        </p:spPr>
-      </p:sp>
-    </p:spTree>
-  </p:cSld>
-  <p:clrMapOvr>
-    <a:masterClrMapping/>
-  </p:clrMapOvr>
-</p:notes>
-</file>
-
-<file path=ppt/notesSlides/notesSlide11.xml><?xml version="1.0" encoding="utf-8"?>
-<p:notes xmlns:a="http://schemas.openxmlformats.org/drawingml/2006/main" xmlns:r="http://schemas.openxmlformats.org/officeDocument/2006/relationships" xmlns:p="http://schemas.openxmlformats.org/presentationml/2006/main" showMasterSp="0" showMasterPhAnim="0">
-  <p:cSld>
-    <p:spTree>
-      <p:nvGrpSpPr>
         <p:cNvPr id="1" name="Shape 113"/>
         <p:cNvGrpSpPr/>
         <p:nvPr/>
@@ -1225,7 +1102,7 @@
 </p:notes>
 </file>
 
-<file path=ppt/notesSlides/notesSlide12.xml><?xml version="1.0" encoding="utf-8"?>
+<file path=ppt/notesSlides/notesSlide11.xml><?xml version="1.0" encoding="utf-8"?>
 <p:notes xmlns:a="http://schemas.openxmlformats.org/drawingml/2006/main" xmlns:r="http://schemas.openxmlformats.org/officeDocument/2006/relationships" xmlns:p="http://schemas.openxmlformats.org/presentationml/2006/main" showMasterSp="0" showMasterPhAnim="0">
   <p:cSld>
     <p:spTree>
@@ -1718,6 +1595,441 @@
   <p:cSld>
     <p:spTree>
       <p:nvGrpSpPr>
+        <p:cNvPr id="1" name="Shape 72">
+          <a:extLst>
+            <a:ext uri="{FF2B5EF4-FFF2-40B4-BE49-F238E27FC236}">
+              <a16:creationId xmlns:a16="http://schemas.microsoft.com/office/drawing/2014/main" id="{E7FD21D7-789D-436D-454A-E5DB0F6FCA78}"/>
+            </a:ext>
+          </a:extLst>
+        </p:cNvPr>
+        <p:cNvGrpSpPr/>
+        <p:nvPr/>
+      </p:nvGrpSpPr>
+      <p:grpSpPr>
+        <a:xfrm>
+          <a:off x="0" y="0"/>
+          <a:ext cx="0" cy="0"/>
+          <a:chOff x="0" y="0"/>
+          <a:chExt cx="0" cy="0"/>
+        </a:xfrm>
+      </p:grpSpPr>
+      <p:sp>
+        <p:nvSpPr>
+          <p:cNvPr id="73" name="Google Shape;73;p6:notes">
+            <a:extLst>
+              <a:ext uri="{FF2B5EF4-FFF2-40B4-BE49-F238E27FC236}">
+                <a16:creationId xmlns:a16="http://schemas.microsoft.com/office/drawing/2014/main" id="{8E34F54D-C9FA-731A-67BA-ADEAEFA61A03}"/>
+              </a:ext>
+            </a:extLst>
+          </p:cNvPr>
+          <p:cNvSpPr txBox="1">
+            <a:spLocks noGrp="1"/>
+          </p:cNvSpPr>
+          <p:nvPr>
+            <p:ph type="body" idx="1"/>
+          </p:nvPr>
+        </p:nvSpPr>
+        <p:spPr>
+          <a:xfrm>
+            <a:off x="1219200" y="3257550"/>
+            <a:ext cx="9753600" cy="3086100"/>
+          </a:xfrm>
+          <a:prstGeom prst="rect">
+            <a:avLst/>
+          </a:prstGeom>
+          <a:noFill/>
+          <a:ln>
+            <a:noFill/>
+          </a:ln>
+        </p:spPr>
+        <p:txBody>
+          <a:bodyPr spcFirstLastPara="1" wrap="square" lIns="91425" tIns="91425" rIns="91425" bIns="91425" anchor="t" anchorCtr="0">
+            <a:noAutofit/>
+          </a:bodyPr>
+          <a:lstStyle/>
+          <a:p>
+            <a:pPr marL="0" lvl="0" indent="0" algn="l" rtl="0">
+              <a:lnSpc>
+                <a:spcPct val="100000"/>
+              </a:lnSpc>
+              <a:spcBef>
+                <a:spcPts val="0"/>
+              </a:spcBef>
+              <a:spcAft>
+                <a:spcPts val="0"/>
+              </a:spcAft>
+              <a:buSzPts val="1100"/>
+              <a:buNone/>
+            </a:pPr>
+            <a:endParaRPr/>
+          </a:p>
+        </p:txBody>
+      </p:sp>
+      <p:sp>
+        <p:nvSpPr>
+          <p:cNvPr id="74" name="Google Shape;74;p6:notes">
+            <a:extLst>
+              <a:ext uri="{FF2B5EF4-FFF2-40B4-BE49-F238E27FC236}">
+                <a16:creationId xmlns:a16="http://schemas.microsoft.com/office/drawing/2014/main" id="{492FAFAE-205F-6576-1C49-105828B9189D}"/>
+              </a:ext>
+            </a:extLst>
+          </p:cNvPr>
+          <p:cNvSpPr>
+            <a:spLocks noGrp="1" noRot="1" noChangeAspect="1"/>
+          </p:cNvSpPr>
+          <p:nvPr>
+            <p:ph type="sldImg" idx="2"/>
+          </p:nvPr>
+        </p:nvSpPr>
+        <p:spPr>
+          <a:xfrm>
+            <a:off x="3810000" y="514350"/>
+            <a:ext cx="4573588" cy="2571750"/>
+          </a:xfrm>
+          <a:custGeom>
+            <a:avLst/>
+            <a:gdLst/>
+            <a:ahLst/>
+            <a:cxnLst/>
+            <a:rect l="l" t="t" r="r" b="b"/>
+            <a:pathLst>
+              <a:path w="120000" h="120000" extrusionOk="0">
+                <a:moveTo>
+                  <a:pt x="0" y="0"/>
+                </a:moveTo>
+                <a:lnTo>
+                  <a:pt x="120000" y="0"/>
+                </a:lnTo>
+                <a:lnTo>
+                  <a:pt x="120000" y="120000"/>
+                </a:lnTo>
+                <a:lnTo>
+                  <a:pt x="0" y="120000"/>
+                </a:lnTo>
+                <a:close/>
+              </a:path>
+            </a:pathLst>
+          </a:custGeom>
+          <a:noFill/>
+          <a:ln w="9525" cap="flat" cmpd="sng">
+            <a:solidFill>
+              <a:srgbClr val="000000"/>
+            </a:solidFill>
+            <a:prstDash val="solid"/>
+            <a:round/>
+            <a:headEnd type="none" w="sm" len="sm"/>
+            <a:tailEnd type="none" w="sm" len="sm"/>
+          </a:ln>
+        </p:spPr>
+      </p:sp>
+    </p:spTree>
+    <p:extLst>
+      <p:ext uri="{BB962C8B-B14F-4D97-AF65-F5344CB8AC3E}">
+        <p14:creationId xmlns:p14="http://schemas.microsoft.com/office/powerpoint/2010/main" val="579526799"/>
+      </p:ext>
+    </p:extLst>
+  </p:cSld>
+  <p:clrMapOvr>
+    <a:masterClrMapping/>
+  </p:clrMapOvr>
+</p:notes>
+</file>
+
+<file path=ppt/notesSlides/notesSlide6.xml><?xml version="1.0" encoding="utf-8"?>
+<p:notes xmlns:a="http://schemas.openxmlformats.org/drawingml/2006/main" xmlns:r="http://schemas.openxmlformats.org/officeDocument/2006/relationships" xmlns:p="http://schemas.openxmlformats.org/presentationml/2006/main" showMasterSp="0" showMasterPhAnim="0">
+  <p:cSld>
+    <p:spTree>
+      <p:nvGrpSpPr>
+        <p:cNvPr id="1" name="Shape 72">
+          <a:extLst>
+            <a:ext uri="{FF2B5EF4-FFF2-40B4-BE49-F238E27FC236}">
+              <a16:creationId xmlns:a16="http://schemas.microsoft.com/office/drawing/2014/main" id="{9EF1D29D-9078-AC02-DE99-2F37371B98F3}"/>
+            </a:ext>
+          </a:extLst>
+        </p:cNvPr>
+        <p:cNvGrpSpPr/>
+        <p:nvPr/>
+      </p:nvGrpSpPr>
+      <p:grpSpPr>
+        <a:xfrm>
+          <a:off x="0" y="0"/>
+          <a:ext cx="0" cy="0"/>
+          <a:chOff x="0" y="0"/>
+          <a:chExt cx="0" cy="0"/>
+        </a:xfrm>
+      </p:grpSpPr>
+      <p:sp>
+        <p:nvSpPr>
+          <p:cNvPr id="73" name="Google Shape;73;p6:notes">
+            <a:extLst>
+              <a:ext uri="{FF2B5EF4-FFF2-40B4-BE49-F238E27FC236}">
+                <a16:creationId xmlns:a16="http://schemas.microsoft.com/office/drawing/2014/main" id="{5576B0C5-109C-8426-10F7-A7E2788FAB12}"/>
+              </a:ext>
+            </a:extLst>
+          </p:cNvPr>
+          <p:cNvSpPr txBox="1">
+            <a:spLocks noGrp="1"/>
+          </p:cNvSpPr>
+          <p:nvPr>
+            <p:ph type="body" idx="1"/>
+          </p:nvPr>
+        </p:nvSpPr>
+        <p:spPr>
+          <a:xfrm>
+            <a:off x="1219200" y="3257550"/>
+            <a:ext cx="9753600" cy="3086100"/>
+          </a:xfrm>
+          <a:prstGeom prst="rect">
+            <a:avLst/>
+          </a:prstGeom>
+          <a:noFill/>
+          <a:ln>
+            <a:noFill/>
+          </a:ln>
+        </p:spPr>
+        <p:txBody>
+          <a:bodyPr spcFirstLastPara="1" wrap="square" lIns="91425" tIns="91425" rIns="91425" bIns="91425" anchor="t" anchorCtr="0">
+            <a:noAutofit/>
+          </a:bodyPr>
+          <a:lstStyle/>
+          <a:p>
+            <a:pPr marL="0" lvl="0" indent="0" algn="l" rtl="0">
+              <a:lnSpc>
+                <a:spcPct val="100000"/>
+              </a:lnSpc>
+              <a:spcBef>
+                <a:spcPts val="0"/>
+              </a:spcBef>
+              <a:spcAft>
+                <a:spcPts val="0"/>
+              </a:spcAft>
+              <a:buSzPts val="1100"/>
+              <a:buNone/>
+            </a:pPr>
+            <a:endParaRPr/>
+          </a:p>
+        </p:txBody>
+      </p:sp>
+      <p:sp>
+        <p:nvSpPr>
+          <p:cNvPr id="74" name="Google Shape;74;p6:notes">
+            <a:extLst>
+              <a:ext uri="{FF2B5EF4-FFF2-40B4-BE49-F238E27FC236}">
+                <a16:creationId xmlns:a16="http://schemas.microsoft.com/office/drawing/2014/main" id="{26EB088E-1ADA-C382-5DD8-53AF97C7B004}"/>
+              </a:ext>
+            </a:extLst>
+          </p:cNvPr>
+          <p:cNvSpPr>
+            <a:spLocks noGrp="1" noRot="1" noChangeAspect="1"/>
+          </p:cNvSpPr>
+          <p:nvPr>
+            <p:ph type="sldImg" idx="2"/>
+          </p:nvPr>
+        </p:nvSpPr>
+        <p:spPr>
+          <a:xfrm>
+            <a:off x="3810000" y="514350"/>
+            <a:ext cx="4573588" cy="2571750"/>
+          </a:xfrm>
+          <a:custGeom>
+            <a:avLst/>
+            <a:gdLst/>
+            <a:ahLst/>
+            <a:cxnLst/>
+            <a:rect l="l" t="t" r="r" b="b"/>
+            <a:pathLst>
+              <a:path w="120000" h="120000" extrusionOk="0">
+                <a:moveTo>
+                  <a:pt x="0" y="0"/>
+                </a:moveTo>
+                <a:lnTo>
+                  <a:pt x="120000" y="0"/>
+                </a:lnTo>
+                <a:lnTo>
+                  <a:pt x="120000" y="120000"/>
+                </a:lnTo>
+                <a:lnTo>
+                  <a:pt x="0" y="120000"/>
+                </a:lnTo>
+                <a:close/>
+              </a:path>
+            </a:pathLst>
+          </a:custGeom>
+          <a:noFill/>
+          <a:ln w="9525" cap="flat" cmpd="sng">
+            <a:solidFill>
+              <a:srgbClr val="000000"/>
+            </a:solidFill>
+            <a:prstDash val="solid"/>
+            <a:round/>
+            <a:headEnd type="none" w="sm" len="sm"/>
+            <a:tailEnd type="none" w="sm" len="sm"/>
+          </a:ln>
+        </p:spPr>
+      </p:sp>
+    </p:spTree>
+    <p:extLst>
+      <p:ext uri="{BB962C8B-B14F-4D97-AF65-F5344CB8AC3E}">
+        <p14:creationId xmlns:p14="http://schemas.microsoft.com/office/powerpoint/2010/main" val="1531073208"/>
+      </p:ext>
+    </p:extLst>
+  </p:cSld>
+  <p:clrMapOvr>
+    <a:masterClrMapping/>
+  </p:clrMapOvr>
+</p:notes>
+</file>
+
+<file path=ppt/notesSlides/notesSlide7.xml><?xml version="1.0" encoding="utf-8"?>
+<p:notes xmlns:a="http://schemas.openxmlformats.org/drawingml/2006/main" xmlns:r="http://schemas.openxmlformats.org/officeDocument/2006/relationships" xmlns:p="http://schemas.openxmlformats.org/presentationml/2006/main" showMasterSp="0" showMasterPhAnim="0">
+  <p:cSld>
+    <p:spTree>
+      <p:nvGrpSpPr>
+        <p:cNvPr id="1" name="Shape 72">
+          <a:extLst>
+            <a:ext uri="{FF2B5EF4-FFF2-40B4-BE49-F238E27FC236}">
+              <a16:creationId xmlns:a16="http://schemas.microsoft.com/office/drawing/2014/main" id="{82CD2ED1-B446-09CB-0DAF-DC79D7620E00}"/>
+            </a:ext>
+          </a:extLst>
+        </p:cNvPr>
+        <p:cNvGrpSpPr/>
+        <p:nvPr/>
+      </p:nvGrpSpPr>
+      <p:grpSpPr>
+        <a:xfrm>
+          <a:off x="0" y="0"/>
+          <a:ext cx="0" cy="0"/>
+          <a:chOff x="0" y="0"/>
+          <a:chExt cx="0" cy="0"/>
+        </a:xfrm>
+      </p:grpSpPr>
+      <p:sp>
+        <p:nvSpPr>
+          <p:cNvPr id="73" name="Google Shape;73;p6:notes">
+            <a:extLst>
+              <a:ext uri="{FF2B5EF4-FFF2-40B4-BE49-F238E27FC236}">
+                <a16:creationId xmlns:a16="http://schemas.microsoft.com/office/drawing/2014/main" id="{A6599DA9-4FE2-3699-803A-9B1FB669416A}"/>
+              </a:ext>
+            </a:extLst>
+          </p:cNvPr>
+          <p:cNvSpPr txBox="1">
+            <a:spLocks noGrp="1"/>
+          </p:cNvSpPr>
+          <p:nvPr>
+            <p:ph type="body" idx="1"/>
+          </p:nvPr>
+        </p:nvSpPr>
+        <p:spPr>
+          <a:xfrm>
+            <a:off x="1219200" y="3257550"/>
+            <a:ext cx="9753600" cy="3086100"/>
+          </a:xfrm>
+          <a:prstGeom prst="rect">
+            <a:avLst/>
+          </a:prstGeom>
+          <a:noFill/>
+          <a:ln>
+            <a:noFill/>
+          </a:ln>
+        </p:spPr>
+        <p:txBody>
+          <a:bodyPr spcFirstLastPara="1" wrap="square" lIns="91425" tIns="91425" rIns="91425" bIns="91425" anchor="t" anchorCtr="0">
+            <a:noAutofit/>
+          </a:bodyPr>
+          <a:lstStyle/>
+          <a:p>
+            <a:pPr marL="0" lvl="0" indent="0" algn="l" rtl="0">
+              <a:lnSpc>
+                <a:spcPct val="100000"/>
+              </a:lnSpc>
+              <a:spcBef>
+                <a:spcPts val="0"/>
+              </a:spcBef>
+              <a:spcAft>
+                <a:spcPts val="0"/>
+              </a:spcAft>
+              <a:buSzPts val="1100"/>
+              <a:buNone/>
+            </a:pPr>
+            <a:endParaRPr/>
+          </a:p>
+        </p:txBody>
+      </p:sp>
+      <p:sp>
+        <p:nvSpPr>
+          <p:cNvPr id="74" name="Google Shape;74;p6:notes">
+            <a:extLst>
+              <a:ext uri="{FF2B5EF4-FFF2-40B4-BE49-F238E27FC236}">
+                <a16:creationId xmlns:a16="http://schemas.microsoft.com/office/drawing/2014/main" id="{62BF9814-62DD-0F87-9F14-8ACD5526F70B}"/>
+              </a:ext>
+            </a:extLst>
+          </p:cNvPr>
+          <p:cNvSpPr>
+            <a:spLocks noGrp="1" noRot="1" noChangeAspect="1"/>
+          </p:cNvSpPr>
+          <p:nvPr>
+            <p:ph type="sldImg" idx="2"/>
+          </p:nvPr>
+        </p:nvSpPr>
+        <p:spPr>
+          <a:xfrm>
+            <a:off x="3810000" y="514350"/>
+            <a:ext cx="4573588" cy="2571750"/>
+          </a:xfrm>
+          <a:custGeom>
+            <a:avLst/>
+            <a:gdLst/>
+            <a:ahLst/>
+            <a:cxnLst/>
+            <a:rect l="l" t="t" r="r" b="b"/>
+            <a:pathLst>
+              <a:path w="120000" h="120000" extrusionOk="0">
+                <a:moveTo>
+                  <a:pt x="0" y="0"/>
+                </a:moveTo>
+                <a:lnTo>
+                  <a:pt x="120000" y="0"/>
+                </a:lnTo>
+                <a:lnTo>
+                  <a:pt x="120000" y="120000"/>
+                </a:lnTo>
+                <a:lnTo>
+                  <a:pt x="0" y="120000"/>
+                </a:lnTo>
+                <a:close/>
+              </a:path>
+            </a:pathLst>
+          </a:custGeom>
+          <a:noFill/>
+          <a:ln w="9525" cap="flat" cmpd="sng">
+            <a:solidFill>
+              <a:srgbClr val="000000"/>
+            </a:solidFill>
+            <a:prstDash val="solid"/>
+            <a:round/>
+            <a:headEnd type="none" w="sm" len="sm"/>
+            <a:tailEnd type="none" w="sm" len="sm"/>
+          </a:ln>
+        </p:spPr>
+      </p:sp>
+    </p:spTree>
+    <p:extLst>
+      <p:ext uri="{BB962C8B-B14F-4D97-AF65-F5344CB8AC3E}">
+        <p14:creationId xmlns:p14="http://schemas.microsoft.com/office/powerpoint/2010/main" val="1385410145"/>
+      </p:ext>
+    </p:extLst>
+  </p:cSld>
+  <p:clrMapOvr>
+    <a:masterClrMapping/>
+  </p:clrMapOvr>
+</p:notes>
+</file>
+
+<file path=ppt/notesSlides/notesSlide8.xml><?xml version="1.0" encoding="utf-8"?>
+<p:notes xmlns:a="http://schemas.openxmlformats.org/drawingml/2006/main" xmlns:r="http://schemas.openxmlformats.org/officeDocument/2006/relationships" xmlns:p="http://schemas.openxmlformats.org/presentationml/2006/main" showMasterSp="0" showMasterPhAnim="0">
+  <p:cSld>
+    <p:spTree>
+      <p:nvGrpSpPr>
         <p:cNvPr id="1" name="Shape 66"/>
         <p:cNvGrpSpPr/>
         <p:nvPr/>
@@ -1835,12 +2147,12 @@
 </p:notes>
 </file>
 
-<file path=ppt/notesSlides/notesSlide6.xml><?xml version="1.0" encoding="utf-8"?>
+<file path=ppt/notesSlides/notesSlide9.xml><?xml version="1.0" encoding="utf-8"?>
 <p:notes xmlns:a="http://schemas.openxmlformats.org/drawingml/2006/main" xmlns:r="http://schemas.openxmlformats.org/officeDocument/2006/relationships" xmlns:p="http://schemas.openxmlformats.org/presentationml/2006/main" showMasterSp="0" showMasterPhAnim="0">
   <p:cSld>
     <p:spTree>
       <p:nvGrpSpPr>
-        <p:cNvPr id="1" name="Shape 78"/>
+        <p:cNvPr id="1" name="Shape 106"/>
         <p:cNvGrpSpPr/>
         <p:nvPr/>
       </p:nvGrpSpPr>
@@ -1854,7 +2166,7 @@
       </p:grpSpPr>
       <p:sp>
         <p:nvSpPr>
-          <p:cNvPr id="79" name="Google Shape;79;p7:notes"/>
+          <p:cNvPr id="107" name="Google Shape;107;p14:notes"/>
           <p:cNvSpPr txBox="1">
             <a:spLocks noGrp="1"/>
           </p:cNvSpPr>
@@ -1900,129 +2212,7 @@
       </p:sp>
       <p:sp>
         <p:nvSpPr>
-          <p:cNvPr id="80" name="Google Shape;80;p7:notes"/>
-          <p:cNvSpPr>
-            <a:spLocks noGrp="1" noRot="1" noChangeAspect="1"/>
-          </p:cNvSpPr>
-          <p:nvPr>
-            <p:ph type="sldImg" idx="2"/>
-          </p:nvPr>
-        </p:nvSpPr>
-        <p:spPr>
-          <a:xfrm>
-            <a:off x="2032400" y="514350"/>
-            <a:ext cx="8128400" cy="2571750"/>
-          </a:xfrm>
-          <a:custGeom>
-            <a:avLst/>
-            <a:gdLst/>
-            <a:ahLst/>
-            <a:cxnLst/>
-            <a:rect l="l" t="t" r="r" b="b"/>
-            <a:pathLst>
-              <a:path w="120000" h="120000" extrusionOk="0">
-                <a:moveTo>
-                  <a:pt x="0" y="0"/>
-                </a:moveTo>
-                <a:lnTo>
-                  <a:pt x="120000" y="0"/>
-                </a:lnTo>
-                <a:lnTo>
-                  <a:pt x="120000" y="120000"/>
-                </a:lnTo>
-                <a:lnTo>
-                  <a:pt x="0" y="120000"/>
-                </a:lnTo>
-                <a:close/>
-              </a:path>
-            </a:pathLst>
-          </a:custGeom>
-          <a:noFill/>
-          <a:ln w="9525" cap="flat" cmpd="sng">
-            <a:solidFill>
-              <a:srgbClr val="000000"/>
-            </a:solidFill>
-            <a:prstDash val="solid"/>
-            <a:round/>
-            <a:headEnd type="none" w="sm" len="sm"/>
-            <a:tailEnd type="none" w="sm" len="sm"/>
-          </a:ln>
-        </p:spPr>
-      </p:sp>
-    </p:spTree>
-  </p:cSld>
-  <p:clrMapOvr>
-    <a:masterClrMapping/>
-  </p:clrMapOvr>
-</p:notes>
-</file>
-
-<file path=ppt/notesSlides/notesSlide7.xml><?xml version="1.0" encoding="utf-8"?>
-<p:notes xmlns:a="http://schemas.openxmlformats.org/drawingml/2006/main" xmlns:r="http://schemas.openxmlformats.org/officeDocument/2006/relationships" xmlns:p="http://schemas.openxmlformats.org/presentationml/2006/main" showMasterSp="0" showMasterPhAnim="0">
-  <p:cSld>
-    <p:spTree>
-      <p:nvGrpSpPr>
-        <p:cNvPr id="1" name="Shape 85"/>
-        <p:cNvGrpSpPr/>
-        <p:nvPr/>
-      </p:nvGrpSpPr>
-      <p:grpSpPr>
-        <a:xfrm>
-          <a:off x="0" y="0"/>
-          <a:ext cx="0" cy="0"/>
-          <a:chOff x="0" y="0"/>
-          <a:chExt cx="0" cy="0"/>
-        </a:xfrm>
-      </p:grpSpPr>
-      <p:sp>
-        <p:nvSpPr>
-          <p:cNvPr id="86" name="Google Shape;86;p9:notes"/>
-          <p:cNvSpPr txBox="1">
-            <a:spLocks noGrp="1"/>
-          </p:cNvSpPr>
-          <p:nvPr>
-            <p:ph type="body" idx="1"/>
-          </p:nvPr>
-        </p:nvSpPr>
-        <p:spPr>
-          <a:xfrm>
-            <a:off x="1219200" y="3257550"/>
-            <a:ext cx="9753600" cy="3086100"/>
-          </a:xfrm>
-          <a:prstGeom prst="rect">
-            <a:avLst/>
-          </a:prstGeom>
-          <a:noFill/>
-          <a:ln>
-            <a:noFill/>
-          </a:ln>
-        </p:spPr>
-        <p:txBody>
-          <a:bodyPr spcFirstLastPara="1" wrap="square" lIns="91425" tIns="91425" rIns="91425" bIns="91425" anchor="t" anchorCtr="0">
-            <a:noAutofit/>
-          </a:bodyPr>
-          <a:lstStyle/>
-          <a:p>
-            <a:pPr marL="0" lvl="0" indent="0" algn="l" rtl="0">
-              <a:lnSpc>
-                <a:spcPct val="100000"/>
-              </a:lnSpc>
-              <a:spcBef>
-                <a:spcPts val="0"/>
-              </a:spcBef>
-              <a:spcAft>
-                <a:spcPts val="0"/>
-              </a:spcAft>
-              <a:buSzPts val="1100"/>
-              <a:buNone/>
-            </a:pPr>
-            <a:endParaRPr/>
-          </a:p>
-        </p:txBody>
-      </p:sp>
-      <p:sp>
-        <p:nvSpPr>
-          <p:cNvPr id="87" name="Google Shape;87;p9:notes"/>
+          <p:cNvPr id="108" name="Google Shape;108;p14:notes"/>
           <p:cNvSpPr>
             <a:spLocks noGrp="1" noRot="1" noChangeAspect="1"/>
           </p:cNvSpPr>
@@ -2033,251 +2223,7 @@
         <p:spPr>
           <a:xfrm>
             <a:off x="3810000" y="514350"/>
-            <a:ext cx="4573500" cy="2571900"/>
-          </a:xfrm>
-          <a:custGeom>
-            <a:avLst/>
-            <a:gdLst/>
-            <a:ahLst/>
-            <a:cxnLst/>
-            <a:rect l="l" t="t" r="r" b="b"/>
-            <a:pathLst>
-              <a:path w="120000" h="120000" extrusionOk="0">
-                <a:moveTo>
-                  <a:pt x="0" y="0"/>
-                </a:moveTo>
-                <a:lnTo>
-                  <a:pt x="120000" y="0"/>
-                </a:lnTo>
-                <a:lnTo>
-                  <a:pt x="120000" y="120000"/>
-                </a:lnTo>
-                <a:lnTo>
-                  <a:pt x="0" y="120000"/>
-                </a:lnTo>
-                <a:close/>
-              </a:path>
-            </a:pathLst>
-          </a:custGeom>
-          <a:noFill/>
-          <a:ln w="9525" cap="flat" cmpd="sng">
-            <a:solidFill>
-              <a:srgbClr val="000000"/>
-            </a:solidFill>
-            <a:prstDash val="solid"/>
-            <a:round/>
-            <a:headEnd type="none" w="sm" len="sm"/>
-            <a:tailEnd type="none" w="sm" len="sm"/>
-          </a:ln>
-        </p:spPr>
-      </p:sp>
-    </p:spTree>
-  </p:cSld>
-  <p:clrMapOvr>
-    <a:masterClrMapping/>
-  </p:clrMapOvr>
-</p:notes>
-</file>
-
-<file path=ppt/notesSlides/notesSlide8.xml><?xml version="1.0" encoding="utf-8"?>
-<p:notes xmlns:a="http://schemas.openxmlformats.org/drawingml/2006/main" xmlns:r="http://schemas.openxmlformats.org/officeDocument/2006/relationships" xmlns:p="http://schemas.openxmlformats.org/presentationml/2006/main" showMasterSp="0" showMasterPhAnim="0">
-  <p:cSld>
-    <p:spTree>
-      <p:nvGrpSpPr>
-        <p:cNvPr id="1" name="Shape 92"/>
-        <p:cNvGrpSpPr/>
-        <p:nvPr/>
-      </p:nvGrpSpPr>
-      <p:grpSpPr>
-        <a:xfrm>
-          <a:off x="0" y="0"/>
-          <a:ext cx="0" cy="0"/>
-          <a:chOff x="0" y="0"/>
-          <a:chExt cx="0" cy="0"/>
-        </a:xfrm>
-      </p:grpSpPr>
-      <p:sp>
-        <p:nvSpPr>
-          <p:cNvPr id="93" name="Google Shape;93;p11:notes"/>
-          <p:cNvSpPr txBox="1">
-            <a:spLocks noGrp="1"/>
-          </p:cNvSpPr>
-          <p:nvPr>
-            <p:ph type="body" idx="1"/>
-          </p:nvPr>
-        </p:nvSpPr>
-        <p:spPr>
-          <a:xfrm>
-            <a:off x="1219200" y="3257550"/>
-            <a:ext cx="9753600" cy="3086100"/>
-          </a:xfrm>
-          <a:prstGeom prst="rect">
-            <a:avLst/>
-          </a:prstGeom>
-          <a:noFill/>
-          <a:ln>
-            <a:noFill/>
-          </a:ln>
-        </p:spPr>
-        <p:txBody>
-          <a:bodyPr spcFirstLastPara="1" wrap="square" lIns="91425" tIns="91425" rIns="91425" bIns="91425" anchor="t" anchorCtr="0">
-            <a:noAutofit/>
-          </a:bodyPr>
-          <a:lstStyle/>
-          <a:p>
-            <a:pPr marL="0" lvl="0" indent="0" algn="l" rtl="0">
-              <a:lnSpc>
-                <a:spcPct val="100000"/>
-              </a:lnSpc>
-              <a:spcBef>
-                <a:spcPts val="0"/>
-              </a:spcBef>
-              <a:spcAft>
-                <a:spcPts val="0"/>
-              </a:spcAft>
-              <a:buSzPts val="1100"/>
-              <a:buNone/>
-            </a:pPr>
-            <a:endParaRPr/>
-          </a:p>
-        </p:txBody>
-      </p:sp>
-      <p:sp>
-        <p:nvSpPr>
-          <p:cNvPr id="94" name="Google Shape;94;p11:notes"/>
-          <p:cNvSpPr>
-            <a:spLocks noGrp="1" noRot="1" noChangeAspect="1"/>
-          </p:cNvSpPr>
-          <p:nvPr>
-            <p:ph type="sldImg" idx="2"/>
-          </p:nvPr>
-        </p:nvSpPr>
-        <p:spPr>
-          <a:xfrm>
-            <a:off x="2032400" y="514350"/>
-            <a:ext cx="8128400" cy="2571750"/>
-          </a:xfrm>
-          <a:custGeom>
-            <a:avLst/>
-            <a:gdLst/>
-            <a:ahLst/>
-            <a:cxnLst/>
-            <a:rect l="l" t="t" r="r" b="b"/>
-            <a:pathLst>
-              <a:path w="120000" h="120000" extrusionOk="0">
-                <a:moveTo>
-                  <a:pt x="0" y="0"/>
-                </a:moveTo>
-                <a:lnTo>
-                  <a:pt x="120000" y="0"/>
-                </a:lnTo>
-                <a:lnTo>
-                  <a:pt x="120000" y="120000"/>
-                </a:lnTo>
-                <a:lnTo>
-                  <a:pt x="0" y="120000"/>
-                </a:lnTo>
-                <a:close/>
-              </a:path>
-            </a:pathLst>
-          </a:custGeom>
-          <a:noFill/>
-          <a:ln w="9525" cap="flat" cmpd="sng">
-            <a:solidFill>
-              <a:srgbClr val="000000"/>
-            </a:solidFill>
-            <a:prstDash val="solid"/>
-            <a:round/>
-            <a:headEnd type="none" w="sm" len="sm"/>
-            <a:tailEnd type="none" w="sm" len="sm"/>
-          </a:ln>
-        </p:spPr>
-      </p:sp>
-    </p:spTree>
-  </p:cSld>
-  <p:clrMapOvr>
-    <a:masterClrMapping/>
-  </p:clrMapOvr>
-</p:notes>
-</file>
-
-<file path=ppt/notesSlides/notesSlide9.xml><?xml version="1.0" encoding="utf-8"?>
-<p:notes xmlns:a="http://schemas.openxmlformats.org/drawingml/2006/main" xmlns:r="http://schemas.openxmlformats.org/officeDocument/2006/relationships" xmlns:p="http://schemas.openxmlformats.org/presentationml/2006/main" showMasterSp="0" showMasterPhAnim="0">
-  <p:cSld>
-    <p:spTree>
-      <p:nvGrpSpPr>
-        <p:cNvPr id="1" name="Shape 99"/>
-        <p:cNvGrpSpPr/>
-        <p:nvPr/>
-      </p:nvGrpSpPr>
-      <p:grpSpPr>
-        <a:xfrm>
-          <a:off x="0" y="0"/>
-          <a:ext cx="0" cy="0"/>
-          <a:chOff x="0" y="0"/>
-          <a:chExt cx="0" cy="0"/>
-        </a:xfrm>
-      </p:grpSpPr>
-      <p:sp>
-        <p:nvSpPr>
-          <p:cNvPr id="100" name="Google Shape;100;p12:notes"/>
-          <p:cNvSpPr txBox="1">
-            <a:spLocks noGrp="1"/>
-          </p:cNvSpPr>
-          <p:nvPr>
-            <p:ph type="body" idx="1"/>
-          </p:nvPr>
-        </p:nvSpPr>
-        <p:spPr>
-          <a:xfrm>
-            <a:off x="1219200" y="3257550"/>
-            <a:ext cx="9753600" cy="3086100"/>
-          </a:xfrm>
-          <a:prstGeom prst="rect">
-            <a:avLst/>
-          </a:prstGeom>
-          <a:noFill/>
-          <a:ln>
-            <a:noFill/>
-          </a:ln>
-        </p:spPr>
-        <p:txBody>
-          <a:bodyPr spcFirstLastPara="1" wrap="square" lIns="91425" tIns="91425" rIns="91425" bIns="91425" anchor="t" anchorCtr="0">
-            <a:noAutofit/>
-          </a:bodyPr>
-          <a:lstStyle/>
-          <a:p>
-            <a:pPr marL="0" lvl="0" indent="0" algn="l" rtl="0">
-              <a:lnSpc>
-                <a:spcPct val="100000"/>
-              </a:lnSpc>
-              <a:spcBef>
-                <a:spcPts val="0"/>
-              </a:spcBef>
-              <a:spcAft>
-                <a:spcPts val="0"/>
-              </a:spcAft>
-              <a:buSzPts val="1100"/>
-              <a:buNone/>
-            </a:pPr>
-            <a:endParaRPr/>
-          </a:p>
-        </p:txBody>
-      </p:sp>
-      <p:sp>
-        <p:nvSpPr>
-          <p:cNvPr id="101" name="Google Shape;101;p12:notes"/>
-          <p:cNvSpPr>
-            <a:spLocks noGrp="1" noRot="1" noChangeAspect="1"/>
-          </p:cNvSpPr>
-          <p:nvPr>
-            <p:ph type="sldImg" idx="2"/>
-          </p:nvPr>
-        </p:nvSpPr>
-        <p:spPr>
-          <a:xfrm>
-            <a:off x="2032400" y="514350"/>
-            <a:ext cx="8128400" cy="2571750"/>
+            <a:ext cx="4573588" cy="2571750"/>
           </a:xfrm>
           <a:custGeom>
             <a:avLst/>
@@ -9280,167 +9226,6 @@
   <p:cSld>
     <p:spTree>
       <p:nvGrpSpPr>
-        <p:cNvPr id="1" name="Shape 109"/>
-        <p:cNvGrpSpPr/>
-        <p:nvPr/>
-      </p:nvGrpSpPr>
-      <p:grpSpPr>
-        <a:xfrm>
-          <a:off x="0" y="0"/>
-          <a:ext cx="0" cy="0"/>
-          <a:chOff x="0" y="0"/>
-          <a:chExt cx="0" cy="0"/>
-        </a:xfrm>
-      </p:grpSpPr>
-      <p:sp>
-        <p:nvSpPr>
-          <p:cNvPr id="110" name="Google Shape;110;p16"/>
-          <p:cNvSpPr txBox="1">
-            <a:spLocks noGrp="1"/>
-          </p:cNvSpPr>
-          <p:nvPr>
-            <p:ph type="title"/>
-          </p:nvPr>
-        </p:nvSpPr>
-        <p:spPr>
-          <a:xfrm>
-            <a:off x="513111" y="374572"/>
-            <a:ext cx="7123500" cy="567000"/>
-          </a:xfrm>
-          <a:prstGeom prst="rect">
-            <a:avLst/>
-          </a:prstGeom>
-          <a:noFill/>
-          <a:ln>
-            <a:noFill/>
-          </a:ln>
-        </p:spPr>
-        <p:txBody>
-          <a:bodyPr spcFirstLastPara="1" wrap="square" lIns="0" tIns="12700" rIns="0" bIns="0" anchor="t" anchorCtr="0">
-            <a:spAutoFit/>
-          </a:bodyPr>
-          <a:lstStyle/>
-          <a:p>
-            <a:pPr marL="0" lvl="0" indent="0" algn="l" rtl="0">
-              <a:lnSpc>
-                <a:spcPct val="100000"/>
-              </a:lnSpc>
-              <a:spcBef>
-                <a:spcPts val="0"/>
-              </a:spcBef>
-              <a:spcAft>
-                <a:spcPts val="0"/>
-              </a:spcAft>
-              <a:buSzPts val="1400"/>
-              <a:buNone/>
-            </a:pPr>
-            <a:r>
-              <a:rPr lang="es-CO"/>
-              <a:t>Front-End Funcional</a:t>
-            </a:r>
-            <a:endParaRPr/>
-          </a:p>
-        </p:txBody>
-      </p:sp>
-      <p:sp>
-        <p:nvSpPr>
-          <p:cNvPr id="111" name="Google Shape;111;p16"/>
-          <p:cNvSpPr txBox="1"/>
-          <p:nvPr/>
-        </p:nvSpPr>
-        <p:spPr>
-          <a:xfrm>
-            <a:off x="632925" y="1552700"/>
-            <a:ext cx="5989500" cy="1028700"/>
-          </a:xfrm>
-          <a:prstGeom prst="rect">
-            <a:avLst/>
-          </a:prstGeom>
-          <a:noFill/>
-          <a:ln>
-            <a:noFill/>
-          </a:ln>
-        </p:spPr>
-        <p:txBody>
-          <a:bodyPr spcFirstLastPara="1" wrap="square" lIns="0" tIns="12700" rIns="0" bIns="0" anchor="t" anchorCtr="0">
-            <a:spAutoFit/>
-          </a:bodyPr>
-          <a:lstStyle/>
-          <a:p>
-            <a:pPr marL="12700" marR="5080" lvl="0" indent="0" algn="l" rtl="0">
-              <a:lnSpc>
-                <a:spcPct val="100000"/>
-              </a:lnSpc>
-              <a:spcBef>
-                <a:spcPts val="0"/>
-              </a:spcBef>
-              <a:spcAft>
-                <a:spcPts val="0"/>
-              </a:spcAft>
-              <a:buClr>
-                <a:srgbClr val="000000"/>
-              </a:buClr>
-              <a:buSzPts val="1800"/>
-              <a:buFont typeface="Arial"/>
-              <a:buNone/>
-            </a:pPr>
-            <a:r>
-              <a:rPr lang="es-CO" sz="2200"/>
-              <a:t>El Front-End funcional fue desarrollado en base a la combinacion de la biblioteca de JS React y TailwindCSS como estilos.</a:t>
-            </a:r>
-            <a:endParaRPr sz="2200" b="0" i="0" u="none" strike="noStrike" cap="none">
-              <a:solidFill>
-                <a:srgbClr val="000000"/>
-              </a:solidFill>
-              <a:latin typeface="Arial"/>
-              <a:ea typeface="Arial"/>
-              <a:cs typeface="Arial"/>
-              <a:sym typeface="Arial"/>
-            </a:endParaRPr>
-          </a:p>
-        </p:txBody>
-      </p:sp>
-      <p:pic>
-        <p:nvPicPr>
-          <p:cNvPr id="112" name="Google Shape;112;p16"/>
-          <p:cNvPicPr preferRelativeResize="0"/>
-          <p:nvPr/>
-        </p:nvPicPr>
-        <p:blipFill>
-          <a:blip r:embed="rId3">
-            <a:alphaModFix/>
-          </a:blip>
-          <a:stretch>
-            <a:fillRect/>
-          </a:stretch>
-        </p:blipFill>
-        <p:spPr>
-          <a:xfrm>
-            <a:off x="4006950" y="2774925"/>
-            <a:ext cx="7746724" cy="3785375"/>
-          </a:xfrm>
-          <a:prstGeom prst="rect">
-            <a:avLst/>
-          </a:prstGeom>
-          <a:noFill/>
-          <a:ln>
-            <a:noFill/>
-          </a:ln>
-        </p:spPr>
-      </p:pic>
-    </p:spTree>
-  </p:cSld>
-  <p:clrMapOvr>
-    <a:masterClrMapping/>
-  </p:clrMapOvr>
-</p:sld>
-</file>
-
-<file path=ppt/slides/slide11.xml><?xml version="1.0" encoding="utf-8"?>
-<p:sld xmlns:a="http://schemas.openxmlformats.org/drawingml/2006/main" xmlns:r="http://schemas.openxmlformats.org/officeDocument/2006/relationships" xmlns:p="http://schemas.openxmlformats.org/presentationml/2006/main">
-  <p:cSld>
-    <p:spTree>
-      <p:nvGrpSpPr>
         <p:cNvPr id="1" name="Shape 116"/>
         <p:cNvGrpSpPr/>
         <p:nvPr/>
@@ -9563,30 +9348,32 @@
       </p:sp>
       <p:pic>
         <p:nvPicPr>
-          <p:cNvPr id="119" name="Google Shape;119;p17"/>
-          <p:cNvPicPr preferRelativeResize="0"/>
+          <p:cNvPr id="5" name="Imagen 4">
+            <a:extLst>
+              <a:ext uri="{FF2B5EF4-FFF2-40B4-BE49-F238E27FC236}">
+                <a16:creationId xmlns:a16="http://schemas.microsoft.com/office/drawing/2014/main" id="{6B7D9473-63B5-770E-1B93-81D7D47027FC}"/>
+              </a:ext>
+            </a:extLst>
+          </p:cNvPr>
+          <p:cNvPicPr>
+            <a:picLocks noChangeAspect="1"/>
+          </p:cNvPicPr>
           <p:nvPr/>
         </p:nvPicPr>
         <p:blipFill>
-          <a:blip r:embed="rId3">
-            <a:alphaModFix/>
-          </a:blip>
+          <a:blip r:embed="rId3"/>
           <a:stretch>
             <a:fillRect/>
           </a:stretch>
         </p:blipFill>
         <p:spPr>
           <a:xfrm>
-            <a:off x="1540800" y="2973725"/>
-            <a:ext cx="10582276" cy="3731875"/>
+            <a:off x="1868517" y="3039253"/>
+            <a:ext cx="9507816" cy="3460300"/>
           </a:xfrm>
           <a:prstGeom prst="rect">
             <a:avLst/>
           </a:prstGeom>
-          <a:noFill/>
-          <a:ln>
-            <a:noFill/>
-          </a:ln>
         </p:spPr>
       </p:pic>
     </p:spTree>
@@ -9597,7 +9384,7 @@
 </p:sld>
 </file>
 
-<file path=ppt/slides/slide12.xml><?xml version="1.0" encoding="utf-8"?>
+<file path=ppt/slides/slide11.xml><?xml version="1.0" encoding="utf-8"?>
 <p:sld xmlns:a="http://schemas.openxmlformats.org/drawingml/2006/main" xmlns:r="http://schemas.openxmlformats.org/officeDocument/2006/relationships" xmlns:p="http://schemas.openxmlformats.org/presentationml/2006/main">
   <p:cSld>
     <p:spTree>
@@ -10236,6 +10023,410 @@
               <a:buNone/>
             </a:pPr>
             <a:r>
+              <a:rPr lang="es-CO" dirty="0"/>
+              <a:t>Planteamiento del problema</a:t>
+            </a:r>
+            <a:endParaRPr dirty="0"/>
+          </a:p>
+        </p:txBody>
+      </p:sp>
+      <p:sp>
+        <p:nvSpPr>
+          <p:cNvPr id="77" name="Google Shape;77;p11"/>
+          <p:cNvSpPr txBox="1">
+            <a:spLocks noGrp="1"/>
+          </p:cNvSpPr>
+          <p:nvPr>
+            <p:ph type="body" idx="1"/>
+          </p:nvPr>
+        </p:nvSpPr>
+        <p:spPr>
+          <a:xfrm>
+            <a:off x="1866300" y="1910007"/>
+            <a:ext cx="8459400" cy="3952364"/>
+          </a:xfrm>
+          <a:prstGeom prst="rect">
+            <a:avLst/>
+          </a:prstGeom>
+          <a:noFill/>
+          <a:ln>
+            <a:noFill/>
+          </a:ln>
+        </p:spPr>
+        <p:txBody>
+          <a:bodyPr spcFirstLastPara="1" wrap="square" lIns="0" tIns="12700" rIns="0" bIns="0" anchor="t" anchorCtr="0">
+            <a:spAutoFit/>
+          </a:bodyPr>
+          <a:lstStyle/>
+          <a:p>
+            <a:pPr marR="5080" lvl="0" indent="-425450">
+              <a:buSzPts val="3100"/>
+              <a:buChar char="●"/>
+            </a:pPr>
+            <a:r>
+              <a:rPr lang="es-ES" sz="3200" dirty="0"/>
+              <a:t>Los aprendices del SENA y estudiantes de otras instituciones con habilidades artísticas; no cuentan con canales de apoyo y visibilidad para exhibir sus obras y ofrecer sus servicios; además, los interesados en arte pierden tiempo buscando artistas en distintos canales sin ningún tipo de garantías.</a:t>
+            </a:r>
+            <a:endParaRPr sz="3400" dirty="0"/>
+          </a:p>
+        </p:txBody>
+      </p:sp>
+    </p:spTree>
+  </p:cSld>
+  <p:clrMapOvr>
+    <a:masterClrMapping/>
+  </p:clrMapOvr>
+</p:sld>
+</file>
+
+<file path=ppt/slides/slide5.xml><?xml version="1.0" encoding="utf-8"?>
+<p:sld xmlns:a="http://schemas.openxmlformats.org/drawingml/2006/main" xmlns:r="http://schemas.openxmlformats.org/officeDocument/2006/relationships" xmlns:p="http://schemas.openxmlformats.org/presentationml/2006/main">
+  <p:cSld>
+    <p:spTree>
+      <p:nvGrpSpPr>
+        <p:cNvPr id="1" name="Shape 75">
+          <a:extLst>
+            <a:ext uri="{FF2B5EF4-FFF2-40B4-BE49-F238E27FC236}">
+              <a16:creationId xmlns:a16="http://schemas.microsoft.com/office/drawing/2014/main" id="{26F63470-2F53-EE1F-D69C-EB66A2F0BBF6}"/>
+            </a:ext>
+          </a:extLst>
+        </p:cNvPr>
+        <p:cNvGrpSpPr/>
+        <p:nvPr/>
+      </p:nvGrpSpPr>
+      <p:grpSpPr>
+        <a:xfrm>
+          <a:off x="0" y="0"/>
+          <a:ext cx="0" cy="0"/>
+          <a:chOff x="0" y="0"/>
+          <a:chExt cx="0" cy="0"/>
+        </a:xfrm>
+      </p:grpSpPr>
+      <p:sp>
+        <p:nvSpPr>
+          <p:cNvPr id="76" name="Google Shape;76;p11">
+            <a:extLst>
+              <a:ext uri="{FF2B5EF4-FFF2-40B4-BE49-F238E27FC236}">
+                <a16:creationId xmlns:a16="http://schemas.microsoft.com/office/drawing/2014/main" id="{DB64C1E8-8004-3F5B-5E45-DF71CC0C2953}"/>
+              </a:ext>
+            </a:extLst>
+          </p:cNvPr>
+          <p:cNvSpPr txBox="1">
+            <a:spLocks noGrp="1"/>
+          </p:cNvSpPr>
+          <p:nvPr>
+            <p:ph type="title"/>
+          </p:nvPr>
+        </p:nvSpPr>
+        <p:spPr>
+          <a:xfrm>
+            <a:off x="529261" y="358447"/>
+            <a:ext cx="7123500" cy="567000"/>
+          </a:xfrm>
+          <a:prstGeom prst="rect">
+            <a:avLst/>
+          </a:prstGeom>
+          <a:noFill/>
+          <a:ln>
+            <a:noFill/>
+          </a:ln>
+        </p:spPr>
+        <p:txBody>
+          <a:bodyPr spcFirstLastPara="1" wrap="square" lIns="0" tIns="12700" rIns="0" bIns="0" anchor="t" anchorCtr="0">
+            <a:spAutoFit/>
+          </a:bodyPr>
+          <a:lstStyle/>
+          <a:p>
+            <a:pPr marL="12700" lvl="0" indent="0" algn="l" rtl="0">
+              <a:lnSpc>
+                <a:spcPct val="100000"/>
+              </a:lnSpc>
+              <a:spcBef>
+                <a:spcPts val="0"/>
+              </a:spcBef>
+              <a:spcAft>
+                <a:spcPts val="0"/>
+              </a:spcAft>
+              <a:buSzPts val="1400"/>
+              <a:buNone/>
+            </a:pPr>
+            <a:r>
+              <a:rPr lang="es-CO" dirty="0"/>
+              <a:t>Pregunta problema</a:t>
+            </a:r>
+            <a:endParaRPr dirty="0"/>
+          </a:p>
+        </p:txBody>
+      </p:sp>
+      <p:sp>
+        <p:nvSpPr>
+          <p:cNvPr id="77" name="Google Shape;77;p11">
+            <a:extLst>
+              <a:ext uri="{FF2B5EF4-FFF2-40B4-BE49-F238E27FC236}">
+                <a16:creationId xmlns:a16="http://schemas.microsoft.com/office/drawing/2014/main" id="{E58A8FBD-94B4-082F-6C7C-0ED6F45D3C97}"/>
+              </a:ext>
+            </a:extLst>
+          </p:cNvPr>
+          <p:cNvSpPr txBox="1">
+            <a:spLocks noGrp="1"/>
+          </p:cNvSpPr>
+          <p:nvPr>
+            <p:ph type="body" idx="1"/>
+          </p:nvPr>
+        </p:nvSpPr>
+        <p:spPr>
+          <a:xfrm>
+            <a:off x="1866300" y="2870323"/>
+            <a:ext cx="8459400" cy="1982594"/>
+          </a:xfrm>
+          <a:prstGeom prst="rect">
+            <a:avLst/>
+          </a:prstGeom>
+          <a:noFill/>
+          <a:ln>
+            <a:noFill/>
+          </a:ln>
+        </p:spPr>
+        <p:txBody>
+          <a:bodyPr spcFirstLastPara="1" wrap="square" lIns="0" tIns="12700" rIns="0" bIns="0" anchor="t" anchorCtr="0">
+            <a:spAutoFit/>
+          </a:bodyPr>
+          <a:lstStyle/>
+          <a:p>
+            <a:pPr marL="31750" marR="5080" lvl="0" indent="0">
+              <a:buSzPts val="3100"/>
+            </a:pPr>
+            <a:r>
+              <a:rPr lang="es-ES" sz="3200" dirty="0"/>
+              <a:t>¿Cómo generar una visibilidad de los artistas aprendices y brindar a los clientes un contacto e información de servicios con garantías verificables?</a:t>
+            </a:r>
+            <a:endParaRPr sz="3400" dirty="0"/>
+          </a:p>
+        </p:txBody>
+      </p:sp>
+    </p:spTree>
+    <p:extLst>
+      <p:ext uri="{BB962C8B-B14F-4D97-AF65-F5344CB8AC3E}">
+        <p14:creationId xmlns:p14="http://schemas.microsoft.com/office/powerpoint/2010/main" val="2891656662"/>
+      </p:ext>
+    </p:extLst>
+  </p:cSld>
+  <p:clrMapOvr>
+    <a:masterClrMapping/>
+  </p:clrMapOvr>
+</p:sld>
+</file>
+
+<file path=ppt/slides/slide6.xml><?xml version="1.0" encoding="utf-8"?>
+<p:sld xmlns:a="http://schemas.openxmlformats.org/drawingml/2006/main" xmlns:r="http://schemas.openxmlformats.org/officeDocument/2006/relationships" xmlns:p="http://schemas.openxmlformats.org/presentationml/2006/main">
+  <p:cSld>
+    <p:spTree>
+      <p:nvGrpSpPr>
+        <p:cNvPr id="1" name="Shape 75">
+          <a:extLst>
+            <a:ext uri="{FF2B5EF4-FFF2-40B4-BE49-F238E27FC236}">
+              <a16:creationId xmlns:a16="http://schemas.microsoft.com/office/drawing/2014/main" id="{B59C33E1-986E-F939-0850-849029EEF808}"/>
+            </a:ext>
+          </a:extLst>
+        </p:cNvPr>
+        <p:cNvGrpSpPr/>
+        <p:nvPr/>
+      </p:nvGrpSpPr>
+      <p:grpSpPr>
+        <a:xfrm>
+          <a:off x="0" y="0"/>
+          <a:ext cx="0" cy="0"/>
+          <a:chOff x="0" y="0"/>
+          <a:chExt cx="0" cy="0"/>
+        </a:xfrm>
+      </p:grpSpPr>
+      <p:sp>
+        <p:nvSpPr>
+          <p:cNvPr id="76" name="Google Shape;76;p11">
+            <a:extLst>
+              <a:ext uri="{FF2B5EF4-FFF2-40B4-BE49-F238E27FC236}">
+                <a16:creationId xmlns:a16="http://schemas.microsoft.com/office/drawing/2014/main" id="{74A8ADD6-EF85-AF98-B141-777D770FFE31}"/>
+              </a:ext>
+            </a:extLst>
+          </p:cNvPr>
+          <p:cNvSpPr txBox="1">
+            <a:spLocks noGrp="1"/>
+          </p:cNvSpPr>
+          <p:nvPr>
+            <p:ph type="title"/>
+          </p:nvPr>
+        </p:nvSpPr>
+        <p:spPr>
+          <a:xfrm>
+            <a:off x="529261" y="358447"/>
+            <a:ext cx="7123500" cy="567000"/>
+          </a:xfrm>
+          <a:prstGeom prst="rect">
+            <a:avLst/>
+          </a:prstGeom>
+          <a:noFill/>
+          <a:ln>
+            <a:noFill/>
+          </a:ln>
+        </p:spPr>
+        <p:txBody>
+          <a:bodyPr spcFirstLastPara="1" wrap="square" lIns="0" tIns="12700" rIns="0" bIns="0" anchor="t" anchorCtr="0">
+            <a:spAutoFit/>
+          </a:bodyPr>
+          <a:lstStyle/>
+          <a:p>
+            <a:pPr marL="12700" lvl="0" indent="0" algn="l" rtl="0">
+              <a:lnSpc>
+                <a:spcPct val="100000"/>
+              </a:lnSpc>
+              <a:spcBef>
+                <a:spcPts val="0"/>
+              </a:spcBef>
+              <a:spcAft>
+                <a:spcPts val="0"/>
+              </a:spcAft>
+              <a:buSzPts val="1400"/>
+              <a:buNone/>
+            </a:pPr>
+            <a:r>
+              <a:rPr lang="es-CO" dirty="0"/>
+              <a:t>Justificación</a:t>
+            </a:r>
+            <a:endParaRPr dirty="0"/>
+          </a:p>
+        </p:txBody>
+      </p:sp>
+      <p:sp>
+        <p:nvSpPr>
+          <p:cNvPr id="77" name="Google Shape;77;p11">
+            <a:extLst>
+              <a:ext uri="{FF2B5EF4-FFF2-40B4-BE49-F238E27FC236}">
+                <a16:creationId xmlns:a16="http://schemas.microsoft.com/office/drawing/2014/main" id="{5F83B512-9C7E-3706-F978-1AD45288EC1E}"/>
+              </a:ext>
+            </a:extLst>
+          </p:cNvPr>
+          <p:cNvSpPr txBox="1">
+            <a:spLocks noGrp="1"/>
+          </p:cNvSpPr>
+          <p:nvPr>
+            <p:ph type="body" idx="1"/>
+          </p:nvPr>
+        </p:nvSpPr>
+        <p:spPr>
+          <a:xfrm>
+            <a:off x="1866300" y="1978834"/>
+            <a:ext cx="8459400" cy="3952364"/>
+          </a:xfrm>
+          <a:prstGeom prst="rect">
+            <a:avLst/>
+          </a:prstGeom>
+          <a:noFill/>
+          <a:ln>
+            <a:noFill/>
+          </a:ln>
+        </p:spPr>
+        <p:txBody>
+          <a:bodyPr spcFirstLastPara="1" wrap="square" lIns="0" tIns="12700" rIns="0" bIns="0" anchor="t" anchorCtr="0">
+            <a:spAutoFit/>
+          </a:bodyPr>
+          <a:lstStyle/>
+          <a:p>
+            <a:pPr marL="31750" marR="5080" lvl="0" indent="0">
+              <a:buSzPts val="3100"/>
+            </a:pPr>
+            <a:r>
+              <a:rPr lang="es-ES" sz="3200" dirty="0"/>
+              <a:t>La baja visibilidad y falta de garantías elevan tiempos y desconfianza por parte de potenciales clientes, intervenir permitirá reducir tiempos, aumentar contactos y fortalecer la confianza mediante verificación y evaluación, contando con el acompañamiento académico de instructores del SENA expertos del área artística.</a:t>
+            </a:r>
+            <a:endParaRPr sz="3400" dirty="0"/>
+          </a:p>
+        </p:txBody>
+      </p:sp>
+    </p:spTree>
+    <p:extLst>
+      <p:ext uri="{BB962C8B-B14F-4D97-AF65-F5344CB8AC3E}">
+        <p14:creationId xmlns:p14="http://schemas.microsoft.com/office/powerpoint/2010/main" val="2822999041"/>
+      </p:ext>
+    </p:extLst>
+  </p:cSld>
+  <p:clrMapOvr>
+    <a:masterClrMapping/>
+  </p:clrMapOvr>
+</p:sld>
+</file>
+
+<file path=ppt/slides/slide7.xml><?xml version="1.0" encoding="utf-8"?>
+<p:sld xmlns:a="http://schemas.openxmlformats.org/drawingml/2006/main" xmlns:r="http://schemas.openxmlformats.org/officeDocument/2006/relationships" xmlns:p="http://schemas.openxmlformats.org/presentationml/2006/main">
+  <p:cSld>
+    <p:spTree>
+      <p:nvGrpSpPr>
+        <p:cNvPr id="1" name="Shape 75">
+          <a:extLst>
+            <a:ext uri="{FF2B5EF4-FFF2-40B4-BE49-F238E27FC236}">
+              <a16:creationId xmlns:a16="http://schemas.microsoft.com/office/drawing/2014/main" id="{553D2554-B633-84BB-DF12-5DBB7B8F9A9C}"/>
+            </a:ext>
+          </a:extLst>
+        </p:cNvPr>
+        <p:cNvGrpSpPr/>
+        <p:nvPr/>
+      </p:nvGrpSpPr>
+      <p:grpSpPr>
+        <a:xfrm>
+          <a:off x="0" y="0"/>
+          <a:ext cx="0" cy="0"/>
+          <a:chOff x="0" y="0"/>
+          <a:chExt cx="0" cy="0"/>
+        </a:xfrm>
+      </p:grpSpPr>
+      <p:sp>
+        <p:nvSpPr>
+          <p:cNvPr id="76" name="Google Shape;76;p11">
+            <a:extLst>
+              <a:ext uri="{FF2B5EF4-FFF2-40B4-BE49-F238E27FC236}">
+                <a16:creationId xmlns:a16="http://schemas.microsoft.com/office/drawing/2014/main" id="{3EF2407D-8409-4310-0E2F-C99A0D211061}"/>
+              </a:ext>
+            </a:extLst>
+          </p:cNvPr>
+          <p:cNvSpPr txBox="1">
+            <a:spLocks noGrp="1"/>
+          </p:cNvSpPr>
+          <p:nvPr>
+            <p:ph type="title"/>
+          </p:nvPr>
+        </p:nvSpPr>
+        <p:spPr>
+          <a:xfrm>
+            <a:off x="529261" y="358447"/>
+            <a:ext cx="7123500" cy="567000"/>
+          </a:xfrm>
+          <a:prstGeom prst="rect">
+            <a:avLst/>
+          </a:prstGeom>
+          <a:noFill/>
+          <a:ln>
+            <a:noFill/>
+          </a:ln>
+        </p:spPr>
+        <p:txBody>
+          <a:bodyPr spcFirstLastPara="1" wrap="square" lIns="0" tIns="12700" rIns="0" bIns="0" anchor="t" anchorCtr="0">
+            <a:spAutoFit/>
+          </a:bodyPr>
+          <a:lstStyle/>
+          <a:p>
+            <a:pPr marL="12700" lvl="0" indent="0" algn="l" rtl="0">
+              <a:lnSpc>
+                <a:spcPct val="100000"/>
+              </a:lnSpc>
+              <a:spcBef>
+                <a:spcPts val="0"/>
+              </a:spcBef>
+              <a:spcAft>
+                <a:spcPts val="0"/>
+              </a:spcAft>
+              <a:buSzPts val="1400"/>
+              <a:buNone/>
+            </a:pPr>
+            <a:r>
               <a:rPr lang="es-CO"/>
               <a:t>Objetivo general</a:t>
             </a:r>
@@ -10245,7 +10436,13 @@
       </p:sp>
       <p:sp>
         <p:nvSpPr>
-          <p:cNvPr id="77" name="Google Shape;77;p11"/>
+          <p:cNvPr id="77" name="Google Shape;77;p11">
+            <a:extLst>
+              <a:ext uri="{FF2B5EF4-FFF2-40B4-BE49-F238E27FC236}">
+                <a16:creationId xmlns:a16="http://schemas.microsoft.com/office/drawing/2014/main" id="{381EC173-BB3F-7355-1FE3-4C5A168C0504}"/>
+              </a:ext>
+            </a:extLst>
+          </p:cNvPr>
           <p:cNvSpPr txBox="1">
             <a:spLocks noGrp="1"/>
           </p:cNvSpPr>
@@ -10286,14 +10483,19 @@
               <a:buChar char="●"/>
             </a:pPr>
             <a:r>
-              <a:rPr lang="es-CO" sz="3100"/>
-              <a:t>Desarrollar una plataforma tipo red social que incremente la visibilidad de los artistas, facilitando de forma segura y con garantías el contacto de los artistas y la búsqueda de información sobre servicios artísticos.</a:t>
+              <a:rPr lang="es-CO" sz="3100" dirty="0"/>
+              <a:t>Desarrollar una plataforma tipo red social que incremente la visibilidad de los artistas, facilitando de forma segura el contacto de los artistas y la búsqueda de información sobre servicios artísticos.</a:t>
             </a:r>
-            <a:endParaRPr sz="3400"/>
+            <a:endParaRPr sz="3400" dirty="0"/>
           </a:p>
         </p:txBody>
       </p:sp>
     </p:spTree>
+    <p:extLst>
+      <p:ext uri="{BB962C8B-B14F-4D97-AF65-F5344CB8AC3E}">
+        <p14:creationId xmlns:p14="http://schemas.microsoft.com/office/powerpoint/2010/main" val="2805282688"/>
+      </p:ext>
+    </p:extLst>
   </p:cSld>
   <p:clrMapOvr>
     <a:masterClrMapping/>
@@ -10301,7 +10503,7 @@
 </p:sld>
 </file>
 
-<file path=ppt/slides/slide5.xml><?xml version="1.0" encoding="utf-8"?>
+<file path=ppt/slides/slide8.xml><?xml version="1.0" encoding="utf-8"?>
 <p:sld xmlns:a="http://schemas.openxmlformats.org/drawingml/2006/main" xmlns:r="http://schemas.openxmlformats.org/officeDocument/2006/relationships" xmlns:p="http://schemas.openxmlformats.org/presentationml/2006/main">
   <p:cSld>
     <p:spTree>
@@ -10377,7 +10579,7 @@
         <p:spPr>
           <a:xfrm>
             <a:off x="1478550" y="2279025"/>
-            <a:ext cx="8621400" cy="2922000"/>
+            <a:ext cx="8621400" cy="3481466"/>
           </a:xfrm>
           <a:prstGeom prst="rect">
             <a:avLst/>
@@ -10407,10 +10609,18 @@
               <a:buChar char="●"/>
             </a:pPr>
             <a:r>
-              <a:rPr lang="es-CO" sz="2800"/>
-              <a:t>Desarrollar la autenticacion de usuarios con sus respectivos perfiles. </a:t>
+              <a:rPr lang="es-CO" sz="2800" dirty="0"/>
+              <a:t>Desarrollar la </a:t>
             </a:r>
-            <a:endParaRPr sz="2800"/>
+            <a:r>
+              <a:rPr lang="es-CO" sz="2800" dirty="0" err="1"/>
+              <a:t>autenticacion</a:t>
+            </a:r>
+            <a:r>
+              <a:rPr lang="es-CO" sz="2800" dirty="0"/>
+              <a:t> de usuarios con sus respectivos perfiles. </a:t>
+            </a:r>
+            <a:endParaRPr sz="2800" dirty="0"/>
           </a:p>
           <a:p>
             <a:pPr marL="457200" marR="5080" lvl="0" indent="-406400" algn="l" rtl="0">
@@ -10427,10 +10637,10 @@
               <a:buChar char="●"/>
             </a:pPr>
             <a:r>
-              <a:rPr lang="es-CO" sz="2800"/>
+              <a:rPr lang="es-CO" sz="2800" dirty="0"/>
               <a:t>Implementar el modulo de publicaciones</a:t>
             </a:r>
-            <a:endParaRPr sz="2800"/>
+            <a:endParaRPr sz="2800" dirty="0"/>
           </a:p>
           <a:p>
             <a:pPr marL="457200" marR="5080" lvl="0" indent="-406400" algn="l" rtl="0">
@@ -10447,10 +10657,10 @@
               <a:buChar char="●"/>
             </a:pPr>
             <a:r>
-              <a:rPr lang="es-CO" sz="2800"/>
+              <a:rPr lang="es-CO" sz="2800" dirty="0"/>
               <a:t>Desarrollar el modulo de conversaciones entre usuarios </a:t>
             </a:r>
-            <a:endParaRPr sz="2800"/>
+            <a:endParaRPr sz="2800" dirty="0"/>
           </a:p>
           <a:p>
             <a:pPr marL="457200" marR="5080" lvl="0" indent="-406400" algn="l" rtl="0">
@@ -10467,10 +10677,10 @@
               <a:buChar char="●"/>
             </a:pPr>
             <a:r>
-              <a:rPr lang="es-CO" sz="2800"/>
-              <a:t>Construir el modulo de notificaciones del sistema</a:t>
+              <a:rPr lang="es-CO" sz="2800" dirty="0"/>
+              <a:t>Construir el modulo de notificaciones y solicitudes del sistema</a:t>
             </a:r>
-            <a:endParaRPr sz="2800" b="0" i="0" u="none" strike="noStrike" cap="none">
+            <a:endParaRPr sz="2800" b="0" i="0" u="none" strike="noStrike" cap="none" dirty="0">
               <a:solidFill>
                 <a:srgbClr val="000000"/>
               </a:solidFill>
@@ -10490,12 +10700,12 @@
 </p:sld>
 </file>
 
-<file path=ppt/slides/slide6.xml><?xml version="1.0" encoding="utf-8"?>
+<file path=ppt/slides/slide9.xml><?xml version="1.0" encoding="utf-8"?>
 <p:sld xmlns:a="http://schemas.openxmlformats.org/drawingml/2006/main" xmlns:r="http://schemas.openxmlformats.org/officeDocument/2006/relationships" xmlns:p="http://schemas.openxmlformats.org/presentationml/2006/main">
   <p:cSld>
     <p:spTree>
       <p:nvGrpSpPr>
-        <p:cNvPr id="1" name="Shape 81"/>
+        <p:cNvPr id="1" name="Shape 109"/>
         <p:cNvGrpSpPr/>
         <p:nvPr/>
       </p:nvGrpSpPr>
@@ -10509,7 +10719,7 @@
       </p:grpSpPr>
       <p:sp>
         <p:nvSpPr>
-          <p:cNvPr id="82" name="Google Shape;82;p12"/>
+          <p:cNvPr id="110" name="Google Shape;110;p16"/>
           <p:cNvSpPr txBox="1">
             <a:spLocks noGrp="1"/>
           </p:cNvSpPr>
@@ -10519,8 +10729,8 @@
         </p:nvSpPr>
         <p:spPr>
           <a:xfrm>
-            <a:off x="529248" y="358450"/>
-            <a:ext cx="8522100" cy="567000"/>
+            <a:off x="513111" y="374572"/>
+            <a:ext cx="7123500" cy="567000"/>
           </a:xfrm>
           <a:prstGeom prst="rect">
             <a:avLst/>
@@ -10536,7 +10746,7 @@
           </a:bodyPr>
           <a:lstStyle/>
           <a:p>
-            <a:pPr marL="12700" lvl="0" indent="0" algn="l" rtl="0">
+            <a:pPr marL="0" lvl="0" indent="0" algn="l" rtl="0">
               <a:lnSpc>
                 <a:spcPct val="100000"/>
               </a:lnSpc>
@@ -10551,7 +10761,7 @@
             </a:pPr>
             <a:r>
               <a:rPr lang="es-CO"/>
-              <a:t>Construccion de la base de datos (SQL)</a:t>
+              <a:t>Front-End Funcional</a:t>
             </a:r>
             <a:endParaRPr/>
           </a:p>
@@ -10559,14 +10769,14 @@
       </p:sp>
       <p:sp>
         <p:nvSpPr>
-          <p:cNvPr id="83" name="Google Shape;83;p12"/>
+          <p:cNvPr id="111" name="Google Shape;111;p16"/>
           <p:cNvSpPr txBox="1"/>
           <p:nvPr/>
         </p:nvSpPr>
         <p:spPr>
           <a:xfrm>
-            <a:off x="762075" y="1568850"/>
-            <a:ext cx="4665900" cy="2721900"/>
+            <a:off x="632925" y="1552700"/>
+            <a:ext cx="5989500" cy="1028700"/>
           </a:xfrm>
           <a:prstGeom prst="rect">
             <a:avLst/>
@@ -10601,7 +10811,7 @@
             </a:pPr>
             <a:r>
               <a:rPr lang="es-CO" sz="2200"/>
-              <a:t>La base de datos de ArteNauta se conforma de 12 tablas con 4 módulos (Validacion de usuarios, notificaciones, conversaciones, publicaciones), tambien cuenta con inserciones de 50 datos por tabla y 10 consultas sencillas, subconsultas y joins</a:t>
+              <a:t>El Front-End funcional fue desarrollado en base a la combinacion de la biblioteca de JS React y TailwindCSS como estilos.</a:t>
             </a:r>
             <a:endParaRPr sz="2200" b="0" i="0" u="none" strike="noStrike" cap="none">
               <a:solidFill>
@@ -10617,7 +10827,7 @@
       </p:sp>
       <p:pic>
         <p:nvPicPr>
-          <p:cNvPr id="84" name="Google Shape;84;p12"/>
+          <p:cNvPr id="112" name="Google Shape;112;p16"/>
           <p:cNvPicPr preferRelativeResize="0"/>
           <p:nvPr/>
         </p:nvPicPr>
@@ -10631,491 +10841,8 @@
         </p:blipFill>
         <p:spPr>
           <a:xfrm>
-            <a:off x="6124500" y="1568850"/>
-            <a:ext cx="5754212" cy="5007601"/>
-          </a:xfrm>
-          <a:prstGeom prst="rect">
-            <a:avLst/>
-          </a:prstGeom>
-          <a:noFill/>
-          <a:ln>
-            <a:noFill/>
-          </a:ln>
-        </p:spPr>
-      </p:pic>
-    </p:spTree>
-  </p:cSld>
-  <p:clrMapOvr>
-    <a:masterClrMapping/>
-  </p:clrMapOvr>
-</p:sld>
-</file>
-
-<file path=ppt/slides/slide7.xml><?xml version="1.0" encoding="utf-8"?>
-<p:sld xmlns:a="http://schemas.openxmlformats.org/drawingml/2006/main" xmlns:r="http://schemas.openxmlformats.org/officeDocument/2006/relationships" xmlns:p="http://schemas.openxmlformats.org/presentationml/2006/main">
-  <p:cSld>
-    <p:spTree>
-      <p:nvGrpSpPr>
-        <p:cNvPr id="1" name="Shape 88"/>
-        <p:cNvGrpSpPr/>
-        <p:nvPr/>
-      </p:nvGrpSpPr>
-      <p:grpSpPr>
-        <a:xfrm>
-          <a:off x="0" y="0"/>
-          <a:ext cx="0" cy="0"/>
-          <a:chOff x="0" y="0"/>
-          <a:chExt cx="0" cy="0"/>
-        </a:xfrm>
-      </p:grpSpPr>
-      <p:sp>
-        <p:nvSpPr>
-          <p:cNvPr id="89" name="Google Shape;89;p13"/>
-          <p:cNvSpPr txBox="1">
-            <a:spLocks noGrp="1"/>
-          </p:cNvSpPr>
-          <p:nvPr>
-            <p:ph type="title"/>
-          </p:nvPr>
-        </p:nvSpPr>
-        <p:spPr>
-          <a:xfrm>
-            <a:off x="268775" y="441350"/>
-            <a:ext cx="10437900" cy="567000"/>
-          </a:xfrm>
-          <a:prstGeom prst="rect">
-            <a:avLst/>
-          </a:prstGeom>
-          <a:noFill/>
-          <a:ln>
-            <a:noFill/>
-          </a:ln>
-        </p:spPr>
-        <p:txBody>
-          <a:bodyPr spcFirstLastPara="1" wrap="square" lIns="0" tIns="12700" rIns="0" bIns="0" anchor="t" anchorCtr="0">
-            <a:spAutoFit/>
-          </a:bodyPr>
-          <a:lstStyle/>
-          <a:p>
-            <a:pPr marL="12700" lvl="0" indent="0" algn="l" rtl="0">
-              <a:lnSpc>
-                <a:spcPct val="100000"/>
-              </a:lnSpc>
-              <a:spcBef>
-                <a:spcPts val="0"/>
-              </a:spcBef>
-              <a:spcAft>
-                <a:spcPts val="0"/>
-              </a:spcAft>
-              <a:buSzPts val="1400"/>
-              <a:buNone/>
-            </a:pPr>
-            <a:r>
-              <a:rPr lang="es-CO"/>
-              <a:t>Uso de la base de datos a través de sentencias DML</a:t>
-            </a:r>
-            <a:endParaRPr/>
-          </a:p>
-        </p:txBody>
-      </p:sp>
-      <p:sp>
-        <p:nvSpPr>
-          <p:cNvPr id="90" name="Google Shape;90;p13"/>
-          <p:cNvSpPr txBox="1"/>
-          <p:nvPr/>
-        </p:nvSpPr>
-        <p:spPr>
-          <a:xfrm>
-            <a:off x="632925" y="1552700"/>
-            <a:ext cx="4262100" cy="1706100"/>
-          </a:xfrm>
-          <a:prstGeom prst="rect">
-            <a:avLst/>
-          </a:prstGeom>
-          <a:noFill/>
-          <a:ln>
-            <a:noFill/>
-          </a:ln>
-        </p:spPr>
-        <p:txBody>
-          <a:bodyPr spcFirstLastPara="1" wrap="square" lIns="0" tIns="12700" rIns="0" bIns="0" anchor="t" anchorCtr="0">
-            <a:spAutoFit/>
-          </a:bodyPr>
-          <a:lstStyle/>
-          <a:p>
-            <a:pPr marL="12700" marR="5080" lvl="0" indent="0" algn="l" rtl="0">
-              <a:lnSpc>
-                <a:spcPct val="100000"/>
-              </a:lnSpc>
-              <a:spcBef>
-                <a:spcPts val="0"/>
-              </a:spcBef>
-              <a:spcAft>
-                <a:spcPts val="0"/>
-              </a:spcAft>
-              <a:buClr>
-                <a:srgbClr val="000000"/>
-              </a:buClr>
-              <a:buSzPts val="1800"/>
-              <a:buFont typeface="Arial"/>
-              <a:buNone/>
-            </a:pPr>
-            <a:r>
-              <a:rPr lang="es-CO" sz="2200"/>
-              <a:t>En las tablas de la base de datos se contaran con 50 inserciones de datos las cuales simulan la infromacion que se guardará desde el sistema</a:t>
-            </a:r>
-            <a:endParaRPr sz="2200" b="0" i="0" u="none" strike="noStrike" cap="none">
-              <a:solidFill>
-                <a:srgbClr val="000000"/>
-              </a:solidFill>
-              <a:latin typeface="Arial"/>
-              <a:ea typeface="Arial"/>
-              <a:cs typeface="Arial"/>
-              <a:sym typeface="Arial"/>
-            </a:endParaRPr>
-          </a:p>
-        </p:txBody>
-      </p:sp>
-      <p:pic>
-        <p:nvPicPr>
-          <p:cNvPr id="91" name="Google Shape;91;p13"/>
-          <p:cNvPicPr preferRelativeResize="0"/>
-          <p:nvPr/>
-        </p:nvPicPr>
-        <p:blipFill>
-          <a:blip r:embed="rId3">
-            <a:alphaModFix/>
-          </a:blip>
-          <a:stretch>
-            <a:fillRect/>
-          </a:stretch>
-        </p:blipFill>
-        <p:spPr>
-          <a:xfrm>
-            <a:off x="5209075" y="2516850"/>
-            <a:ext cx="6588375" cy="3882332"/>
-          </a:xfrm>
-          <a:prstGeom prst="rect">
-            <a:avLst/>
-          </a:prstGeom>
-          <a:noFill/>
-          <a:ln>
-            <a:noFill/>
-          </a:ln>
-        </p:spPr>
-      </p:pic>
-    </p:spTree>
-  </p:cSld>
-  <p:clrMapOvr>
-    <a:masterClrMapping/>
-  </p:clrMapOvr>
-</p:sld>
-</file>
-
-<file path=ppt/slides/slide8.xml><?xml version="1.0" encoding="utf-8"?>
-<p:sld xmlns:a="http://schemas.openxmlformats.org/drawingml/2006/main" xmlns:r="http://schemas.openxmlformats.org/officeDocument/2006/relationships" xmlns:p="http://schemas.openxmlformats.org/presentationml/2006/main">
-  <p:cSld>
-    <p:spTree>
-      <p:nvGrpSpPr>
-        <p:cNvPr id="1" name="Shape 95"/>
-        <p:cNvGrpSpPr/>
-        <p:nvPr/>
-      </p:nvGrpSpPr>
-      <p:grpSpPr>
-        <a:xfrm>
-          <a:off x="0" y="0"/>
-          <a:ext cx="0" cy="0"/>
-          <a:chOff x="0" y="0"/>
-          <a:chExt cx="0" cy="0"/>
-        </a:xfrm>
-      </p:grpSpPr>
-      <p:sp>
-        <p:nvSpPr>
-          <p:cNvPr id="96" name="Google Shape;96;p14"/>
-          <p:cNvSpPr txBox="1">
-            <a:spLocks noGrp="1"/>
-          </p:cNvSpPr>
-          <p:nvPr>
-            <p:ph type="title"/>
-          </p:nvPr>
-        </p:nvSpPr>
-        <p:spPr>
-          <a:xfrm>
-            <a:off x="206376" y="358450"/>
-            <a:ext cx="10807200" cy="567000"/>
-          </a:xfrm>
-          <a:prstGeom prst="rect">
-            <a:avLst/>
-          </a:prstGeom>
-          <a:noFill/>
-          <a:ln>
-            <a:noFill/>
-          </a:ln>
-        </p:spPr>
-        <p:txBody>
-          <a:bodyPr spcFirstLastPara="1" wrap="square" lIns="0" tIns="12700" rIns="0" bIns="0" anchor="t" anchorCtr="0">
-            <a:spAutoFit/>
-          </a:bodyPr>
-          <a:lstStyle/>
-          <a:p>
-            <a:pPr marL="12700" lvl="0" indent="0" algn="l" rtl="0">
-              <a:lnSpc>
-                <a:spcPct val="100000"/>
-              </a:lnSpc>
-              <a:spcBef>
-                <a:spcPts val="0"/>
-              </a:spcBef>
-              <a:spcAft>
-                <a:spcPts val="0"/>
-              </a:spcAft>
-              <a:buSzPts val="1400"/>
-              <a:buNone/>
-            </a:pPr>
-            <a:r>
-              <a:rPr lang="es-CO"/>
-              <a:t>Uso de la base de datos a través de sentencias DQL</a:t>
-            </a:r>
-            <a:endParaRPr/>
-          </a:p>
-        </p:txBody>
-      </p:sp>
-      <p:sp>
-        <p:nvSpPr>
-          <p:cNvPr id="97" name="Google Shape;97;p14"/>
-          <p:cNvSpPr txBox="1"/>
-          <p:nvPr/>
-        </p:nvSpPr>
-        <p:spPr>
-          <a:xfrm>
-            <a:off x="632925" y="1552700"/>
-            <a:ext cx="4262100" cy="1367400"/>
-          </a:xfrm>
-          <a:prstGeom prst="rect">
-            <a:avLst/>
-          </a:prstGeom>
-          <a:noFill/>
-          <a:ln>
-            <a:noFill/>
-          </a:ln>
-        </p:spPr>
-        <p:txBody>
-          <a:bodyPr spcFirstLastPara="1" wrap="square" lIns="0" tIns="12700" rIns="0" bIns="0" anchor="t" anchorCtr="0">
-            <a:spAutoFit/>
-          </a:bodyPr>
-          <a:lstStyle/>
-          <a:p>
-            <a:pPr marL="12700" marR="5080" lvl="0" indent="0" algn="l" rtl="0">
-              <a:lnSpc>
-                <a:spcPct val="100000"/>
-              </a:lnSpc>
-              <a:spcBef>
-                <a:spcPts val="0"/>
-              </a:spcBef>
-              <a:spcAft>
-                <a:spcPts val="0"/>
-              </a:spcAft>
-              <a:buClr>
-                <a:srgbClr val="000000"/>
-              </a:buClr>
-              <a:buSzPts val="1800"/>
-              <a:buFont typeface="Arial"/>
-              <a:buNone/>
-            </a:pPr>
-            <a:r>
-              <a:rPr lang="es-CO" sz="2200"/>
-              <a:t>Las consultas DQL se usaran para solicitar y analizar informacion de los datos que se encuentras dentro de las tablas</a:t>
-            </a:r>
-            <a:endParaRPr sz="2200" b="0" i="0" u="none" strike="noStrike" cap="none">
-              <a:solidFill>
-                <a:srgbClr val="000000"/>
-              </a:solidFill>
-              <a:latin typeface="Arial"/>
-              <a:ea typeface="Arial"/>
-              <a:cs typeface="Arial"/>
-              <a:sym typeface="Arial"/>
-            </a:endParaRPr>
-          </a:p>
-        </p:txBody>
-      </p:sp>
-      <p:pic>
-        <p:nvPicPr>
-          <p:cNvPr id="98" name="Google Shape;98;p14"/>
-          <p:cNvPicPr preferRelativeResize="0"/>
-          <p:nvPr/>
-        </p:nvPicPr>
-        <p:blipFill>
-          <a:blip r:embed="rId3">
-            <a:alphaModFix/>
-          </a:blip>
-          <a:stretch>
-            <a:fillRect/>
-          </a:stretch>
-        </p:blipFill>
-        <p:spPr>
-          <a:xfrm>
-            <a:off x="5282350" y="1671300"/>
-            <a:ext cx="6644250" cy="5186700"/>
-          </a:xfrm>
-          <a:prstGeom prst="rect">
-            <a:avLst/>
-          </a:prstGeom>
-          <a:noFill/>
-          <a:ln>
-            <a:noFill/>
-          </a:ln>
-        </p:spPr>
-      </p:pic>
-    </p:spTree>
-  </p:cSld>
-  <p:clrMapOvr>
-    <a:masterClrMapping/>
-  </p:clrMapOvr>
-</p:sld>
-</file>
-
-<file path=ppt/slides/slide9.xml><?xml version="1.0" encoding="utf-8"?>
-<p:sld xmlns:a="http://schemas.openxmlformats.org/drawingml/2006/main" xmlns:r="http://schemas.openxmlformats.org/officeDocument/2006/relationships" xmlns:p="http://schemas.openxmlformats.org/presentationml/2006/main">
-  <p:cSld>
-    <p:spTree>
-      <p:nvGrpSpPr>
-        <p:cNvPr id="1" name="Shape 102"/>
-        <p:cNvGrpSpPr/>
-        <p:nvPr/>
-      </p:nvGrpSpPr>
-      <p:grpSpPr>
-        <a:xfrm>
-          <a:off x="0" y="0"/>
-          <a:ext cx="0" cy="0"/>
-          <a:chOff x="0" y="0"/>
-          <a:chExt cx="0" cy="0"/>
-        </a:xfrm>
-      </p:grpSpPr>
-      <p:sp>
-        <p:nvSpPr>
-          <p:cNvPr id="103" name="Google Shape;103;p15"/>
-          <p:cNvSpPr txBox="1">
-            <a:spLocks noGrp="1"/>
-          </p:cNvSpPr>
-          <p:nvPr>
-            <p:ph type="title"/>
-          </p:nvPr>
-        </p:nvSpPr>
-        <p:spPr>
-          <a:xfrm>
-            <a:off x="529261" y="358447"/>
-            <a:ext cx="7123500" cy="567000"/>
-          </a:xfrm>
-          <a:prstGeom prst="rect">
-            <a:avLst/>
-          </a:prstGeom>
-          <a:noFill/>
-          <a:ln>
-            <a:noFill/>
-          </a:ln>
-        </p:spPr>
-        <p:txBody>
-          <a:bodyPr spcFirstLastPara="1" wrap="square" lIns="0" tIns="12700" rIns="0" bIns="0" anchor="t" anchorCtr="0">
-            <a:spAutoFit/>
-          </a:bodyPr>
-          <a:lstStyle/>
-          <a:p>
-            <a:pPr marL="12700" lvl="0" indent="0" algn="l" rtl="0">
-              <a:lnSpc>
-                <a:spcPct val="100000"/>
-              </a:lnSpc>
-              <a:spcBef>
-                <a:spcPts val="0"/>
-              </a:spcBef>
-              <a:spcAft>
-                <a:spcPts val="0"/>
-              </a:spcAft>
-              <a:buSzPts val="1400"/>
-              <a:buNone/>
-            </a:pPr>
-            <a:r>
-              <a:rPr lang="es-CO"/>
-              <a:t>Procedimientos almacenados</a:t>
-            </a:r>
-            <a:endParaRPr/>
-          </a:p>
-        </p:txBody>
-      </p:sp>
-      <p:sp>
-        <p:nvSpPr>
-          <p:cNvPr id="104" name="Google Shape;104;p15"/>
-          <p:cNvSpPr txBox="1"/>
-          <p:nvPr/>
-        </p:nvSpPr>
-        <p:spPr>
-          <a:xfrm>
-            <a:off x="632925" y="1552700"/>
-            <a:ext cx="4262100" cy="1706100"/>
-          </a:xfrm>
-          <a:prstGeom prst="rect">
-            <a:avLst/>
-          </a:prstGeom>
-          <a:noFill/>
-          <a:ln>
-            <a:noFill/>
-          </a:ln>
-        </p:spPr>
-        <p:txBody>
-          <a:bodyPr spcFirstLastPara="1" wrap="square" lIns="0" tIns="12700" rIns="0" bIns="0" anchor="t" anchorCtr="0">
-            <a:spAutoFit/>
-          </a:bodyPr>
-          <a:lstStyle/>
-          <a:p>
-            <a:pPr marL="12700" marR="5080" lvl="0" indent="0" algn="l" rtl="0">
-              <a:lnSpc>
-                <a:spcPct val="100000"/>
-              </a:lnSpc>
-              <a:spcBef>
-                <a:spcPts val="0"/>
-              </a:spcBef>
-              <a:spcAft>
-                <a:spcPts val="0"/>
-              </a:spcAft>
-              <a:buClr>
-                <a:srgbClr val="000000"/>
-              </a:buClr>
-              <a:buSzPts val="1800"/>
-              <a:buFont typeface="Arial"/>
-              <a:buNone/>
-            </a:pPr>
-            <a:r>
-              <a:rPr lang="es-CO" sz="2200"/>
-              <a:t>Los procedimientos almacenados de la base de datos ayudan a usar instrucciones SQL, ejecutarlas y reutilizarlas para un mayor rendimiento y seguridad</a:t>
-            </a:r>
-            <a:endParaRPr sz="2200" b="0" i="0" u="none" strike="noStrike" cap="none">
-              <a:solidFill>
-                <a:srgbClr val="000000"/>
-              </a:solidFill>
-              <a:latin typeface="Arial"/>
-              <a:ea typeface="Arial"/>
-              <a:cs typeface="Arial"/>
-              <a:sym typeface="Arial"/>
-            </a:endParaRPr>
-          </a:p>
-        </p:txBody>
-      </p:sp>
-      <p:pic>
-        <p:nvPicPr>
-          <p:cNvPr id="105" name="Google Shape;105;p15"/>
-          <p:cNvPicPr preferRelativeResize="0"/>
-          <p:nvPr/>
-        </p:nvPicPr>
-        <p:blipFill>
-          <a:blip r:embed="rId3">
-            <a:alphaModFix/>
-          </a:blip>
-          <a:stretch>
-            <a:fillRect/>
-          </a:stretch>
-        </p:blipFill>
-        <p:spPr>
-          <a:xfrm>
-            <a:off x="5015150" y="2127197"/>
-            <a:ext cx="6992176" cy="4229835"/>
+            <a:off x="4006950" y="2774925"/>
+            <a:ext cx="7746724" cy="3785375"/>
           </a:xfrm>
           <a:prstGeom prst="rect">
             <a:avLst/>
